--- a/CARE2.0_current_status_2026-08-12.pptx
+++ b/CARE2.0_current_status_2026-08-12.pptx
@@ -2,42 +2,42 @@
 <file path=ppt/presentation.xml><?xml version="1.0" encoding="utf-8"?>
 <p:presentation xmlns:p="http://schemas.openxmlformats.org/presentationml/2006/main">
   <p:sldMasterIdLst>
-    <p:sldMasterId xmlns:r="http://schemas.openxmlformats.org/officeDocument/2006/relationships" id="2147483648" r:id="R0c5057749fec4b4b"/>
+    <p:sldMasterId xmlns:r="http://schemas.openxmlformats.org/officeDocument/2006/relationships" id="2147483648" r:id="R7229cfba185a40fc"/>
   </p:sldMasterIdLst>
   <p:notesMasterIdLst>
-    <p:notesMasterId xmlns:r="http://schemas.openxmlformats.org/officeDocument/2006/relationships" r:id="R324d3a8767b847db"/>
+    <p:notesMasterId xmlns:r="http://schemas.openxmlformats.org/officeDocument/2006/relationships" r:id="R043608de5779426d"/>
   </p:notesMasterIdLst>
   <p:sldIdLst>
-    <p:sldId xmlns:r="http://schemas.openxmlformats.org/officeDocument/2006/relationships" id="256" r:id="R38b29bd98e964f63"/>
-    <p:sldId xmlns:r="http://schemas.openxmlformats.org/officeDocument/2006/relationships" id="257" r:id="R34a3159f57584aa8"/>
-    <p:sldId xmlns:r="http://schemas.openxmlformats.org/officeDocument/2006/relationships" id="258" r:id="Rec5cb39c95c44650"/>
-    <p:sldId xmlns:r="http://schemas.openxmlformats.org/officeDocument/2006/relationships" id="259" r:id="Rc133ff34e91344c4"/>
-    <p:sldId xmlns:r="http://schemas.openxmlformats.org/officeDocument/2006/relationships" id="260" r:id="R139084dde7cf4cdc"/>
-    <p:sldId xmlns:r="http://schemas.openxmlformats.org/officeDocument/2006/relationships" id="261" r:id="Rf7bbead80ce64802"/>
-    <p:sldId xmlns:r="http://schemas.openxmlformats.org/officeDocument/2006/relationships" id="262" r:id="R98406c09ec524b39"/>
-    <p:sldId xmlns:r="http://schemas.openxmlformats.org/officeDocument/2006/relationships" id="263" r:id="R9075668d91e043b0"/>
-    <p:sldId xmlns:r="http://schemas.openxmlformats.org/officeDocument/2006/relationships" id="264" r:id="R2fc123dadc0d48a8"/>
-    <p:sldId xmlns:r="http://schemas.openxmlformats.org/officeDocument/2006/relationships" id="265" r:id="R3daad6ef8f0c4c18"/>
-    <p:sldId xmlns:r="http://schemas.openxmlformats.org/officeDocument/2006/relationships" id="266" r:id="R22f66aeb1b7b47e2"/>
-    <p:sldId xmlns:r="http://schemas.openxmlformats.org/officeDocument/2006/relationships" id="267" r:id="Rdad60f18b4d2404f"/>
-    <p:sldId xmlns:r="http://schemas.openxmlformats.org/officeDocument/2006/relationships" id="268" r:id="R9e8df3cb9da2483e"/>
-    <p:sldId xmlns:r="http://schemas.openxmlformats.org/officeDocument/2006/relationships" id="269" r:id="R15c0de55d550453c"/>
-    <p:sldId xmlns:r="http://schemas.openxmlformats.org/officeDocument/2006/relationships" id="270" r:id="R896dc7c1092b47d8"/>
-    <p:sldId xmlns:r="http://schemas.openxmlformats.org/officeDocument/2006/relationships" id="271" r:id="R733ec1c4fff04139"/>
-    <p:sldId xmlns:r="http://schemas.openxmlformats.org/officeDocument/2006/relationships" id="272" r:id="R7544bdd5206943ff"/>
-    <p:sldId xmlns:r="http://schemas.openxmlformats.org/officeDocument/2006/relationships" id="273" r:id="R19aaa93499184710"/>
-    <p:sldId xmlns:r="http://schemas.openxmlformats.org/officeDocument/2006/relationships" id="274" r:id="R1113667d4d2043c1"/>
-    <p:sldId xmlns:r="http://schemas.openxmlformats.org/officeDocument/2006/relationships" id="275" r:id="Redeaf70159e246f5"/>
-    <p:sldId xmlns:r="http://schemas.openxmlformats.org/officeDocument/2006/relationships" id="276" r:id="R4b8c7de08ebb439c"/>
-    <p:sldId xmlns:r="http://schemas.openxmlformats.org/officeDocument/2006/relationships" id="277" r:id="R3d123c486bb84b51"/>
-    <p:sldId xmlns:r="http://schemas.openxmlformats.org/officeDocument/2006/relationships" id="278" r:id="R84c3f0e50adc4625"/>
-    <p:sldId xmlns:r="http://schemas.openxmlformats.org/officeDocument/2006/relationships" id="279" r:id="R58cc063ba9844aa4"/>
-    <p:sldId xmlns:r="http://schemas.openxmlformats.org/officeDocument/2006/relationships" id="280" r:id="R833e3e6316df4ee2"/>
-    <p:sldId xmlns:r="http://schemas.openxmlformats.org/officeDocument/2006/relationships" id="281" r:id="R4db2b6b3f0c74410"/>
-    <p:sldId xmlns:r="http://schemas.openxmlformats.org/officeDocument/2006/relationships" id="282" r:id="R67835578b0914a4f"/>
-    <p:sldId xmlns:r="http://schemas.openxmlformats.org/officeDocument/2006/relationships" id="283" r:id="Rad38e6bdf95146c3"/>
-    <p:sldId xmlns:r="http://schemas.openxmlformats.org/officeDocument/2006/relationships" id="284" r:id="Ra2e60ffdc17f4661"/>
-    <p:sldId xmlns:r="http://schemas.openxmlformats.org/officeDocument/2006/relationships" id="285" r:id="Red35483b7af1478d"/>
+    <p:sldId xmlns:r="http://schemas.openxmlformats.org/officeDocument/2006/relationships" id="256" r:id="R8af92297f7cb46ae"/>
+    <p:sldId xmlns:r="http://schemas.openxmlformats.org/officeDocument/2006/relationships" id="257" r:id="R4cb7010592fd4c93"/>
+    <p:sldId xmlns:r="http://schemas.openxmlformats.org/officeDocument/2006/relationships" id="258" r:id="R257fb7d4910b4b4f"/>
+    <p:sldId xmlns:r="http://schemas.openxmlformats.org/officeDocument/2006/relationships" id="259" r:id="R70d34d0ec3f8467c"/>
+    <p:sldId xmlns:r="http://schemas.openxmlformats.org/officeDocument/2006/relationships" id="260" r:id="R5efaa29401fe46f6"/>
+    <p:sldId xmlns:r="http://schemas.openxmlformats.org/officeDocument/2006/relationships" id="261" r:id="R8c76fffe4c1541c7"/>
+    <p:sldId xmlns:r="http://schemas.openxmlformats.org/officeDocument/2006/relationships" id="262" r:id="R7d881d57d54b46c0"/>
+    <p:sldId xmlns:r="http://schemas.openxmlformats.org/officeDocument/2006/relationships" id="263" r:id="Rbe3fa9ab87714d46"/>
+    <p:sldId xmlns:r="http://schemas.openxmlformats.org/officeDocument/2006/relationships" id="264" r:id="R9cd4cad0403b4dd9"/>
+    <p:sldId xmlns:r="http://schemas.openxmlformats.org/officeDocument/2006/relationships" id="265" r:id="R21e30dfc774a4c93"/>
+    <p:sldId xmlns:r="http://schemas.openxmlformats.org/officeDocument/2006/relationships" id="266" r:id="Rb927a771c8d746b5"/>
+    <p:sldId xmlns:r="http://schemas.openxmlformats.org/officeDocument/2006/relationships" id="267" r:id="R48be213db5c54107"/>
+    <p:sldId xmlns:r="http://schemas.openxmlformats.org/officeDocument/2006/relationships" id="268" r:id="Ra350bfa70bd444e1"/>
+    <p:sldId xmlns:r="http://schemas.openxmlformats.org/officeDocument/2006/relationships" id="269" r:id="R4e8132097b88446a"/>
+    <p:sldId xmlns:r="http://schemas.openxmlformats.org/officeDocument/2006/relationships" id="270" r:id="Ra53d70c70518414e"/>
+    <p:sldId xmlns:r="http://schemas.openxmlformats.org/officeDocument/2006/relationships" id="271" r:id="R2c5de1a5898a4311"/>
+    <p:sldId xmlns:r="http://schemas.openxmlformats.org/officeDocument/2006/relationships" id="272" r:id="R2840009ca6b74c68"/>
+    <p:sldId xmlns:r="http://schemas.openxmlformats.org/officeDocument/2006/relationships" id="273" r:id="R47f4195b82d1443b"/>
+    <p:sldId xmlns:r="http://schemas.openxmlformats.org/officeDocument/2006/relationships" id="274" r:id="R122918ee7d8e42db"/>
+    <p:sldId xmlns:r="http://schemas.openxmlformats.org/officeDocument/2006/relationships" id="275" r:id="R020a5724db6d48a5"/>
+    <p:sldId xmlns:r="http://schemas.openxmlformats.org/officeDocument/2006/relationships" id="276" r:id="Rf0172deb0fe84df5"/>
+    <p:sldId xmlns:r="http://schemas.openxmlformats.org/officeDocument/2006/relationships" id="277" r:id="R85c86e2e82094bd2"/>
+    <p:sldId xmlns:r="http://schemas.openxmlformats.org/officeDocument/2006/relationships" id="278" r:id="R36537302fb0e4206"/>
+    <p:sldId xmlns:r="http://schemas.openxmlformats.org/officeDocument/2006/relationships" id="279" r:id="R777d21c336d94ede"/>
+    <p:sldId xmlns:r="http://schemas.openxmlformats.org/officeDocument/2006/relationships" id="280" r:id="Recdf496ffbe34ca6"/>
+    <p:sldId xmlns:r="http://schemas.openxmlformats.org/officeDocument/2006/relationships" id="281" r:id="Rea3be511394040c1"/>
+    <p:sldId xmlns:r="http://schemas.openxmlformats.org/officeDocument/2006/relationships" id="282" r:id="Rd1cb176f3de74b8a"/>
+    <p:sldId xmlns:r="http://schemas.openxmlformats.org/officeDocument/2006/relationships" id="283" r:id="Rb2ffda780c5b47df"/>
+    <p:sldId xmlns:r="http://schemas.openxmlformats.org/officeDocument/2006/relationships" id="284" r:id="R9c8015c425ca4c9d"/>
+    <p:sldId xmlns:r="http://schemas.openxmlformats.org/officeDocument/2006/relationships" id="285" r:id="R0f278999b29f4b10"/>
   </p:sldIdLst>
   <p:sldSz cx="12192000" cy="6858000"/>
   <p:notesSz cx="6858000" cy="9144000"/>
@@ -471,7 +471,67 @@
           <a:lstStyle xmlns:a="http://schemas.openxmlformats.org/drawingml/2006/main"/>
           <a:p xmlns:a="http://schemas.openxmlformats.org/drawingml/2006/main">
             <a:r>
-              <a:t>今天介绍 CARE 2.0 的最新状态。我们的目标不是让一个固定算法在所有数据集上都赢，而是建立一套可信的实验知识迁移框架：历史实验如何进入新任务，什么时候允许迁移，什么时候应该拒绝，以及迁移结果如何被审计和沉淀。最近最重要的进展，是在修正 v1 失败后，v2 在一个冻结后才执行的外部 Suzuki target 上取得了明显的搜索效率提升。</a:t>
+              <a:t>本页核心</a:t>
+            </a:r>
+          </a:p>
+          <a:p xmlns:a="http://schemas.openxmlformats.org/drawingml/2006/main">
+            <a:r>
+              <a:t>CARE 2.0 的重点不是发明一个永远获胜的优化器，而是建立一套可以验证、拒绝和复用历史实验经验的迁移框架。</a:t>
+            </a:r>
+          </a:p>
+          <a:p xmlns:a="http://schemas.openxmlformats.org/drawingml/2006/main">
+            <a:r>
+              <a:t/>
+            </a:r>
+          </a:p>
+          <a:p xmlns:a="http://schemas.openxmlformats.org/drawingml/2006/main">
+            <a:r>
+              <a:t>详细讲解</a:t>
+            </a:r>
+          </a:p>
+          <a:p xmlns:a="http://schemas.openxmlformats.org/drawingml/2006/main">
+            <a:r>
+              <a:t>开场先把项目定位讲清楚。CARE 2.0 研究的是：过去做过的实验，能不能在一个新实验刚开始、数据很少的时候帮助我们更快选到好条件。这里的 source 是已经完成、结果已知的历史实验，target 是准备开始的新实验。我们希望把 source 中真正有用的经验整理成可执行的 Skill，再用它改变 target 的开局；如果证据不足，就拒绝迁移，回到 target-only 方法。</a:t>
+            </a:r>
+          </a:p>
+          <a:p xmlns:a="http://schemas.openxmlformats.org/drawingml/2006/main">
+            <a:r>
+              <a:t/>
+            </a:r>
+          </a:p>
+          <a:p xmlns:a="http://schemas.openxmlformats.org/drawingml/2006/main">
+            <a:r>
+              <a:t>右侧四个词可以按顺序解释：历史实验提供数据；系统把数据整理成可执行 Skill；Skill影响新实验的决策；新实验的成功和失败再回到知识库。最近最重要的进展，是 v1 在独立验证中失败后，我们没有隐藏失败，而是根据失败 trace 修改出 v2，并在一个冻结后才执行的外部 Suzuki target 上看到明显提升。</a:t>
+            </a:r>
+          </a:p>
+          <a:p xmlns:a="http://schemas.openxmlformats.org/drawingml/2006/main">
+            <a:r>
+              <a:t/>
+            </a:r>
+          </a:p>
+          <a:p xmlns:a="http://schemas.openxmlformats.org/drawingml/2006/main">
+            <a:r>
+              <a:t>名词解释</a:t>
+            </a:r>
+          </a:p>
+          <a:p xmlns:a="http://schemas.openxmlformats.org/drawingml/2006/main">
+            <a:r>
+              <a:t>source=历史任务；target=新任务；Skill=带执行逻辑、适用边界和证据记录的策略包。</a:t>
+            </a:r>
+          </a:p>
+          <a:p xmlns:a="http://schemas.openxmlformats.org/drawingml/2006/main">
+            <a:r>
+              <a:t/>
+            </a:r>
+          </a:p>
+          <a:p xmlns:a="http://schemas.openxmlformats.org/drawingml/2006/main">
+            <a:r>
+              <a:t>转场</a:t>
+            </a:r>
+          </a:p>
+          <a:p xmlns:a="http://schemas.openxmlformats.org/drawingml/2006/main">
+            <a:r>
+              <a:t>下一页先给出目前最重要的结果，再逐步解释这个结果是怎么得到的。</a:t>
             </a:r>
           </a:p>
           <a:p xmlns:a="http://schemas.openxmlformats.org/drawingml/2006/main">
@@ -556,7 +616,67 @@
           <a:lstStyle xmlns:a="http://schemas.openxmlformats.org/drawingml/2006/main"/>
           <a:p xmlns:a="http://schemas.openxmlformats.org/drawingml/2006/main">
             <a:r>
-              <a:t>完整平台中，hypothesis 可以由 LLM 提出，但必须经过结构化编译。比如‘相同 substrate 的 campaign 更值得参考’要转换成 source scope；‘优先高质量同时保持多样性’要转换成 quality region 和 maximin 规则；失败条件要转换成 abstention 或 fallback。最新 v2 的 hypothesis 是固定、非 LLM 的。</a:t>
+              <a:t>本页核心</a:t>
+            </a:r>
+          </a:p>
+          <a:p xmlns:a="http://schemas.openxmlformats.org/drawingml/2006/main">
+            <a:r>
+              <a:t>Hypothesis 只有被编译成明确的选点和停止规则，才真正进入实验。</a:t>
+            </a:r>
+          </a:p>
+          <a:p xmlns:a="http://schemas.openxmlformats.org/drawingml/2006/main">
+            <a:r>
+              <a:t/>
+            </a:r>
+          </a:p>
+          <a:p xmlns:a="http://schemas.openxmlformats.org/drawingml/2006/main">
+            <a:r>
+              <a:t>详细讲解</a:t>
+            </a:r>
+          </a:p>
+          <a:p xmlns:a="http://schemas.openxmlformats.org/drawingml/2006/main">
+            <a:r>
+              <a:t>完整平台给 hypothesis generator 的输入包括 source history、target 的变量角色、候选空间、预算以及 SkillBank 中的成功和失败案例。输出不能只是“这个 source 看起来相似”，而必须结构化为：适用哪些 source、变量如何对齐、什么条件应该优先或惩罚、允许进入什么质量区域、置信度多高，以及在什么情况下应该失败或回退。</a:t>
+            </a:r>
+          </a:p>
+          <a:p xmlns:a="http://schemas.openxmlformats.org/drawingml/2006/main">
+            <a:r>
+              <a:t/>
+            </a:r>
+          </a:p>
+          <a:p xmlns:a="http://schemas.openxmlformats.org/drawingml/2006/main">
+            <a:r>
+              <a:t>结构化输出再被编译成 TransferSkill，用来选择 candidate。target outcome 揭示后，系统更新 evidence status：支持、反驳、暂缓或者拒绝。最新 v2 的 hypothesis 不是 LLM 生成，而是固定规则，目的是先验证从 hypothesis 到执行再到反馈的链路。</a:t>
+            </a:r>
+          </a:p>
+          <a:p xmlns:a="http://schemas.openxmlformats.org/drawingml/2006/main">
+            <a:r>
+              <a:t/>
+            </a:r>
+          </a:p>
+          <a:p xmlns:a="http://schemas.openxmlformats.org/drawingml/2006/main">
+            <a:r>
+              <a:t>名词解释</a:t>
+            </a:r>
+          </a:p>
+          <a:p xmlns:a="http://schemas.openxmlformats.org/drawingml/2006/main">
+            <a:r>
+              <a:t>role map=source 和 target 变量的语义对应关系；operator=把 hypothesis 转成选点动作的执行算子。</a:t>
+            </a:r>
+          </a:p>
+          <a:p xmlns:a="http://schemas.openxmlformats.org/drawingml/2006/main">
+            <a:r>
+              <a:t/>
+            </a:r>
+          </a:p>
+          <a:p xmlns:a="http://schemas.openxmlformats.org/drawingml/2006/main">
+            <a:r>
+              <a:t>转场</a:t>
+            </a:r>
+          </a:p>
+          <a:p xmlns:a="http://schemas.openxmlformats.org/drawingml/2006/main">
+            <a:r>
+              <a:t>下一页具体说明一个 Skill 里到底保存什么。</a:t>
             </a:r>
           </a:p>
           <a:p xmlns:a="http://schemas.openxmlformats.org/drawingml/2006/main">
@@ -646,7 +766,67 @@
           <a:lstStyle xmlns:a="http://schemas.openxmlformats.org/drawingml/2006/main"/>
           <a:p xmlns:a="http://schemas.openxmlformats.org/drawingml/2006/main">
             <a:r>
-              <a:t>Skill 不是 prompt 集合，而是能够重放的策略包。它既包含执行参数，也包含来源和限制。一个 skill 必须说明在哪些任务上开发、在哪些任务上失败，以及能否外推。Baumgartner v2 目前只能标记为在一个外部 target 上得到支持，不能标记为普遍有效。</a:t>
+              <a:t>本页核心</a:t>
+            </a:r>
+          </a:p>
+          <a:p xmlns:a="http://schemas.openxmlformats.org/drawingml/2006/main">
+            <a:r>
+              <a:t>Skill 是一个可重放、可审计、带失败条件的策略包，而不是一句 prompt。</a:t>
+            </a:r>
+          </a:p>
+          <a:p xmlns:a="http://schemas.openxmlformats.org/drawingml/2006/main">
+            <a:r>
+              <a:t/>
+            </a:r>
+          </a:p>
+          <a:p xmlns:a="http://schemas.openxmlformats.org/drawingml/2006/main">
+            <a:r>
+              <a:t>详细讲解</a:t>
+            </a:r>
+          </a:p>
+          <a:p xmlns:a="http://schemas.openxmlformats.org/drawingml/2006/main">
+            <a:r>
+              <a:t>一个合格的 Skill 至少包含五部分。第一是任务边界：source、target、变量角色以及不能对齐的字段。第二是执行逻辑：它影响 initial design、source prior、kernel 还是 router。第三是安全机制：哪些情况应该 abstain，何时 exact fallback。第四是证据记录：在哪些开发任务和独立任务上运行，使用哪些 seeds，CI、win、non-loss 和 negative cases 是什么。第五是可复现信息：模型记录、配置、commit 和 SHA-256 fingerprint。</a:t>
+            </a:r>
+          </a:p>
+          <a:p xmlns:a="http://schemas.openxmlformats.org/drawingml/2006/main">
+            <a:r>
+              <a:t/>
+            </a:r>
+          </a:p>
+          <a:p xmlns:a="http://schemas.openxmlformats.org/drawingml/2006/main">
+            <a:r>
+              <a:t>因此 SkillBank 不是文档仓库，而是可执行对象与证据的集合。Baumgartner v2 当前应该标注为“在一个外部 target 上得到支持的 candidate skill”，不能标成通用规则。</a:t>
+            </a:r>
+          </a:p>
+          <a:p xmlns:a="http://schemas.openxmlformats.org/drawingml/2006/main">
+            <a:r>
+              <a:t/>
+            </a:r>
+          </a:p>
+          <a:p xmlns:a="http://schemas.openxmlformats.org/drawingml/2006/main">
+            <a:r>
+              <a:t>名词解释</a:t>
+            </a:r>
+          </a:p>
+          <a:p xmlns:a="http://schemas.openxmlformats.org/drawingml/2006/main">
+            <a:r>
+              <a:t>abstention=系统主动不迁移；fallback=精确回到预先定义的 target-only 方法；fingerprint=用于确认版本没有被事后修改的哈希。</a:t>
+            </a:r>
+          </a:p>
+          <a:p xmlns:a="http://schemas.openxmlformats.org/drawingml/2006/main">
+            <a:r>
+              <a:t/>
+            </a:r>
+          </a:p>
+          <a:p xmlns:a="http://schemas.openxmlformats.org/drawingml/2006/main">
+            <a:r>
+              <a:t>转场</a:t>
+            </a:r>
+          </a:p>
+          <a:p xmlns:a="http://schemas.openxmlformats.org/drawingml/2006/main">
+            <a:r>
+              <a:t>下面看 v2 如何把多个 source campaign 合成一个稳健共识。</a:t>
             </a:r>
           </a:p>
           <a:p xmlns:a="http://schemas.openxmlformats.org/drawingml/2006/main">
@@ -736,7 +916,67 @@
           <a:lstStyle xmlns:a="http://schemas.openxmlformats.org/drawingml/2006/main"/>
           <a:p xmlns:a="http://schemas.openxmlformats.org/drawingml/2006/main">
             <a:r>
-              <a:t>不同 campaign 的产率尺度和噪声可能不同，直接平均预测值不可靠。因此系统把每个 source 的预测转换成相对排序，再取中位数。这个 prior 表示多个历史实验共同认为哪些候选更值得先试，而不是预测 target 的绝对产率。</a:t>
+              <a:t>本页核心</a:t>
+            </a:r>
+          </a:p>
+          <a:p xmlns:a="http://schemas.openxmlformats.org/drawingml/2006/main">
+            <a:r>
+              <a:t>每个 source 单独建模，先转成相对排序，再用中位数聚合，避免量纲和异常 campaign 主导结果。</a:t>
+            </a:r>
+          </a:p>
+          <a:p xmlns:a="http://schemas.openxmlformats.org/drawingml/2006/main">
+            <a:r>
+              <a:t/>
+            </a:r>
+          </a:p>
+          <a:p xmlns:a="http://schemas.openxmlformats.org/drawingml/2006/main">
+            <a:r>
+              <a:t>详细讲解</a:t>
+            </a:r>
+          </a:p>
+          <a:p xmlns:a="http://schemas.openxmlformats.org/drawingml/2006/main">
+            <a:r>
+              <a:t>第一步，每个 source campaign 单独训练 GP，保留各自内部的变量与 outcome 关系。第二步，把每个 expert 对 target candidates 的预测转成 0 到 1 的 rank score。这样我们只比较“这个 source 更偏好哪个候选”，不直接混合不同 campaign 的产率尺度。第三步，对多个 source 的 rank 取中位数，得到 consensus prior。</a:t>
+            </a:r>
+          </a:p>
+          <a:p xmlns:a="http://schemas.openxmlformats.org/drawingml/2006/main">
+            <a:r>
+              <a:t/>
+            </a:r>
+          </a:p>
+          <a:p xmlns:a="http://schemas.openxmlformats.org/drawingml/2006/main">
+            <a:r>
+              <a:t>中位数的意义是稳健：如果某一个历史 campaign 对某些候选给出极端高分，它不会轻易压过其他 source。这里的 prior 不是 target 的真实结果，只是多个 source 对候选顺序的共同意见。</a:t>
+            </a:r>
+          </a:p>
+          <a:p xmlns:a="http://schemas.openxmlformats.org/drawingml/2006/main">
+            <a:r>
+              <a:t/>
+            </a:r>
+          </a:p>
+          <a:p xmlns:a="http://schemas.openxmlformats.org/drawingml/2006/main">
+            <a:r>
+              <a:t>名词解释</a:t>
+            </a:r>
+          </a:p>
+          <a:p xmlns:a="http://schemas.openxmlformats.org/drawingml/2006/main">
+            <a:r>
+              <a:t>GP=高斯过程，用少量数据给出预测均值和不确定性；rank score=候选在一个 source 预测中的相对名次。</a:t>
+            </a:r>
+          </a:p>
+          <a:p xmlns:a="http://schemas.openxmlformats.org/drawingml/2006/main">
+            <a:r>
+              <a:t/>
+            </a:r>
+          </a:p>
+          <a:p xmlns:a="http://schemas.openxmlformats.org/drawingml/2006/main">
+            <a:r>
+              <a:t>转场</a:t>
+            </a:r>
+          </a:p>
+          <a:p xmlns:a="http://schemas.openxmlformats.org/drawingml/2006/main">
+            <a:r>
+              <a:t>有了共识排序以后，v2 还增加了一个关键限制：多样性不能跨出 source 支持的质量区域。</a:t>
             </a:r>
           </a:p>
           <a:p xmlns:a="http://schemas.openxmlformats.org/drawingml/2006/main">
@@ -821,7 +1061,77 @@
           <a:lstStyle xmlns:a="http://schemas.openxmlformats.org/drawingml/2006/main"/>
           <a:p xmlns:a="http://schemas.openxmlformats.org/drawingml/2006/main">
             <a:r>
-              <a:t>v1 将 source score 和 diversity 线性加权，diversity 权重较高时，第二和第三个点可能进入所有 source 都认为很差的区域。v2 改成两阶段约束：先定义 source 排名前 50% 的可接受区域，再在区域内追求 maximin coverage。这是从 v1 失败中提炼出的可复用 skill。</a:t>
+              <a:t>本页核心</a:t>
+            </a:r>
+          </a:p>
+          <a:p xmlns:a="http://schemas.openxmlformats.org/drawingml/2006/main">
+            <a:r>
+              <a:t>v2 先限定 source 共识的高质量区域，再在区域内部选择互补实验。</a:t>
+            </a:r>
+          </a:p>
+          <a:p xmlns:a="http://schemas.openxmlformats.org/drawingml/2006/main">
+            <a:r>
+              <a:t/>
+            </a:r>
+          </a:p>
+          <a:p xmlns:a="http://schemas.openxmlformats.org/drawingml/2006/main">
+            <a:r>
+              <a:t>详细讲解</a:t>
+            </a:r>
+          </a:p>
+          <a:p xmlns:a="http://schemas.openxmlformats.org/drawingml/2006/main">
+            <a:r>
+              <a:t>v1 的第一个点取 source 排名最高的候选，第二、第三个点主要追求距离远、覆盖广。问题是“离得远”不代表“质量仍然好”，所以多样性可能把点推入 source 自己也不看好的区域。</a:t>
+            </a:r>
+          </a:p>
+          <a:p xmlns:a="http://schemas.openxmlformats.org/drawingml/2006/main">
+            <a:r>
+              <a:t/>
+            </a:r>
+          </a:p>
+          <a:p xmlns:a="http://schemas.openxmlformats.org/drawingml/2006/main">
+            <a:r>
+              <a:t>v2 保留第一个 source consensus 最优点，但先建立 top-50% admissible region，也就是只允许第二、第三个点从 source 排名前一半的候选中产生；然后在这个质量区域内用 maximin 选择与已选点距离最大的候选。它同时保留质量和覆盖。前三个点选完后 source prior 退出，后面仍是统一的 target-only GP-UCB。</a:t>
+            </a:r>
+          </a:p>
+          <a:p xmlns:a="http://schemas.openxmlformats.org/drawingml/2006/main">
+            <a:r>
+              <a:t/>
+            </a:r>
+          </a:p>
+          <a:p xmlns:a="http://schemas.openxmlformats.org/drawingml/2006/main">
+            <a:r>
+              <a:t>这里的 top-50% 是当前冻结协议中的经验参数，不应称为学界通用常数，后续需要做 threshold sensitivity。</a:t>
+            </a:r>
+          </a:p>
+          <a:p xmlns:a="http://schemas.openxmlformats.org/drawingml/2006/main">
+            <a:r>
+              <a:t/>
+            </a:r>
+          </a:p>
+          <a:p xmlns:a="http://schemas.openxmlformats.org/drawingml/2006/main">
+            <a:r>
+              <a:t>名词解释</a:t>
+            </a:r>
+          </a:p>
+          <a:p xmlns:a="http://schemas.openxmlformats.org/drawingml/2006/main">
+            <a:r>
+              <a:t>admissible region=允许选点的候选区域；maximin=选择与现有点最小距离最大的候选，用于扩大覆盖。</a:t>
+            </a:r>
+          </a:p>
+          <a:p xmlns:a="http://schemas.openxmlformats.org/drawingml/2006/main">
+            <a:r>
+              <a:t/>
+            </a:r>
+          </a:p>
+          <a:p xmlns:a="http://schemas.openxmlformats.org/drawingml/2006/main">
+            <a:r>
+              <a:t>转场</a:t>
+            </a:r>
+          </a:p>
+          <a:p xmlns:a="http://schemas.openxmlformats.org/drawingml/2006/main">
+            <a:r>
+              <a:t>前三个点不同以后，后续怎么保证比较公平？下一页解释统一的 GP-UCB。</a:t>
             </a:r>
           </a:p>
           <a:p xmlns:a="http://schemas.openxmlformats.org/drawingml/2006/main">
@@ -906,7 +1216,67 @@
           <a:lstStyle xmlns:a="http://schemas.openxmlformats.org/drawingml/2006/main"/>
           <a:p xmlns:a="http://schemas.openxmlformats.org/drawingml/2006/main">
             <a:r>
-              <a:t>GP-UCB 同时考虑预测均值和不确定性。这里的重要点不是公式本身，而是三种方法只有前三个点的来源不同，之后代码路径完全一致。因此 external result 可以解释为历史经验让 target 从更好的位置开始。</a:t>
+              <a:t>本页核心</a:t>
+            </a:r>
+          </a:p>
+          <a:p xmlns:a="http://schemas.openxmlformats.org/drawingml/2006/main">
+            <a:r>
+              <a:t>三种方法在初始点之后使用同一个优化器，因此差异只来自 initial design。</a:t>
+            </a:r>
+          </a:p>
+          <a:p xmlns:a="http://schemas.openxmlformats.org/drawingml/2006/main">
+            <a:r>
+              <a:t/>
+            </a:r>
+          </a:p>
+          <a:p xmlns:a="http://schemas.openxmlformats.org/drawingml/2006/main">
+            <a:r>
+              <a:t>详细讲解</a:t>
+            </a:r>
+          </a:p>
+          <a:p xmlns:a="http://schemas.openxmlformats.org/drawingml/2006/main">
+            <a:r>
+              <a:t>GP-UCB 每轮给每个候选计算“预测均值加探索奖励”。预测均值代表当前看起来有多好，不确定性代表这个点还有多少未知信息，beta 控制探索与利用的平衡。算法选择 UCB 分数最高的候选执行。</a:t>
+            </a:r>
+          </a:p>
+          <a:p xmlns:a="http://schemas.openxmlformats.org/drawingml/2006/main">
+            <a:r>
+              <a:t/>
+            </a:r>
+          </a:p>
+          <a:p xmlns:a="http://schemas.openxmlformats.org/drawingml/2006/main">
+            <a:r>
+              <a:t>公平性有四条：使用相同的 target observations；相同 GP-UCB 实现；相同 10 次 reveal budget；相同 candidate pool 和未选择结果不可见。Frozen v2、random initial 和 space filling 的前三个点不同，但从第四个观测开始完全运行同一套 target-only GP-UCB。因此如果 v2 曲线更高，是因为开局把优化器带到了更有价值的区域。</a:t>
+            </a:r>
+          </a:p>
+          <a:p xmlns:a="http://schemas.openxmlformats.org/drawingml/2006/main">
+            <a:r>
+              <a:t/>
+            </a:r>
+          </a:p>
+          <a:p xmlns:a="http://schemas.openxmlformats.org/drawingml/2006/main">
+            <a:r>
+              <a:t>名词解释</a:t>
+            </a:r>
+          </a:p>
+          <a:p xmlns:a="http://schemas.openxmlformats.org/drawingml/2006/main">
+            <a:r>
+              <a:t>UCB=预测均值加不确定性奖励；exploration=探索未知区域；exploitation=利用当前高预测区域。</a:t>
+            </a:r>
+          </a:p>
+          <a:p xmlns:a="http://schemas.openxmlformats.org/drawingml/2006/main">
+            <a:r>
+              <a:t/>
+            </a:r>
+          </a:p>
+          <a:p xmlns:a="http://schemas.openxmlformats.org/drawingml/2006/main">
+            <a:r>
+              <a:t>转场</a:t>
+            </a:r>
+          </a:p>
+          <a:p xmlns:a="http://schemas.openxmlformats.org/drawingml/2006/main">
+            <a:r>
+              <a:t>下面说明我们用哪些指标评价一个策略，不只看最后一轮。</a:t>
             </a:r>
           </a:p>
           <a:p xmlns:a="http://schemas.openxmlformats.org/drawingml/2006/main">
@@ -991,7 +1361,67 @@
           <a:lstStyle xmlns:a="http://schemas.openxmlformats.org/drawingml/2006/main"/>
           <a:p xmlns:a="http://schemas.openxmlformats.org/drawingml/2006/main">
             <a:r>
-              <a:t>如果只看 final best，一个方法在最后一轮才找到高产率，与第五轮就找到高产率可能得到相同分数，但实际实验成本完全不同。因此把 best-so-far AUC 作为主要指标。多 campaign 时以 campaign 为统计单位；只有一个 external target 时报告 effect size 和随机分布，不夸大成跨任务显著性。</a:t>
+              <a:t>本页核心</a:t>
+            </a:r>
+          </a:p>
+          <a:p xmlns:a="http://schemas.openxmlformats.org/drawingml/2006/main">
+            <a:r>
+              <a:t>主指标看整个搜索过程，辅助指标看最终质量、胜负、负迁移和实验节省。</a:t>
+            </a:r>
+          </a:p>
+          <a:p xmlns:a="http://schemas.openxmlformats.org/drawingml/2006/main">
+            <a:r>
+              <a:t/>
+            </a:r>
+          </a:p>
+          <a:p xmlns:a="http://schemas.openxmlformats.org/drawingml/2006/main">
+            <a:r>
+              <a:t>详细讲解</a:t>
+            </a:r>
+          </a:p>
+          <a:p xmlns:a="http://schemas.openxmlformats.org/drawingml/2006/main">
+            <a:r>
+              <a:t>Primary metric 是 best-so-far AUC。每一轮记录到目前为止观察到的最好 outcome，再对整条曲线求平均或面积。它奖励“尽早找到好条件”，特别适合实验昂贵的场景。Secondary metrics 包括 final best、达到阈值所需轮数、win/non-loss、negative transfer rate 和 gate acceptance rate。</a:t>
+            </a:r>
+          </a:p>
+          <a:p xmlns:a="http://schemas.openxmlformats.org/drawingml/2006/main">
+            <a:r>
+              <a:t/>
+            </a:r>
+          </a:p>
+          <a:p xmlns:a="http://schemas.openxmlformats.org/drawingml/2006/main">
+            <a:r>
+              <a:t>需要区分两种统计单位。对多个独立 campaign 的开发或验证结果，可以在 task level 计算置信区间；同一个 target 上的 100 个 random seeds 只描述随机初始化分布，不能当作 100 个独立科学任务。因此外部 target 的 +8.66 是很大的实际 effect，但暂时不能称为跨任务统计显著。</a:t>
+            </a:r>
+          </a:p>
+          <a:p xmlns:a="http://schemas.openxmlformats.org/drawingml/2006/main">
+            <a:r>
+              <a:t/>
+            </a:r>
+          </a:p>
+          <a:p xmlns:a="http://schemas.openxmlformats.org/drawingml/2006/main">
+            <a:r>
+              <a:t>名词解释</a:t>
+            </a:r>
+          </a:p>
+          <a:p xmlns:a="http://schemas.openxmlformats.org/drawingml/2006/main">
+            <a:r>
+              <a:t>best-so-far=截至当前轮找到的最好结果；CI=置信区间；effect size=提升幅度本身，而非只看 p 值。</a:t>
+            </a:r>
+          </a:p>
+          <a:p xmlns:a="http://schemas.openxmlformats.org/drawingml/2006/main">
+            <a:r>
+              <a:t/>
+            </a:r>
+          </a:p>
+          <a:p xmlns:a="http://schemas.openxmlformats.org/drawingml/2006/main">
+            <a:r>
+              <a:t>转场</a:t>
+            </a:r>
+          </a:p>
+          <a:p xmlns:a="http://schemas.openxmlformats.org/drawingml/2006/main">
+            <a:r>
+              <a:t>评价指标确定后，系统需要一个 gate 来决定哪些策略有资格被冻结。</a:t>
             </a:r>
           </a:p>
           <a:p xmlns:a="http://schemas.openxmlformats.org/drawingml/2006/main">
@@ -1081,7 +1511,67 @@
           <a:lstStyle xmlns:a="http://schemas.openxmlformats.org/drawingml/2006/main"/>
           <a:p xmlns:a="http://schemas.openxmlformats.org/drawingml/2006/main">
             <a:r>
-              <a:t>Gate 分两步。第一步只检查稳定性，拒绝平均值高但任务间波动大的路线。第二步才在稳定候选中比较预期 AUC。non-loss 0.8 是为了控制负迁移风险而设定的经验阈值，需要通过 sensitivity analysis 继续验证。external target 不参与这个选择。</a:t>
+              <a:t>本页核心</a:t>
+            </a:r>
+          </a:p>
+          <a:p xmlns:a="http://schemas.openxmlformats.org/drawingml/2006/main">
+            <a:r>
+              <a:t>Gate 先检查稳定性和负迁移风险，再从合格策略中选择平均收益最高者。</a:t>
+            </a:r>
+          </a:p>
+          <a:p xmlns:a="http://schemas.openxmlformats.org/drawingml/2006/main">
+            <a:r>
+              <a:t/>
+            </a:r>
+          </a:p>
+          <a:p xmlns:a="http://schemas.openxmlformats.org/drawingml/2006/main">
+            <a:r>
+              <a:t>详细讲解</a:t>
+            </a:r>
+          </a:p>
+          <a:p xmlns:a="http://schemas.openxmlformats.org/drawingml/2006/main">
+            <a:r>
+              <a:t>第一步是资格检查：开发任务上 AUC delta 的 95% CI lower bound 必须大于 0，同时 task non-loss rate 至少为 0.8。前者要求平均收益具有统计支持，后者要求不能靠少数大胜掩盖大量失败。第二步只在 eligible routes 中选择 mean AUC gain 最大的策略，CI lower bound 用作并列时的次级标准。</a:t>
+            </a:r>
+          </a:p>
+          <a:p xmlns:a="http://schemas.openxmlformats.org/drawingml/2006/main">
+            <a:r>
+              <a:t/>
+            </a:r>
+          </a:p>
+          <a:p xmlns:a="http://schemas.openxmlformats.org/drawingml/2006/main">
+            <a:r>
+              <a:t>要诚实说明阈值来源：CI lower &gt; 0 有明确统计含义；non-loss 0.8 是本项目预先冻结的经验门槛，不是普遍公认常数。后续应对 0.7、0.8、0.9 以及 admissible region 阈值做 sensitivity analysis，确认结论不依赖单一超参数。</a:t>
+            </a:r>
+          </a:p>
+          <a:p xmlns:a="http://schemas.openxmlformats.org/drawingml/2006/main">
+            <a:r>
+              <a:t/>
+            </a:r>
+          </a:p>
+          <a:p xmlns:a="http://schemas.openxmlformats.org/drawingml/2006/main">
+            <a:r>
+              <a:t>名词解释</a:t>
+            </a:r>
+          </a:p>
+          <a:p xmlns:a="http://schemas.openxmlformats.org/drawingml/2006/main">
+            <a:r>
+              <a:t>gate=迁移准入与路由机制；non-loss=相对 baseline 没有变差的任务比例；eligible=通过资格检查。</a:t>
+            </a:r>
+          </a:p>
+          <a:p xmlns:a="http://schemas.openxmlformats.org/drawingml/2006/main">
+            <a:r>
+              <a:t/>
+            </a:r>
+          </a:p>
+          <a:p xmlns:a="http://schemas.openxmlformats.org/drawingml/2006/main">
+            <a:r>
+              <a:t>转场</a:t>
+            </a:r>
+          </a:p>
+          <a:p xmlns:a="http://schemas.openxmlformats.org/drawingml/2006/main">
+            <a:r>
+              <a:t>有了 gate 以后，还要说明我们到底与哪些强对照比较。</a:t>
             </a:r>
           </a:p>
           <a:p xmlns:a="http://schemas.openxmlformats.org/drawingml/2006/main">
@@ -1166,7 +1656,67 @@
           <a:lstStyle xmlns:a="http://schemas.openxmlformats.org/drawingml/2006/main"/>
           <a:p xmlns:a="http://schemas.openxmlformats.org/drawingml/2006/main">
             <a:r>
-              <a:t>随机 baseline 不是弱随机搜索，它只是随机选择前三个点，后续仍运行同样的 GP-UCB；space filling 是另一个较强的确定性初始设计。CARE 必须超过两者中更强的一个。所有方法的 target 实验次数完全一致。</a:t>
+              <a:t>本页核心</a:t>
+            </a:r>
+          </a:p>
+          <a:p xmlns:a="http://schemas.openxmlformats.org/drawingml/2006/main">
+            <a:r>
+              <a:t>Frozen v2 必须同时超过随机初始化和确定性的空间覆盖，对比口径完全一致。</a:t>
+            </a:r>
+          </a:p>
+          <a:p xmlns:a="http://schemas.openxmlformats.org/drawingml/2006/main">
+            <a:r>
+              <a:t/>
+            </a:r>
+          </a:p>
+          <a:p xmlns:a="http://schemas.openxmlformats.org/drawingml/2006/main">
+            <a:r>
+              <a:t>详细讲解</a:t>
+            </a:r>
+          </a:p>
+          <a:p xmlns:a="http://schemas.openxmlformats.org/drawingml/2006/main">
+            <a:r>
+              <a:t>第一列 Frozen v2 的前三个点由 source-guided skill 选择；第二列 random-initial GP-UCB 的前三个点随机选择，并用 100 个 seeds 描述随机性；第三列 space filling 用确定性规则最大化候选空间覆盖。三者之后都运行同一个 target-only GP-UCB、做 10 次 reveal，而且都不能预读 target outcome。</a:t>
+            </a:r>
+          </a:p>
+          <a:p xmlns:a="http://schemas.openxmlformats.org/drawingml/2006/main">
+            <a:r>
+              <a:t/>
+            </a:r>
+          </a:p>
+          <a:p xmlns:a="http://schemas.openxmlformats.org/drawingml/2006/main">
+            <a:r>
+              <a:t>Random baseline 不是每轮都随机。只有前三个初始点随机，后续仍然是强的 GP-UCB。Space filling 也不是弱对照，它能给 GP 一个分散且覆盖面好的初始设计。主比较对象是每个 campaign 上表现更强的 target-only baseline，而不是挑一个最弱对照。</a:t>
+            </a:r>
+          </a:p>
+          <a:p xmlns:a="http://schemas.openxmlformats.org/drawingml/2006/main">
+            <a:r>
+              <a:t/>
+            </a:r>
+          </a:p>
+          <a:p xmlns:a="http://schemas.openxmlformats.org/drawingml/2006/main">
+            <a:r>
+              <a:t>名词解释</a:t>
+            </a:r>
+          </a:p>
+          <a:p xmlns:a="http://schemas.openxmlformats.org/drawingml/2006/main">
+            <a:r>
+              <a:t>space filling=优先覆盖参数空间的确定性初始设计；stronger baseline=在给定 target 上两种 target-only 对照中更强者。</a:t>
+            </a:r>
+          </a:p>
+          <a:p xmlns:a="http://schemas.openxmlformats.org/drawingml/2006/main">
+            <a:r>
+              <a:t/>
+            </a:r>
+          </a:p>
+          <a:p xmlns:a="http://schemas.openxmlformats.org/drawingml/2006/main">
+            <a:r>
+              <a:t>转场</a:t>
+            </a:r>
+          </a:p>
+          <a:p xmlns:a="http://schemas.openxmlformats.org/drawingml/2006/main">
+            <a:r>
+              <a:t>下面先回顾 v1 为什么在开发集看起来很好。</a:t>
             </a:r>
           </a:p>
           <a:p xmlns:a="http://schemas.openxmlformats.org/drawingml/2006/main">
@@ -1251,7 +1801,67 @@
           <a:lstStyle xmlns:a="http://schemas.openxmlformats.org/drawingml/2006/main"/>
           <a:p xmlns:a="http://schemas.openxmlformats.org/drawingml/2006/main">
             <a:r>
-              <a:t>如果只看开发结果，v1 很有说服力：平均提升为正，CI 不跨零，而且所有开发 campaign 都不输。但开发任务中的 source availability 有偏差，大部分 target 都能找到 same-substrate source，导致 fallback 路线没有被充分检验。</a:t>
+              <a:t>本页核心</a:t>
+            </a:r>
+          </a:p>
+          <a:p xmlns:a="http://schemas.openxmlformats.org/drawingml/2006/main">
+            <a:r>
+              <a:t>v1 在 9 个开发 campaign 上平均正向并全部 non-loss，因此当时看起来具备冻结资格。</a:t>
+            </a:r>
+          </a:p>
+          <a:p xmlns:a="http://schemas.openxmlformats.org/drawingml/2006/main">
+            <a:r>
+              <a:t/>
+            </a:r>
+          </a:p>
+          <a:p xmlns:a="http://schemas.openxmlformats.org/drawingml/2006/main">
+            <a:r>
+              <a:t>详细讲解</a:t>
+            </a:r>
+          </a:p>
+          <a:p xmlns:a="http://schemas.openxmlformats.org/drawingml/2006/main">
+            <a:r>
+              <a:t>v1 的开发结果是 mean AUC delta +1.321，task-level 95% CI 为 [0.315, 2.326]，下界大于 0；9 个 campaign 中 7 个获胜，9 个都没有输。按照预先定义的 gate，它确实是一个合格候选，而不是随意挑出来的规则。</a:t>
+            </a:r>
+          </a:p>
+          <a:p xmlns:a="http://schemas.openxmlformats.org/drawingml/2006/main">
+            <a:r>
+              <a:t/>
+            </a:r>
+          </a:p>
+          <a:p xmlns:a="http://schemas.openxmlformats.org/drawingml/2006/main">
+            <a:r>
+              <a:t>v1 的主要设置是优先 same-substrate source，其次 same-precatalyst，diversity weight 为 0.85，后续指标是 10 轮 target-only GP-UCB 的 best-so-far AUC。但开发任务几乎都能找到 same-substrate source，所以 fallback 场景没有得到充分检验。这是为什么开发集漂亮仍然不能代替独立验证。</a:t>
+            </a:r>
+          </a:p>
+          <a:p xmlns:a="http://schemas.openxmlformats.org/drawingml/2006/main">
+            <a:r>
+              <a:t/>
+            </a:r>
+          </a:p>
+          <a:p xmlns:a="http://schemas.openxmlformats.org/drawingml/2006/main">
+            <a:r>
+              <a:t>名词解释</a:t>
+            </a:r>
+          </a:p>
+          <a:p xmlns:a="http://schemas.openxmlformats.org/drawingml/2006/main">
+            <a:r>
+              <a:t>win=相对 stronger baseline 提升；non-loss=提升或持平；fallback=首选迁移条件不满足时使用的备用策略。</a:t>
+            </a:r>
+          </a:p>
+          <a:p xmlns:a="http://schemas.openxmlformats.org/drawingml/2006/main">
+            <a:r>
+              <a:t/>
+            </a:r>
+          </a:p>
+          <a:p xmlns:a="http://schemas.openxmlformats.org/drawingml/2006/main">
+            <a:r>
+              <a:t>转场</a:t>
+            </a:r>
+          </a:p>
+          <a:p xmlns:a="http://schemas.openxmlformats.org/drawingml/2006/main">
+            <a:r>
+              <a:t>真正的独立任务到来后，v1 的问题暴露出来。</a:t>
             </a:r>
           </a:p>
           <a:p xmlns:a="http://schemas.openxmlformats.org/drawingml/2006/main">
@@ -1336,7 +1946,67 @@
           <a:lstStyle xmlns:a="http://schemas.openxmlformats.org/drawingml/2006/main"/>
           <a:p xmlns:a="http://schemas.openxmlformats.org/drawingml/2006/main">
             <a:r>
-              <a:t>这里要主动讲负结果。v1 在四个独立 campaign 上平均转为负值，不能说成功。最大的失败任务没有 same-substrate source，只能使用 same-precatalyst fallback。这个失败说明在开发集上选择一个平均效果好的权重不足以保证迁移。</a:t>
+              <a:t>本页核心</a:t>
+            </a:r>
+          </a:p>
+          <a:p xmlns:a="http://schemas.openxmlformats.org/drawingml/2006/main">
+            <a:r>
+              <a:t>冻结后的 v1 在 4 个独立 campaign 上平均变差，说明开发收益没有泛化。</a:t>
+            </a:r>
+          </a:p>
+          <a:p xmlns:a="http://schemas.openxmlformats.org/drawingml/2006/main">
+            <a:r>
+              <a:t/>
+            </a:r>
+          </a:p>
+          <a:p xmlns:a="http://schemas.openxmlformats.org/drawingml/2006/main">
+            <a:r>
+              <a:t>详细讲解</a:t>
+            </a:r>
+          </a:p>
+          <a:p xmlns:a="http://schemas.openxmlformats.org/drawingml/2006/main">
+            <a:r>
+              <a:t>冻结后，v1 在 4 个新的 campaign 上 mean AUC delta 为 -1.205，95% CI 为 [-2.927, 0.518]，只有 1 个获胜，虽然 4 个都没有造成极端崩溃，但 final-best delta 为 -1.61。最大失败是 Morpholine + BuBrettPhos。</a:t>
+            </a:r>
+          </a:p>
+          <a:p xmlns:a="http://schemas.openxmlformats.org/drawingml/2006/main">
+            <a:r>
+              <a:t/>
+            </a:r>
+          </a:p>
+          <a:p xmlns:a="http://schemas.openxmlformats.org/drawingml/2006/main">
+            <a:r>
+              <a:t>原因不是后续 GP-UCB 不公平，而是新 substrate 没有 same-substrate source，只能走 same-precatalyst fallback。v1 的多样性机制又没有限制第二、第三个点必须处于 source 高质量区域，因此开局可能被带到覆盖广但质量低的位置。这里最重要的结论是：开发集平均正向不等于冻结策略能泛化。</a:t>
+            </a:r>
+          </a:p>
+          <a:p xmlns:a="http://schemas.openxmlformats.org/drawingml/2006/main">
+            <a:r>
+              <a:t/>
+            </a:r>
+          </a:p>
+          <a:p xmlns:a="http://schemas.openxmlformats.org/drawingml/2006/main">
+            <a:r>
+              <a:t>名词解释</a:t>
+            </a:r>
+          </a:p>
+          <a:p xmlns:a="http://schemas.openxmlformats.org/drawingml/2006/main">
+            <a:r>
+              <a:t>independent campaign=未用于规则或超参数选择的新实验任务；final-best delta=预算结束时最好结果之差。</a:t>
+            </a:r>
+          </a:p>
+          <a:p xmlns:a="http://schemas.openxmlformats.org/drawingml/2006/main">
+            <a:r>
+              <a:t/>
+            </a:r>
+          </a:p>
+          <a:p xmlns:a="http://schemas.openxmlformats.org/drawingml/2006/main">
+            <a:r>
+              <a:t>转场</a:t>
+            </a:r>
+          </a:p>
+          <a:p xmlns:a="http://schemas.openxmlformats.org/drawingml/2006/main">
+            <a:r>
+              <a:t>下一页展示我们如何把这个失败转化为 v2，而不是继续在测试任务上调 v1。</a:t>
             </a:r>
           </a:p>
           <a:p xmlns:a="http://schemas.openxmlformats.org/drawingml/2006/main">
@@ -1421,7 +2091,67 @@
           <a:lstStyle xmlns:a="http://schemas.openxmlformats.org/drawingml/2006/main"/>
           <a:p xmlns:a="http://schemas.openxmlformats.org/drawingml/2006/main">
             <a:r>
-              <a:t>这一页先把结论讲清楚。v1 在开发任务上为正，但独立验证失败；v2 针对这个 failure mode 加入 source quality floor，随后在新的 Suzuki MINLP2 target 上取得 AUC 8.66 的提升，并更早找到 100% 产率。需要强调的是，这还是一个外部 target 的结果，而且 v2 本轮没有使用 LLM，所以不能把它表述成 LLM 的普遍泛化。</a:t>
+              <a:t>本页核心</a:t>
+            </a:r>
+          </a:p>
+          <a:p xmlns:a="http://schemas.openxmlformats.org/drawingml/2006/main">
+            <a:r>
+              <a:t>最新外部验证显示 v2 能更早找到好实验，但当前证据只有一个外部 target，而且这轮没有使用 LLM。</a:t>
+            </a:r>
+          </a:p>
+          <a:p xmlns:a="http://schemas.openxmlformats.org/drawingml/2006/main">
+            <a:r>
+              <a:t/>
+            </a:r>
+          </a:p>
+          <a:p xmlns:a="http://schemas.openxmlformats.org/drawingml/2006/main">
+            <a:r>
+              <a:t>详细讲解</a:t>
+            </a:r>
+          </a:p>
+          <a:p xmlns:a="http://schemas.openxmlformats.org/drawingml/2006/main">
+            <a:r>
+              <a:t>这一页是整份汇报的数字摘要。第一，AUC 相对更强 baseline 提高 8.66。这里的 AUC 不是分类任务里的 ROC-AUC，而是把每一轮目前找到的最好结果连成 best-so-far 曲线，再计算曲线下面积。AUC 越高，说明越早找到高质量实验，而不只是最后一轮碰巧找到好点。</a:t>
+            </a:r>
+          </a:p>
+          <a:p xmlns:a="http://schemas.openxmlformats.org/drawingml/2006/main">
+            <a:r>
+              <a:t/>
+            </a:r>
+          </a:p>
+          <a:p xmlns:a="http://schemas.openxmlformats.org/drawingml/2006/main">
+            <a:r>
+              <a:t>第二，Frozen v2 最终找到数据集中的 100% 产率。这里的 100% 是实验产率，不是准确率，也不是置信度。第三，v2 达到 100% 只需要 5 次总观测；成功的随机初始化运行中位数需要 7 次，所以在这个 target 上相当于少做两次实验。第四，目前只有 1 个严格冻结的外部 target，因此最准确的说法是：source-outcome initial design 在这个真实反应优化任务上有实际价值。不能直接说所有领域都提升，也不能把结果归因给 LLM，因为本轮 LLM 没有参与。</a:t>
+            </a:r>
+          </a:p>
+          <a:p xmlns:a="http://schemas.openxmlformats.org/drawingml/2006/main">
+            <a:r>
+              <a:t/>
+            </a:r>
+          </a:p>
+          <a:p xmlns:a="http://schemas.openxmlformats.org/drawingml/2006/main">
+            <a:r>
+              <a:t>名词解释</a:t>
+            </a:r>
+          </a:p>
+          <a:p xmlns:a="http://schemas.openxmlformats.org/drawingml/2006/main">
+            <a:r>
+              <a:t>AUC=搜索全过程的效率；baseline=用来比较的对照方法；Frozen=策略和参数在看 target 结果前已锁定。</a:t>
+            </a:r>
+          </a:p>
+          <a:p xmlns:a="http://schemas.openxmlformats.org/drawingml/2006/main">
+            <a:r>
+              <a:t/>
+            </a:r>
+          </a:p>
+          <a:p xmlns:a="http://schemas.openxmlformats.org/drawingml/2006/main">
+            <a:r>
+              <a:t>转场</a:t>
+            </a:r>
+          </a:p>
+          <a:p xmlns:a="http://schemas.openxmlformats.org/drawingml/2006/main">
+            <a:r>
+              <a:t>有了结果后，下面回到问题定义：我们到底在优化什么。</a:t>
             </a:r>
           </a:p>
           <a:p xmlns:a="http://schemas.openxmlformats.org/drawingml/2006/main">
@@ -1506,7 +2236,67 @@
           <a:lstStyle xmlns:a="http://schemas.openxmlformats.org/drawingml/2006/main"/>
           <a:p xmlns:a="http://schemas.openxmlformats.org/drawingml/2006/main">
             <a:r>
-              <a:t>项目没有把 v1 失败归结为随机波动，也没有放宽 gate 把结果做成正值，而是分析选点 trace，发现第二、第三个点可能进入 source 低质量区。旧四个任务只能用于 stress test，新的外部 Suzuki target 才是确认性证据。</a:t>
+              <a:t>本页核心</a:t>
+            </a:r>
+          </a:p>
+          <a:p xmlns:a="http://schemas.openxmlformats.org/drawingml/2006/main">
+            <a:r>
+              <a:t>v2 修复的是明确的 failure mode：多样性可以扩大覆盖，但不能跨出 source 支持的质量边界。</a:t>
+            </a:r>
+          </a:p>
+          <a:p xmlns:a="http://schemas.openxmlformats.org/drawingml/2006/main">
+            <a:r>
+              <a:t/>
+            </a:r>
+          </a:p>
+          <a:p xmlns:a="http://schemas.openxmlformats.org/drawingml/2006/main">
+            <a:r>
+              <a:t>详细讲解</a:t>
+            </a:r>
+          </a:p>
+          <a:p xmlns:a="http://schemas.openxmlformats.org/drawingml/2006/main">
+            <a:r>
+              <a:t>左侧是 v1 failure trace：第一个点通常位于 source 高排名区域；第二、第三个点受 diversity 加权影响，会远离已选点，却可能进入 source 低质量区域；新 substrate 下 fallback 风险进一步放大。右侧是 v2 的对应修改：第一个点仍取 consensus 最优；建立 source top-50% admissible region；第二、第三个点只在该区域内做 maximin；旧四个验证任务仅用于 post-hoc stress，不重新计作新证据。</a:t>
+            </a:r>
+          </a:p>
+          <a:p xmlns:a="http://schemas.openxmlformats.org/drawingml/2006/main">
+            <a:r>
+              <a:t/>
+            </a:r>
+          </a:p>
+          <a:p xmlns:a="http://schemas.openxmlformats.org/drawingml/2006/main">
+            <a:r>
+              <a:t>这一步体现 CARE 的知识沉淀方式：失败不只是一个负数，而是形成“什么条件下多样性会破坏迁移”的 negative case，并转化为新的 Skill failure condition。</a:t>
+            </a:r>
+          </a:p>
+          <a:p xmlns:a="http://schemas.openxmlformats.org/drawingml/2006/main">
+            <a:r>
+              <a:t/>
+            </a:r>
+          </a:p>
+          <a:p xmlns:a="http://schemas.openxmlformats.org/drawingml/2006/main">
+            <a:r>
+              <a:t>名词解释</a:t>
+            </a:r>
+          </a:p>
+          <a:p xmlns:a="http://schemas.openxmlformats.org/drawingml/2006/main">
+            <a:r>
+              <a:t>post-hoc stress=看到结果后用于理解失败和压力测试，不能作为新的独立验证；failure mode=可重复描述的失败机制。</a:t>
+            </a:r>
+          </a:p>
+          <a:p xmlns:a="http://schemas.openxmlformats.org/drawingml/2006/main">
+            <a:r>
+              <a:t/>
+            </a:r>
+          </a:p>
+          <a:p xmlns:a="http://schemas.openxmlformats.org/drawingml/2006/main">
+            <a:r>
+              <a:t>转场</a:t>
+            </a:r>
+          </a:p>
+          <a:p xmlns:a="http://schemas.openxmlformats.org/drawingml/2006/main">
+            <a:r>
+              <a:t>下面用整条证据链说明，哪些结果只是开发，哪个结果真正改变了结论。</a:t>
             </a:r>
           </a:p>
           <a:p xmlns:a="http://schemas.openxmlformats.org/drawingml/2006/main">
@@ -1596,7 +2386,67 @@
           <a:lstStyle xmlns:a="http://schemas.openxmlformats.org/drawingml/2006/main"/>
           <a:p xmlns:a="http://schemas.openxmlformats.org/drawingml/2006/main">
             <a:r>
-              <a:t>v1 开发为正但独立验证失败，说明冻结协议有必要。v2 开发仍然只是策略选择，真正改变项目状态的是 frozen v2 在外部 target 上取得大幅正向结果。最右侧 post-hoc 只说明修复方向合理，不能和 external result 等价。</a:t>
+              <a:t>本页核心</a:t>
+            </a:r>
+          </a:p>
+          <a:p xmlns:a="http://schemas.openxmlformats.org/drawingml/2006/main">
+            <a:r>
+              <a:t>只有冻结后外部正向结果能支持泛化；开发结果和 post-hoc 结果不能替代它。</a:t>
+            </a:r>
+          </a:p>
+          <a:p xmlns:a="http://schemas.openxmlformats.org/drawingml/2006/main">
+            <a:r>
+              <a:t/>
+            </a:r>
+          </a:p>
+          <a:p xmlns:a="http://schemas.openxmlformats.org/drawingml/2006/main">
+            <a:r>
+              <a:t>详细讲解</a:t>
+            </a:r>
+          </a:p>
+          <a:p xmlns:a="http://schemas.openxmlformats.org/drawingml/2006/main">
+            <a:r>
+              <a:t>从左到右看五根柱。v1 在 9 个开发任务上 +1.32，但在 4 个独立任务上变成 -1.20；这说明 v1 没有泛化。v2 在 9 个开发任务上 +1.39，说明它可以成为新的冻结候选，但仍不算外部证据。真正改变项目状态的是 v2 在外部 Suzuki MINLP2 上 AUC +8.66。最右侧旧四任务 post-hoc 约 +0.38，只能支持修复方向，不能当成新的 held-out evidence。</a:t>
+            </a:r>
+          </a:p>
+          <a:p xmlns:a="http://schemas.openxmlformats.org/drawingml/2006/main">
+            <a:r>
+              <a:t/>
+            </a:r>
+          </a:p>
+          <a:p xmlns:a="http://schemas.openxmlformats.org/drawingml/2006/main">
+            <a:r>
+              <a:t>汇报时要强调这条逻辑：开发用来选策略，独立验证用来检验策略；独立验证失败后可以分析和修复，但旧验证集从此变成开发信息，不能反复计算成新的泛化证据。</a:t>
+            </a:r>
+          </a:p>
+          <a:p xmlns:a="http://schemas.openxmlformats.org/drawingml/2006/main">
+            <a:r>
+              <a:t/>
+            </a:r>
+          </a:p>
+          <a:p xmlns:a="http://schemas.openxmlformats.org/drawingml/2006/main">
+            <a:r>
+              <a:t>名词解释</a:t>
+            </a:r>
+          </a:p>
+          <a:p xmlns:a="http://schemas.openxmlformats.org/drawingml/2006/main">
+            <a:r>
+              <a:t>held-out=冻结前未用于选择策略的数据；post-hoc=看过结果以后进行的分析。</a:t>
+            </a:r>
+          </a:p>
+          <a:p xmlns:a="http://schemas.openxmlformats.org/drawingml/2006/main">
+            <a:r>
+              <a:t/>
+            </a:r>
+          </a:p>
+          <a:p xmlns:a="http://schemas.openxmlformats.org/drawingml/2006/main">
+            <a:r>
+              <a:t>转场</a:t>
+            </a:r>
+          </a:p>
+          <a:p xmlns:a="http://schemas.openxmlformats.org/drawingml/2006/main">
+            <a:r>
+              <a:t>接下来详细介绍真正的外部验证任务。</a:t>
             </a:r>
           </a:p>
           <a:p xmlns:a="http://schemas.openxmlformats.org/drawingml/2006/main">
@@ -1686,7 +2536,67 @@
           <a:lstStyle xmlns:a="http://schemas.openxmlformats.org/drawingml/2006/main"/>
           <a:p xmlns:a="http://schemas.openxmlformats.org/drawingml/2006/main">
             <a:r>
-              <a:t>MINLP1 是完整 source，MINLP2 是新 target。两者共享主要实验变量，因此迁移有明确的科学和表示基础。MINLP2 outcome 没有进入开发选择；代码、配置和 skill 在运行之前已经冻结。这使结果不再依赖看过 target 后再决定迁移。</a:t>
+              <a:t>本页核心</a:t>
+            </a:r>
+          </a:p>
+          <a:p xmlns:a="http://schemas.openxmlformats.org/drawingml/2006/main">
+            <a:r>
+              <a:t>MINLP1 作为完整 source，MINLP2 在策略冻结前只暴露 schema，不暴露 outcome。</a:t>
+            </a:r>
+          </a:p>
+          <a:p xmlns:a="http://schemas.openxmlformats.org/drawingml/2006/main">
+            <a:r>
+              <a:t/>
+            </a:r>
+          </a:p>
+          <a:p xmlns:a="http://schemas.openxmlformats.org/drawingml/2006/main">
+            <a:r>
+              <a:t>详细讲解</a:t>
+            </a:r>
+          </a:p>
+          <a:p xmlns:a="http://schemas.openxmlformats.org/drawingml/2006/main">
+            <a:r>
+              <a:t>左侧 Baumgartner Suzuki MINLP1 是完成的 source campaign，完整 outcomes 可用于训练 source expert。右侧 MINLP2 是 frozen target，在冻结前只知道候选变量与实验预算，不加载产率结果。两者共享 precatalyst、temperature、residence time 和 loading，因此 source-target 之间有明确的变量对应与反应优化基础。</a:t>
+            </a:r>
+          </a:p>
+          <a:p xmlns:a="http://schemas.openxmlformats.org/drawingml/2006/main">
+            <a:r>
+              <a:t/>
+            </a:r>
+          </a:p>
+          <a:p xmlns:a="http://schemas.openxmlformats.org/drawingml/2006/main">
+            <a:r>
+              <a:t>执行前冻结五类信息：代码 commit、data version、config、selection record 和 skill fingerprint。然后 target 只按 3 个初始点加 10 次 reveal 的预算运行。这个设计防止我们看过 MINLP2 的答案再修改 v2。</a:t>
+            </a:r>
+          </a:p>
+          <a:p xmlns:a="http://schemas.openxmlformats.org/drawingml/2006/main">
+            <a:r>
+              <a:t/>
+            </a:r>
+          </a:p>
+          <a:p xmlns:a="http://schemas.openxmlformats.org/drawingml/2006/main">
+            <a:r>
+              <a:t>名词解释</a:t>
+            </a:r>
+          </a:p>
+          <a:p xmlns:a="http://schemas.openxmlformats.org/drawingml/2006/main">
+            <a:r>
+              <a:t>MINLP=混合整数非线性规划形式的反应优化数据；schema-only=只读变量结构，不读结果值。</a:t>
+            </a:r>
+          </a:p>
+          <a:p xmlns:a="http://schemas.openxmlformats.org/drawingml/2006/main">
+            <a:r>
+              <a:t/>
+            </a:r>
+          </a:p>
+          <a:p xmlns:a="http://schemas.openxmlformats.org/drawingml/2006/main">
+            <a:r>
+              <a:t>转场</a:t>
+            </a:r>
+          </a:p>
+          <a:p xmlns:a="http://schemas.openxmlformats.org/drawingml/2006/main">
+            <a:r>
+              <a:t>设置说清楚以后，下一页直接看 Frozen v2 与两个 target-only baseline 的结果。</a:t>
             </a:r>
           </a:p>
           <a:p xmlns:a="http://schemas.openxmlformats.org/drawingml/2006/main">
@@ -1776,7 +2686,67 @@
           <a:lstStyle xmlns:a="http://schemas.openxmlformats.org/drawingml/2006/main"/>
           <a:p xmlns:a="http://schemas.openxmlformats.org/drawingml/2006/main">
             <a:r>
-              <a:t>Frozen v2 的 AUC 为 98.06，stronger baseline 是 space filling，AUC 为 89.40。最终 v2 找到 100% 产率，随机初始化平均最终最佳为 94.77。100 个随机运行中只有 15 个的 AUC 达到或超过 frozen v2。这是一个大的实际 effect，但只有一个 external target，不能写成 task-level 统计显著。</a:t>
+              <a:t>本页核心</a:t>
+            </a:r>
+          </a:p>
+          <a:p xmlns:a="http://schemas.openxmlformats.org/drawingml/2006/main">
+            <a:r>
+              <a:t>Frozen v2 的优势不只体现在最终最好值，也体现在更早进入高产率区域。</a:t>
+            </a:r>
+          </a:p>
+          <a:p xmlns:a="http://schemas.openxmlformats.org/drawingml/2006/main">
+            <a:r>
+              <a:t/>
+            </a:r>
+          </a:p>
+          <a:p xmlns:a="http://schemas.openxmlformats.org/drawingml/2006/main">
+            <a:r>
+              <a:t>详细讲解</a:t>
+            </a:r>
+          </a:p>
+          <a:p xmlns:a="http://schemas.openxmlformats.org/drawingml/2006/main">
+            <a:r>
+              <a:t>左图比较 best-so-far AUC：Frozen v2 为 98.06，space filling 为 89.40，100 次 random 的均值为 88.84。因为 space filling 是两个 target-only 对照中更强者，主结果写成相对 stronger baseline +8.66。右图比较预算结束时的 final best：v2 找到 100% 产率，space filling 为 91.82，random 平均为 94.77。</a:t>
+            </a:r>
+          </a:p>
+          <a:p xmlns:a="http://schemas.openxmlformats.org/drawingml/2006/main">
+            <a:r>
+              <a:t/>
+            </a:r>
+          </a:p>
+          <a:p xmlns:a="http://schemas.openxmlformats.org/drawingml/2006/main">
+            <a:r>
+              <a:t>100 个 random runs 中，只有 15 个 AUC 达到或超过 v2，说明 v2 位于随机初始化分布的高端。这里要避免把 100 seeds 写成 100 个独立任务；它们只说明同一个 target 上随机初始化的波动。最稳妥的结论是“在一个外部 target 上观察到大的实际提升”。</a:t>
+            </a:r>
+          </a:p>
+          <a:p xmlns:a="http://schemas.openxmlformats.org/drawingml/2006/main">
+            <a:r>
+              <a:t/>
+            </a:r>
+          </a:p>
+          <a:p xmlns:a="http://schemas.openxmlformats.org/drawingml/2006/main">
+            <a:r>
+              <a:t>名词解释</a:t>
+            </a:r>
+          </a:p>
+          <a:p xmlns:a="http://schemas.openxmlformats.org/drawingml/2006/main">
+            <a:r>
+              <a:t>final best=预算结束时找到的最高 outcome；random mean=同一算法更换随机初始化后的平均结果。</a:t>
+            </a:r>
+          </a:p>
+          <a:p xmlns:a="http://schemas.openxmlformats.org/drawingml/2006/main">
+            <a:r>
+              <a:t/>
+            </a:r>
+          </a:p>
+          <a:p xmlns:a="http://schemas.openxmlformats.org/drawingml/2006/main">
+            <a:r>
+              <a:t>转场</a:t>
+            </a:r>
+          </a:p>
+          <a:p xmlns:a="http://schemas.openxmlformats.org/drawingml/2006/main">
+            <a:r>
+              <a:t>实际 wet-lab 最关心的是少做多少轮，下一页把曲线差异翻译成实验次数。</a:t>
             </a:r>
           </a:p>
           <a:p xmlns:a="http://schemas.openxmlformats.org/drawingml/2006/main">
@@ -1861,7 +2831,67 @@
           <a:lstStyle xmlns:a="http://schemas.openxmlformats.org/drawingml/2006/main"/>
           <a:p xmlns:a="http://schemas.openxmlformats.org/drawingml/2006/main">
             <a:r>
-              <a:t>v2 在前三个初始点后，只用两轮 target GP-UCB 就找到 100% 产率。随机初始化即使最终成功，中位数也需要七次总观测；超过一半的随机运行在 13 次预算内都没有达到 100%。因此可以说在这个 target 上少做了两次实验。</a:t>
+              <a:t>本页核心</a:t>
+            </a:r>
+          </a:p>
+          <a:p xmlns:a="http://schemas.openxmlformats.org/drawingml/2006/main">
+            <a:r>
+              <a:t>在 MINLP2 上，v2 达到 100% 产率所需总观测数比成功随机运行的中位数少 2 次。</a:t>
+            </a:r>
+          </a:p>
+          <a:p xmlns:a="http://schemas.openxmlformats.org/drawingml/2006/main">
+            <a:r>
+              <a:t/>
+            </a:r>
+          </a:p>
+          <a:p xmlns:a="http://schemas.openxmlformats.org/drawingml/2006/main">
+            <a:r>
+              <a:t>详细讲解</a:t>
+            </a:r>
+          </a:p>
+          <a:p xmlns:a="http://schemas.openxmlformats.org/drawingml/2006/main">
+            <a:r>
+              <a:t>Frozen v2 的总观测数是 5：先执行 3 个 source-guided initial points，再做 2 次 target-only GP-UCB reveal，就已经找到 100% 产率。100 个 random-initial runs 中，只有 46 个在总预算内达到 100%；这些成功运行达到 100% 的中位数是 7 次总观测。由此得到“节省 2 次 target observations”。</a:t>
+            </a:r>
+          </a:p>
+          <a:p xmlns:a="http://schemas.openxmlformats.org/drawingml/2006/main">
+            <a:r>
+              <a:t/>
+            </a:r>
+          </a:p>
+          <a:p xmlns:a="http://schemas.openxmlformats.org/drawingml/2006/main">
+            <a:r>
+              <a:t>右侧另一个数字是 15/100：只有 15 个随机运行的全过程 AUC 不低于 v2。Space filling 在预算内甚至没有达到 95%。因此 v2 的价值不是简单多算了模型，而是在相同实验预算下把最有价值的 target 实验提前了。</a:t>
+            </a:r>
+          </a:p>
+          <a:p xmlns:a="http://schemas.openxmlformats.org/drawingml/2006/main">
+            <a:r>
+              <a:t/>
+            </a:r>
+          </a:p>
+          <a:p xmlns:a="http://schemas.openxmlformats.org/drawingml/2006/main">
+            <a:r>
+              <a:t>名词解释</a:t>
+            </a:r>
+          </a:p>
+          <a:p xmlns:a="http://schemas.openxmlformats.org/drawingml/2006/main">
+            <a:r>
+              <a:t>总观测数包含 3 个初始点；节省 2 次是相对成功 random runs 的中位数，不是所有 random runs 的平均。</a:t>
+            </a:r>
+          </a:p>
+          <a:p xmlns:a="http://schemas.openxmlformats.org/drawingml/2006/main">
+            <a:r>
+              <a:t/>
+            </a:r>
+          </a:p>
+          <a:p xmlns:a="http://schemas.openxmlformats.org/drawingml/2006/main">
+            <a:r>
+              <a:t>转场</a:t>
+            </a:r>
+          </a:p>
+          <a:p xmlns:a="http://schemas.openxmlformats.org/drawingml/2006/main">
+            <a:r>
+              <a:t>单个外部结果之外，我们还有一个更广的离线多领域 suite，但它的证据等级较低。</a:t>
             </a:r>
           </a:p>
           <a:p xmlns:a="http://schemas.openxmlformats.org/drawingml/2006/main">
@@ -1951,7 +2981,67 @@
           <a:lstStyle xmlns:a="http://schemas.openxmlformats.org/drawingml/2006/main"/>
           <a:p xmlns:a="http://schemas.openxmlformats.org/drawingml/2006/main">
             <a:r>
-              <a:t>Canonical source-outcome suite 证明完整平台可以在多个领域使用统一协议并精确回退。四条路径部署迁移，三条回退。但它使用 target calibration seeds，因此解决的是离线方法选择，而不是一个全新实验开始前如何零成本判断。</a:t>
+              <a:t>本页核心</a:t>
+            </a:r>
+          </a:p>
+          <a:p xmlns:a="http://schemas.openxmlformats.org/drawingml/2006/main">
+            <a:r>
+              <a:t>离线 suite 证明平台能跨数据类型选择迁移或回退，但不能代替全新任务上的零成本决策。</a:t>
+            </a:r>
+          </a:p>
+          <a:p xmlns:a="http://schemas.openxmlformats.org/drawingml/2006/main">
+            <a:r>
+              <a:t/>
+            </a:r>
+          </a:p>
+          <a:p xmlns:a="http://schemas.openxmlformats.org/drawingml/2006/main">
+            <a:r>
+              <a:t>详细讲解</a:t>
+            </a:r>
+          </a:p>
+          <a:p xmlns:a="http://schemas.openxmlformats.org/drawingml/2006/main">
+            <a:r>
+              <a:t>表中 7 条 source-target 路径覆盖反应、分子和材料。系统在 ChemLex 到 Buchwald-Hartwig、dielectric 与 experimental gap 的双向路径、FreeSolv 到 Lipophilicity 上选择 transfer；在 phonons 到 dielectric、ESOL 到 Lipophilicity、Lipophilicity 到 FreeSolv 上选择 fallback。正数表示相对 target-only baseline 的 final-best 和 AUC 改善，0 表示精确回退后与 baseline 完全相同。</a:t>
+            </a:r>
+          </a:p>
+          <a:p xmlns:a="http://schemas.openxmlformats.org/drawingml/2006/main">
+            <a:r>
+              <a:t/>
+            </a:r>
+          </a:p>
+          <a:p xmlns:a="http://schemas.openxmlformats.org/drawingml/2006/main">
+            <a:r>
+              <a:t>限制写在红框里：这套选择使用了 50 个 archived target calibration seeds。也就是说系统利用历史 target outcomes 判断哪条路线更适合，解决的是离线方法选择问题。它不能证明面对一个从未做过的新 wet-lab target，系统可以零成本知道该不该迁移。</a:t>
+            </a:r>
+          </a:p>
+          <a:p xmlns:a="http://schemas.openxmlformats.org/drawingml/2006/main">
+            <a:r>
+              <a:t/>
+            </a:r>
+          </a:p>
+          <a:p xmlns:a="http://schemas.openxmlformats.org/drawingml/2006/main">
+            <a:r>
+              <a:t>名词解释</a:t>
+            </a:r>
+          </a:p>
+          <a:p xmlns:a="http://schemas.openxmlformats.org/drawingml/2006/main">
+            <a:r>
+              <a:t>exact fallback=拒绝迁移后与预先定义的 target-only baseline 完全一致；calibration seed=用于离线选方法的随机重复。</a:t>
+            </a:r>
+          </a:p>
+          <a:p xmlns:a="http://schemas.openxmlformats.org/drawingml/2006/main">
+            <a:r>
+              <a:t/>
+            </a:r>
+          </a:p>
+          <a:p xmlns:a="http://schemas.openxmlformats.org/drawingml/2006/main">
+            <a:r>
+              <a:t>转场</a:t>
+            </a:r>
+          </a:p>
+          <a:p xmlns:a="http://schemas.openxmlformats.org/drawingml/2006/main">
+            <a:r>
+              <a:t>为了判断我们的 baseline 是否足够强，下一页加入传统 transfer BO。</a:t>
             </a:r>
           </a:p>
           <a:p xmlns:a="http://schemas.openxmlformats.org/drawingml/2006/main">
@@ -2041,7 +3131,67 @@
           <a:lstStyle xmlns:a="http://schemas.openxmlformats.org/drawingml/2006/main"/>
           <a:p xmlns:a="http://schemas.openxmlformats.org/drawingml/2006/main">
             <a:r>
-              <a:t>经典 transfer suite 回答了 baseline 是否足够强。RGPE 在一个材料方向非常强，但在另外四条 final-score 比较中显著变差；ICM 更保守，但也不是普遍最优。Hybrid router 支持方法路由的价值，不过它仍然使用 calibration。还要说明 CARE source-transfer candidate 在五条路径都被拒绝，不能把 target-only fallback 的优势写成 source transfer。</a:t>
+              <a:t>本页核心</a:t>
+            </a:r>
+          </a:p>
+          <a:p xmlns:a="http://schemas.openxmlformats.org/drawingml/2006/main">
+            <a:r>
+              <a:t>RGPE、ICM 和混合路由各有优势，但没有一个固定迁移方法在所有任务都可靠。</a:t>
+            </a:r>
+          </a:p>
+          <a:p xmlns:a="http://schemas.openxmlformats.org/drawingml/2006/main">
+            <a:r>
+              <a:t/>
+            </a:r>
+          </a:p>
+          <a:p xmlns:a="http://schemas.openxmlformats.org/drawingml/2006/main">
+            <a:r>
+              <a:t>详细讲解</a:t>
+            </a:r>
+          </a:p>
+          <a:p xmlns:a="http://schemas.openxmlformats.org/drawingml/2006/main">
+            <a:r>
+              <a:t>RGPE 会根据 source 模型在 target 观测上的排序损失给不同模型加权。它在 dielectric 到 experimental gap 上非常强，但在另外多条 final-score 比较中显著变差，说明经典方法也会负迁移。Two-task ICM GP 通过多任务协方差联合建模，整体更保守，但仍不是普遍最优。Hybrid router 在 calibration 信息帮助下选择方法，AUC 在五条路径上为正，支持路由机制的价值。</a:t>
+            </a:r>
+          </a:p>
+          <a:p xmlns:a="http://schemas.openxmlformats.org/drawingml/2006/main">
+            <a:r>
+              <a:t/>
+            </a:r>
+          </a:p>
+          <a:p xmlns:a="http://schemas.openxmlformats.org/drawingml/2006/main">
+            <a:r>
+              <a:t>必须解释深蓝框中的限制：在这五条路径里，CARE 自己的 source-transfer candidates 全部被 gate 拒绝，所以 CARE 的正向结果主要来自 target-only fallback。不能把“系统避免了负迁移”写成“CARE source transfer 全面击败传统方法”。当前平台价值是比较、路由、拒绝和审计。</a:t>
+            </a:r>
+          </a:p>
+          <a:p xmlns:a="http://schemas.openxmlformats.org/drawingml/2006/main">
+            <a:r>
+              <a:t/>
+            </a:r>
+          </a:p>
+          <a:p xmlns:a="http://schemas.openxmlformats.org/drawingml/2006/main">
+            <a:r>
+              <a:t>名词解释</a:t>
+            </a:r>
+          </a:p>
+          <a:p xmlns:a="http://schemas.openxmlformats.org/drawingml/2006/main">
+            <a:r>
+              <a:t>RGPE=按目标任务上的排序表现给多个 GP 专家加权；ICM=用任务间协方差联合建模的多任务 GP。</a:t>
+            </a:r>
+          </a:p>
+          <a:p xmlns:a="http://schemas.openxmlformats.org/drawingml/2006/main">
+            <a:r>
+              <a:t/>
+            </a:r>
+          </a:p>
+          <a:p xmlns:a="http://schemas.openxmlformats.org/drawingml/2006/main">
+            <a:r>
+              <a:t>转场</a:t>
+            </a:r>
+          </a:p>
+          <a:p xmlns:a="http://schemas.openxmlformats.org/drawingml/2006/main">
+            <a:r>
+              <a:t>下面回到 LLM：它在完整平台里做什么，以及目前为什么还不能宣称它有独立优势。</a:t>
             </a:r>
           </a:p>
           <a:p xmlns:a="http://schemas.openxmlformats.org/drawingml/2006/main">
@@ -2126,7 +3276,77 @@
           <a:lstStyle xmlns:a="http://schemas.openxmlformats.org/drawingml/2006/main"/>
           <a:p xmlns:a="http://schemas.openxmlformats.org/drawingml/2006/main">
             <a:r>
-              <a:t>LLM 在完整平台中扮演策略专家和 hypothesis compiler，而不是每轮直接猜实验结果。此前多个路径出现过 LLM 正向信号，但 random-rule warm start 也能带来收益，部分 CARE 结果与 target-only LLM 相同，因此还不能声称 LLM 在多数任务上有独立因果优势。知识库保存的是带证据边界的可执行 skill，不是会议文档集合。</a:t>
+              <a:t>本页核心</a:t>
+            </a:r>
+          </a:p>
+          <a:p xmlns:a="http://schemas.openxmlformats.org/drawingml/2006/main">
+            <a:r>
+              <a:t>LLM 负责提出和编译可检验的迁移假设，SkillBank 保存执行证据；最新外部增益并不来自 LLM。</a:t>
+            </a:r>
+          </a:p>
+          <a:p xmlns:a="http://schemas.openxmlformats.org/drawingml/2006/main">
+            <a:r>
+              <a:t/>
+            </a:r>
+          </a:p>
+          <a:p xmlns:a="http://schemas.openxmlformats.org/drawingml/2006/main">
+            <a:r>
+              <a:t>详细讲解</a:t>
+            </a:r>
+          </a:p>
+          <a:p xmlns:a="http://schemas.openxmlformats.org/drawingml/2006/main">
+            <a:r>
+              <a:t>完整平台中，LLM 的输入是 source/target schema、统计摘要、已有 skill 与失败案例；输出是结构化 role map、hypothesis、kernel/prior/routing patch、rationale、confidence 和 failure condition。它更像策略专家或 hypothesis compiler，而不是直接预测每个实验 outcome。</a:t>
+            </a:r>
+          </a:p>
+          <a:p xmlns:a="http://schemas.openxmlformats.org/drawingml/2006/main">
+            <a:r>
+              <a:t/>
+            </a:r>
+          </a:p>
+          <a:p xmlns:a="http://schemas.openxmlformats.org/drawingml/2006/main">
+            <a:r>
+              <a:t>SkillBank 保存 task cards、role maps、frozen TransferSkill、正负案例、被 gate 拒绝的案例、逐轮 candidate-score-outcome trace、commit、config 和模型记录。这样一个新任务可以检索相似经验，同时也能看到经验在哪里失败。</a:t>
+            </a:r>
+          </a:p>
+          <a:p xmlns:a="http://schemas.openxmlformats.org/drawingml/2006/main">
+            <a:r>
+              <a:t/>
+            </a:r>
+          </a:p>
+          <a:p xmlns:a="http://schemas.openxmlformats.org/drawingml/2006/main">
+            <a:r>
+              <a:t>当前结论要克制：此前确实看到过 LLM 的正向信号，但 random-rule warm start 也能提高，部分 CARE 结果与 target-only LLM 相同。最新 v2 external 完全没有使用 LLM，所以它只能证明 source-outcome initial design。下一步必须在同一 v2 executor 上做 fixed v2、LLM hypothesis-only 和 matched random hypothesis 三组对照。</a:t>
+            </a:r>
+          </a:p>
+          <a:p xmlns:a="http://schemas.openxmlformats.org/drawingml/2006/main">
+            <a:r>
+              <a:t/>
+            </a:r>
+          </a:p>
+          <a:p xmlns:a="http://schemas.openxmlformats.org/drawingml/2006/main">
+            <a:r>
+              <a:t>名词解释</a:t>
+            </a:r>
+          </a:p>
+          <a:p xmlns:a="http://schemas.openxmlformats.org/drawingml/2006/main">
+            <a:r>
+              <a:t>hypothesis-only=LLM 只生成迁移假设，不接触 target outcome，也不改变后续优化预算；matched random=输出格式和复杂度匹配的随机假设对照。</a:t>
+            </a:r>
+          </a:p>
+          <a:p xmlns:a="http://schemas.openxmlformats.org/drawingml/2006/main">
+            <a:r>
+              <a:t/>
+            </a:r>
+          </a:p>
+          <a:p xmlns:a="http://schemas.openxmlformats.org/drawingml/2006/main">
+            <a:r>
+              <a:t>转场</a:t>
+            </a:r>
+          </a:p>
+          <a:p xmlns:a="http://schemas.openxmlformats.org/drawingml/2006/main">
+            <a:r>
+              <a:t>最后两页把已成立、未成立和下一步工作明确分开。</a:t>
             </a:r>
           </a:p>
           <a:p xmlns:a="http://schemas.openxmlformats.org/drawingml/2006/main">
@@ -2216,7 +3436,77 @@
           <a:lstStyle xmlns:a="http://schemas.openxmlformats.org/drawingml/2006/main"/>
           <a:p xmlns:a="http://schemas.openxmlformats.org/drawingml/2006/main">
             <a:r>
-              <a:t>项目已经完成的不只是一个实验脚本，而是从数据适配、逐轮决策、baseline、冻结验证、审计到知识沉淀的一整套框架。最新外部结果证明这种迁移在真实 reaction-optimization 数据上有实际价值。结论必须克制：这不是所有领域都提升，也不是 LLM 优越性的证明。</a:t>
+              <a:t>本页核心</a:t>
+            </a:r>
+          </a:p>
+          <a:p xmlns:a="http://schemas.openxmlformats.org/drawingml/2006/main">
+            <a:r>
+              <a:t>已经成立的是可信迁移流程和一个外部正例；尚未成立的是所有任务提升与 LLM 普遍优势。</a:t>
+            </a:r>
+          </a:p>
+          <a:p xmlns:a="http://schemas.openxmlformats.org/drawingml/2006/main">
+            <a:r>
+              <a:t/>
+            </a:r>
+          </a:p>
+          <a:p xmlns:a="http://schemas.openxmlformats.org/drawingml/2006/main">
+            <a:r>
+              <a:t>详细讲解</a:t>
+            </a:r>
+          </a:p>
+          <a:p xmlns:a="http://schemas.openxmlformats.org/drawingml/2006/main">
+            <a:r>
+              <a:t>左栏是可以明确说的：我们建立了统一、可审计的 replay harness；source-outcome initial design 在一个真实外部 Suzuki target 上有实际价值；v1 的独立失败推动了 v2 的可解释修订；最新外部 AUC 相对强 baseline 提高 8.66。</a:t>
+            </a:r>
+          </a:p>
+          <a:p xmlns:a="http://schemas.openxmlformats.org/drawingml/2006/main">
+            <a:r>
+              <a:t/>
+            </a:r>
+          </a:p>
+          <a:p xmlns:a="http://schemas.openxmlformats.org/drawingml/2006/main">
+            <a:r>
+              <a:t>中栏是不能说的：任意跨领域稳定迁移、LLM 在多数路径优于 fixed rule、source 在优化全程持续贡献，以及单个 target 的 task-level 显著性。右栏是项目真正的定位：可信赖的科学知识迁移框架，强调强 baseline、冻结协议、负迁移审计、exact fallback，以及成功与失败共同沉淀。</a:t>
+            </a:r>
+          </a:p>
+          <a:p xmlns:a="http://schemas.openxmlformats.org/drawingml/2006/main">
+            <a:r>
+              <a:t/>
+            </a:r>
+          </a:p>
+          <a:p xmlns:a="http://schemas.openxmlformats.org/drawingml/2006/main">
+            <a:r>
+              <a:t>一句话收束：历史实验可以形成可执行、可拒绝、可验证的 Skill，但每个泛化结论都要由冻结后的新任务来支持。</a:t>
+            </a:r>
+          </a:p>
+          <a:p xmlns:a="http://schemas.openxmlformats.org/drawingml/2006/main">
+            <a:r>
+              <a:t/>
+            </a:r>
+          </a:p>
+          <a:p xmlns:a="http://schemas.openxmlformats.org/drawingml/2006/main">
+            <a:r>
+              <a:t>名词解释</a:t>
+            </a:r>
+          </a:p>
+          <a:p xmlns:a="http://schemas.openxmlformats.org/drawingml/2006/main">
+            <a:r>
+              <a:t>可信迁移不等于每次都迁移；能够识别不该迁移并安全回退，也是系统能力。</a:t>
+            </a:r>
+          </a:p>
+          <a:p xmlns:a="http://schemas.openxmlformats.org/drawingml/2006/main">
+            <a:r>
+              <a:t/>
+            </a:r>
+          </a:p>
+          <a:p xmlns:a="http://schemas.openxmlformats.org/drawingml/2006/main">
+            <a:r>
+              <a:t>转场</a:t>
+            </a:r>
+          </a:p>
+          <a:p xmlns:a="http://schemas.openxmlformats.org/drawingml/2006/main">
+            <a:r>
+              <a:t>最后说明怎样把一个外部正例扩展成论文级泛化证据。</a:t>
             </a:r>
           </a:p>
           <a:p xmlns:a="http://schemas.openxmlformats.org/drawingml/2006/main">
@@ -2301,7 +3591,67 @@
           <a:lstStyle xmlns:a="http://schemas.openxmlformats.org/drawingml/2006/main"/>
           <a:p xmlns:a="http://schemas.openxmlformats.org/drawingml/2006/main">
             <a:r>
-              <a:t>下一阶段最关键的是扩大 external target，并在相同协议下重新引入 LLM，直接检验它是否能超过 fixed v2，而不是继续依靠离线 calibration 做更好看的数字。多个独立 target 才能形成 task-level CI 和可发表的泛化结论。</a:t>
+              <a:t>本页核心</a:t>
+            </a:r>
+          </a:p>
+          <a:p xmlns:a="http://schemas.openxmlformats.org/drawingml/2006/main">
+            <a:r>
+              <a:t>优先增加真正外部 target，并在统一协议下隔离 LLM 的独立增量。</a:t>
+            </a:r>
+          </a:p>
+          <a:p xmlns:a="http://schemas.openxmlformats.org/drawingml/2006/main">
+            <a:r>
+              <a:t/>
+            </a:r>
+          </a:p>
+          <a:p xmlns:a="http://schemas.openxmlformats.org/drawingml/2006/main">
+            <a:r>
+              <a:t>详细讲解</a:t>
+            </a:r>
+          </a:p>
+          <a:p xmlns:a="http://schemas.openxmlformats.org/drawingml/2006/main">
+            <a:r>
+              <a:t>P0 第一项是扩大 external targets：冻结同一个 v2 skill family，在更多未参与开发的 C-N、Suzuki 或相邻 reaction campaigns 上执行。只有多个独立 target 才能计算 task-level CI。P0 第二项是冻结统一 Confirmation Protocol，包括任务根列表、预算、primary metric、selection hash 和 skill fingerprint，防止每个结果出来后改变口径。</a:t>
+            </a:r>
+          </a:p>
+          <a:p xmlns:a="http://schemas.openxmlformats.org/drawingml/2006/main">
+            <a:r>
+              <a:t/>
+            </a:r>
+          </a:p>
+          <a:p xmlns:a="http://schemas.openxmlformats.org/drawingml/2006/main">
+            <a:r>
+              <a:t>P1 是隔离 LLM：在同一个 v2 executor 上比较 fixed v2、LLM hypothesis-only 和 matched random hypothesis，所有组使用相同 source、candidate pool 和 target budget。另一个 P1 是 skill accumulation：target 完成后进入 SkillBank，检验后续任务是否能稳定复用，以及系统是否会在不合适时 abstain。P2 才是扩展领域，顺序应先 reaction 到 reaction、molecule 到 molecule、materials 到 materials，再讨论远距离迁移。</a:t>
+            </a:r>
+          </a:p>
+          <a:p xmlns:a="http://schemas.openxmlformats.org/drawingml/2006/main">
+            <a:r>
+              <a:t/>
+            </a:r>
+          </a:p>
+          <a:p xmlns:a="http://schemas.openxmlformats.org/drawingml/2006/main">
+            <a:r>
+              <a:t>名词解释</a:t>
+            </a:r>
+          </a:p>
+          <a:p xmlns:a="http://schemas.openxmlformats.org/drawingml/2006/main">
+            <a:r>
+              <a:t>Confirmation Protocol=事先冻结任务、预算、指标和版本的确认性实验协议；skill accumulation=随着完成任务增加，SkillBank 是否带来可重复收益。</a:t>
+            </a:r>
+          </a:p>
+          <a:p xmlns:a="http://schemas.openxmlformats.org/drawingml/2006/main">
+            <a:r>
+              <a:t/>
+            </a:r>
+          </a:p>
+          <a:p xmlns:a="http://schemas.openxmlformats.org/drawingml/2006/main">
+            <a:r>
+              <a:t>转场</a:t>
+            </a:r>
+          </a:p>
+          <a:p xmlns:a="http://schemas.openxmlformats.org/drawingml/2006/main">
+            <a:r>
+              <a:t>最后一页准备回答最容易被问到的四个问题。</a:t>
             </a:r>
           </a:p>
           <a:p xmlns:a="http://schemas.openxmlformats.org/drawingml/2006/main">
@@ -2386,7 +3736,67 @@
           <a:lstStyle xmlns:a="http://schemas.openxmlformats.org/drawingml/2006/main"/>
           <a:p xmlns:a="http://schemas.openxmlformats.org/drawingml/2006/main">
             <a:r>
-              <a:t>CARE 2.0 研究的是有限预算下的逐轮决策问题，而不是普通的监督学习。每轮只能选择一个新实验，只有被选择的候选才会揭示真实结果。我们既关心最后能否找到好条件，也关心是否能更早进入高质量区域。</a:t>
+              <a:t>本页核心</a:t>
+            </a:r>
+          </a:p>
+          <a:p xmlns:a="http://schemas.openxmlformats.org/drawingml/2006/main">
+            <a:r>
+              <a:t>CARE 2.0 不是普通预测任务，而是每轮只能做一个实验、做完才看到结果的序贯决策问题。</a:t>
+            </a:r>
+          </a:p>
+          <a:p xmlns:a="http://schemas.openxmlformats.org/drawingml/2006/main">
+            <a:r>
+              <a:t/>
+            </a:r>
+          </a:p>
+          <a:p xmlns:a="http://schemas.openxmlformats.org/drawingml/2006/main">
+            <a:r>
+              <a:t>详细讲解</a:t>
+            </a:r>
+          </a:p>
+          <a:p xmlns:a="http://schemas.openxmlformats.org/drawingml/2006/main">
+            <a:r>
+              <a:t>左边是算法开始前允许知道的信息：已经完成的 source experiments、target 的变量和候选条件、固定预算，以及尚未揭示的 target outcome。中间是每一轮真实发生的事：算法选择一个候选条件，只看到这个被选条件的结果，然后更新 target model，再做下一轮选择。右边是目标：在相同预算下更早找到高质量候选，同时避免因为错误迁移浪费实验。</a:t>
+            </a:r>
+          </a:p>
+          <a:p xmlns:a="http://schemas.openxmlformats.org/drawingml/2006/main">
+            <a:r>
+              <a:t/>
+            </a:r>
+          </a:p>
+          <a:p xmlns:a="http://schemas.openxmlformats.org/drawingml/2006/main">
+            <a:r>
+              <a:t>这里与普通训练集、测试集的区别是，算法不能一次看到完整 target 表格。它必须像真实实验一样逐轮揭示 outcome。我们真正比较的是 source history 是否改变了 target 的选点顺序，以及这种改变是否让有效实验更早发生。</a:t>
+            </a:r>
+          </a:p>
+          <a:p xmlns:a="http://schemas.openxmlformats.org/drawingml/2006/main">
+            <a:r>
+              <a:t/>
+            </a:r>
+          </a:p>
+          <a:p xmlns:a="http://schemas.openxmlformats.org/drawingml/2006/main">
+            <a:r>
+              <a:t>名词解释</a:t>
+            </a:r>
+          </a:p>
+          <a:p xmlns:a="http://schemas.openxmlformats.org/drawingml/2006/main">
+            <a:r>
+              <a:t>candidate=可选择的实验条件；outcome=实验结果，例如产率；budget=最多允许做多少次 target 实验。</a:t>
+            </a:r>
+          </a:p>
+          <a:p xmlns:a="http://schemas.openxmlformats.org/drawingml/2006/main">
+            <a:r>
+              <a:t/>
+            </a:r>
+          </a:p>
+          <a:p xmlns:a="http://schemas.openxmlformats.org/drawingml/2006/main">
+            <a:r>
+              <a:t>转场</a:t>
+            </a:r>
+          </a:p>
+          <a:p xmlns:a="http://schemas.openxmlformats.org/drawingml/2006/main">
+            <a:r>
+              <a:t>接下来需要区分不同强度的证据，避免把离线正结果和真正外部验证混为一谈。</a:t>
             </a:r>
           </a:p>
           <a:p xmlns:a="http://schemas.openxmlformats.org/drawingml/2006/main">
@@ -2471,7 +3881,77 @@
           <a:lstStyle xmlns:a="http://schemas.openxmlformats.org/drawingml/2006/main"/>
           <a:p xmlns:a="http://schemas.openxmlformats.org/drawingml/2006/main">
             <a:r>
-              <a:t>这页用于答疑和讨论。汇报结束时不要落在一个泛泛的‘谢谢’，而要把讨论收束到下一轮怎样冻结外部验证、怎样隔离 LLM 增量，以及怎样将新证据写回 SkillBank。</a:t>
+              <a:t>本页核心</a:t>
+            </a:r>
+          </a:p>
+          <a:p xmlns:a="http://schemas.openxmlformats.org/drawingml/2006/main">
+            <a:r>
+              <a:t>这四个问题决定目前能把结论说到哪一步。</a:t>
+            </a:r>
+          </a:p>
+          <a:p xmlns:a="http://schemas.openxmlformats.org/drawingml/2006/main">
+            <a:r>
+              <a:t/>
+            </a:r>
+          </a:p>
+          <a:p xmlns:a="http://schemas.openxmlformats.org/drawingml/2006/main">
+            <a:r>
+              <a:t>详细讲解</a:t>
+            </a:r>
+          </a:p>
+          <a:p xmlns:a="http://schemas.openxmlformats.org/drawingml/2006/main">
+            <a:r>
+              <a:t>问题一：是不是挑了三个好 seed？不是。前三个点是冻结的算法输出，不是随机 seed；external target 在冻结前没有读取 outcome。问题二：为什么不持续使用 source prior？因为当前实验先隔离 initial-design contribution，持续 prior 需要单独与 warm-start-only 比较，否则归因不清楚。</a:t>
+            </a:r>
+          </a:p>
+          <a:p xmlns:a="http://schemas.openxmlformats.org/drawingml/2006/main">
+            <a:r>
+              <a:t/>
+            </a:r>
+          </a:p>
+          <a:p xmlns:a="http://schemas.openxmlformats.org/drawingml/2006/main">
+            <a:r>
+              <a:t>问题三：为什么 +8.66 不直接说统计显著？因为它来自一个 target。100 个 random seeds 不是 100 个独立科学任务，只能说明该 target 上随机初始化的分布。问题四：这算跨领域吗？目前是不同 reaction-optimization datasets 之间的迁移，属于同领域或相邻任务迁移，还不足以证明化学到材料等远距离跨领域泛化。</a:t>
+            </a:r>
+          </a:p>
+          <a:p xmlns:a="http://schemas.openxmlformats.org/drawingml/2006/main">
+            <a:r>
+              <a:t/>
+            </a:r>
+          </a:p>
+          <a:p xmlns:a="http://schemas.openxmlformats.org/drawingml/2006/main">
+            <a:r>
+              <a:t>讨论应收束到三个具体决定：下一批 external targets 是什么；LLM hypothesis-only 对照如何冻结；Confirmation Protocol 和 SkillBank 的版本规则如何确定。</a:t>
+            </a:r>
+          </a:p>
+          <a:p xmlns:a="http://schemas.openxmlformats.org/drawingml/2006/main">
+            <a:r>
+              <a:t/>
+            </a:r>
+          </a:p>
+          <a:p xmlns:a="http://schemas.openxmlformats.org/drawingml/2006/main">
+            <a:r>
+              <a:t>名词解释</a:t>
+            </a:r>
+          </a:p>
+          <a:p xmlns:a="http://schemas.openxmlformats.org/drawingml/2006/main">
+            <a:r>
+              <a:t>最稳妥的对外表述是：CARE 2.0 已获得一个严格外部 source-outcome transfer 正例，并形成了可扩展的验证框架。</a:t>
+            </a:r>
+          </a:p>
+          <a:p xmlns:a="http://schemas.openxmlformats.org/drawingml/2006/main">
+            <a:r>
+              <a:t/>
+            </a:r>
+          </a:p>
+          <a:p xmlns:a="http://schemas.openxmlformats.org/drawingml/2006/main">
+            <a:r>
+              <a:t>转场</a:t>
+            </a:r>
+          </a:p>
+          <a:p xmlns:a="http://schemas.openxmlformats.org/drawingml/2006/main">
+            <a:r>
+              <a:t>结束汇报并进入任务、协议和专家 review 的具体讨论。</a:t>
             </a:r>
           </a:p>
           <a:p xmlns:a="http://schemas.openxmlformats.org/drawingml/2006/main">
@@ -2556,7 +4036,77 @@
           <a:lstStyle xmlns:a="http://schemas.openxmlformats.org/drawingml/2006/main"/>
           <a:p xmlns:a="http://schemas.openxmlformats.org/drawingml/2006/main">
             <a:r>
-              <a:t>第一层证明系统能在多个真实数据集上统一运行、选择迁移或精确回退，但它使用 archived target calibration，属于离线 benchmark。第二层加入 RGPE 和 multi-task ICM 等经典 transfer BO，说明没有单一 transfer family 在所有任务上可靠。第三层是最新 v2，它不使用 target calibration，策略冻结后才运行外部 target，因此更接近真实部署。LLM 贡献需要单独做因果对照。</a:t>
+              <a:t>本页核心</a:t>
+            </a:r>
+          </a:p>
+          <a:p xmlns:a="http://schemas.openxmlformats.org/drawingml/2006/main">
+            <a:r>
+              <a:t>系统跑通、多任务离线比较和冻结外部验证是三个不同等级的证据。</a:t>
+            </a:r>
+          </a:p>
+          <a:p xmlns:a="http://schemas.openxmlformats.org/drawingml/2006/main">
+            <a:r>
+              <a:t/>
+            </a:r>
+          </a:p>
+          <a:p xmlns:a="http://schemas.openxmlformats.org/drawingml/2006/main">
+            <a:r>
+              <a:t>详细讲解</a:t>
+            </a:r>
+          </a:p>
+          <a:p xmlns:a="http://schemas.openxmlformats.org/drawingml/2006/main">
+            <a:r>
+              <a:t>这张图从下到上表示证据逐渐变强。第一层是多领域 replay：它证明统一接口、指标、gate 和 audit 可以跨反应、分子、材料数据运行，也能在不适合迁移时精确回退。但这层使用 archived target outcomes 做 calibration，所以属于离线 benchmark。</a:t>
+            </a:r>
+          </a:p>
+          <a:p xmlns:a="http://schemas.openxmlformats.org/drawingml/2006/main">
+            <a:r>
+              <a:t/>
+            </a:r>
+          </a:p>
+          <a:p xmlns:a="http://schemas.openxmlformats.org/drawingml/2006/main">
+            <a:r>
+              <a:t>第二层加入 RGPE、multi-task ICM GP 等传统 transfer BO 方法。它告诉我们经典迁移算法也会出现负迁移，没有一种方法在所有路径都可靠。第三层是最新 frozen external confirmation：策略在看外部 target outcome 之前已经冻结，然后才执行，因此最接近真实部署。</a:t>
+            </a:r>
+          </a:p>
+          <a:p xmlns:a="http://schemas.openxmlformats.org/drawingml/2006/main">
+            <a:r>
+              <a:t/>
+            </a:r>
+          </a:p>
+          <a:p xmlns:a="http://schemas.openxmlformats.org/drawingml/2006/main">
+            <a:r>
+              <a:t>LLM 的贡献还要单独放在第四个问题里做因果对照。即使完整平台包含 LLM，也不能因为某个包含 LLM 的系统取得好结果，就默认增益来自 LLM。</a:t>
+            </a:r>
+          </a:p>
+          <a:p xmlns:a="http://schemas.openxmlformats.org/drawingml/2006/main">
+            <a:r>
+              <a:t/>
+            </a:r>
+          </a:p>
+          <a:p xmlns:a="http://schemas.openxmlformats.org/drawingml/2006/main">
+            <a:r>
+              <a:t>名词解释</a:t>
+            </a:r>
+          </a:p>
+          <a:p xmlns:a="http://schemas.openxmlformats.org/drawingml/2006/main">
+            <a:r>
+              <a:t>offline calibration=利用历史 target 结果选择方法；external confirmation=在策略冻结后才使用新 target 结果检验。</a:t>
+            </a:r>
+          </a:p>
+          <a:p xmlns:a="http://schemas.openxmlformats.org/drawingml/2006/main">
+            <a:r>
+              <a:t/>
+            </a:r>
+          </a:p>
+          <a:p xmlns:a="http://schemas.openxmlformats.org/drawingml/2006/main">
+            <a:r>
+              <a:t>转场</a:t>
+            </a:r>
+          </a:p>
+          <a:p xmlns:a="http://schemas.openxmlformats.org/drawingml/2006/main">
+            <a:r>
+              <a:t>下面说明这些更严格的协议，是如何由团队此前的质疑直接推动出来的。</a:t>
             </a:r>
           </a:p>
           <a:p xmlns:a="http://schemas.openxmlformats.org/drawingml/2006/main">
@@ -2651,7 +4201,67 @@
           <a:lstStyle xmlns:a="http://schemas.openxmlformats.org/drawingml/2006/main"/>
           <a:p xmlns:a="http://schemas.openxmlformats.org/drawingml/2006/main">
             <a:r>
-              <a:t>前几轮 code review 最核心的质疑有四类：开发和测试边界是否清楚；baseline 是否足够强；规则是否手工调得过强；skill 和 trace 是否真的可检查。对应修改包括 campaign-level 划分、冻结 selection record、100-seed random GP-UCB、space filling、RGPE 和 ICM GP，以及完整 SkillBank 和 JSONL audit。最新 external target 专门回应了‘先看 target 再决定迁移’的问题。</a:t>
+              <a:t>本页核心</a:t>
+            </a:r>
+          </a:p>
+          <a:p xmlns:a="http://schemas.openxmlformats.org/drawingml/2006/main">
+            <a:r>
+              <a:t>对数据泄漏、baseline、手工规则和可审计性的质疑，已经被转换成具体代码修改与实验约束。</a:t>
+            </a:r>
+          </a:p>
+          <a:p xmlns:a="http://schemas.openxmlformats.org/drawingml/2006/main">
+            <a:r>
+              <a:t/>
+            </a:r>
+          </a:p>
+          <a:p xmlns:a="http://schemas.openxmlformats.org/drawingml/2006/main">
+            <a:r>
+              <a:t>详细讲解</a:t>
+            </a:r>
+          </a:p>
+          <a:p xmlns:a="http://schemas.openxmlformats.org/drawingml/2006/main">
+            <a:r>
+              <a:t>这一页不是在列会议意见，而是在展示意见如何真正改变系统。关于开发测试边界，我们改成 campaign-level 划分，并冻结 selection record；关于 baseline 不够强，我们加入 100-seed random-initial GP-UCB、space filling、RGPE 和 ICM GP；关于规则是不是手工调得太强，我们把规则、配置、hash 和失败路径全部记录；关于结果是否可重放，我们增加 SkillBank、JSONL audit 和 SHA-256 校验。</a:t>
+            </a:r>
+          </a:p>
+          <a:p xmlns:a="http://schemas.openxmlformats.org/drawingml/2006/main">
+            <a:r>
+              <a:t/>
+            </a:r>
+          </a:p>
+          <a:p xmlns:a="http://schemas.openxmlformats.org/drawingml/2006/main">
+            <a:r>
+              <a:t>最新 external target 最重要的作用，是回应“是不是先看了 target 结果，再决定该不该迁移”这个质疑。答案是：外部 target 的 outcome 在策略冻结前没有加载，执行记录也有对应 fingerprint。</a:t>
+            </a:r>
+          </a:p>
+          <a:p xmlns:a="http://schemas.openxmlformats.org/drawingml/2006/main">
+            <a:r>
+              <a:t/>
+            </a:r>
+          </a:p>
+          <a:p xmlns:a="http://schemas.openxmlformats.org/drawingml/2006/main">
+            <a:r>
+              <a:t>名词解释</a:t>
+            </a:r>
+          </a:p>
+          <a:p xmlns:a="http://schemas.openxmlformats.org/drawingml/2006/main">
+            <a:r>
+              <a:t>campaign-level split=按完整实验任务划分开发与验证；selection record=冻结的选点规则和参数记录。</a:t>
+            </a:r>
+          </a:p>
+          <a:p xmlns:a="http://schemas.openxmlformats.org/drawingml/2006/main">
+            <a:r>
+              <a:t/>
+            </a:r>
+          </a:p>
+          <a:p xmlns:a="http://schemas.openxmlformats.org/drawingml/2006/main">
+            <a:r>
+              <a:t>转场</a:t>
+            </a:r>
+          </a:p>
+          <a:p xmlns:a="http://schemas.openxmlformats.org/drawingml/2006/main">
+            <a:r>
+              <a:t>协议明确以后，下面看最新 v2 的实际执行链路。</a:t>
             </a:r>
           </a:p>
           <a:p xmlns:a="http://schemas.openxmlformats.org/drawingml/2006/main">
@@ -2741,7 +4351,67 @@
           <a:lstStyle xmlns:a="http://schemas.openxmlformats.org/drawingml/2006/main"/>
           <a:p xmlns:a="http://schemas.openxmlformats.org/drawingml/2006/main">
             <a:r>
-              <a:t>最新 v2 的执行链路非常清楚。历史 campaign 被转换成 source experts，预测转成归一化排序并聚合成共识。TransferSkill 用这个共识选择三个初始点。之后 source 信息退出，所有方法都使用相同的 target-only GP-UCB。这样如果结果不同，只能来自前三个点。</a:t>
+              <a:t>本页核心</a:t>
+            </a:r>
+          </a:p>
+          <a:p xmlns:a="http://schemas.openxmlformats.org/drawingml/2006/main">
+            <a:r>
+              <a:t>source 只负责前三个初始实验，之后所有方法都使用完全相同的 target-only GP-UCB。</a:t>
+            </a:r>
+          </a:p>
+          <a:p xmlns:a="http://schemas.openxmlformats.org/drawingml/2006/main">
+            <a:r>
+              <a:t/>
+            </a:r>
+          </a:p>
+          <a:p xmlns:a="http://schemas.openxmlformats.org/drawingml/2006/main">
+            <a:r>
+              <a:t>详细讲解</a:t>
+            </a:r>
+          </a:p>
+          <a:p xmlns:a="http://schemas.openxmlformats.org/drawingml/2006/main">
+            <a:r>
+              <a:t>从左向右讲。首先，每个历史 campaign 单独训练一个 source expert。因为不同 campaign 的 outcome 尺度不同，我们不直接拼接原始数值，而是把每个 expert 的预测转成候选排序，再用中位数形成共识。TransferSkill 根据这个共识选择三个初始实验。</a:t>
+            </a:r>
+          </a:p>
+          <a:p xmlns:a="http://schemas.openxmlformats.org/drawingml/2006/main">
+            <a:r>
+              <a:t/>
+            </a:r>
+          </a:p>
+          <a:p xmlns:a="http://schemas.openxmlformats.org/drawingml/2006/main">
+            <a:r>
+              <a:t>关键控制在黄色分界线之后：三个初始点做完后，source 信息完全退出。随后 10 轮所有方法都运行同一个 target-only GP-UCB，只用已经揭示的 target outcomes 建模。这样，Frozen v2、随机初始化和 space filling 之间唯一的区别就是前三个点怎么选，后续优化器、预算和观测规则完全一致。因此外部结果可以归因于 source-guided initial design，而不是后续偷偷使用了不同算法。</a:t>
+            </a:r>
+          </a:p>
+          <a:p xmlns:a="http://schemas.openxmlformats.org/drawingml/2006/main">
+            <a:r>
+              <a:t/>
+            </a:r>
+          </a:p>
+          <a:p xmlns:a="http://schemas.openxmlformats.org/drawingml/2006/main">
+            <a:r>
+              <a:t>名词解释</a:t>
+            </a:r>
+          </a:p>
+          <a:p xmlns:a="http://schemas.openxmlformats.org/drawingml/2006/main">
+            <a:r>
+              <a:t>source expert=在单个历史 campaign 上训练的模型；initial design=优化开始前先做的少量初始实验。</a:t>
+            </a:r>
+          </a:p>
+          <a:p xmlns:a="http://schemas.openxmlformats.org/drawingml/2006/main">
+            <a:r>
+              <a:t/>
+            </a:r>
+          </a:p>
+          <a:p xmlns:a="http://schemas.openxmlformats.org/drawingml/2006/main">
+            <a:r>
+              <a:t>转场</a:t>
+            </a:r>
+          </a:p>
+          <a:p xmlns:a="http://schemas.openxmlformats.org/drawingml/2006/main">
+            <a:r>
+              <a:t>为了避免误解，下一页把完整 CARE 平台和这次最小验证切片分开。</a:t>
             </a:r>
           </a:p>
           <a:p xmlns:a="http://schemas.openxmlformats.org/drawingml/2006/main">
@@ -2826,7 +4496,67 @@
           <a:lstStyle xmlns:a="http://schemas.openxmlformats.org/drawingml/2006/main"/>
           <a:p xmlns:a="http://schemas.openxmlformats.org/drawingml/2006/main">
             <a:r>
-              <a:t>过去的汇报容易让人误解为所有模块都参与了最新结果。完整 CARE 2.0 平台已经实现 LLM hypothesis、source prior、kernel patch 和 router；但最新 external confirmation 只验证最小可解释路径。先证明 initial-design transfer，再逐步增加 LLM，避免增益无法归因。</a:t>
+              <a:t>本页核心</a:t>
+            </a:r>
+          </a:p>
+          <a:p xmlns:a="http://schemas.openxmlformats.org/drawingml/2006/main">
+            <a:r>
+              <a:t>CARE 2.0 已实现更多模块，但最新外部结果只验证其中最小、最容易归因的一条路径。</a:t>
+            </a:r>
+          </a:p>
+          <a:p xmlns:a="http://schemas.openxmlformats.org/drawingml/2006/main">
+            <a:r>
+              <a:t/>
+            </a:r>
+          </a:p>
+          <a:p xmlns:a="http://schemas.openxmlformats.org/drawingml/2006/main">
+            <a:r>
+              <a:t>详细讲解</a:t>
+            </a:r>
+          </a:p>
+          <a:p xmlns:a="http://schemas.openxmlformats.org/drawingml/2006/main">
+            <a:r>
+              <a:t>左侧是完整 CARE 2.0 平台：LLM 可以读取 source/target schema，生成 role mapping 和 hypothesis；系统也支持 source prior、kernel patch、online router、calibration gate 和 audit。右侧是最新 v2 外部验证：只使用真实 source outcomes 生成 quality-bounded initial design，三个点之后 source 完全退出，而且 LLM 不参与选点或打分。</a:t>
+            </a:r>
+          </a:p>
+          <a:p xmlns:a="http://schemas.openxmlformats.org/drawingml/2006/main">
+            <a:r>
+              <a:t/>
+            </a:r>
+          </a:p>
+          <a:p xmlns:a="http://schemas.openxmlformats.org/drawingml/2006/main">
+            <a:r>
+              <a:t>这样设计不是削弱 CARE，而是为了把因果关系讲清楚。如果一开始把 LLM、kernel、router 和 source prior 全部叠上去，即使结果提高，也不知道是哪一个模块起作用。现在先钉牢 source-outcome initial design 的价值，下一步再在相同执行器上加入 LLM，直接测 LLM 的增量。</a:t>
+            </a:r>
+          </a:p>
+          <a:p xmlns:a="http://schemas.openxmlformats.org/drawingml/2006/main">
+            <a:r>
+              <a:t/>
+            </a:r>
+          </a:p>
+          <a:p xmlns:a="http://schemas.openxmlformats.org/drawingml/2006/main">
+            <a:r>
+              <a:t>名词解释</a:t>
+            </a:r>
+          </a:p>
+          <a:p xmlns:a="http://schemas.openxmlformats.org/drawingml/2006/main">
+            <a:r>
+              <a:t>验证切片=从完整系统中抽出一个可独立检验的最小模块组合；增量=加入某模块后相对固定对照多出来的收益。</a:t>
+            </a:r>
+          </a:p>
+          <a:p xmlns:a="http://schemas.openxmlformats.org/drawingml/2006/main">
+            <a:r>
+              <a:t/>
+            </a:r>
+          </a:p>
+          <a:p xmlns:a="http://schemas.openxmlformats.org/drawingml/2006/main">
+            <a:r>
+              <a:t>转场</a:t>
+            </a:r>
+          </a:p>
+          <a:p xmlns:a="http://schemas.openxmlformats.org/drawingml/2006/main">
+            <a:r>
+              <a:t>下面解释 replay harness 如何模拟真实实验节奏并防止偷看答案。</a:t>
             </a:r>
           </a:p>
           <a:p xmlns:a="http://schemas.openxmlformats.org/drawingml/2006/main">
@@ -2916,7 +4646,67 @@
           <a:lstStyle xmlns:a="http://schemas.openxmlformats.org/drawingml/2006/main"/>
           <a:p xmlns:a="http://schemas.openxmlformats.org/drawingml/2006/main">
             <a:r>
-              <a:t>Replay harness 不会一次性把 target dataset 交给算法，而是像真实实验一样按轮揭示。每轮只允许看到已经做过的实验结果，因此可以检查 outcome leakage，并计算第 1、3、5 轮的 best-so-far。它仍然是离线评测，但比普通 train/test split 更接近 sequential experiment design。</a:t>
+              <a:t>本页核心</a:t>
+            </a:r>
+          </a:p>
+          <a:p xmlns:a="http://schemas.openxmlformats.org/drawingml/2006/main">
+            <a:r>
+              <a:t>完整数据表只充当隐藏环境；算法每轮只能看到自己已经选择过的实验结果。</a:t>
+            </a:r>
+          </a:p>
+          <a:p xmlns:a="http://schemas.openxmlformats.org/drawingml/2006/main">
+            <a:r>
+              <a:t/>
+            </a:r>
+          </a:p>
+          <a:p xmlns:a="http://schemas.openxmlformats.org/drawingml/2006/main">
+            <a:r>
+              <a:t>详细讲解</a:t>
+            </a:r>
+          </a:p>
+          <a:p xmlns:a="http://schemas.openxmlformats.org/drawingml/2006/main">
+            <a:r>
+              <a:t>Replay 的做法是把已有真实数据集当作一个可以查询的实验环境，而不是把整张表交给算法。开始时 target outcomes 全部隐藏。每一轮算法选择一个 candidate，环境只揭示这个点的真实 outcome，算法据此更新模型，再选择下一点。每轮的 candidate、score、outcome 和当前 best-so-far 都进入 trace。</a:t>
+            </a:r>
+          </a:p>
+          <a:p xmlns:a="http://schemas.openxmlformats.org/drawingml/2006/main">
+            <a:r>
+              <a:t/>
+            </a:r>
+          </a:p>
+          <a:p xmlns:a="http://schemas.openxmlformats.org/drawingml/2006/main">
+            <a:r>
+              <a:t>所有对照使用相同 candidate pool、相同初始点数量、相同 reveal budget 和相同 seeds。这里 seed 是随机数种子，用来复现实验随机性，不是提前挑选的好实验点。Replay 仍然不能替代新的 wet-lab 实验，但它能严格检查数据泄漏，并评价有限预算下哪种策略更早找到好条件。</a:t>
+            </a:r>
+          </a:p>
+          <a:p xmlns:a="http://schemas.openxmlformats.org/drawingml/2006/main">
+            <a:r>
+              <a:t/>
+            </a:r>
+          </a:p>
+          <a:p xmlns:a="http://schemas.openxmlformats.org/drawingml/2006/main">
+            <a:r>
+              <a:t>名词解释</a:t>
+            </a:r>
+          </a:p>
+          <a:p xmlns:a="http://schemas.openxmlformats.org/drawingml/2006/main">
+            <a:r>
+              <a:t>seed=控制随机过程的编号；reveal=执行一个候选后揭示结果；trace=逐轮决策记录。</a:t>
+            </a:r>
+          </a:p>
+          <a:p xmlns:a="http://schemas.openxmlformats.org/drawingml/2006/main">
+            <a:r>
+              <a:t/>
+            </a:r>
+          </a:p>
+          <a:p xmlns:a="http://schemas.openxmlformats.org/drawingml/2006/main">
+            <a:r>
+              <a:t>转场</a:t>
+            </a:r>
+          </a:p>
+          <a:p xmlns:a="http://schemas.openxmlformats.org/drawingml/2006/main">
+            <a:r>
+              <a:t>有了统一 replay 协议，下面看目前接入了哪些真实数据。</a:t>
             </a:r>
           </a:p>
           <a:p xmlns:a="http://schemas.openxmlformats.org/drawingml/2006/main">
@@ -3001,7 +4791,67 @@
           <a:lstStyle xmlns:a="http://schemas.openxmlformats.org/drawingml/2006/main"/>
           <a:p xmlns:a="http://schemas.openxmlformats.org/drawingml/2006/main">
             <a:r>
-              <a:t>分子和材料数据为 schema transfer、source-outcome transfer 和 baseline 对照提供了丰富路径；反应方向的真实 campaign 更接近 wet-lab 主线。不能把数据集列表本身当成所有领域都已经成功的证据。</a:t>
+              <a:t>本页核心</a:t>
+            </a:r>
+          </a:p>
+          <a:p xmlns:a="http://schemas.openxmlformats.org/drawingml/2006/main">
+            <a:r>
+              <a:t>平台已覆盖反应优化、分子性质和材料性质，但真正冻结的外部正例目前只在反应优化中。</a:t>
+            </a:r>
+          </a:p>
+          <a:p xmlns:a="http://schemas.openxmlformats.org/drawingml/2006/main">
+            <a:r>
+              <a:t/>
+            </a:r>
+          </a:p>
+          <a:p xmlns:a="http://schemas.openxmlformats.org/drawingml/2006/main">
+            <a:r>
+              <a:t>详细讲解</a:t>
+            </a:r>
+          </a:p>
+          <a:p xmlns:a="http://schemas.openxmlformats.org/drawingml/2006/main">
+            <a:r>
+              <a:t>反应优化包括 ChemLex Acid-Amine、Buchwald-Hartwig HTE、Baumgartner C-N 和 Suzuki MINLP；分子性质包括 ESOL、FreeSolv 和 Lipophilicity；材料性质包括 Matbench experimental gap、dielectric 和 phonons。它们让我们可以测试不同 schema、变量类型和 outcome 尺度下的统一接口。</a:t>
+            </a:r>
+          </a:p>
+          <a:p xmlns:a="http://schemas.openxmlformats.org/drawingml/2006/main">
+            <a:r>
+              <a:t/>
+            </a:r>
+          </a:p>
+          <a:p xmlns:a="http://schemas.openxmlformats.org/drawingml/2006/main">
+            <a:r>
+              <a:t>需要特别说明，数据集多不等于每个领域都已证明迁移成功。分子和材料结果主要来自离线 calibration suite，用于验证平台兼容性、方法选择和 fallback；目前最强的冻结外部证据只来自 Suzuki MINLP2。因此汇报时应说“平台已跨领域运行”，而不是“跨领域迁移已经全面成立”。</a:t>
+            </a:r>
+          </a:p>
+          <a:p xmlns:a="http://schemas.openxmlformats.org/drawingml/2006/main">
+            <a:r>
+              <a:t/>
+            </a:r>
+          </a:p>
+          <a:p xmlns:a="http://schemas.openxmlformats.org/drawingml/2006/main">
+            <a:r>
+              <a:t>名词解释</a:t>
+            </a:r>
+          </a:p>
+          <a:p xmlns:a="http://schemas.openxmlformats.org/drawingml/2006/main">
+            <a:r>
+              <a:t>schema=变量字段、类型和约束的结构；Matbench/MoleculeNet=公开的材料与分子性质 benchmark 集合。</a:t>
+            </a:r>
+          </a:p>
+          <a:p xmlns:a="http://schemas.openxmlformats.org/drawingml/2006/main">
+            <a:r>
+              <a:t/>
+            </a:r>
+          </a:p>
+          <a:p xmlns:a="http://schemas.openxmlformats.org/drawingml/2006/main">
+            <a:r>
+              <a:t>转场</a:t>
+            </a:r>
+          </a:p>
+          <a:p xmlns:a="http://schemas.openxmlformats.org/drawingml/2006/main">
+            <a:r>
+              <a:t>不同数据能够统一接入后，下一步是把自然语言经验变成可执行 hypothesis。</a:t>
             </a:r>
           </a:p>
           <a:p xmlns:a="http://schemas.openxmlformats.org/drawingml/2006/main">
@@ -3089,7 +4939,7 @@
   </p:cSld>
   <p:clrMap bg1="lt1" tx1="dk1" bg2="lt2" tx2="dk2" accent1="accent1" accent2="accent2" accent3="accent3" accent4="accent4" accent5="accent5" accent6="accent6" hlink="hlink" folHlink="folHlink"/>
   <p:sldLayoutIdLst>
-    <p:sldLayoutId xmlns:r="http://schemas.openxmlformats.org/officeDocument/2006/relationships" id="2147483649" r:id="R24ac0804a6e44e39"/>
+    <p:sldLayoutId xmlns:r="http://schemas.openxmlformats.org/officeDocument/2006/relationships" id="2147483649" r:id="Red74654624884955"/>
   </p:sldLayoutIdLst>
   <p:txStyles>
     <p:titleStyle>
@@ -3640,7 +5490,7 @@
           <p:cNvPr id="14" name="">
             <a:extLst xmlns:a="http://schemas.openxmlformats.org/drawingml/2006/main">
               <a:ext uri="{FF2B5EF4-FFF2-40B4-BE49-F238E27FC236}">
-                <a16:creationId xmlns:a16="http://schemas.microsoft.com/office/drawing/2014/main" id="{C2EC3578-A880-4944-8840-4B98C62C2116}"/>
+                <a16:creationId xmlns:a16="http://schemas.microsoft.com/office/drawing/2014/main" id="{ED8E271C-34B3-42DF-A13E-92DBE145772F}"/>
               </a:ext>
             </a:extLst>
           </p:cNvPr>
@@ -3702,7 +5552,7 @@
           <p:cNvPr id="2" name="">
             <a:extLst xmlns:a="http://schemas.openxmlformats.org/drawingml/2006/main">
               <a:ext uri="{FF2B5EF4-FFF2-40B4-BE49-F238E27FC236}">
-                <a16:creationId xmlns:a16="http://schemas.microsoft.com/office/drawing/2014/main" id="{CEA19710-781B-44A9-9A72-D9D2624CE3B2}"/>
+                <a16:creationId xmlns:a16="http://schemas.microsoft.com/office/drawing/2014/main" id="{E55A7513-11E5-4384-9DC6-D637E45D5276}"/>
               </a:ext>
             </a:extLst>
           </p:cNvPr>
@@ -3791,7 +5641,7 @@
           <p:cNvPr id="3" name="">
             <a:extLst xmlns:a="http://schemas.openxmlformats.org/drawingml/2006/main">
               <a:ext uri="{FF2B5EF4-FFF2-40B4-BE49-F238E27FC236}">
-                <a16:creationId xmlns:a16="http://schemas.microsoft.com/office/drawing/2014/main" id="{D832A61D-B8A3-4A24-AB6E-4D5BA766DB43}"/>
+                <a16:creationId xmlns:a16="http://schemas.microsoft.com/office/drawing/2014/main" id="{48BCCB3B-9F6C-4B41-87A8-F655CA1313B6}"/>
               </a:ext>
             </a:extLst>
           </p:cNvPr>
@@ -3853,7 +5703,7 @@
           <p:cNvPr id="4" name="">
             <a:extLst xmlns:a="http://schemas.openxmlformats.org/drawingml/2006/main">
               <a:ext uri="{FF2B5EF4-FFF2-40B4-BE49-F238E27FC236}">
-                <a16:creationId xmlns:a16="http://schemas.microsoft.com/office/drawing/2014/main" id="{29D15DB7-012F-4554-A987-C8762849F727}"/>
+                <a16:creationId xmlns:a16="http://schemas.microsoft.com/office/drawing/2014/main" id="{2157DBB6-057B-46DC-A4A3-292B6F5A9854}"/>
               </a:ext>
             </a:extLst>
           </p:cNvPr>
@@ -3884,7 +5734,7 @@
           <p:cNvPr id="5" name="">
             <a:extLst xmlns:a="http://schemas.openxmlformats.org/drawingml/2006/main">
               <a:ext uri="{FF2B5EF4-FFF2-40B4-BE49-F238E27FC236}">
-                <a16:creationId xmlns:a16="http://schemas.microsoft.com/office/drawing/2014/main" id="{070A5D38-4573-4DFF-A7ED-46A7C8FDF58B}"/>
+                <a16:creationId xmlns:a16="http://schemas.microsoft.com/office/drawing/2014/main" id="{EC8F227E-FE2B-427E-B353-C438A4CFD643}"/>
               </a:ext>
             </a:extLst>
           </p:cNvPr>
@@ -3946,7 +5796,7 @@
           <p:cNvPr id="6" name="">
             <a:extLst xmlns:a="http://schemas.openxmlformats.org/drawingml/2006/main">
               <a:ext uri="{FF2B5EF4-FFF2-40B4-BE49-F238E27FC236}">
-                <a16:creationId xmlns:a16="http://schemas.microsoft.com/office/drawing/2014/main" id="{50FE5331-901A-46AD-A430-E388B99964DB}"/>
+                <a16:creationId xmlns:a16="http://schemas.microsoft.com/office/drawing/2014/main" id="{B0F71BDC-E859-470D-9DF4-7E4A6AE2A74B}"/>
               </a:ext>
             </a:extLst>
           </p:cNvPr>
@@ -3977,7 +5827,7 @@
           <p:cNvPr id="7" name="">
             <a:extLst xmlns:a="http://schemas.openxmlformats.org/drawingml/2006/main">
               <a:ext uri="{FF2B5EF4-FFF2-40B4-BE49-F238E27FC236}">
-                <a16:creationId xmlns:a16="http://schemas.microsoft.com/office/drawing/2014/main" id="{4119D812-1622-477C-B0FF-AB3DC5A07E17}"/>
+                <a16:creationId xmlns:a16="http://schemas.microsoft.com/office/drawing/2014/main" id="{78630050-F0ED-4AA1-B0D8-101D1C406BD4}"/>
               </a:ext>
             </a:extLst>
           </p:cNvPr>
@@ -4039,7 +5889,7 @@
           <p:cNvPr id="8" name="">
             <a:extLst xmlns:a="http://schemas.openxmlformats.org/drawingml/2006/main">
               <a:ext uri="{FF2B5EF4-FFF2-40B4-BE49-F238E27FC236}">
-                <a16:creationId xmlns:a16="http://schemas.microsoft.com/office/drawing/2014/main" id="{DB485558-2C3E-4F28-93EA-2864877978B9}"/>
+                <a16:creationId xmlns:a16="http://schemas.microsoft.com/office/drawing/2014/main" id="{892A99EE-8F93-47BC-87E9-9F174EF432A7}"/>
               </a:ext>
             </a:extLst>
           </p:cNvPr>
@@ -4101,7 +5951,7 @@
           <p:cNvPr id="9" name="">
             <a:extLst xmlns:a="http://schemas.openxmlformats.org/drawingml/2006/main">
               <a:ext uri="{FF2B5EF4-FFF2-40B4-BE49-F238E27FC236}">
-                <a16:creationId xmlns:a16="http://schemas.microsoft.com/office/drawing/2014/main" id="{FE7033FD-C3C2-47F7-B23A-B93FAFE31322}"/>
+                <a16:creationId xmlns:a16="http://schemas.microsoft.com/office/drawing/2014/main" id="{BE25345C-B8C1-4C40-9A57-3C6739DBA239}"/>
               </a:ext>
             </a:extLst>
           </p:cNvPr>
@@ -4163,7 +6013,7 @@
           <p:cNvPr id="10" name="">
             <a:extLst xmlns:a="http://schemas.openxmlformats.org/drawingml/2006/main">
               <a:ext uri="{FF2B5EF4-FFF2-40B4-BE49-F238E27FC236}">
-                <a16:creationId xmlns:a16="http://schemas.microsoft.com/office/drawing/2014/main" id="{4A026E2A-D45A-4DB4-AEC4-540572D287FD}"/>
+                <a16:creationId xmlns:a16="http://schemas.microsoft.com/office/drawing/2014/main" id="{BECA0780-C370-44FE-995C-E2D02585B55D}"/>
               </a:ext>
             </a:extLst>
           </p:cNvPr>
@@ -4225,7 +6075,7 @@
           <p:cNvPr id="11" name="">
             <a:extLst xmlns:a="http://schemas.openxmlformats.org/drawingml/2006/main">
               <a:ext uri="{FF2B5EF4-FFF2-40B4-BE49-F238E27FC236}">
-                <a16:creationId xmlns:a16="http://schemas.microsoft.com/office/drawing/2014/main" id="{D6ABB93C-EDDE-49A9-997F-18E364634669}"/>
+                <a16:creationId xmlns:a16="http://schemas.microsoft.com/office/drawing/2014/main" id="{BBA5CDAC-E353-4F88-A4AF-B9F278F40F8D}"/>
               </a:ext>
             </a:extLst>
           </p:cNvPr>
@@ -4287,7 +6137,7 @@
           <p:cNvPr id="12" name="">
             <a:extLst xmlns:a="http://schemas.openxmlformats.org/drawingml/2006/main">
               <a:ext uri="{FF2B5EF4-FFF2-40B4-BE49-F238E27FC236}">
-                <a16:creationId xmlns:a16="http://schemas.microsoft.com/office/drawing/2014/main" id="{87313FFF-DCD2-4717-8076-C36B350F237F}"/>
+                <a16:creationId xmlns:a16="http://schemas.microsoft.com/office/drawing/2014/main" id="{4A8D4BE3-2E42-4935-8812-48F734045456}"/>
               </a:ext>
             </a:extLst>
           </p:cNvPr>
@@ -4349,7 +6199,7 @@
           <p:cNvPr id="13" name="">
             <a:extLst xmlns:a="http://schemas.openxmlformats.org/drawingml/2006/main">
               <a:ext uri="{FF2B5EF4-FFF2-40B4-BE49-F238E27FC236}">
-                <a16:creationId xmlns:a16="http://schemas.microsoft.com/office/drawing/2014/main" id="{422720EB-2ECC-45ED-8429-C21C1F1929A3}"/>
+                <a16:creationId xmlns:a16="http://schemas.microsoft.com/office/drawing/2014/main" id="{7FA24BB0-5ED4-4BCF-B485-D4DE46FBFF85}"/>
               </a:ext>
             </a:extLst>
           </p:cNvPr>
@@ -4409,7 +6259,7 @@
     </p:spTree>
     <p:extLst>
       <p:ext uri="{BB962C8B-B14F-4D97-AF65-F5344CB8AC3E}">
-        <p14:creationId xmlns:p14="http://schemas.microsoft.com/office/powerpoint/2010/main" val="2077629709"/>
+        <p14:creationId xmlns:p14="http://schemas.microsoft.com/office/powerpoint/2010/main" val="1231705918"/>
       </p:ext>
     </p:extLst>
   </p:cSld>
@@ -4440,7 +6290,7 @@
           <p:cNvPr id="19" name="">
             <a:extLst xmlns:a="http://schemas.openxmlformats.org/drawingml/2006/main">
               <a:ext uri="{FF2B5EF4-FFF2-40B4-BE49-F238E27FC236}">
-                <a16:creationId xmlns:a16="http://schemas.microsoft.com/office/drawing/2014/main" id="{C16EDF39-801B-4280-826C-3726817B6A55}"/>
+                <a16:creationId xmlns:a16="http://schemas.microsoft.com/office/drawing/2014/main" id="{38FB0920-766A-48C5-BFE7-C24E22371B70}"/>
               </a:ext>
             </a:extLst>
           </p:cNvPr>
@@ -4502,7 +6352,7 @@
           <p:cNvPr id="2" name="">
             <a:extLst xmlns:a="http://schemas.openxmlformats.org/drawingml/2006/main">
               <a:ext uri="{FF2B5EF4-FFF2-40B4-BE49-F238E27FC236}">
-                <a16:creationId xmlns:a16="http://schemas.microsoft.com/office/drawing/2014/main" id="{7D1D4BA8-3968-4986-A4FC-46842EA160A4}"/>
+                <a16:creationId xmlns:a16="http://schemas.microsoft.com/office/drawing/2014/main" id="{B5FB5558-B9FB-495E-AB93-923EB2473A4D}"/>
               </a:ext>
             </a:extLst>
           </p:cNvPr>
@@ -4564,7 +6414,7 @@
           <p:cNvPr id="3" name="">
             <a:extLst xmlns:a="http://schemas.openxmlformats.org/drawingml/2006/main">
               <a:ext uri="{FF2B5EF4-FFF2-40B4-BE49-F238E27FC236}">
-                <a16:creationId xmlns:a16="http://schemas.microsoft.com/office/drawing/2014/main" id="{4E18AE30-D0F2-4EE8-9DA6-07E8CB8BF4F4}"/>
+                <a16:creationId xmlns:a16="http://schemas.microsoft.com/office/drawing/2014/main" id="{5855CD03-92D0-4D3A-9B33-9A1217155F06}"/>
               </a:ext>
             </a:extLst>
           </p:cNvPr>
@@ -4626,7 +6476,7 @@
           <p:cNvPr id="4" name="">
             <a:extLst xmlns:a="http://schemas.openxmlformats.org/drawingml/2006/main">
               <a:ext uri="{FF2B5EF4-FFF2-40B4-BE49-F238E27FC236}">
-                <a16:creationId xmlns:a16="http://schemas.microsoft.com/office/drawing/2014/main" id="{75CEA334-A3D7-48DA-A0AC-E427E7BF4779}"/>
+                <a16:creationId xmlns:a16="http://schemas.microsoft.com/office/drawing/2014/main" id="{F13FA2E2-CFC2-4910-BF3F-1C0764DF50FF}"/>
               </a:ext>
             </a:extLst>
           </p:cNvPr>
@@ -4657,7 +6507,7 @@
           <p:cNvPr id="5" name="">
             <a:extLst xmlns:a="http://schemas.openxmlformats.org/drawingml/2006/main">
               <a:ext uri="{FF2B5EF4-FFF2-40B4-BE49-F238E27FC236}">
-                <a16:creationId xmlns:a16="http://schemas.microsoft.com/office/drawing/2014/main" id="{55A2BBF9-46BA-48A2-BE34-1F43F6A2A14A}"/>
+                <a16:creationId xmlns:a16="http://schemas.microsoft.com/office/drawing/2014/main" id="{BDBD0B98-B86B-4DD8-9DE9-1403D5540726}"/>
               </a:ext>
             </a:extLst>
           </p:cNvPr>
@@ -4719,7 +6569,7 @@
           <p:cNvPr id="6" name="">
             <a:extLst xmlns:a="http://schemas.openxmlformats.org/drawingml/2006/main">
               <a:ext uri="{FF2B5EF4-FFF2-40B4-BE49-F238E27FC236}">
-                <a16:creationId xmlns:a16="http://schemas.microsoft.com/office/drawing/2014/main" id="{A48395F4-C2AB-46F1-9DA9-672873074AAC}"/>
+                <a16:creationId xmlns:a16="http://schemas.microsoft.com/office/drawing/2014/main" id="{AE925944-76B1-4F2E-90BF-0C300EA70EA6}"/>
               </a:ext>
             </a:extLst>
           </p:cNvPr>
@@ -4750,7 +6600,7 @@
           <p:cNvPr id="7" name="">
             <a:extLst xmlns:a="http://schemas.openxmlformats.org/drawingml/2006/main">
               <a:ext uri="{FF2B5EF4-FFF2-40B4-BE49-F238E27FC236}">
-                <a16:creationId xmlns:a16="http://schemas.microsoft.com/office/drawing/2014/main" id="{A9D74593-F96D-46E7-8DED-3C7F4F1C9C89}"/>
+                <a16:creationId xmlns:a16="http://schemas.microsoft.com/office/drawing/2014/main" id="{10E916A3-3C72-48CC-9D22-CA749D40C170}"/>
               </a:ext>
             </a:extLst>
           </p:cNvPr>
@@ -4893,7 +6743,7 @@
           <p:cNvPr id="8" name="">
             <a:extLst xmlns:a="http://schemas.openxmlformats.org/drawingml/2006/main">
               <a:ext uri="{FF2B5EF4-FFF2-40B4-BE49-F238E27FC236}">
-                <a16:creationId xmlns:a16="http://schemas.microsoft.com/office/drawing/2014/main" id="{CE0917F7-C498-411F-9257-DEC12246F134}"/>
+                <a16:creationId xmlns:a16="http://schemas.microsoft.com/office/drawing/2014/main" id="{DD7F6279-0FC2-4BA0-A6E2-06CDF9FD0D47}"/>
               </a:ext>
             </a:extLst>
           </p:cNvPr>
@@ -4955,7 +6805,7 @@
           <p:cNvPr id="9" name="">
             <a:extLst xmlns:a="http://schemas.openxmlformats.org/drawingml/2006/main">
               <a:ext uri="{FF2B5EF4-FFF2-40B4-BE49-F238E27FC236}">
-                <a16:creationId xmlns:a16="http://schemas.microsoft.com/office/drawing/2014/main" id="{D08600A3-292B-4D6E-873E-5A2E928CB008}"/>
+                <a16:creationId xmlns:a16="http://schemas.microsoft.com/office/drawing/2014/main" id="{0B3449D0-3151-4F64-9C94-ED98B7CE4DDD}"/>
               </a:ext>
             </a:extLst>
           </p:cNvPr>
@@ -5017,7 +6867,7 @@
           <p:cNvPr id="10" name="">
             <a:extLst xmlns:a="http://schemas.openxmlformats.org/drawingml/2006/main">
               <a:ext uri="{FF2B5EF4-FFF2-40B4-BE49-F238E27FC236}">
-                <a16:creationId xmlns:a16="http://schemas.microsoft.com/office/drawing/2014/main" id="{AC939B70-CE04-49F5-AFD4-CDD9C864463C}"/>
+                <a16:creationId xmlns:a16="http://schemas.microsoft.com/office/drawing/2014/main" id="{B7E9A920-AAAF-4A9C-B499-540EB1F06AC6}"/>
               </a:ext>
             </a:extLst>
           </p:cNvPr>
@@ -5050,7 +6900,7 @@
           <p:cNvPr id="11" name="">
             <a:extLst xmlns:a="http://schemas.openxmlformats.org/drawingml/2006/main">
               <a:ext uri="{FF2B5EF4-FFF2-40B4-BE49-F238E27FC236}">
-                <a16:creationId xmlns:a16="http://schemas.microsoft.com/office/drawing/2014/main" id="{88EBE032-AF81-4193-A3D5-9E9FBF24479F}"/>
+                <a16:creationId xmlns:a16="http://schemas.microsoft.com/office/drawing/2014/main" id="{2A61B45F-E723-412D-952A-9C311D3D40DC}"/>
               </a:ext>
             </a:extLst>
           </p:cNvPr>
@@ -5193,7 +7043,7 @@
           <p:cNvPr id="12" name="">
             <a:extLst xmlns:a="http://schemas.openxmlformats.org/drawingml/2006/main">
               <a:ext uri="{FF2B5EF4-FFF2-40B4-BE49-F238E27FC236}">
-                <a16:creationId xmlns:a16="http://schemas.microsoft.com/office/drawing/2014/main" id="{885763F6-0C77-4EA4-ADCC-5F312C5AAFFA}"/>
+                <a16:creationId xmlns:a16="http://schemas.microsoft.com/office/drawing/2014/main" id="{D84EA604-AEFA-4812-8353-40983D2D3715}"/>
               </a:ext>
             </a:extLst>
           </p:cNvPr>
@@ -5255,7 +7105,7 @@
           <p:cNvPr id="13" name="">
             <a:extLst xmlns:a="http://schemas.openxmlformats.org/drawingml/2006/main">
               <a:ext uri="{FF2B5EF4-FFF2-40B4-BE49-F238E27FC236}">
-                <a16:creationId xmlns:a16="http://schemas.microsoft.com/office/drawing/2014/main" id="{572968BE-6FFA-4B07-BB22-EB4985612C61}"/>
+                <a16:creationId xmlns:a16="http://schemas.microsoft.com/office/drawing/2014/main" id="{D3EB3679-C6CC-4F09-A05F-5284CEF538A0}"/>
               </a:ext>
             </a:extLst>
           </p:cNvPr>
@@ -5317,7 +7167,7 @@
           <p:cNvPr id="14" name="">
             <a:extLst xmlns:a="http://schemas.openxmlformats.org/drawingml/2006/main">
               <a:ext uri="{FF2B5EF4-FFF2-40B4-BE49-F238E27FC236}">
-                <a16:creationId xmlns:a16="http://schemas.microsoft.com/office/drawing/2014/main" id="{C9FA9C13-85D0-427A-8A0D-AD030525FBE1}"/>
+                <a16:creationId xmlns:a16="http://schemas.microsoft.com/office/drawing/2014/main" id="{86148EC9-B541-4E8F-BF86-3CBE02336856}"/>
               </a:ext>
             </a:extLst>
           </p:cNvPr>
@@ -5350,7 +7200,7 @@
           <p:cNvPr id="15" name="">
             <a:extLst xmlns:a="http://schemas.openxmlformats.org/drawingml/2006/main">
               <a:ext uri="{FF2B5EF4-FFF2-40B4-BE49-F238E27FC236}">
-                <a16:creationId xmlns:a16="http://schemas.microsoft.com/office/drawing/2014/main" id="{AC4FD50A-4483-4677-8A16-49BC0DF7D8BE}"/>
+                <a16:creationId xmlns:a16="http://schemas.microsoft.com/office/drawing/2014/main" id="{7E2EEADF-41BD-4DF5-A816-B52995F265D9}"/>
               </a:ext>
             </a:extLst>
           </p:cNvPr>
@@ -5493,7 +7343,7 @@
           <p:cNvPr id="16" name="">
             <a:extLst xmlns:a="http://schemas.openxmlformats.org/drawingml/2006/main">
               <a:ext uri="{FF2B5EF4-FFF2-40B4-BE49-F238E27FC236}">
-                <a16:creationId xmlns:a16="http://schemas.microsoft.com/office/drawing/2014/main" id="{71F57155-0EFE-41E9-9869-51FDDDA3565C}"/>
+                <a16:creationId xmlns:a16="http://schemas.microsoft.com/office/drawing/2014/main" id="{4188E305-BDA3-4F08-A01A-2FA93E6171DF}"/>
               </a:ext>
             </a:extLst>
           </p:cNvPr>
@@ -5524,7 +7374,7 @@
           <p:cNvPr id="17" name="">
             <a:extLst xmlns:a="http://schemas.openxmlformats.org/drawingml/2006/main">
               <a:ext uri="{FF2B5EF4-FFF2-40B4-BE49-F238E27FC236}">
-                <a16:creationId xmlns:a16="http://schemas.microsoft.com/office/drawing/2014/main" id="{62089372-3838-4D47-BE0B-E0381793F41B}"/>
+                <a16:creationId xmlns:a16="http://schemas.microsoft.com/office/drawing/2014/main" id="{A595497D-9A70-4CA9-A601-251BCBF9FD71}"/>
               </a:ext>
             </a:extLst>
           </p:cNvPr>
@@ -5586,7 +7436,7 @@
           <p:cNvPr id="18" name="">
             <a:extLst xmlns:a="http://schemas.openxmlformats.org/drawingml/2006/main">
               <a:ext uri="{FF2B5EF4-FFF2-40B4-BE49-F238E27FC236}">
-                <a16:creationId xmlns:a16="http://schemas.microsoft.com/office/drawing/2014/main" id="{E608E187-7503-4B60-A4B0-96BABDCE8918}"/>
+                <a16:creationId xmlns:a16="http://schemas.microsoft.com/office/drawing/2014/main" id="{D807FFE3-0500-46CB-B543-75B545B155C6}"/>
               </a:ext>
             </a:extLst>
           </p:cNvPr>
@@ -5646,7 +7496,7 @@
     </p:spTree>
     <p:extLst>
       <p:ext uri="{BB962C8B-B14F-4D97-AF65-F5344CB8AC3E}">
-        <p14:creationId xmlns:p14="http://schemas.microsoft.com/office/powerpoint/2010/main" val="1141092555"/>
+        <p14:creationId xmlns:p14="http://schemas.microsoft.com/office/powerpoint/2010/main" val="2132788991"/>
       </p:ext>
     </p:extLst>
   </p:cSld>
@@ -5677,7 +7527,7 @@
           <p:cNvPr id="30" name="">
             <a:extLst xmlns:a="http://schemas.openxmlformats.org/drawingml/2006/main">
               <a:ext uri="{FF2B5EF4-FFF2-40B4-BE49-F238E27FC236}">
-                <a16:creationId xmlns:a16="http://schemas.microsoft.com/office/drawing/2014/main" id="{3E73A66A-825E-4C3A-9A43-F1EE69B642A9}"/>
+                <a16:creationId xmlns:a16="http://schemas.microsoft.com/office/drawing/2014/main" id="{A98719A3-17AA-447E-9089-22E45D18E719}"/>
               </a:ext>
             </a:extLst>
           </p:cNvPr>
@@ -5739,7 +7589,7 @@
           <p:cNvPr id="2" name="">
             <a:extLst xmlns:a="http://schemas.openxmlformats.org/drawingml/2006/main">
               <a:ext uri="{FF2B5EF4-FFF2-40B4-BE49-F238E27FC236}">
-                <a16:creationId xmlns:a16="http://schemas.microsoft.com/office/drawing/2014/main" id="{29079C8B-C190-4E09-A99D-C87330DEF2F9}"/>
+                <a16:creationId xmlns:a16="http://schemas.microsoft.com/office/drawing/2014/main" id="{FC13FDC6-D5E1-4CA6-8A50-1C8DC584E7DB}"/>
               </a:ext>
             </a:extLst>
           </p:cNvPr>
@@ -5801,7 +7651,7 @@
           <p:cNvPr id="3" name="">
             <a:extLst xmlns:a="http://schemas.openxmlformats.org/drawingml/2006/main">
               <a:ext uri="{FF2B5EF4-FFF2-40B4-BE49-F238E27FC236}">
-                <a16:creationId xmlns:a16="http://schemas.microsoft.com/office/drawing/2014/main" id="{3D7DDCD5-F525-4637-B4B5-86229CDBA661}"/>
+                <a16:creationId xmlns:a16="http://schemas.microsoft.com/office/drawing/2014/main" id="{5FF4D543-F713-42DC-9C49-CD864277906C}"/>
               </a:ext>
             </a:extLst>
           </p:cNvPr>
@@ -5863,7 +7713,7 @@
           <p:cNvPr id="4" name="">
             <a:extLst xmlns:a="http://schemas.openxmlformats.org/drawingml/2006/main">
               <a:ext uri="{FF2B5EF4-FFF2-40B4-BE49-F238E27FC236}">
-                <a16:creationId xmlns:a16="http://schemas.microsoft.com/office/drawing/2014/main" id="{17539A08-FA37-43C0-A844-FB8EA7D2BB0E}"/>
+                <a16:creationId xmlns:a16="http://schemas.microsoft.com/office/drawing/2014/main" id="{B3D67D86-D17B-4731-A569-BED4D20B8E48}"/>
               </a:ext>
             </a:extLst>
           </p:cNvPr>
@@ -5894,7 +7744,7 @@
           <p:cNvPr id="5" name="">
             <a:extLst xmlns:a="http://schemas.openxmlformats.org/drawingml/2006/main">
               <a:ext uri="{FF2B5EF4-FFF2-40B4-BE49-F238E27FC236}">
-                <a16:creationId xmlns:a16="http://schemas.microsoft.com/office/drawing/2014/main" id="{579FD8C8-4EE2-4802-AFA5-73C0300E555E}"/>
+                <a16:creationId xmlns:a16="http://schemas.microsoft.com/office/drawing/2014/main" id="{3034F71D-1CB5-4A4F-BBF6-41FB006EDC78}"/>
               </a:ext>
             </a:extLst>
           </p:cNvPr>
@@ -5956,7 +7806,7 @@
           <p:cNvPr id="6" name="">
             <a:extLst xmlns:a="http://schemas.openxmlformats.org/drawingml/2006/main">
               <a:ext uri="{FF2B5EF4-FFF2-40B4-BE49-F238E27FC236}">
-                <a16:creationId xmlns:a16="http://schemas.microsoft.com/office/drawing/2014/main" id="{B90C1852-2D2B-48AA-87BB-B8CDE6EB6262}"/>
+                <a16:creationId xmlns:a16="http://schemas.microsoft.com/office/drawing/2014/main" id="{D1D9EC8B-5394-4B6A-A2E7-FDA840288455}"/>
               </a:ext>
             </a:extLst>
           </p:cNvPr>
@@ -6018,7 +7868,7 @@
           <p:cNvPr id="7" name="">
             <a:extLst xmlns:a="http://schemas.openxmlformats.org/drawingml/2006/main">
               <a:ext uri="{FF2B5EF4-FFF2-40B4-BE49-F238E27FC236}">
-                <a16:creationId xmlns:a16="http://schemas.microsoft.com/office/drawing/2014/main" id="{9FF56E7B-CA01-4C34-8A93-31069A1BFE45}"/>
+                <a16:creationId xmlns:a16="http://schemas.microsoft.com/office/drawing/2014/main" id="{69049EF5-D1C1-40F4-AC91-8675906ECD2C}"/>
               </a:ext>
             </a:extLst>
           </p:cNvPr>
@@ -6080,7 +7930,7 @@
           <p:cNvPr id="8" name="">
             <a:extLst xmlns:a="http://schemas.openxmlformats.org/drawingml/2006/main">
               <a:ext uri="{FF2B5EF4-FFF2-40B4-BE49-F238E27FC236}">
-                <a16:creationId xmlns:a16="http://schemas.microsoft.com/office/drawing/2014/main" id="{9A345B6F-D424-410A-B70A-B90BCEC5ECEE}"/>
+                <a16:creationId xmlns:a16="http://schemas.microsoft.com/office/drawing/2014/main" id="{F2952439-BECB-4503-AA2A-D987AF7DE700}"/>
               </a:ext>
             </a:extLst>
           </p:cNvPr>
@@ -6111,7 +7961,7 @@
           <p:cNvPr id="9" name="">
             <a:extLst xmlns:a="http://schemas.openxmlformats.org/drawingml/2006/main">
               <a:ext uri="{FF2B5EF4-FFF2-40B4-BE49-F238E27FC236}">
-                <a16:creationId xmlns:a16="http://schemas.microsoft.com/office/drawing/2014/main" id="{BD9B844F-848F-46B5-8BED-D70CC175FD5D}"/>
+                <a16:creationId xmlns:a16="http://schemas.microsoft.com/office/drawing/2014/main" id="{D2E18678-A00C-4791-8266-B799CFB44978}"/>
               </a:ext>
             </a:extLst>
           </p:cNvPr>
@@ -6173,7 +8023,7 @@
           <p:cNvPr id="10" name="">
             <a:extLst xmlns:a="http://schemas.openxmlformats.org/drawingml/2006/main">
               <a:ext uri="{FF2B5EF4-FFF2-40B4-BE49-F238E27FC236}">
-                <a16:creationId xmlns:a16="http://schemas.microsoft.com/office/drawing/2014/main" id="{6DFA1AE9-DE16-4D31-B10C-2E2E01D498B0}"/>
+                <a16:creationId xmlns:a16="http://schemas.microsoft.com/office/drawing/2014/main" id="{4D8ED5E4-9192-4A73-A157-2A32ECE64786}"/>
               </a:ext>
             </a:extLst>
           </p:cNvPr>
@@ -6235,7 +8085,7 @@
           <p:cNvPr id="11" name="">
             <a:extLst xmlns:a="http://schemas.openxmlformats.org/drawingml/2006/main">
               <a:ext uri="{FF2B5EF4-FFF2-40B4-BE49-F238E27FC236}">
-                <a16:creationId xmlns:a16="http://schemas.microsoft.com/office/drawing/2014/main" id="{98ED4BE3-C609-49E4-BCC2-649C3E3DF3B1}"/>
+                <a16:creationId xmlns:a16="http://schemas.microsoft.com/office/drawing/2014/main" id="{BBCD3EB7-D5C3-416C-BB4A-8FF9DB6E77CB}"/>
               </a:ext>
             </a:extLst>
           </p:cNvPr>
@@ -6297,7 +8147,7 @@
           <p:cNvPr id="12" name="">
             <a:extLst xmlns:a="http://schemas.openxmlformats.org/drawingml/2006/main">
               <a:ext uri="{FF2B5EF4-FFF2-40B4-BE49-F238E27FC236}">
-                <a16:creationId xmlns:a16="http://schemas.microsoft.com/office/drawing/2014/main" id="{FF2ED60A-BF98-4B0B-BC6A-82D871050810}"/>
+                <a16:creationId xmlns:a16="http://schemas.microsoft.com/office/drawing/2014/main" id="{C3815A27-4EDB-4FD8-A804-21AC7AF7AED7}"/>
               </a:ext>
             </a:extLst>
           </p:cNvPr>
@@ -6328,7 +8178,7 @@
           <p:cNvPr id="13" name="">
             <a:extLst xmlns:a="http://schemas.openxmlformats.org/drawingml/2006/main">
               <a:ext uri="{FF2B5EF4-FFF2-40B4-BE49-F238E27FC236}">
-                <a16:creationId xmlns:a16="http://schemas.microsoft.com/office/drawing/2014/main" id="{AFB42914-12A9-4CDE-A81B-137704EC1E85}"/>
+                <a16:creationId xmlns:a16="http://schemas.microsoft.com/office/drawing/2014/main" id="{7C3BA601-F59C-4F6D-97CB-0C77519F3624}"/>
               </a:ext>
             </a:extLst>
           </p:cNvPr>
@@ -6390,7 +8240,7 @@
           <p:cNvPr id="14" name="">
             <a:extLst xmlns:a="http://schemas.openxmlformats.org/drawingml/2006/main">
               <a:ext uri="{FF2B5EF4-FFF2-40B4-BE49-F238E27FC236}">
-                <a16:creationId xmlns:a16="http://schemas.microsoft.com/office/drawing/2014/main" id="{C3F79E06-6F71-4F9F-AD81-EBDF3FD65916}"/>
+                <a16:creationId xmlns:a16="http://schemas.microsoft.com/office/drawing/2014/main" id="{C0799D9B-213E-47EC-BED9-E0716D2E03B5}"/>
               </a:ext>
             </a:extLst>
           </p:cNvPr>
@@ -6452,7 +8302,7 @@
           <p:cNvPr id="15" name="">
             <a:extLst xmlns:a="http://schemas.openxmlformats.org/drawingml/2006/main">
               <a:ext uri="{FF2B5EF4-FFF2-40B4-BE49-F238E27FC236}">
-                <a16:creationId xmlns:a16="http://schemas.microsoft.com/office/drawing/2014/main" id="{3E59E24F-E6C2-4EDB-891F-2FE54198D226}"/>
+                <a16:creationId xmlns:a16="http://schemas.microsoft.com/office/drawing/2014/main" id="{08D61D79-DDF5-45B9-93CE-603BCCC25130}"/>
               </a:ext>
             </a:extLst>
           </p:cNvPr>
@@ -6514,7 +8364,7 @@
           <p:cNvPr id="16" name="">
             <a:extLst xmlns:a="http://schemas.openxmlformats.org/drawingml/2006/main">
               <a:ext uri="{FF2B5EF4-FFF2-40B4-BE49-F238E27FC236}">
-                <a16:creationId xmlns:a16="http://schemas.microsoft.com/office/drawing/2014/main" id="{2AD755B8-EC08-45FE-9FA7-CEE8AB34A104}"/>
+                <a16:creationId xmlns:a16="http://schemas.microsoft.com/office/drawing/2014/main" id="{99ACED15-C5CE-4335-9A26-94513CDF6EDC}"/>
               </a:ext>
             </a:extLst>
           </p:cNvPr>
@@ -6545,7 +8395,7 @@
           <p:cNvPr id="17" name="">
             <a:extLst xmlns:a="http://schemas.openxmlformats.org/drawingml/2006/main">
               <a:ext uri="{FF2B5EF4-FFF2-40B4-BE49-F238E27FC236}">
-                <a16:creationId xmlns:a16="http://schemas.microsoft.com/office/drawing/2014/main" id="{97E2BD61-4F24-443E-BE9F-7C3921A7FC75}"/>
+                <a16:creationId xmlns:a16="http://schemas.microsoft.com/office/drawing/2014/main" id="{B6CD886C-36CB-4DAB-A590-3928EEA3D616}"/>
               </a:ext>
             </a:extLst>
           </p:cNvPr>
@@ -6607,7 +8457,7 @@
           <p:cNvPr id="18" name="">
             <a:extLst xmlns:a="http://schemas.openxmlformats.org/drawingml/2006/main">
               <a:ext uri="{FF2B5EF4-FFF2-40B4-BE49-F238E27FC236}">
-                <a16:creationId xmlns:a16="http://schemas.microsoft.com/office/drawing/2014/main" id="{DB03D727-0C9E-42E5-B83D-B2079B2460CD}"/>
+                <a16:creationId xmlns:a16="http://schemas.microsoft.com/office/drawing/2014/main" id="{1F576700-71C2-4403-9F93-1157BE04C146}"/>
               </a:ext>
             </a:extLst>
           </p:cNvPr>
@@ -6669,7 +8519,7 @@
           <p:cNvPr id="19" name="">
             <a:extLst xmlns:a="http://schemas.openxmlformats.org/drawingml/2006/main">
               <a:ext uri="{FF2B5EF4-FFF2-40B4-BE49-F238E27FC236}">
-                <a16:creationId xmlns:a16="http://schemas.microsoft.com/office/drawing/2014/main" id="{E6C13FDF-A84D-4C4E-B452-001BA7EF6E9D}"/>
+                <a16:creationId xmlns:a16="http://schemas.microsoft.com/office/drawing/2014/main" id="{789D3C9C-DC85-4EBC-A093-973B097F1F4F}"/>
               </a:ext>
             </a:extLst>
           </p:cNvPr>
@@ -6731,7 +8581,7 @@
           <p:cNvPr id="20" name="">
             <a:extLst xmlns:a="http://schemas.openxmlformats.org/drawingml/2006/main">
               <a:ext uri="{FF2B5EF4-FFF2-40B4-BE49-F238E27FC236}">
-                <a16:creationId xmlns:a16="http://schemas.microsoft.com/office/drawing/2014/main" id="{5FE78A0C-8B82-4901-BCC7-9B278E105964}"/>
+                <a16:creationId xmlns:a16="http://schemas.microsoft.com/office/drawing/2014/main" id="{FB32AEEE-A168-4F81-9409-9F5D8DECFA21}"/>
               </a:ext>
             </a:extLst>
           </p:cNvPr>
@@ -6762,7 +8612,7 @@
           <p:cNvPr id="21" name="">
             <a:extLst xmlns:a="http://schemas.openxmlformats.org/drawingml/2006/main">
               <a:ext uri="{FF2B5EF4-FFF2-40B4-BE49-F238E27FC236}">
-                <a16:creationId xmlns:a16="http://schemas.microsoft.com/office/drawing/2014/main" id="{EF7B0766-0D1F-439D-9215-0AE18EAC3B2E}"/>
+                <a16:creationId xmlns:a16="http://schemas.microsoft.com/office/drawing/2014/main" id="{B09DB5E9-1BB7-46F0-931F-B13F5157E424}"/>
               </a:ext>
             </a:extLst>
           </p:cNvPr>
@@ -6824,7 +8674,7 @@
           <p:cNvPr id="22" name="">
             <a:extLst xmlns:a="http://schemas.openxmlformats.org/drawingml/2006/main">
               <a:ext uri="{FF2B5EF4-FFF2-40B4-BE49-F238E27FC236}">
-                <a16:creationId xmlns:a16="http://schemas.microsoft.com/office/drawing/2014/main" id="{C39A95AA-9F36-4682-A191-C8B4FE67B16B}"/>
+                <a16:creationId xmlns:a16="http://schemas.microsoft.com/office/drawing/2014/main" id="{ACA5C5AA-C571-4240-AC78-5C3F967A731F}"/>
               </a:ext>
             </a:extLst>
           </p:cNvPr>
@@ -6886,7 +8736,7 @@
           <p:cNvPr id="23" name="">
             <a:extLst xmlns:a="http://schemas.openxmlformats.org/drawingml/2006/main">
               <a:ext uri="{FF2B5EF4-FFF2-40B4-BE49-F238E27FC236}">
-                <a16:creationId xmlns:a16="http://schemas.microsoft.com/office/drawing/2014/main" id="{E8D25511-2857-4BA5-9DA7-4E06815A478C}"/>
+                <a16:creationId xmlns:a16="http://schemas.microsoft.com/office/drawing/2014/main" id="{79A8C983-39BA-4E10-932B-2811DC0EA691}"/>
               </a:ext>
             </a:extLst>
           </p:cNvPr>
@@ -6948,7 +8798,7 @@
           <p:cNvPr id="24" name="">
             <a:extLst xmlns:a="http://schemas.openxmlformats.org/drawingml/2006/main">
               <a:ext uri="{FF2B5EF4-FFF2-40B4-BE49-F238E27FC236}">
-                <a16:creationId xmlns:a16="http://schemas.microsoft.com/office/drawing/2014/main" id="{BCB0210A-00F0-405F-9F0F-33564E202C5D}"/>
+                <a16:creationId xmlns:a16="http://schemas.microsoft.com/office/drawing/2014/main" id="{FC47E4A5-333A-46CF-8C0B-73B26FDE2245}"/>
               </a:ext>
             </a:extLst>
           </p:cNvPr>
@@ -6979,7 +8829,7 @@
           <p:cNvPr id="25" name="">
             <a:extLst xmlns:a="http://schemas.openxmlformats.org/drawingml/2006/main">
               <a:ext uri="{FF2B5EF4-FFF2-40B4-BE49-F238E27FC236}">
-                <a16:creationId xmlns:a16="http://schemas.microsoft.com/office/drawing/2014/main" id="{C59CA263-DA78-486A-93CD-0FE5D6F17EFB}"/>
+                <a16:creationId xmlns:a16="http://schemas.microsoft.com/office/drawing/2014/main" id="{967BB7B1-FC49-4FC6-BB77-A09AC6290D2A}"/>
               </a:ext>
             </a:extLst>
           </p:cNvPr>
@@ -7010,7 +8860,7 @@
           <p:cNvPr id="26" name="">
             <a:extLst xmlns:a="http://schemas.openxmlformats.org/drawingml/2006/main">
               <a:ext uri="{FF2B5EF4-FFF2-40B4-BE49-F238E27FC236}">
-                <a16:creationId xmlns:a16="http://schemas.microsoft.com/office/drawing/2014/main" id="{638CE8AC-D3DB-427F-BEF1-CB6BFA5BD092}"/>
+                <a16:creationId xmlns:a16="http://schemas.microsoft.com/office/drawing/2014/main" id="{D6DAFD50-54C4-41D7-8C03-2612744F27A8}"/>
               </a:ext>
             </a:extLst>
           </p:cNvPr>
@@ -7072,7 +8922,7 @@
           <p:cNvPr id="27" name="">
             <a:extLst xmlns:a="http://schemas.openxmlformats.org/drawingml/2006/main">
               <a:ext uri="{FF2B5EF4-FFF2-40B4-BE49-F238E27FC236}">
-                <a16:creationId xmlns:a16="http://schemas.microsoft.com/office/drawing/2014/main" id="{67F3DB2B-73A9-4FCE-9DCA-A1A900ABDE21}"/>
+                <a16:creationId xmlns:a16="http://schemas.microsoft.com/office/drawing/2014/main" id="{B9F95BB3-CDEA-4CFE-92F4-18A950647673}"/>
               </a:ext>
             </a:extLst>
           </p:cNvPr>
@@ -7262,7 +9112,7 @@
           <p:cNvPr id="28" name="">
             <a:extLst xmlns:a="http://schemas.openxmlformats.org/drawingml/2006/main">
               <a:ext uri="{FF2B5EF4-FFF2-40B4-BE49-F238E27FC236}">
-                <a16:creationId xmlns:a16="http://schemas.microsoft.com/office/drawing/2014/main" id="{7496DBBF-58C0-4CB3-84A5-B5CEABB0F8EC}"/>
+                <a16:creationId xmlns:a16="http://schemas.microsoft.com/office/drawing/2014/main" id="{240DB015-8FEF-4EB8-907F-6C50E6A6C2A4}"/>
               </a:ext>
             </a:extLst>
           </p:cNvPr>
@@ -7324,7 +9174,7 @@
           <p:cNvPr id="29" name="">
             <a:extLst xmlns:a="http://schemas.openxmlformats.org/drawingml/2006/main">
               <a:ext uri="{FF2B5EF4-FFF2-40B4-BE49-F238E27FC236}">
-                <a16:creationId xmlns:a16="http://schemas.microsoft.com/office/drawing/2014/main" id="{E6E5281B-4091-4D0D-9B78-F8E527753D82}"/>
+                <a16:creationId xmlns:a16="http://schemas.microsoft.com/office/drawing/2014/main" id="{74AFA669-DF0F-497F-BC9E-AC82AD6FB5EF}"/>
               </a:ext>
             </a:extLst>
           </p:cNvPr>
@@ -7384,7 +9234,7 @@
     </p:spTree>
     <p:extLst>
       <p:ext uri="{BB962C8B-B14F-4D97-AF65-F5344CB8AC3E}">
-        <p14:creationId xmlns:p14="http://schemas.microsoft.com/office/powerpoint/2010/main" val="413264405"/>
+        <p14:creationId xmlns:p14="http://schemas.microsoft.com/office/powerpoint/2010/main" val="1734517137"/>
       </p:ext>
     </p:extLst>
   </p:cSld>
@@ -7415,7 +9265,7 @@
           <p:cNvPr id="17" name="">
             <a:extLst xmlns:a="http://schemas.openxmlformats.org/drawingml/2006/main">
               <a:ext uri="{FF2B5EF4-FFF2-40B4-BE49-F238E27FC236}">
-                <a16:creationId xmlns:a16="http://schemas.microsoft.com/office/drawing/2014/main" id="{542D7293-0EDD-4781-9C4E-E44F2168DD22}"/>
+                <a16:creationId xmlns:a16="http://schemas.microsoft.com/office/drawing/2014/main" id="{2564A00B-00CC-49B7-9DF3-058D3874A92A}"/>
               </a:ext>
             </a:extLst>
           </p:cNvPr>
@@ -7477,7 +9327,7 @@
           <p:cNvPr id="2" name="">
             <a:extLst xmlns:a="http://schemas.openxmlformats.org/drawingml/2006/main">
               <a:ext uri="{FF2B5EF4-FFF2-40B4-BE49-F238E27FC236}">
-                <a16:creationId xmlns:a16="http://schemas.microsoft.com/office/drawing/2014/main" id="{649D2D31-8271-4BC5-8917-7551F9DFF58E}"/>
+                <a16:creationId xmlns:a16="http://schemas.microsoft.com/office/drawing/2014/main" id="{1E50F877-F1E7-4B10-8376-C84B052E3CEE}"/>
               </a:ext>
             </a:extLst>
           </p:cNvPr>
@@ -7539,7 +9389,7 @@
           <p:cNvPr id="3" name="">
             <a:extLst xmlns:a="http://schemas.openxmlformats.org/drawingml/2006/main">
               <a:ext uri="{FF2B5EF4-FFF2-40B4-BE49-F238E27FC236}">
-                <a16:creationId xmlns:a16="http://schemas.microsoft.com/office/drawing/2014/main" id="{1ACDB5D1-8188-4127-A5BB-7D40F39A3D40}"/>
+                <a16:creationId xmlns:a16="http://schemas.microsoft.com/office/drawing/2014/main" id="{D05552D8-AE05-4B6F-A749-014DE90FE345}"/>
               </a:ext>
             </a:extLst>
           </p:cNvPr>
@@ -7601,7 +9451,7 @@
           <p:cNvPr id="4" name="">
             <a:extLst xmlns:a="http://schemas.openxmlformats.org/drawingml/2006/main">
               <a:ext uri="{FF2B5EF4-FFF2-40B4-BE49-F238E27FC236}">
-                <a16:creationId xmlns:a16="http://schemas.microsoft.com/office/drawing/2014/main" id="{072D282E-9AF9-47D6-B5B0-8ECB06B6CB4B}"/>
+                <a16:creationId xmlns:a16="http://schemas.microsoft.com/office/drawing/2014/main" id="{EEF8F342-0925-45C3-B1B9-7D16E9F90441}"/>
               </a:ext>
             </a:extLst>
           </p:cNvPr>
@@ -7632,7 +9482,7 @@
           <p:cNvPr id="5" name="">
             <a:extLst xmlns:a="http://schemas.openxmlformats.org/drawingml/2006/main">
               <a:ext uri="{FF2B5EF4-FFF2-40B4-BE49-F238E27FC236}">
-                <a16:creationId xmlns:a16="http://schemas.microsoft.com/office/drawing/2014/main" id="{CACD00CF-D8B6-4C6A-9C8C-643C0EA8EFEF}"/>
+                <a16:creationId xmlns:a16="http://schemas.microsoft.com/office/drawing/2014/main" id="{56D79CB0-157B-4817-BF17-36BF868FD5D2}"/>
               </a:ext>
             </a:extLst>
           </p:cNvPr>
@@ -7694,7 +9544,7 @@
           <p:cNvPr id="6" name="">
             <a:extLst xmlns:a="http://schemas.openxmlformats.org/drawingml/2006/main">
               <a:ext uri="{FF2B5EF4-FFF2-40B4-BE49-F238E27FC236}">
-                <a16:creationId xmlns:a16="http://schemas.microsoft.com/office/drawing/2014/main" id="{38A4C8DE-2F2C-48C0-A46C-963015422A55}"/>
+                <a16:creationId xmlns:a16="http://schemas.microsoft.com/office/drawing/2014/main" id="{16376083-80E6-4A6B-8DF6-7A1EE2A62C8C}"/>
               </a:ext>
             </a:extLst>
           </p:cNvPr>
@@ -7810,7 +9660,7 @@
           <p:cNvPr id="7" name="">
             <a:extLst xmlns:a="http://schemas.openxmlformats.org/drawingml/2006/main">
               <a:ext uri="{FF2B5EF4-FFF2-40B4-BE49-F238E27FC236}">
-                <a16:creationId xmlns:a16="http://schemas.microsoft.com/office/drawing/2014/main" id="{3699773B-7861-4E80-B0AE-26965E9E913B}"/>
+                <a16:creationId xmlns:a16="http://schemas.microsoft.com/office/drawing/2014/main" id="{16A6E80C-AF1A-483C-99EF-4BE8A90D098D}"/>
               </a:ext>
             </a:extLst>
           </p:cNvPr>
@@ -7872,7 +9722,7 @@
           <p:cNvPr id="8" name="">
             <a:extLst xmlns:a="http://schemas.openxmlformats.org/drawingml/2006/main">
               <a:ext uri="{FF2B5EF4-FFF2-40B4-BE49-F238E27FC236}">
-                <a16:creationId xmlns:a16="http://schemas.microsoft.com/office/drawing/2014/main" id="{A11036F3-071A-442A-B662-234EC1BD9177}"/>
+                <a16:creationId xmlns:a16="http://schemas.microsoft.com/office/drawing/2014/main" id="{5002E55D-ACC9-4BBD-9078-69561F523D36}"/>
               </a:ext>
             </a:extLst>
           </p:cNvPr>
@@ -7934,7 +9784,7 @@
           <p:cNvPr id="9" name="">
             <a:extLst xmlns:a="http://schemas.openxmlformats.org/drawingml/2006/main">
               <a:ext uri="{FF2B5EF4-FFF2-40B4-BE49-F238E27FC236}">
-                <a16:creationId xmlns:a16="http://schemas.microsoft.com/office/drawing/2014/main" id="{23E87853-5611-424B-8369-980F4489D092}"/>
+                <a16:creationId xmlns:a16="http://schemas.microsoft.com/office/drawing/2014/main" id="{D2A521A7-0C9C-4ABE-9B21-FCCE5F293A6B}"/>
               </a:ext>
             </a:extLst>
           </p:cNvPr>
@@ -8050,7 +9900,7 @@
           <p:cNvPr id="10" name="">
             <a:extLst xmlns:a="http://schemas.openxmlformats.org/drawingml/2006/main">
               <a:ext uri="{FF2B5EF4-FFF2-40B4-BE49-F238E27FC236}">
-                <a16:creationId xmlns:a16="http://schemas.microsoft.com/office/drawing/2014/main" id="{F4D9A030-EE21-471B-9C95-8FFA052E22C9}"/>
+                <a16:creationId xmlns:a16="http://schemas.microsoft.com/office/drawing/2014/main" id="{3CDC62B1-212D-4CB2-B247-7A4E845DE1A2}"/>
               </a:ext>
             </a:extLst>
           </p:cNvPr>
@@ -8112,7 +9962,7 @@
           <p:cNvPr id="11" name="">
             <a:extLst xmlns:a="http://schemas.openxmlformats.org/drawingml/2006/main">
               <a:ext uri="{FF2B5EF4-FFF2-40B4-BE49-F238E27FC236}">
-                <a16:creationId xmlns:a16="http://schemas.microsoft.com/office/drawing/2014/main" id="{0239E9F9-6396-4B14-B8D0-69F16CD45771}"/>
+                <a16:creationId xmlns:a16="http://schemas.microsoft.com/office/drawing/2014/main" id="{B3FEA485-D760-4475-85F5-62F93CDC3881}"/>
               </a:ext>
             </a:extLst>
           </p:cNvPr>
@@ -8174,7 +10024,7 @@
           <p:cNvPr id="12" name="">
             <a:extLst xmlns:a="http://schemas.openxmlformats.org/drawingml/2006/main">
               <a:ext uri="{FF2B5EF4-FFF2-40B4-BE49-F238E27FC236}">
-                <a16:creationId xmlns:a16="http://schemas.microsoft.com/office/drawing/2014/main" id="{9A154BAD-F240-49EB-BD46-549DA2734259}"/>
+                <a16:creationId xmlns:a16="http://schemas.microsoft.com/office/drawing/2014/main" id="{170C423D-BEDD-4A15-9289-D70680B22441}"/>
               </a:ext>
             </a:extLst>
           </p:cNvPr>
@@ -8290,7 +10140,7 @@
           <p:cNvPr id="13" name="">
             <a:extLst xmlns:a="http://schemas.openxmlformats.org/drawingml/2006/main">
               <a:ext uri="{FF2B5EF4-FFF2-40B4-BE49-F238E27FC236}">
-                <a16:creationId xmlns:a16="http://schemas.microsoft.com/office/drawing/2014/main" id="{76DBEED6-6622-4BD4-8F1E-5C2C2E88A189}"/>
+                <a16:creationId xmlns:a16="http://schemas.microsoft.com/office/drawing/2014/main" id="{C4AE6A86-4AA3-43E6-90A8-7674DDC4D891}"/>
               </a:ext>
             </a:extLst>
           </p:cNvPr>
@@ -8321,7 +10171,7 @@
           <p:cNvPr id="14" name="">
             <a:extLst xmlns:a="http://schemas.openxmlformats.org/drawingml/2006/main">
               <a:ext uri="{FF2B5EF4-FFF2-40B4-BE49-F238E27FC236}">
-                <a16:creationId xmlns:a16="http://schemas.microsoft.com/office/drawing/2014/main" id="{D522413A-DF2B-4483-A1A6-7F86521DBBB7}"/>
+                <a16:creationId xmlns:a16="http://schemas.microsoft.com/office/drawing/2014/main" id="{0CAA5470-A453-4E1E-BC15-C8BF6FCB9352}"/>
               </a:ext>
             </a:extLst>
           </p:cNvPr>
@@ -8383,7 +10233,7 @@
           <p:cNvPr id="15" name="">
             <a:extLst xmlns:a="http://schemas.openxmlformats.org/drawingml/2006/main">
               <a:ext uri="{FF2B5EF4-FFF2-40B4-BE49-F238E27FC236}">
-                <a16:creationId xmlns:a16="http://schemas.microsoft.com/office/drawing/2014/main" id="{B6995677-A3DA-48E6-A137-F341FE586B25}"/>
+                <a16:creationId xmlns:a16="http://schemas.microsoft.com/office/drawing/2014/main" id="{239BC78E-0E36-46EF-9DF4-D8BF367C03D9}"/>
               </a:ext>
             </a:extLst>
           </p:cNvPr>
@@ -8445,7 +10295,7 @@
           <p:cNvPr id="16" name="">
             <a:extLst xmlns:a="http://schemas.openxmlformats.org/drawingml/2006/main">
               <a:ext uri="{FF2B5EF4-FFF2-40B4-BE49-F238E27FC236}">
-                <a16:creationId xmlns:a16="http://schemas.microsoft.com/office/drawing/2014/main" id="{956967F2-E622-47DD-A5D0-9204E733C2FD}"/>
+                <a16:creationId xmlns:a16="http://schemas.microsoft.com/office/drawing/2014/main" id="{A133A36A-E45E-484C-BFDB-C8BFD9E39E4D}"/>
               </a:ext>
             </a:extLst>
           </p:cNvPr>
@@ -8505,7 +10355,7 @@
     </p:spTree>
     <p:extLst>
       <p:ext uri="{BB962C8B-B14F-4D97-AF65-F5344CB8AC3E}">
-        <p14:creationId xmlns:p14="http://schemas.microsoft.com/office/powerpoint/2010/main" val="301348506"/>
+        <p14:creationId xmlns:p14="http://schemas.microsoft.com/office/powerpoint/2010/main" val="38064948"/>
       </p:ext>
     </p:extLst>
   </p:cSld>
@@ -8536,7 +10386,7 @@
           <p:cNvPr id="7" name="">
             <a:extLst xmlns:a="http://schemas.openxmlformats.org/drawingml/2006/main">
               <a:ext uri="{FF2B5EF4-FFF2-40B4-BE49-F238E27FC236}">
-                <a16:creationId xmlns:a16="http://schemas.microsoft.com/office/drawing/2014/main" id="{BF4C6AC3-43ED-477D-A709-25941DE81E61}"/>
+                <a16:creationId xmlns:a16="http://schemas.microsoft.com/office/drawing/2014/main" id="{34F4C8F3-C271-4E1B-82E7-A6717146133B}"/>
               </a:ext>
             </a:extLst>
           </p:cNvPr>
@@ -8598,7 +10448,7 @@
           <p:cNvPr id="2" name="">
             <a:extLst xmlns:a="http://schemas.openxmlformats.org/drawingml/2006/main">
               <a:ext uri="{FF2B5EF4-FFF2-40B4-BE49-F238E27FC236}">
-                <a16:creationId xmlns:a16="http://schemas.microsoft.com/office/drawing/2014/main" id="{53E50247-D01E-4884-9DC8-27FC53114C33}"/>
+                <a16:creationId xmlns:a16="http://schemas.microsoft.com/office/drawing/2014/main" id="{4A9F4F5D-218F-438E-B3D4-7C02FCFCC093}"/>
               </a:ext>
             </a:extLst>
           </p:cNvPr>
@@ -8660,7 +10510,7 @@
           <p:cNvPr id="3" name="">
             <a:extLst xmlns:a="http://schemas.openxmlformats.org/drawingml/2006/main">
               <a:ext uri="{FF2B5EF4-FFF2-40B4-BE49-F238E27FC236}">
-                <a16:creationId xmlns:a16="http://schemas.microsoft.com/office/drawing/2014/main" id="{0F729570-8593-47B8-A04E-D0E1DF5E8795}"/>
+                <a16:creationId xmlns:a16="http://schemas.microsoft.com/office/drawing/2014/main" id="{99507F3F-0F92-49F5-AF14-7488553B2A8D}"/>
               </a:ext>
             </a:extLst>
           </p:cNvPr>
@@ -8722,7 +10572,7 @@
           <p:cNvPr id="4" name="">
             <a:extLst xmlns:a="http://schemas.openxmlformats.org/drawingml/2006/main">
               <a:ext uri="{FF2B5EF4-FFF2-40B4-BE49-F238E27FC236}">
-                <a16:creationId xmlns:a16="http://schemas.microsoft.com/office/drawing/2014/main" id="{108D886F-DFF1-48F9-B1FA-5F479BD6597E}"/>
+                <a16:creationId xmlns:a16="http://schemas.microsoft.com/office/drawing/2014/main" id="{B3105FA9-3A27-483E-9085-012129368114}"/>
               </a:ext>
             </a:extLst>
           </p:cNvPr>
@@ -8757,7 +10607,7 @@
           <p:nvPr/>
         </p:nvPicPr>
         <p:blipFill>
-          <a:blip xmlns:r="http://schemas.openxmlformats.org/officeDocument/2006/relationships" xmlns:a="http://schemas.openxmlformats.org/drawingml/2006/main" r:embed="Rc1b2a9433c3645f4"/>
+          <a:blip xmlns:r="http://schemas.openxmlformats.org/officeDocument/2006/relationships" xmlns:a="http://schemas.openxmlformats.org/drawingml/2006/main" r:embed="Ra560f0c2cc23404a"/>
           <a:stretch xmlns:a="http://schemas.openxmlformats.org/drawingml/2006/main"/>
         </p:blipFill>
         <p:spPr>
@@ -8775,7 +10625,7 @@
           <p:cNvPr id="6" name="">
             <a:extLst xmlns:a="http://schemas.openxmlformats.org/drawingml/2006/main">
               <a:ext uri="{FF2B5EF4-FFF2-40B4-BE49-F238E27FC236}">
-                <a16:creationId xmlns:a16="http://schemas.microsoft.com/office/drawing/2014/main" id="{84467733-4603-4BA1-95EC-DA70F2CF25AE}"/>
+                <a16:creationId xmlns:a16="http://schemas.microsoft.com/office/drawing/2014/main" id="{C80269DE-78D5-48A1-A464-88B4B79F709B}"/>
               </a:ext>
             </a:extLst>
           </p:cNvPr>
@@ -8835,7 +10685,7 @@
     </p:spTree>
     <p:extLst>
       <p:ext uri="{BB962C8B-B14F-4D97-AF65-F5344CB8AC3E}">
-        <p14:creationId xmlns:p14="http://schemas.microsoft.com/office/powerpoint/2010/main" val="1984166397"/>
+        <p14:creationId xmlns:p14="http://schemas.microsoft.com/office/powerpoint/2010/main" val="197269725"/>
       </p:ext>
     </p:extLst>
   </p:cSld>
@@ -8866,7 +10716,7 @@
           <p:cNvPr id="14" name="">
             <a:extLst xmlns:a="http://schemas.openxmlformats.org/drawingml/2006/main">
               <a:ext uri="{FF2B5EF4-FFF2-40B4-BE49-F238E27FC236}">
-                <a16:creationId xmlns:a16="http://schemas.microsoft.com/office/drawing/2014/main" id="{4DE53833-EB95-4F65-B998-F172FB66B3D1}"/>
+                <a16:creationId xmlns:a16="http://schemas.microsoft.com/office/drawing/2014/main" id="{37004482-D543-4CDC-A49E-651CD50BD63C}"/>
               </a:ext>
             </a:extLst>
           </p:cNvPr>
@@ -8928,7 +10778,7 @@
           <p:cNvPr id="2" name="">
             <a:extLst xmlns:a="http://schemas.openxmlformats.org/drawingml/2006/main">
               <a:ext uri="{FF2B5EF4-FFF2-40B4-BE49-F238E27FC236}">
-                <a16:creationId xmlns:a16="http://schemas.microsoft.com/office/drawing/2014/main" id="{9B4CBBF1-508B-4C32-BAB6-1F4F4EC3DF34}"/>
+                <a16:creationId xmlns:a16="http://schemas.microsoft.com/office/drawing/2014/main" id="{EA2146E6-3F32-4888-9148-4FCB1B82A16C}"/>
               </a:ext>
             </a:extLst>
           </p:cNvPr>
@@ -8990,7 +10840,7 @@
           <p:cNvPr id="3" name="">
             <a:extLst xmlns:a="http://schemas.openxmlformats.org/drawingml/2006/main">
               <a:ext uri="{FF2B5EF4-FFF2-40B4-BE49-F238E27FC236}">
-                <a16:creationId xmlns:a16="http://schemas.microsoft.com/office/drawing/2014/main" id="{774560E4-780F-422B-945D-EF387DF5738F}"/>
+                <a16:creationId xmlns:a16="http://schemas.microsoft.com/office/drawing/2014/main" id="{5BD7E836-DD3A-426F-9B85-BC7B6F9C4845}"/>
               </a:ext>
             </a:extLst>
           </p:cNvPr>
@@ -9052,7 +10902,7 @@
           <p:cNvPr id="4" name="">
             <a:extLst xmlns:a="http://schemas.openxmlformats.org/drawingml/2006/main">
               <a:ext uri="{FF2B5EF4-FFF2-40B4-BE49-F238E27FC236}">
-                <a16:creationId xmlns:a16="http://schemas.microsoft.com/office/drawing/2014/main" id="{7A7EF525-1FEE-4C33-BD90-00C8898EA158}"/>
+                <a16:creationId xmlns:a16="http://schemas.microsoft.com/office/drawing/2014/main" id="{5858785B-58BF-4FB5-A699-7BD7F0E6F650}"/>
               </a:ext>
             </a:extLst>
           </p:cNvPr>
@@ -9083,7 +10933,7 @@
           <p:cNvPr id="5" name="">
             <a:extLst xmlns:a="http://schemas.openxmlformats.org/drawingml/2006/main">
               <a:ext uri="{FF2B5EF4-FFF2-40B4-BE49-F238E27FC236}">
-                <a16:creationId xmlns:a16="http://schemas.microsoft.com/office/drawing/2014/main" id="{CFF788D6-A8D5-4342-8601-0EAE9B9D6C0B}"/>
+                <a16:creationId xmlns:a16="http://schemas.microsoft.com/office/drawing/2014/main" id="{11DFE2A6-931C-462D-9DDF-10C2FFB42122}"/>
               </a:ext>
             </a:extLst>
           </p:cNvPr>
@@ -9114,7 +10964,7 @@
           <p:cNvPr id="6" name="">
             <a:extLst xmlns:a="http://schemas.openxmlformats.org/drawingml/2006/main">
               <a:ext uri="{FF2B5EF4-FFF2-40B4-BE49-F238E27FC236}">
-                <a16:creationId xmlns:a16="http://schemas.microsoft.com/office/drawing/2014/main" id="{690BA962-7E9A-4345-BE14-8C6E6A88583F}"/>
+                <a16:creationId xmlns:a16="http://schemas.microsoft.com/office/drawing/2014/main" id="{6B2DE11C-B9F1-48FA-BD86-23BF50C6EFA8}"/>
               </a:ext>
             </a:extLst>
           </p:cNvPr>
@@ -9176,7 +11026,7 @@
           <p:cNvPr id="7" name="">
             <a:extLst xmlns:a="http://schemas.openxmlformats.org/drawingml/2006/main">
               <a:ext uri="{FF2B5EF4-FFF2-40B4-BE49-F238E27FC236}">
-                <a16:creationId xmlns:a16="http://schemas.microsoft.com/office/drawing/2014/main" id="{71658DAC-4775-479B-9F0B-3BAF5A348618}"/>
+                <a16:creationId xmlns:a16="http://schemas.microsoft.com/office/drawing/2014/main" id="{97522F76-1699-41DE-B2A0-BBDE030778AE}"/>
               </a:ext>
             </a:extLst>
           </p:cNvPr>
@@ -9238,7 +11088,7 @@
           <p:cNvPr id="8" name="">
             <a:extLst xmlns:a="http://schemas.openxmlformats.org/drawingml/2006/main">
               <a:ext uri="{FF2B5EF4-FFF2-40B4-BE49-F238E27FC236}">
-                <a16:creationId xmlns:a16="http://schemas.microsoft.com/office/drawing/2014/main" id="{7A56A516-5298-4D17-AF42-CD374752F7F4}"/>
+                <a16:creationId xmlns:a16="http://schemas.microsoft.com/office/drawing/2014/main" id="{F65A1B7C-3963-4394-8A59-289DA304A125}"/>
               </a:ext>
             </a:extLst>
           </p:cNvPr>
@@ -9354,7 +11204,7 @@
           <p:cNvPr id="9" name="">
             <a:extLst xmlns:a="http://schemas.openxmlformats.org/drawingml/2006/main">
               <a:ext uri="{FF2B5EF4-FFF2-40B4-BE49-F238E27FC236}">
-                <a16:creationId xmlns:a16="http://schemas.microsoft.com/office/drawing/2014/main" id="{0FC78E4F-59CA-41BB-9596-81B56105DB04}"/>
+                <a16:creationId xmlns:a16="http://schemas.microsoft.com/office/drawing/2014/main" id="{B024026A-8C79-416E-8695-81409F413A2E}"/>
               </a:ext>
             </a:extLst>
           </p:cNvPr>
@@ -9416,7 +11266,7 @@
           <p:cNvPr id="10" name="">
             <a:extLst xmlns:a="http://schemas.openxmlformats.org/drawingml/2006/main">
               <a:ext uri="{FF2B5EF4-FFF2-40B4-BE49-F238E27FC236}">
-                <a16:creationId xmlns:a16="http://schemas.microsoft.com/office/drawing/2014/main" id="{EDD9175C-9696-4F6C-ADDF-E77DF1EBF755}"/>
+                <a16:creationId xmlns:a16="http://schemas.microsoft.com/office/drawing/2014/main" id="{C97F3385-AEA5-486E-95DB-372013A5AB30}"/>
               </a:ext>
             </a:extLst>
           </p:cNvPr>
@@ -9559,7 +11409,7 @@
           <p:cNvPr id="11" name="">
             <a:extLst xmlns:a="http://schemas.openxmlformats.org/drawingml/2006/main">
               <a:ext uri="{FF2B5EF4-FFF2-40B4-BE49-F238E27FC236}">
-                <a16:creationId xmlns:a16="http://schemas.microsoft.com/office/drawing/2014/main" id="{C1E034C2-53A2-46AF-B8BF-ECFD20DC0F8F}"/>
+                <a16:creationId xmlns:a16="http://schemas.microsoft.com/office/drawing/2014/main" id="{9222E1D5-991A-4B32-9F85-017835F86A6F}"/>
               </a:ext>
             </a:extLst>
           </p:cNvPr>
@@ -9590,7 +11440,7 @@
           <p:cNvPr id="12" name="">
             <a:extLst xmlns:a="http://schemas.openxmlformats.org/drawingml/2006/main">
               <a:ext uri="{FF2B5EF4-FFF2-40B4-BE49-F238E27FC236}">
-                <a16:creationId xmlns:a16="http://schemas.microsoft.com/office/drawing/2014/main" id="{4AECBDE2-F1FD-492E-ABFF-688F504E2E1B}"/>
+                <a16:creationId xmlns:a16="http://schemas.microsoft.com/office/drawing/2014/main" id="{EF7D2222-5A15-4AEE-8B62-7CAF1F8ABA75}"/>
               </a:ext>
             </a:extLst>
           </p:cNvPr>
@@ -9652,7 +11502,7 @@
           <p:cNvPr id="13" name="">
             <a:extLst xmlns:a="http://schemas.openxmlformats.org/drawingml/2006/main">
               <a:ext uri="{FF2B5EF4-FFF2-40B4-BE49-F238E27FC236}">
-                <a16:creationId xmlns:a16="http://schemas.microsoft.com/office/drawing/2014/main" id="{94DD8CE1-A416-428F-A3B8-06BB0A94C735}"/>
+                <a16:creationId xmlns:a16="http://schemas.microsoft.com/office/drawing/2014/main" id="{EF96F631-9E67-4574-B5F0-D7A46654C044}"/>
               </a:ext>
             </a:extLst>
           </p:cNvPr>
@@ -9712,7 +11562,7 @@
     </p:spTree>
     <p:extLst>
       <p:ext uri="{BB962C8B-B14F-4D97-AF65-F5344CB8AC3E}">
-        <p14:creationId xmlns:p14="http://schemas.microsoft.com/office/powerpoint/2010/main" val="823535788"/>
+        <p14:creationId xmlns:p14="http://schemas.microsoft.com/office/powerpoint/2010/main" val="555419472"/>
       </p:ext>
     </p:extLst>
   </p:cSld>
@@ -9743,7 +11593,7 @@
           <p:cNvPr id="15" name="">
             <a:extLst xmlns:a="http://schemas.openxmlformats.org/drawingml/2006/main">
               <a:ext uri="{FF2B5EF4-FFF2-40B4-BE49-F238E27FC236}">
-                <a16:creationId xmlns:a16="http://schemas.microsoft.com/office/drawing/2014/main" id="{34A2A04D-5F19-4642-80B0-27113619E679}"/>
+                <a16:creationId xmlns:a16="http://schemas.microsoft.com/office/drawing/2014/main" id="{D398A341-CF34-4D31-9A5A-ECEA0210B4C3}"/>
               </a:ext>
             </a:extLst>
           </p:cNvPr>
@@ -9805,7 +11655,7 @@
           <p:cNvPr id="2" name="">
             <a:extLst xmlns:a="http://schemas.openxmlformats.org/drawingml/2006/main">
               <a:ext uri="{FF2B5EF4-FFF2-40B4-BE49-F238E27FC236}">
-                <a16:creationId xmlns:a16="http://schemas.microsoft.com/office/drawing/2014/main" id="{C7504929-D48B-498B-920B-939A4E69243E}"/>
+                <a16:creationId xmlns:a16="http://schemas.microsoft.com/office/drawing/2014/main" id="{10FBC769-084D-4E71-AE7B-9BD7A795CF67}"/>
               </a:ext>
             </a:extLst>
           </p:cNvPr>
@@ -9867,7 +11717,7 @@
           <p:cNvPr id="3" name="">
             <a:extLst xmlns:a="http://schemas.openxmlformats.org/drawingml/2006/main">
               <a:ext uri="{FF2B5EF4-FFF2-40B4-BE49-F238E27FC236}">
-                <a16:creationId xmlns:a16="http://schemas.microsoft.com/office/drawing/2014/main" id="{1FABBD1A-9B8A-4EE3-A643-4F272F493449}"/>
+                <a16:creationId xmlns:a16="http://schemas.microsoft.com/office/drawing/2014/main" id="{69EEA982-7AD9-424E-8185-BDD18BE7EB39}"/>
               </a:ext>
             </a:extLst>
           </p:cNvPr>
@@ -9929,7 +11779,7 @@
           <p:cNvPr id="4" name="">
             <a:extLst xmlns:a="http://schemas.openxmlformats.org/drawingml/2006/main">
               <a:ext uri="{FF2B5EF4-FFF2-40B4-BE49-F238E27FC236}">
-                <a16:creationId xmlns:a16="http://schemas.microsoft.com/office/drawing/2014/main" id="{8020DB83-4FAD-46AD-932F-A7499831E23E}"/>
+                <a16:creationId xmlns:a16="http://schemas.microsoft.com/office/drawing/2014/main" id="{43E7124A-FC9B-4A95-B7DA-ED857F21C961}"/>
               </a:ext>
             </a:extLst>
           </p:cNvPr>
@@ -9960,7 +11810,7 @@
           <p:cNvPr id="5" name="">
             <a:extLst xmlns:a="http://schemas.openxmlformats.org/drawingml/2006/main">
               <a:ext uri="{FF2B5EF4-FFF2-40B4-BE49-F238E27FC236}">
-                <a16:creationId xmlns:a16="http://schemas.microsoft.com/office/drawing/2014/main" id="{EE101254-5314-4131-A4DB-5BEF3E1C95EA}"/>
+                <a16:creationId xmlns:a16="http://schemas.microsoft.com/office/drawing/2014/main" id="{6B958968-070D-4E64-9E72-720C19261278}"/>
               </a:ext>
             </a:extLst>
           </p:cNvPr>
@@ -9991,7 +11841,7 @@
           <p:cNvPr id="6" name="">
             <a:extLst xmlns:a="http://schemas.openxmlformats.org/drawingml/2006/main">
               <a:ext uri="{FF2B5EF4-FFF2-40B4-BE49-F238E27FC236}">
-                <a16:creationId xmlns:a16="http://schemas.microsoft.com/office/drawing/2014/main" id="{2BEA2229-2530-4F85-A38D-0F16ED8C3DB7}"/>
+                <a16:creationId xmlns:a16="http://schemas.microsoft.com/office/drawing/2014/main" id="{B7E3324F-704A-45E4-8B26-12FD121704B2}"/>
               </a:ext>
             </a:extLst>
           </p:cNvPr>
@@ -10053,7 +11903,7 @@
           <p:cNvPr id="7" name="">
             <a:extLst xmlns:a="http://schemas.openxmlformats.org/drawingml/2006/main">
               <a:ext uri="{FF2B5EF4-FFF2-40B4-BE49-F238E27FC236}">
-                <a16:creationId xmlns:a16="http://schemas.microsoft.com/office/drawing/2014/main" id="{AE5F159B-C792-4A40-84FB-146FEC2159D2}"/>
+                <a16:creationId xmlns:a16="http://schemas.microsoft.com/office/drawing/2014/main" id="{B45DD377-F0C2-43C5-977A-86BD4D9082C7}"/>
               </a:ext>
             </a:extLst>
           </p:cNvPr>
@@ -10115,7 +11965,7 @@
           <p:cNvPr id="8" name="">
             <a:extLst xmlns:a="http://schemas.openxmlformats.org/drawingml/2006/main">
               <a:ext uri="{FF2B5EF4-FFF2-40B4-BE49-F238E27FC236}">
-                <a16:creationId xmlns:a16="http://schemas.microsoft.com/office/drawing/2014/main" id="{25BF482A-6EC3-4190-9559-48CB3E6F59BA}"/>
+                <a16:creationId xmlns:a16="http://schemas.microsoft.com/office/drawing/2014/main" id="{7C6DF96E-96E5-422A-A225-95C0B8455D6C}"/>
               </a:ext>
             </a:extLst>
           </p:cNvPr>
@@ -10177,7 +12027,7 @@
           <p:cNvPr id="9" name="">
             <a:extLst xmlns:a="http://schemas.openxmlformats.org/drawingml/2006/main">
               <a:ext uri="{FF2B5EF4-FFF2-40B4-BE49-F238E27FC236}">
-                <a16:creationId xmlns:a16="http://schemas.microsoft.com/office/drawing/2014/main" id="{D6CE7CB0-0096-4DD9-B02E-D1BDAAEBFA97}"/>
+                <a16:creationId xmlns:a16="http://schemas.microsoft.com/office/drawing/2014/main" id="{E381ECE9-4A45-4BEB-A4F6-41D8D6976CC5}"/>
               </a:ext>
             </a:extLst>
           </p:cNvPr>
@@ -10239,7 +12089,7 @@
           <p:cNvPr id="10" name="">
             <a:extLst xmlns:a="http://schemas.openxmlformats.org/drawingml/2006/main">
               <a:ext uri="{FF2B5EF4-FFF2-40B4-BE49-F238E27FC236}">
-                <a16:creationId xmlns:a16="http://schemas.microsoft.com/office/drawing/2014/main" id="{C6DDE038-5A64-4A51-888B-8E04D15D5304}"/>
+                <a16:creationId xmlns:a16="http://schemas.microsoft.com/office/drawing/2014/main" id="{E7A02E0B-8B23-4C8B-959C-AF5C34AB70A6}"/>
               </a:ext>
             </a:extLst>
           </p:cNvPr>
@@ -10301,7 +12151,7 @@
           <p:cNvPr id="11" name="">
             <a:extLst xmlns:a="http://schemas.openxmlformats.org/drawingml/2006/main">
               <a:ext uri="{FF2B5EF4-FFF2-40B4-BE49-F238E27FC236}">
-                <a16:creationId xmlns:a16="http://schemas.microsoft.com/office/drawing/2014/main" id="{8A4994F0-4AB7-4483-85C6-7CBFB66DC520}"/>
+                <a16:creationId xmlns:a16="http://schemas.microsoft.com/office/drawing/2014/main" id="{7A636C4A-CB6D-47B5-AFFA-E303268852AD}"/>
               </a:ext>
             </a:extLst>
           </p:cNvPr>
@@ -10471,7 +12321,7 @@
           <p:cNvPr id="12" name="">
             <a:extLst xmlns:a="http://schemas.openxmlformats.org/drawingml/2006/main">
               <a:ext uri="{FF2B5EF4-FFF2-40B4-BE49-F238E27FC236}">
-                <a16:creationId xmlns:a16="http://schemas.microsoft.com/office/drawing/2014/main" id="{58D3BDAD-33BF-45B2-8200-4CE3E685643A}"/>
+                <a16:creationId xmlns:a16="http://schemas.microsoft.com/office/drawing/2014/main" id="{515E6920-AFBE-43B7-9B71-A028C83BCA75}"/>
               </a:ext>
             </a:extLst>
           </p:cNvPr>
@@ -10502,7 +12352,7 @@
           <p:cNvPr id="13" name="">
             <a:extLst xmlns:a="http://schemas.openxmlformats.org/drawingml/2006/main">
               <a:ext uri="{FF2B5EF4-FFF2-40B4-BE49-F238E27FC236}">
-                <a16:creationId xmlns:a16="http://schemas.microsoft.com/office/drawing/2014/main" id="{D7572578-AB1D-4209-B60F-26EA743B1C04}"/>
+                <a16:creationId xmlns:a16="http://schemas.microsoft.com/office/drawing/2014/main" id="{327ABEB6-0299-4489-9BBE-82075AB3CF14}"/>
               </a:ext>
             </a:extLst>
           </p:cNvPr>
@@ -10564,7 +12414,7 @@
           <p:cNvPr id="14" name="">
             <a:extLst xmlns:a="http://schemas.openxmlformats.org/drawingml/2006/main">
               <a:ext uri="{FF2B5EF4-FFF2-40B4-BE49-F238E27FC236}">
-                <a16:creationId xmlns:a16="http://schemas.microsoft.com/office/drawing/2014/main" id="{79D84755-5DCA-4B04-838C-DC6943FA5184}"/>
+                <a16:creationId xmlns:a16="http://schemas.microsoft.com/office/drawing/2014/main" id="{57F326FE-433A-49F0-AEE5-40ACF7E6F75D}"/>
               </a:ext>
             </a:extLst>
           </p:cNvPr>
@@ -10624,7 +12474,7 @@
     </p:spTree>
     <p:extLst>
       <p:ext uri="{BB962C8B-B14F-4D97-AF65-F5344CB8AC3E}">
-        <p14:creationId xmlns:p14="http://schemas.microsoft.com/office/powerpoint/2010/main" val="1692032838"/>
+        <p14:creationId xmlns:p14="http://schemas.microsoft.com/office/powerpoint/2010/main" val="1696309406"/>
       </p:ext>
     </p:extLst>
   </p:cSld>
@@ -10655,7 +12505,7 @@
           <p:cNvPr id="19" name="">
             <a:extLst xmlns:a="http://schemas.openxmlformats.org/drawingml/2006/main">
               <a:ext uri="{FF2B5EF4-FFF2-40B4-BE49-F238E27FC236}">
-                <a16:creationId xmlns:a16="http://schemas.microsoft.com/office/drawing/2014/main" id="{26495252-FA70-4F7C-92E2-68C6F45A2B03}"/>
+                <a16:creationId xmlns:a16="http://schemas.microsoft.com/office/drawing/2014/main" id="{1A0378BE-6C08-4CE8-BB01-3A39B89E9D79}"/>
               </a:ext>
             </a:extLst>
           </p:cNvPr>
@@ -10717,7 +12567,7 @@
           <p:cNvPr id="2" name="">
             <a:extLst xmlns:a="http://schemas.openxmlformats.org/drawingml/2006/main">
               <a:ext uri="{FF2B5EF4-FFF2-40B4-BE49-F238E27FC236}">
-                <a16:creationId xmlns:a16="http://schemas.microsoft.com/office/drawing/2014/main" id="{A637DF4F-D567-4FE6-99CA-6A1BCC158A5D}"/>
+                <a16:creationId xmlns:a16="http://schemas.microsoft.com/office/drawing/2014/main" id="{7657F65A-9697-4A49-A224-741EFC97DD93}"/>
               </a:ext>
             </a:extLst>
           </p:cNvPr>
@@ -10779,7 +12629,7 @@
           <p:cNvPr id="3" name="">
             <a:extLst xmlns:a="http://schemas.openxmlformats.org/drawingml/2006/main">
               <a:ext uri="{FF2B5EF4-FFF2-40B4-BE49-F238E27FC236}">
-                <a16:creationId xmlns:a16="http://schemas.microsoft.com/office/drawing/2014/main" id="{3AFB5D2A-7B72-44E8-B2A3-E4BB497680BD}"/>
+                <a16:creationId xmlns:a16="http://schemas.microsoft.com/office/drawing/2014/main" id="{D3282AAD-D7E6-4B36-A2C1-3FCC311613A0}"/>
               </a:ext>
             </a:extLst>
           </p:cNvPr>
@@ -10841,7 +12691,7 @@
           <p:cNvPr id="4" name="">
             <a:extLst xmlns:a="http://schemas.openxmlformats.org/drawingml/2006/main">
               <a:ext uri="{FF2B5EF4-FFF2-40B4-BE49-F238E27FC236}">
-                <a16:creationId xmlns:a16="http://schemas.microsoft.com/office/drawing/2014/main" id="{2346DBBD-A2C1-4F74-8F75-2D148941B0F2}"/>
+                <a16:creationId xmlns:a16="http://schemas.microsoft.com/office/drawing/2014/main" id="{E0F8FF15-A089-4BE1-9845-0D21691B9B6A}"/>
               </a:ext>
             </a:extLst>
           </p:cNvPr>
@@ -10872,7 +12722,7 @@
           <p:cNvPr id="5" name="">
             <a:extLst xmlns:a="http://schemas.openxmlformats.org/drawingml/2006/main">
               <a:ext uri="{FF2B5EF4-FFF2-40B4-BE49-F238E27FC236}">
-                <a16:creationId xmlns:a16="http://schemas.microsoft.com/office/drawing/2014/main" id="{46AC035A-7976-47B3-B973-74B5D1F5D68D}"/>
+                <a16:creationId xmlns:a16="http://schemas.microsoft.com/office/drawing/2014/main" id="{23D0D164-D0E2-4495-98B7-FCEE1A8CBA6A}"/>
               </a:ext>
             </a:extLst>
           </p:cNvPr>
@@ -10934,7 +12784,7 @@
           <p:cNvPr id="6" name="">
             <a:extLst xmlns:a="http://schemas.openxmlformats.org/drawingml/2006/main">
               <a:ext uri="{FF2B5EF4-FFF2-40B4-BE49-F238E27FC236}">
-                <a16:creationId xmlns:a16="http://schemas.microsoft.com/office/drawing/2014/main" id="{828D8A2E-BD1B-46B4-9533-BAB70C28CF64}"/>
+                <a16:creationId xmlns:a16="http://schemas.microsoft.com/office/drawing/2014/main" id="{39AF8F45-512F-42A9-B002-CC950FAD401A}"/>
               </a:ext>
             </a:extLst>
           </p:cNvPr>
@@ -10965,7 +12815,7 @@
           <p:cNvPr id="7" name="">
             <a:extLst xmlns:a="http://schemas.openxmlformats.org/drawingml/2006/main">
               <a:ext uri="{FF2B5EF4-FFF2-40B4-BE49-F238E27FC236}">
-                <a16:creationId xmlns:a16="http://schemas.microsoft.com/office/drawing/2014/main" id="{8CA00F70-0D88-4C1D-8E34-41AE30462017}"/>
+                <a16:creationId xmlns:a16="http://schemas.microsoft.com/office/drawing/2014/main" id="{02784DCE-64C9-4C34-B31C-470A2171F22F}"/>
               </a:ext>
             </a:extLst>
           </p:cNvPr>
@@ -11027,7 +12877,7 @@
           <p:cNvPr id="8" name="">
             <a:extLst xmlns:a="http://schemas.openxmlformats.org/drawingml/2006/main">
               <a:ext uri="{FF2B5EF4-FFF2-40B4-BE49-F238E27FC236}">
-                <a16:creationId xmlns:a16="http://schemas.microsoft.com/office/drawing/2014/main" id="{259F2F42-98D5-4237-9E64-2E1FD832E539}"/>
+                <a16:creationId xmlns:a16="http://schemas.microsoft.com/office/drawing/2014/main" id="{988B6A8A-50BE-4D4A-9F80-42C9279CD1E3}"/>
               </a:ext>
             </a:extLst>
           </p:cNvPr>
@@ -11089,7 +12939,7 @@
           <p:cNvPr id="9" name="">
             <a:extLst xmlns:a="http://schemas.openxmlformats.org/drawingml/2006/main">
               <a:ext uri="{FF2B5EF4-FFF2-40B4-BE49-F238E27FC236}">
-                <a16:creationId xmlns:a16="http://schemas.microsoft.com/office/drawing/2014/main" id="{E8C4D37C-6A7E-465A-9FB4-4512095A38E1}"/>
+                <a16:creationId xmlns:a16="http://schemas.microsoft.com/office/drawing/2014/main" id="{631C0681-F6EC-400F-9939-69BF064F3F46}"/>
               </a:ext>
             </a:extLst>
           </p:cNvPr>
@@ -11151,7 +13001,7 @@
           <p:cNvPr id="10" name="">
             <a:extLst xmlns:a="http://schemas.openxmlformats.org/drawingml/2006/main">
               <a:ext uri="{FF2B5EF4-FFF2-40B4-BE49-F238E27FC236}">
-                <a16:creationId xmlns:a16="http://schemas.microsoft.com/office/drawing/2014/main" id="{A9162011-FA6D-4648-A0F2-4DAAC52AC284}"/>
+                <a16:creationId xmlns:a16="http://schemas.microsoft.com/office/drawing/2014/main" id="{78A3651B-75B7-485D-AE3B-C83AF7827B7D}"/>
               </a:ext>
             </a:extLst>
           </p:cNvPr>
@@ -11213,7 +13063,7 @@
           <p:cNvPr id="11" name="">
             <a:extLst xmlns:a="http://schemas.openxmlformats.org/drawingml/2006/main">
               <a:ext uri="{FF2B5EF4-FFF2-40B4-BE49-F238E27FC236}">
-                <a16:creationId xmlns:a16="http://schemas.microsoft.com/office/drawing/2014/main" id="{3CFDF428-EFF4-48DA-82AB-41C7CD4467F7}"/>
+                <a16:creationId xmlns:a16="http://schemas.microsoft.com/office/drawing/2014/main" id="{82D8574D-8F77-4E7B-AEDE-F2B93040C35A}"/>
               </a:ext>
             </a:extLst>
           </p:cNvPr>
@@ -11275,7 +13125,7 @@
           <p:cNvPr id="12" name="">
             <a:extLst xmlns:a="http://schemas.openxmlformats.org/drawingml/2006/main">
               <a:ext uri="{FF2B5EF4-FFF2-40B4-BE49-F238E27FC236}">
-                <a16:creationId xmlns:a16="http://schemas.microsoft.com/office/drawing/2014/main" id="{281D633D-CAB9-4766-8CB7-6A68C98EFC69}"/>
+                <a16:creationId xmlns:a16="http://schemas.microsoft.com/office/drawing/2014/main" id="{58E6278E-7FB5-4203-B463-4A7E464F6C5C}"/>
               </a:ext>
             </a:extLst>
           </p:cNvPr>
@@ -11306,7 +13156,7 @@
           <p:cNvPr id="13" name="">
             <a:extLst xmlns:a="http://schemas.openxmlformats.org/drawingml/2006/main">
               <a:ext uri="{FF2B5EF4-FFF2-40B4-BE49-F238E27FC236}">
-                <a16:creationId xmlns:a16="http://schemas.microsoft.com/office/drawing/2014/main" id="{5BFAD661-94BD-4204-B141-E94CCFB06178}"/>
+                <a16:creationId xmlns:a16="http://schemas.microsoft.com/office/drawing/2014/main" id="{D78D916F-B953-4378-BABB-D925292FCD82}"/>
               </a:ext>
             </a:extLst>
           </p:cNvPr>
@@ -11395,7 +13245,7 @@
           <p:cNvPr id="14" name="">
             <a:extLst xmlns:a="http://schemas.openxmlformats.org/drawingml/2006/main">
               <a:ext uri="{FF2B5EF4-FFF2-40B4-BE49-F238E27FC236}">
-                <a16:creationId xmlns:a16="http://schemas.microsoft.com/office/drawing/2014/main" id="{6A0666EB-DAB9-4028-9DB5-02D78BDD2180}"/>
+                <a16:creationId xmlns:a16="http://schemas.microsoft.com/office/drawing/2014/main" id="{320F81F2-A498-4615-8735-A0B44F6C458E}"/>
               </a:ext>
             </a:extLst>
           </p:cNvPr>
@@ -11457,7 +13307,7 @@
           <p:cNvPr id="15" name="">
             <a:extLst xmlns:a="http://schemas.openxmlformats.org/drawingml/2006/main">
               <a:ext uri="{FF2B5EF4-FFF2-40B4-BE49-F238E27FC236}">
-                <a16:creationId xmlns:a16="http://schemas.microsoft.com/office/drawing/2014/main" id="{40DDE1E2-012D-4145-8978-5D85BFF2435C}"/>
+                <a16:creationId xmlns:a16="http://schemas.microsoft.com/office/drawing/2014/main" id="{20D75852-E15A-4867-828E-F0C3E326B34C}"/>
               </a:ext>
             </a:extLst>
           </p:cNvPr>
@@ -11488,7 +13338,7 @@
           <p:cNvPr id="16" name="">
             <a:extLst xmlns:a="http://schemas.openxmlformats.org/drawingml/2006/main">
               <a:ext uri="{FF2B5EF4-FFF2-40B4-BE49-F238E27FC236}">
-                <a16:creationId xmlns:a16="http://schemas.microsoft.com/office/drawing/2014/main" id="{627B0BF0-79CF-420E-BAE4-639E17187A10}"/>
+                <a16:creationId xmlns:a16="http://schemas.microsoft.com/office/drawing/2014/main" id="{DB5656BA-936C-4FFE-8D6A-957D26ABC8F1}"/>
               </a:ext>
             </a:extLst>
           </p:cNvPr>
@@ -11550,7 +13400,7 @@
           <p:cNvPr id="17" name="">
             <a:extLst xmlns:a="http://schemas.openxmlformats.org/drawingml/2006/main">
               <a:ext uri="{FF2B5EF4-FFF2-40B4-BE49-F238E27FC236}">
-                <a16:creationId xmlns:a16="http://schemas.microsoft.com/office/drawing/2014/main" id="{19EA724A-CCAD-4166-AF97-86C4195AF04C}"/>
+                <a16:creationId xmlns:a16="http://schemas.microsoft.com/office/drawing/2014/main" id="{E1B37C30-6710-4C3C-B7B4-42D9933AF126}"/>
               </a:ext>
             </a:extLst>
           </p:cNvPr>
@@ -11612,7 +13462,7 @@
           <p:cNvPr id="18" name="">
             <a:extLst xmlns:a="http://schemas.openxmlformats.org/drawingml/2006/main">
               <a:ext uri="{FF2B5EF4-FFF2-40B4-BE49-F238E27FC236}">
-                <a16:creationId xmlns:a16="http://schemas.microsoft.com/office/drawing/2014/main" id="{BEEB9C28-B67D-4B7A-8507-584DA0CCFA30}"/>
+                <a16:creationId xmlns:a16="http://schemas.microsoft.com/office/drawing/2014/main" id="{7A2C63AF-001A-415E-B806-2527280F2ABC}"/>
               </a:ext>
             </a:extLst>
           </p:cNvPr>
@@ -11672,7 +13522,7 @@
     </p:spTree>
     <p:extLst>
       <p:ext uri="{BB962C8B-B14F-4D97-AF65-F5344CB8AC3E}">
-        <p14:creationId xmlns:p14="http://schemas.microsoft.com/office/powerpoint/2010/main" val="2023455749"/>
+        <p14:creationId xmlns:p14="http://schemas.microsoft.com/office/powerpoint/2010/main" val="939395394"/>
       </p:ext>
     </p:extLst>
   </p:cSld>
@@ -11703,7 +13553,7 @@
           <p:cNvPr id="56" name="">
             <a:extLst xmlns:a="http://schemas.openxmlformats.org/drawingml/2006/main">
               <a:ext uri="{FF2B5EF4-FFF2-40B4-BE49-F238E27FC236}">
-                <a16:creationId xmlns:a16="http://schemas.microsoft.com/office/drawing/2014/main" id="{FFAF0341-A2A3-4E46-8719-DBCA861734A0}"/>
+                <a16:creationId xmlns:a16="http://schemas.microsoft.com/office/drawing/2014/main" id="{BBD99FE2-E6A0-4011-A827-F8E6DEEB9365}"/>
               </a:ext>
             </a:extLst>
           </p:cNvPr>
@@ -11765,7 +13615,7 @@
           <p:cNvPr id="2" name="">
             <a:extLst xmlns:a="http://schemas.openxmlformats.org/drawingml/2006/main">
               <a:ext uri="{FF2B5EF4-FFF2-40B4-BE49-F238E27FC236}">
-                <a16:creationId xmlns:a16="http://schemas.microsoft.com/office/drawing/2014/main" id="{9D132BCA-0A9C-42D8-81E5-643AEE9A48C0}"/>
+                <a16:creationId xmlns:a16="http://schemas.microsoft.com/office/drawing/2014/main" id="{02107A93-FB89-416E-802A-30BE8DFB7999}"/>
               </a:ext>
             </a:extLst>
           </p:cNvPr>
@@ -11827,7 +13677,7 @@
           <p:cNvPr id="3" name="">
             <a:extLst xmlns:a="http://schemas.openxmlformats.org/drawingml/2006/main">
               <a:ext uri="{FF2B5EF4-FFF2-40B4-BE49-F238E27FC236}">
-                <a16:creationId xmlns:a16="http://schemas.microsoft.com/office/drawing/2014/main" id="{012A07C3-A425-4AAC-B3A4-9FB2E38B31F3}"/>
+                <a16:creationId xmlns:a16="http://schemas.microsoft.com/office/drawing/2014/main" id="{1E5A8700-E2BD-4B93-9208-E75B9EEA79DC}"/>
               </a:ext>
             </a:extLst>
           </p:cNvPr>
@@ -11889,7 +13739,7 @@
           <p:cNvPr id="4" name="">
             <a:extLst xmlns:a="http://schemas.openxmlformats.org/drawingml/2006/main">
               <a:ext uri="{FF2B5EF4-FFF2-40B4-BE49-F238E27FC236}">
-                <a16:creationId xmlns:a16="http://schemas.microsoft.com/office/drawing/2014/main" id="{15CC2B3A-1ABA-405A-B195-7B93D73DABB1}"/>
+                <a16:creationId xmlns:a16="http://schemas.microsoft.com/office/drawing/2014/main" id="{36B4DF72-4B05-47E2-9FF2-8AA2BA1B1155}"/>
               </a:ext>
             </a:extLst>
           </p:cNvPr>
@@ -11920,7 +13770,7 @@
           <p:cNvPr id="5" name="">
             <a:extLst xmlns:a="http://schemas.openxmlformats.org/drawingml/2006/main">
               <a:ext uri="{FF2B5EF4-FFF2-40B4-BE49-F238E27FC236}">
-                <a16:creationId xmlns:a16="http://schemas.microsoft.com/office/drawing/2014/main" id="{B07BC0EA-1DDE-4360-A797-98328AFF8D0A}"/>
+                <a16:creationId xmlns:a16="http://schemas.microsoft.com/office/drawing/2014/main" id="{B3D0DF6A-C80F-42AD-A71C-B5920A43FE63}"/>
               </a:ext>
             </a:extLst>
           </p:cNvPr>
@@ -11953,7 +13803,7 @@
           <p:cNvPr id="6" name="">
             <a:extLst xmlns:a="http://schemas.openxmlformats.org/drawingml/2006/main">
               <a:ext uri="{FF2B5EF4-FFF2-40B4-BE49-F238E27FC236}">
-                <a16:creationId xmlns:a16="http://schemas.microsoft.com/office/drawing/2014/main" id="{B70094B7-50D5-4F3E-8865-89F6B0C696DC}"/>
+                <a16:creationId xmlns:a16="http://schemas.microsoft.com/office/drawing/2014/main" id="{5FA7F3ED-68D2-4FA1-B6B2-7CF601C0CF92}"/>
               </a:ext>
             </a:extLst>
           </p:cNvPr>
@@ -12015,7 +13865,7 @@
           <p:cNvPr id="7" name="">
             <a:extLst xmlns:a="http://schemas.openxmlformats.org/drawingml/2006/main">
               <a:ext uri="{FF2B5EF4-FFF2-40B4-BE49-F238E27FC236}">
-                <a16:creationId xmlns:a16="http://schemas.microsoft.com/office/drawing/2014/main" id="{92A2BFCE-9CD2-4914-83D6-8DF7BD46CB6A}"/>
+                <a16:creationId xmlns:a16="http://schemas.microsoft.com/office/drawing/2014/main" id="{F81DA220-9B1C-4F6C-8C16-AE06F970BD05}"/>
               </a:ext>
             </a:extLst>
           </p:cNvPr>
@@ -12048,7 +13898,7 @@
           <p:cNvPr id="8" name="">
             <a:extLst xmlns:a="http://schemas.openxmlformats.org/drawingml/2006/main">
               <a:ext uri="{FF2B5EF4-FFF2-40B4-BE49-F238E27FC236}">
-                <a16:creationId xmlns:a16="http://schemas.microsoft.com/office/drawing/2014/main" id="{01DCDB14-FB3B-4A3B-9285-3942EA2E22BE}"/>
+                <a16:creationId xmlns:a16="http://schemas.microsoft.com/office/drawing/2014/main" id="{6FBA75FD-3F5A-497F-A4EB-43B8DA976021}"/>
               </a:ext>
             </a:extLst>
           </p:cNvPr>
@@ -12110,7 +13960,7 @@
           <p:cNvPr id="9" name="">
             <a:extLst xmlns:a="http://schemas.openxmlformats.org/drawingml/2006/main">
               <a:ext uri="{FF2B5EF4-FFF2-40B4-BE49-F238E27FC236}">
-                <a16:creationId xmlns:a16="http://schemas.microsoft.com/office/drawing/2014/main" id="{E1805248-6F20-4169-94D3-84188514A2DC}"/>
+                <a16:creationId xmlns:a16="http://schemas.microsoft.com/office/drawing/2014/main" id="{3DD98162-791D-417F-A001-957D6F458A7B}"/>
               </a:ext>
             </a:extLst>
           </p:cNvPr>
@@ -12143,7 +13993,7 @@
           <p:cNvPr id="10" name="">
             <a:extLst xmlns:a="http://schemas.openxmlformats.org/drawingml/2006/main">
               <a:ext uri="{FF2B5EF4-FFF2-40B4-BE49-F238E27FC236}">
-                <a16:creationId xmlns:a16="http://schemas.microsoft.com/office/drawing/2014/main" id="{6BDFF9FA-97B4-4526-B57B-A236D1159D41}"/>
+                <a16:creationId xmlns:a16="http://schemas.microsoft.com/office/drawing/2014/main" id="{E2CB4066-3EED-44CB-BD8D-D330F39000FE}"/>
               </a:ext>
             </a:extLst>
           </p:cNvPr>
@@ -12205,7 +14055,7 @@
           <p:cNvPr id="11" name="">
             <a:extLst xmlns:a="http://schemas.openxmlformats.org/drawingml/2006/main">
               <a:ext uri="{FF2B5EF4-FFF2-40B4-BE49-F238E27FC236}">
-                <a16:creationId xmlns:a16="http://schemas.microsoft.com/office/drawing/2014/main" id="{104B9CAC-4D8E-481E-913D-BDEC3A4BFD6E}"/>
+                <a16:creationId xmlns:a16="http://schemas.microsoft.com/office/drawing/2014/main" id="{C6A225A5-2E1F-47AF-B109-B489F06FE3DB}"/>
               </a:ext>
             </a:extLst>
           </p:cNvPr>
@@ -12238,7 +14088,7 @@
           <p:cNvPr id="12" name="">
             <a:extLst xmlns:a="http://schemas.openxmlformats.org/drawingml/2006/main">
               <a:ext uri="{FF2B5EF4-FFF2-40B4-BE49-F238E27FC236}">
-                <a16:creationId xmlns:a16="http://schemas.microsoft.com/office/drawing/2014/main" id="{30824D67-3D75-4648-B8FF-66F90896C05F}"/>
+                <a16:creationId xmlns:a16="http://schemas.microsoft.com/office/drawing/2014/main" id="{C1FCD641-55B0-4B96-A1A9-D2003592AEDE}"/>
               </a:ext>
             </a:extLst>
           </p:cNvPr>
@@ -12300,7 +14150,7 @@
           <p:cNvPr id="13" name="">
             <a:extLst xmlns:a="http://schemas.openxmlformats.org/drawingml/2006/main">
               <a:ext uri="{FF2B5EF4-FFF2-40B4-BE49-F238E27FC236}">
-                <a16:creationId xmlns:a16="http://schemas.microsoft.com/office/drawing/2014/main" id="{9B70F877-151C-42CA-B810-B931370BE963}"/>
+                <a16:creationId xmlns:a16="http://schemas.microsoft.com/office/drawing/2014/main" id="{3FBCDD4A-2DF5-469B-A0D6-F9C8C09C8DBE}"/>
               </a:ext>
             </a:extLst>
           </p:cNvPr>
@@ -12333,7 +14183,7 @@
           <p:cNvPr id="14" name="">
             <a:extLst xmlns:a="http://schemas.openxmlformats.org/drawingml/2006/main">
               <a:ext uri="{FF2B5EF4-FFF2-40B4-BE49-F238E27FC236}">
-                <a16:creationId xmlns:a16="http://schemas.microsoft.com/office/drawing/2014/main" id="{22E2C93E-3286-4504-BA79-58FF809681D4}"/>
+                <a16:creationId xmlns:a16="http://schemas.microsoft.com/office/drawing/2014/main" id="{00C3D3E3-6618-4D00-B2A1-56A92ADB041C}"/>
               </a:ext>
             </a:extLst>
           </p:cNvPr>
@@ -12395,7 +14245,7 @@
           <p:cNvPr id="15" name="">
             <a:extLst xmlns:a="http://schemas.openxmlformats.org/drawingml/2006/main">
               <a:ext uri="{FF2B5EF4-FFF2-40B4-BE49-F238E27FC236}">
-                <a16:creationId xmlns:a16="http://schemas.microsoft.com/office/drawing/2014/main" id="{98615372-D5BE-47FC-9548-97B7BE15FAE0}"/>
+                <a16:creationId xmlns:a16="http://schemas.microsoft.com/office/drawing/2014/main" id="{CD2BDB96-725A-474C-A204-E077C3BAAE0D}"/>
               </a:ext>
             </a:extLst>
           </p:cNvPr>
@@ -12428,7 +14278,7 @@
           <p:cNvPr id="16" name="">
             <a:extLst xmlns:a="http://schemas.openxmlformats.org/drawingml/2006/main">
               <a:ext uri="{FF2B5EF4-FFF2-40B4-BE49-F238E27FC236}">
-                <a16:creationId xmlns:a16="http://schemas.microsoft.com/office/drawing/2014/main" id="{C198CD3C-57B1-40B0-ACDA-16F5CB7ABB04}"/>
+                <a16:creationId xmlns:a16="http://schemas.microsoft.com/office/drawing/2014/main" id="{2B91EAB1-59C9-46BC-B109-7F7815D06DEC}"/>
               </a:ext>
             </a:extLst>
           </p:cNvPr>
@@ -12490,7 +14340,7 @@
           <p:cNvPr id="17" name="">
             <a:extLst xmlns:a="http://schemas.openxmlformats.org/drawingml/2006/main">
               <a:ext uri="{FF2B5EF4-FFF2-40B4-BE49-F238E27FC236}">
-                <a16:creationId xmlns:a16="http://schemas.microsoft.com/office/drawing/2014/main" id="{75D9A1B9-A918-4031-A3A2-D7F2FA08CFE3}"/>
+                <a16:creationId xmlns:a16="http://schemas.microsoft.com/office/drawing/2014/main" id="{C75B77E9-1F41-4AA5-95A5-8FF35E57C429}"/>
               </a:ext>
             </a:extLst>
           </p:cNvPr>
@@ -12523,7 +14373,7 @@
           <p:cNvPr id="18" name="">
             <a:extLst xmlns:a="http://schemas.openxmlformats.org/drawingml/2006/main">
               <a:ext uri="{FF2B5EF4-FFF2-40B4-BE49-F238E27FC236}">
-                <a16:creationId xmlns:a16="http://schemas.microsoft.com/office/drawing/2014/main" id="{AE21E6CF-A613-4A4B-A332-B63FA4945962}"/>
+                <a16:creationId xmlns:a16="http://schemas.microsoft.com/office/drawing/2014/main" id="{C331E9E0-F01C-449D-B7EF-735A1602B261}"/>
               </a:ext>
             </a:extLst>
           </p:cNvPr>
@@ -12585,7 +14435,7 @@
           <p:cNvPr id="19" name="">
             <a:extLst xmlns:a="http://schemas.openxmlformats.org/drawingml/2006/main">
               <a:ext uri="{FF2B5EF4-FFF2-40B4-BE49-F238E27FC236}">
-                <a16:creationId xmlns:a16="http://schemas.microsoft.com/office/drawing/2014/main" id="{599A0F9D-FACD-474C-B534-A72817DC76F8}"/>
+                <a16:creationId xmlns:a16="http://schemas.microsoft.com/office/drawing/2014/main" id="{2CE4E43B-1E92-4678-A4AA-01D509BA448C}"/>
               </a:ext>
             </a:extLst>
           </p:cNvPr>
@@ -12618,7 +14468,7 @@
           <p:cNvPr id="20" name="">
             <a:extLst xmlns:a="http://schemas.openxmlformats.org/drawingml/2006/main">
               <a:ext uri="{FF2B5EF4-FFF2-40B4-BE49-F238E27FC236}">
-                <a16:creationId xmlns:a16="http://schemas.microsoft.com/office/drawing/2014/main" id="{5F2A03F1-CC96-4861-AFB7-D77590B122C4}"/>
+                <a16:creationId xmlns:a16="http://schemas.microsoft.com/office/drawing/2014/main" id="{085D08C6-01FC-43AF-95B2-1268FA1143C6}"/>
               </a:ext>
             </a:extLst>
           </p:cNvPr>
@@ -12680,7 +14530,7 @@
           <p:cNvPr id="21" name="">
             <a:extLst xmlns:a="http://schemas.openxmlformats.org/drawingml/2006/main">
               <a:ext uri="{FF2B5EF4-FFF2-40B4-BE49-F238E27FC236}">
-                <a16:creationId xmlns:a16="http://schemas.microsoft.com/office/drawing/2014/main" id="{EC3CE22B-4908-4CEB-96F2-7B2813B56386}"/>
+                <a16:creationId xmlns:a16="http://schemas.microsoft.com/office/drawing/2014/main" id="{C70254FD-1592-4585-A05D-4F28B96808B3}"/>
               </a:ext>
             </a:extLst>
           </p:cNvPr>
@@ -12713,7 +14563,7 @@
           <p:cNvPr id="22" name="">
             <a:extLst xmlns:a="http://schemas.openxmlformats.org/drawingml/2006/main">
               <a:ext uri="{FF2B5EF4-FFF2-40B4-BE49-F238E27FC236}">
-                <a16:creationId xmlns:a16="http://schemas.microsoft.com/office/drawing/2014/main" id="{3D3DF735-2B25-4CAD-BFB5-CBFA0F9A0D3B}"/>
+                <a16:creationId xmlns:a16="http://schemas.microsoft.com/office/drawing/2014/main" id="{F8C54B03-607E-4DD3-ADC5-A1FAB3870A4E}"/>
               </a:ext>
             </a:extLst>
           </p:cNvPr>
@@ -12775,7 +14625,7 @@
           <p:cNvPr id="23" name="">
             <a:extLst xmlns:a="http://schemas.openxmlformats.org/drawingml/2006/main">
               <a:ext uri="{FF2B5EF4-FFF2-40B4-BE49-F238E27FC236}">
-                <a16:creationId xmlns:a16="http://schemas.microsoft.com/office/drawing/2014/main" id="{E9C6588D-ED2D-4F9D-AD6D-977B134447F3}"/>
+                <a16:creationId xmlns:a16="http://schemas.microsoft.com/office/drawing/2014/main" id="{FC132A48-7D15-4F6B-A16B-560F30EA3103}"/>
               </a:ext>
             </a:extLst>
           </p:cNvPr>
@@ -12808,7 +14658,7 @@
           <p:cNvPr id="24" name="">
             <a:extLst xmlns:a="http://schemas.openxmlformats.org/drawingml/2006/main">
               <a:ext uri="{FF2B5EF4-FFF2-40B4-BE49-F238E27FC236}">
-                <a16:creationId xmlns:a16="http://schemas.microsoft.com/office/drawing/2014/main" id="{030E1337-8018-46E2-A71E-A58286881FCF}"/>
+                <a16:creationId xmlns:a16="http://schemas.microsoft.com/office/drawing/2014/main" id="{03DAEB9B-1F59-4F06-8E0A-F558C04F319C}"/>
               </a:ext>
             </a:extLst>
           </p:cNvPr>
@@ -12870,7 +14720,7 @@
           <p:cNvPr id="25" name="">
             <a:extLst xmlns:a="http://schemas.openxmlformats.org/drawingml/2006/main">
               <a:ext uri="{FF2B5EF4-FFF2-40B4-BE49-F238E27FC236}">
-                <a16:creationId xmlns:a16="http://schemas.microsoft.com/office/drawing/2014/main" id="{217B6D74-0AC8-4086-A9C6-8A6F1307594B}"/>
+                <a16:creationId xmlns:a16="http://schemas.microsoft.com/office/drawing/2014/main" id="{7A322BFC-663C-4BB1-8D95-5A75D94849A3}"/>
               </a:ext>
             </a:extLst>
           </p:cNvPr>
@@ -12903,7 +14753,7 @@
           <p:cNvPr id="26" name="">
             <a:extLst xmlns:a="http://schemas.openxmlformats.org/drawingml/2006/main">
               <a:ext uri="{FF2B5EF4-FFF2-40B4-BE49-F238E27FC236}">
-                <a16:creationId xmlns:a16="http://schemas.microsoft.com/office/drawing/2014/main" id="{69C7D2AB-E219-470B-81A1-6A9BE270D403}"/>
+                <a16:creationId xmlns:a16="http://schemas.microsoft.com/office/drawing/2014/main" id="{1FD3E7C3-2325-476E-88F0-5D17769EB1B6}"/>
               </a:ext>
             </a:extLst>
           </p:cNvPr>
@@ -12965,7 +14815,7 @@
           <p:cNvPr id="27" name="">
             <a:extLst xmlns:a="http://schemas.openxmlformats.org/drawingml/2006/main">
               <a:ext uri="{FF2B5EF4-FFF2-40B4-BE49-F238E27FC236}">
-                <a16:creationId xmlns:a16="http://schemas.microsoft.com/office/drawing/2014/main" id="{B9F9B597-F622-48FC-B2F0-981D797A368C}"/>
+                <a16:creationId xmlns:a16="http://schemas.microsoft.com/office/drawing/2014/main" id="{1B261242-BD28-4AB6-9EBC-8F8AE16BBF90}"/>
               </a:ext>
             </a:extLst>
           </p:cNvPr>
@@ -12998,7 +14848,7 @@
           <p:cNvPr id="28" name="">
             <a:extLst xmlns:a="http://schemas.openxmlformats.org/drawingml/2006/main">
               <a:ext uri="{FF2B5EF4-FFF2-40B4-BE49-F238E27FC236}">
-                <a16:creationId xmlns:a16="http://schemas.microsoft.com/office/drawing/2014/main" id="{D91A4022-17CC-4481-9E78-651C1AE6AD21}"/>
+                <a16:creationId xmlns:a16="http://schemas.microsoft.com/office/drawing/2014/main" id="{F009A8B5-72C2-4F44-892E-FCEB4B62EF53}"/>
               </a:ext>
             </a:extLst>
           </p:cNvPr>
@@ -13060,7 +14910,7 @@
           <p:cNvPr id="29" name="">
             <a:extLst xmlns:a="http://schemas.openxmlformats.org/drawingml/2006/main">
               <a:ext uri="{FF2B5EF4-FFF2-40B4-BE49-F238E27FC236}">
-                <a16:creationId xmlns:a16="http://schemas.microsoft.com/office/drawing/2014/main" id="{5BC3A096-F389-440D-B5DD-8F35A90A31F8}"/>
+                <a16:creationId xmlns:a16="http://schemas.microsoft.com/office/drawing/2014/main" id="{B85ECF55-A7D4-4B9F-937A-58808A48B512}"/>
               </a:ext>
             </a:extLst>
           </p:cNvPr>
@@ -13093,7 +14943,7 @@
           <p:cNvPr id="30" name="">
             <a:extLst xmlns:a="http://schemas.openxmlformats.org/drawingml/2006/main">
               <a:ext uri="{FF2B5EF4-FFF2-40B4-BE49-F238E27FC236}">
-                <a16:creationId xmlns:a16="http://schemas.microsoft.com/office/drawing/2014/main" id="{9CC02765-E9D4-4606-8A6F-1F2A91906D8D}"/>
+                <a16:creationId xmlns:a16="http://schemas.microsoft.com/office/drawing/2014/main" id="{5A9E728D-2A6F-4A7D-A9CC-01F1E2741831}"/>
               </a:ext>
             </a:extLst>
           </p:cNvPr>
@@ -13155,7 +15005,7 @@
           <p:cNvPr id="31" name="">
             <a:extLst xmlns:a="http://schemas.openxmlformats.org/drawingml/2006/main">
               <a:ext uri="{FF2B5EF4-FFF2-40B4-BE49-F238E27FC236}">
-                <a16:creationId xmlns:a16="http://schemas.microsoft.com/office/drawing/2014/main" id="{EA91EB90-7F26-40C8-A066-8426E6AE5149}"/>
+                <a16:creationId xmlns:a16="http://schemas.microsoft.com/office/drawing/2014/main" id="{669B7B9C-1F31-449E-B4FD-785EF7003D74}"/>
               </a:ext>
             </a:extLst>
           </p:cNvPr>
@@ -13188,7 +15038,7 @@
           <p:cNvPr id="32" name="">
             <a:extLst xmlns:a="http://schemas.openxmlformats.org/drawingml/2006/main">
               <a:ext uri="{FF2B5EF4-FFF2-40B4-BE49-F238E27FC236}">
-                <a16:creationId xmlns:a16="http://schemas.microsoft.com/office/drawing/2014/main" id="{FF8FCEA6-9BC5-41E0-B36F-6130ABC0D811}"/>
+                <a16:creationId xmlns:a16="http://schemas.microsoft.com/office/drawing/2014/main" id="{4EC76101-9834-4190-83D7-2FA5749263D0}"/>
               </a:ext>
             </a:extLst>
           </p:cNvPr>
@@ -13250,7 +15100,7 @@
           <p:cNvPr id="33" name="">
             <a:extLst xmlns:a="http://schemas.openxmlformats.org/drawingml/2006/main">
               <a:ext uri="{FF2B5EF4-FFF2-40B4-BE49-F238E27FC236}">
-                <a16:creationId xmlns:a16="http://schemas.microsoft.com/office/drawing/2014/main" id="{31207D56-235B-4DC4-BD72-669653727F80}"/>
+                <a16:creationId xmlns:a16="http://schemas.microsoft.com/office/drawing/2014/main" id="{B2F66E76-3E5E-4B19-8189-ED750A1ED930}"/>
               </a:ext>
             </a:extLst>
           </p:cNvPr>
@@ -13283,7 +15133,7 @@
           <p:cNvPr id="34" name="">
             <a:extLst xmlns:a="http://schemas.openxmlformats.org/drawingml/2006/main">
               <a:ext uri="{FF2B5EF4-FFF2-40B4-BE49-F238E27FC236}">
-                <a16:creationId xmlns:a16="http://schemas.microsoft.com/office/drawing/2014/main" id="{4167FD84-D826-4BD6-8E26-FE5C06E127DD}"/>
+                <a16:creationId xmlns:a16="http://schemas.microsoft.com/office/drawing/2014/main" id="{31DDEC59-4646-4C6A-B198-839B2D4B8081}"/>
               </a:ext>
             </a:extLst>
           </p:cNvPr>
@@ -13345,7 +15195,7 @@
           <p:cNvPr id="35" name="">
             <a:extLst xmlns:a="http://schemas.openxmlformats.org/drawingml/2006/main">
               <a:ext uri="{FF2B5EF4-FFF2-40B4-BE49-F238E27FC236}">
-                <a16:creationId xmlns:a16="http://schemas.microsoft.com/office/drawing/2014/main" id="{69038C9A-1726-4277-BB9C-B9F7DBC37B5A}"/>
+                <a16:creationId xmlns:a16="http://schemas.microsoft.com/office/drawing/2014/main" id="{6D16E06E-A56F-49B6-9BA1-CA32120A2971}"/>
               </a:ext>
             </a:extLst>
           </p:cNvPr>
@@ -13378,7 +15228,7 @@
           <p:cNvPr id="36" name="">
             <a:extLst xmlns:a="http://schemas.openxmlformats.org/drawingml/2006/main">
               <a:ext uri="{FF2B5EF4-FFF2-40B4-BE49-F238E27FC236}">
-                <a16:creationId xmlns:a16="http://schemas.microsoft.com/office/drawing/2014/main" id="{DEBEEB33-B3BA-4DC0-9272-056248F2A45F}"/>
+                <a16:creationId xmlns:a16="http://schemas.microsoft.com/office/drawing/2014/main" id="{CC2D61C9-1843-4C22-A8B2-8C0028AC4981}"/>
               </a:ext>
             </a:extLst>
           </p:cNvPr>
@@ -13440,7 +15290,7 @@
           <p:cNvPr id="37" name="">
             <a:extLst xmlns:a="http://schemas.openxmlformats.org/drawingml/2006/main">
               <a:ext uri="{FF2B5EF4-FFF2-40B4-BE49-F238E27FC236}">
-                <a16:creationId xmlns:a16="http://schemas.microsoft.com/office/drawing/2014/main" id="{84B3ED08-4A1B-4DDC-B809-486597B91084}"/>
+                <a16:creationId xmlns:a16="http://schemas.microsoft.com/office/drawing/2014/main" id="{0A298893-4915-4C45-9D53-E703FAED31DB}"/>
               </a:ext>
             </a:extLst>
           </p:cNvPr>
@@ -13473,7 +15323,7 @@
           <p:cNvPr id="38" name="">
             <a:extLst xmlns:a="http://schemas.openxmlformats.org/drawingml/2006/main">
               <a:ext uri="{FF2B5EF4-FFF2-40B4-BE49-F238E27FC236}">
-                <a16:creationId xmlns:a16="http://schemas.microsoft.com/office/drawing/2014/main" id="{1246DDB4-738C-40B8-AB7F-E2189AE2EC73}"/>
+                <a16:creationId xmlns:a16="http://schemas.microsoft.com/office/drawing/2014/main" id="{2B0CA971-24D0-4119-BD35-BF33185F74C4}"/>
               </a:ext>
             </a:extLst>
           </p:cNvPr>
@@ -13535,7 +15385,7 @@
           <p:cNvPr id="39" name="">
             <a:extLst xmlns:a="http://schemas.openxmlformats.org/drawingml/2006/main">
               <a:ext uri="{FF2B5EF4-FFF2-40B4-BE49-F238E27FC236}">
-                <a16:creationId xmlns:a16="http://schemas.microsoft.com/office/drawing/2014/main" id="{E7D57FB7-F5E3-403F-BF2A-DF30500997D3}"/>
+                <a16:creationId xmlns:a16="http://schemas.microsoft.com/office/drawing/2014/main" id="{CD05C292-25A2-4391-A564-C2669B95947A}"/>
               </a:ext>
             </a:extLst>
           </p:cNvPr>
@@ -13568,7 +15418,7 @@
           <p:cNvPr id="40" name="">
             <a:extLst xmlns:a="http://schemas.openxmlformats.org/drawingml/2006/main">
               <a:ext uri="{FF2B5EF4-FFF2-40B4-BE49-F238E27FC236}">
-                <a16:creationId xmlns:a16="http://schemas.microsoft.com/office/drawing/2014/main" id="{7217C407-99C5-4B0A-9F08-EC5B2F2DD377}"/>
+                <a16:creationId xmlns:a16="http://schemas.microsoft.com/office/drawing/2014/main" id="{866396CD-E034-4852-9DFE-98C4FAD4664D}"/>
               </a:ext>
             </a:extLst>
           </p:cNvPr>
@@ -13630,7 +15480,7 @@
           <p:cNvPr id="41" name="">
             <a:extLst xmlns:a="http://schemas.openxmlformats.org/drawingml/2006/main">
               <a:ext uri="{FF2B5EF4-FFF2-40B4-BE49-F238E27FC236}">
-                <a16:creationId xmlns:a16="http://schemas.microsoft.com/office/drawing/2014/main" id="{80909018-1B41-4E4F-A13E-259DC7371F62}"/>
+                <a16:creationId xmlns:a16="http://schemas.microsoft.com/office/drawing/2014/main" id="{7BA6F37F-C8E7-4A4C-A3C1-7E5E50087013}"/>
               </a:ext>
             </a:extLst>
           </p:cNvPr>
@@ -13663,7 +15513,7 @@
           <p:cNvPr id="42" name="">
             <a:extLst xmlns:a="http://schemas.openxmlformats.org/drawingml/2006/main">
               <a:ext uri="{FF2B5EF4-FFF2-40B4-BE49-F238E27FC236}">
-                <a16:creationId xmlns:a16="http://schemas.microsoft.com/office/drawing/2014/main" id="{3B4BDE67-E2D1-4289-83BF-17C7AA366293}"/>
+                <a16:creationId xmlns:a16="http://schemas.microsoft.com/office/drawing/2014/main" id="{A7B1950D-423A-4CE8-BC67-A142B78C9691}"/>
               </a:ext>
             </a:extLst>
           </p:cNvPr>
@@ -13725,7 +15575,7 @@
           <p:cNvPr id="43" name="">
             <a:extLst xmlns:a="http://schemas.openxmlformats.org/drawingml/2006/main">
               <a:ext uri="{FF2B5EF4-FFF2-40B4-BE49-F238E27FC236}">
-                <a16:creationId xmlns:a16="http://schemas.microsoft.com/office/drawing/2014/main" id="{98180E96-15B8-46E4-B083-4C4F4D947AEC}"/>
+                <a16:creationId xmlns:a16="http://schemas.microsoft.com/office/drawing/2014/main" id="{F88B705D-9100-4AB7-9AA5-98B26D850C09}"/>
               </a:ext>
             </a:extLst>
           </p:cNvPr>
@@ -13758,7 +15608,7 @@
           <p:cNvPr id="44" name="">
             <a:extLst xmlns:a="http://schemas.openxmlformats.org/drawingml/2006/main">
               <a:ext uri="{FF2B5EF4-FFF2-40B4-BE49-F238E27FC236}">
-                <a16:creationId xmlns:a16="http://schemas.microsoft.com/office/drawing/2014/main" id="{26725C9A-E67B-41CC-8DF9-8EC9F98E89EC}"/>
+                <a16:creationId xmlns:a16="http://schemas.microsoft.com/office/drawing/2014/main" id="{EC461FBF-0926-4CC4-886D-F2FD132E9486}"/>
               </a:ext>
             </a:extLst>
           </p:cNvPr>
@@ -13820,7 +15670,7 @@
           <p:cNvPr id="45" name="">
             <a:extLst xmlns:a="http://schemas.openxmlformats.org/drawingml/2006/main">
               <a:ext uri="{FF2B5EF4-FFF2-40B4-BE49-F238E27FC236}">
-                <a16:creationId xmlns:a16="http://schemas.microsoft.com/office/drawing/2014/main" id="{B751D985-8D00-472F-98AA-8F321BE97844}"/>
+                <a16:creationId xmlns:a16="http://schemas.microsoft.com/office/drawing/2014/main" id="{E6DEC058-6092-4DF5-8C7A-2DE14F09A31D}"/>
               </a:ext>
             </a:extLst>
           </p:cNvPr>
@@ -13853,7 +15703,7 @@
           <p:cNvPr id="46" name="">
             <a:extLst xmlns:a="http://schemas.openxmlformats.org/drawingml/2006/main">
               <a:ext uri="{FF2B5EF4-FFF2-40B4-BE49-F238E27FC236}">
-                <a16:creationId xmlns:a16="http://schemas.microsoft.com/office/drawing/2014/main" id="{FDC829FE-74F1-4D98-94C1-A5A50C40B832}"/>
+                <a16:creationId xmlns:a16="http://schemas.microsoft.com/office/drawing/2014/main" id="{22B2D883-081A-4A27-9DC2-B75F63820F2D}"/>
               </a:ext>
             </a:extLst>
           </p:cNvPr>
@@ -13915,7 +15765,7 @@
           <p:cNvPr id="47" name="">
             <a:extLst xmlns:a="http://schemas.openxmlformats.org/drawingml/2006/main">
               <a:ext uri="{FF2B5EF4-FFF2-40B4-BE49-F238E27FC236}">
-                <a16:creationId xmlns:a16="http://schemas.microsoft.com/office/drawing/2014/main" id="{DEC1B3BF-DF63-48C0-A9B3-9D31AA31E4DC}"/>
+                <a16:creationId xmlns:a16="http://schemas.microsoft.com/office/drawing/2014/main" id="{024FBACE-F121-4E2C-8942-91E754C4D9E1}"/>
               </a:ext>
             </a:extLst>
           </p:cNvPr>
@@ -13948,7 +15798,7 @@
           <p:cNvPr id="48" name="">
             <a:extLst xmlns:a="http://schemas.openxmlformats.org/drawingml/2006/main">
               <a:ext uri="{FF2B5EF4-FFF2-40B4-BE49-F238E27FC236}">
-                <a16:creationId xmlns:a16="http://schemas.microsoft.com/office/drawing/2014/main" id="{52E3247F-4107-425F-AF07-12B991B14257}"/>
+                <a16:creationId xmlns:a16="http://schemas.microsoft.com/office/drawing/2014/main" id="{359EAD6A-180D-4CC6-AF26-0FC44ADE4337}"/>
               </a:ext>
             </a:extLst>
           </p:cNvPr>
@@ -14010,7 +15860,7 @@
           <p:cNvPr id="49" name="">
             <a:extLst xmlns:a="http://schemas.openxmlformats.org/drawingml/2006/main">
               <a:ext uri="{FF2B5EF4-FFF2-40B4-BE49-F238E27FC236}">
-                <a16:creationId xmlns:a16="http://schemas.microsoft.com/office/drawing/2014/main" id="{3E394A73-855E-4B13-89E6-2B91E202B964}"/>
+                <a16:creationId xmlns:a16="http://schemas.microsoft.com/office/drawing/2014/main" id="{E16432F4-49B3-4678-A8CA-DE6371B56D27}"/>
               </a:ext>
             </a:extLst>
           </p:cNvPr>
@@ -14043,7 +15893,7 @@
           <p:cNvPr id="50" name="">
             <a:extLst xmlns:a="http://schemas.openxmlformats.org/drawingml/2006/main">
               <a:ext uri="{FF2B5EF4-FFF2-40B4-BE49-F238E27FC236}">
-                <a16:creationId xmlns:a16="http://schemas.microsoft.com/office/drawing/2014/main" id="{F2072DC5-66A2-4ED5-B4E5-2709A5CF4DCC}"/>
+                <a16:creationId xmlns:a16="http://schemas.microsoft.com/office/drawing/2014/main" id="{68D171EA-26FB-4154-8649-810899B8F995}"/>
               </a:ext>
             </a:extLst>
           </p:cNvPr>
@@ -14105,7 +15955,7 @@
           <p:cNvPr id="51" name="">
             <a:extLst xmlns:a="http://schemas.openxmlformats.org/drawingml/2006/main">
               <a:ext uri="{FF2B5EF4-FFF2-40B4-BE49-F238E27FC236}">
-                <a16:creationId xmlns:a16="http://schemas.microsoft.com/office/drawing/2014/main" id="{56E272C1-EFD4-4BCE-9D62-C38F3399FA0D}"/>
+                <a16:creationId xmlns:a16="http://schemas.microsoft.com/office/drawing/2014/main" id="{360F8797-8648-441B-B414-9A857A7D7349}"/>
               </a:ext>
             </a:extLst>
           </p:cNvPr>
@@ -14138,7 +15988,7 @@
           <p:cNvPr id="52" name="">
             <a:extLst xmlns:a="http://schemas.openxmlformats.org/drawingml/2006/main">
               <a:ext uri="{FF2B5EF4-FFF2-40B4-BE49-F238E27FC236}">
-                <a16:creationId xmlns:a16="http://schemas.microsoft.com/office/drawing/2014/main" id="{B895B5A4-74C6-4F85-A092-B507B565246C}"/>
+                <a16:creationId xmlns:a16="http://schemas.microsoft.com/office/drawing/2014/main" id="{BD45EA83-7788-4CBE-922C-185A02F37400}"/>
               </a:ext>
             </a:extLst>
           </p:cNvPr>
@@ -14200,7 +16050,7 @@
           <p:cNvPr id="53" name="">
             <a:extLst xmlns:a="http://schemas.openxmlformats.org/drawingml/2006/main">
               <a:ext uri="{FF2B5EF4-FFF2-40B4-BE49-F238E27FC236}">
-                <a16:creationId xmlns:a16="http://schemas.microsoft.com/office/drawing/2014/main" id="{C154D9AE-6226-44DB-B56A-0A7688D38133}"/>
+                <a16:creationId xmlns:a16="http://schemas.microsoft.com/office/drawing/2014/main" id="{CECEE1D4-9871-4AA6-9349-26396E9235AD}"/>
               </a:ext>
             </a:extLst>
           </p:cNvPr>
@@ -14231,7 +16081,7 @@
           <p:cNvPr id="54" name="">
             <a:extLst xmlns:a="http://schemas.openxmlformats.org/drawingml/2006/main">
               <a:ext uri="{FF2B5EF4-FFF2-40B4-BE49-F238E27FC236}">
-                <a16:creationId xmlns:a16="http://schemas.microsoft.com/office/drawing/2014/main" id="{D37AE562-130B-4A2C-AE4D-38FC9332DD9C}"/>
+                <a16:creationId xmlns:a16="http://schemas.microsoft.com/office/drawing/2014/main" id="{8DCB8933-D29C-4736-87F5-BCDA6BDF430C}"/>
               </a:ext>
             </a:extLst>
           </p:cNvPr>
@@ -14293,7 +16143,7 @@
           <p:cNvPr id="55" name="">
             <a:extLst xmlns:a="http://schemas.openxmlformats.org/drawingml/2006/main">
               <a:ext uri="{FF2B5EF4-FFF2-40B4-BE49-F238E27FC236}">
-                <a16:creationId xmlns:a16="http://schemas.microsoft.com/office/drawing/2014/main" id="{48B762F0-286A-42A0-9DE7-C22128427BDF}"/>
+                <a16:creationId xmlns:a16="http://schemas.microsoft.com/office/drawing/2014/main" id="{BAD3D49A-51F7-4830-8C67-EAA0D3C9C0E6}"/>
               </a:ext>
             </a:extLst>
           </p:cNvPr>
@@ -14353,7 +16203,7 @@
     </p:spTree>
     <p:extLst>
       <p:ext uri="{BB962C8B-B14F-4D97-AF65-F5344CB8AC3E}">
-        <p14:creationId xmlns:p14="http://schemas.microsoft.com/office/powerpoint/2010/main" val="715086010"/>
+        <p14:creationId xmlns:p14="http://schemas.microsoft.com/office/powerpoint/2010/main" val="1995649633"/>
       </p:ext>
     </p:extLst>
   </p:cSld>
@@ -14384,7 +16234,7 @@
           <p:cNvPr id="22" name="">
             <a:extLst xmlns:a="http://schemas.openxmlformats.org/drawingml/2006/main">
               <a:ext uri="{FF2B5EF4-FFF2-40B4-BE49-F238E27FC236}">
-                <a16:creationId xmlns:a16="http://schemas.microsoft.com/office/drawing/2014/main" id="{1D75CC3D-5E2C-4570-BD85-B9A218EB49B9}"/>
+                <a16:creationId xmlns:a16="http://schemas.microsoft.com/office/drawing/2014/main" id="{E2C5C036-01E5-470C-9F66-362ED701F40A}"/>
               </a:ext>
             </a:extLst>
           </p:cNvPr>
@@ -14446,7 +16296,7 @@
           <p:cNvPr id="2" name="">
             <a:extLst xmlns:a="http://schemas.openxmlformats.org/drawingml/2006/main">
               <a:ext uri="{FF2B5EF4-FFF2-40B4-BE49-F238E27FC236}">
-                <a16:creationId xmlns:a16="http://schemas.microsoft.com/office/drawing/2014/main" id="{07B4471A-3598-4869-AC29-EF276CB000A9}"/>
+                <a16:creationId xmlns:a16="http://schemas.microsoft.com/office/drawing/2014/main" id="{A35BE815-AEB6-48A7-B900-B630780B9C3D}"/>
               </a:ext>
             </a:extLst>
           </p:cNvPr>
@@ -14508,7 +16358,7 @@
           <p:cNvPr id="3" name="">
             <a:extLst xmlns:a="http://schemas.openxmlformats.org/drawingml/2006/main">
               <a:ext uri="{FF2B5EF4-FFF2-40B4-BE49-F238E27FC236}">
-                <a16:creationId xmlns:a16="http://schemas.microsoft.com/office/drawing/2014/main" id="{F17D584B-6D1F-42DB-AD39-A372FECFAEC0}"/>
+                <a16:creationId xmlns:a16="http://schemas.microsoft.com/office/drawing/2014/main" id="{2FA27744-2D78-4A2F-92D0-04D9F708D296}"/>
               </a:ext>
             </a:extLst>
           </p:cNvPr>
@@ -14570,7 +16420,7 @@
           <p:cNvPr id="4" name="">
             <a:extLst xmlns:a="http://schemas.openxmlformats.org/drawingml/2006/main">
               <a:ext uri="{FF2B5EF4-FFF2-40B4-BE49-F238E27FC236}">
-                <a16:creationId xmlns:a16="http://schemas.microsoft.com/office/drawing/2014/main" id="{12A4A4CC-6248-48C9-A2B8-A4D375097F15}"/>
+                <a16:creationId xmlns:a16="http://schemas.microsoft.com/office/drawing/2014/main" id="{AB3F5E9A-BAC2-4C46-8966-D5649AB9E202}"/>
               </a:ext>
             </a:extLst>
           </p:cNvPr>
@@ -14601,7 +16451,7 @@
           <p:cNvPr id="5" name="">
             <a:extLst xmlns:a="http://schemas.openxmlformats.org/drawingml/2006/main">
               <a:ext uri="{FF2B5EF4-FFF2-40B4-BE49-F238E27FC236}">
-                <a16:creationId xmlns:a16="http://schemas.microsoft.com/office/drawing/2014/main" id="{796F7D44-D1A0-4018-8F49-7EBAD98611A3}"/>
+                <a16:creationId xmlns:a16="http://schemas.microsoft.com/office/drawing/2014/main" id="{FE781CE4-9964-4C10-ADC5-ED490A2D84AE}"/>
               </a:ext>
             </a:extLst>
           </p:cNvPr>
@@ -14663,7 +16513,7 @@
           <p:cNvPr id="6" name="">
             <a:extLst xmlns:a="http://schemas.openxmlformats.org/drawingml/2006/main">
               <a:ext uri="{FF2B5EF4-FFF2-40B4-BE49-F238E27FC236}">
-                <a16:creationId xmlns:a16="http://schemas.microsoft.com/office/drawing/2014/main" id="{3C5768B3-C07E-4D0D-83CE-A948A74011BC}"/>
+                <a16:creationId xmlns:a16="http://schemas.microsoft.com/office/drawing/2014/main" id="{7133EB2C-09A5-462E-9F7C-7BFF9DBE51B6}"/>
               </a:ext>
             </a:extLst>
           </p:cNvPr>
@@ -14725,7 +16575,7 @@
           <p:cNvPr id="7" name="">
             <a:extLst xmlns:a="http://schemas.openxmlformats.org/drawingml/2006/main">
               <a:ext uri="{FF2B5EF4-FFF2-40B4-BE49-F238E27FC236}">
-                <a16:creationId xmlns:a16="http://schemas.microsoft.com/office/drawing/2014/main" id="{DD41620D-F119-467C-830D-EAC5577C47AC}"/>
+                <a16:creationId xmlns:a16="http://schemas.microsoft.com/office/drawing/2014/main" id="{28EE30BB-10C2-455B-BAE7-E4EDB369F7CB}"/>
               </a:ext>
             </a:extLst>
           </p:cNvPr>
@@ -14787,7 +16637,7 @@
           <p:cNvPr id="8" name="">
             <a:extLst xmlns:a="http://schemas.openxmlformats.org/drawingml/2006/main">
               <a:ext uri="{FF2B5EF4-FFF2-40B4-BE49-F238E27FC236}">
-                <a16:creationId xmlns:a16="http://schemas.microsoft.com/office/drawing/2014/main" id="{121ABF23-1A28-4926-85F1-FB0A46E8D8DA}"/>
+                <a16:creationId xmlns:a16="http://schemas.microsoft.com/office/drawing/2014/main" id="{28A47B65-FFBA-4E6D-AE0B-3B3BD1CA1220}"/>
               </a:ext>
             </a:extLst>
           </p:cNvPr>
@@ -14849,7 +16699,7 @@
           <p:cNvPr id="9" name="">
             <a:extLst xmlns:a="http://schemas.openxmlformats.org/drawingml/2006/main">
               <a:ext uri="{FF2B5EF4-FFF2-40B4-BE49-F238E27FC236}">
-                <a16:creationId xmlns:a16="http://schemas.microsoft.com/office/drawing/2014/main" id="{3B3F4E1A-5F07-4D14-836D-A767049B887C}"/>
+                <a16:creationId xmlns:a16="http://schemas.microsoft.com/office/drawing/2014/main" id="{C7824D55-586F-4755-B7B2-A43DC4EAED3C}"/>
               </a:ext>
             </a:extLst>
           </p:cNvPr>
@@ -14911,7 +16761,7 @@
           <p:cNvPr id="10" name="">
             <a:extLst xmlns:a="http://schemas.openxmlformats.org/drawingml/2006/main">
               <a:ext uri="{FF2B5EF4-FFF2-40B4-BE49-F238E27FC236}">
-                <a16:creationId xmlns:a16="http://schemas.microsoft.com/office/drawing/2014/main" id="{865FD935-10E9-49F4-BA04-E47E4862E12F}"/>
+                <a16:creationId xmlns:a16="http://schemas.microsoft.com/office/drawing/2014/main" id="{A6C6EBF4-B492-4730-BD2A-EB8213388520}"/>
               </a:ext>
             </a:extLst>
           </p:cNvPr>
@@ -14973,7 +16823,7 @@
           <p:cNvPr id="11" name="">
             <a:extLst xmlns:a="http://schemas.openxmlformats.org/drawingml/2006/main">
               <a:ext uri="{FF2B5EF4-FFF2-40B4-BE49-F238E27FC236}">
-                <a16:creationId xmlns:a16="http://schemas.microsoft.com/office/drawing/2014/main" id="{8ECBFF7C-A665-4B96-B73E-E5F8B98A63B6}"/>
+                <a16:creationId xmlns:a16="http://schemas.microsoft.com/office/drawing/2014/main" id="{85F399D2-EA6E-4139-A910-34A79E5DBFA3}"/>
               </a:ext>
             </a:extLst>
           </p:cNvPr>
@@ -15035,7 +16885,7 @@
           <p:cNvPr id="12" name="">
             <a:extLst xmlns:a="http://schemas.openxmlformats.org/drawingml/2006/main">
               <a:ext uri="{FF2B5EF4-FFF2-40B4-BE49-F238E27FC236}">
-                <a16:creationId xmlns:a16="http://schemas.microsoft.com/office/drawing/2014/main" id="{9437F131-2B60-4916-9999-91B5775C5FC6}"/>
+                <a16:creationId xmlns:a16="http://schemas.microsoft.com/office/drawing/2014/main" id="{91F138B1-DB2F-4CFB-8C1F-E1D009F7F9B4}"/>
               </a:ext>
             </a:extLst>
           </p:cNvPr>
@@ -15097,7 +16947,7 @@
           <p:cNvPr id="13" name="">
             <a:extLst xmlns:a="http://schemas.openxmlformats.org/drawingml/2006/main">
               <a:ext uri="{FF2B5EF4-FFF2-40B4-BE49-F238E27FC236}">
-                <a16:creationId xmlns:a16="http://schemas.microsoft.com/office/drawing/2014/main" id="{6960AC3D-3B08-41AC-B16E-C0A36CBCD990}"/>
+                <a16:creationId xmlns:a16="http://schemas.microsoft.com/office/drawing/2014/main" id="{9D1AF2B8-F2C5-45F3-8FA2-620ECD8BFB1D}"/>
               </a:ext>
             </a:extLst>
           </p:cNvPr>
@@ -15159,7 +17009,7 @@
           <p:cNvPr id="14" name="">
             <a:extLst xmlns:a="http://schemas.openxmlformats.org/drawingml/2006/main">
               <a:ext uri="{FF2B5EF4-FFF2-40B4-BE49-F238E27FC236}">
-                <a16:creationId xmlns:a16="http://schemas.microsoft.com/office/drawing/2014/main" id="{794BDD89-1A9F-4456-90B0-CEE50750FEE1}"/>
+                <a16:creationId xmlns:a16="http://schemas.microsoft.com/office/drawing/2014/main" id="{7D2876F8-A4D2-4E2C-81FA-945FCB34B293}"/>
               </a:ext>
             </a:extLst>
           </p:cNvPr>
@@ -15221,7 +17071,7 @@
           <p:cNvPr id="15" name="">
             <a:extLst xmlns:a="http://schemas.openxmlformats.org/drawingml/2006/main">
               <a:ext uri="{FF2B5EF4-FFF2-40B4-BE49-F238E27FC236}">
-                <a16:creationId xmlns:a16="http://schemas.microsoft.com/office/drawing/2014/main" id="{B7D4E1ED-875C-4383-AFA7-A589AA14B3DE}"/>
+                <a16:creationId xmlns:a16="http://schemas.microsoft.com/office/drawing/2014/main" id="{B8440D8B-4E10-40CB-9D77-B9F00FCC0ADB}"/>
               </a:ext>
             </a:extLst>
           </p:cNvPr>
@@ -15283,7 +17133,7 @@
           <p:cNvPr id="16" name="">
             <a:extLst xmlns:a="http://schemas.openxmlformats.org/drawingml/2006/main">
               <a:ext uri="{FF2B5EF4-FFF2-40B4-BE49-F238E27FC236}">
-                <a16:creationId xmlns:a16="http://schemas.microsoft.com/office/drawing/2014/main" id="{83E19008-1339-4160-A71A-718A59EEF7E0}"/>
+                <a16:creationId xmlns:a16="http://schemas.microsoft.com/office/drawing/2014/main" id="{469FC1B6-AB8E-431E-91E9-1DC9BADE08E7}"/>
               </a:ext>
             </a:extLst>
           </p:cNvPr>
@@ -15345,7 +17195,7 @@
           <p:cNvPr id="17" name="">
             <a:extLst xmlns:a="http://schemas.openxmlformats.org/drawingml/2006/main">
               <a:ext uri="{FF2B5EF4-FFF2-40B4-BE49-F238E27FC236}">
-                <a16:creationId xmlns:a16="http://schemas.microsoft.com/office/drawing/2014/main" id="{47474072-3A52-464F-9A48-15D66E2F79C7}"/>
+                <a16:creationId xmlns:a16="http://schemas.microsoft.com/office/drawing/2014/main" id="{9A012C8F-0ACB-40CE-B673-A0F029F0B6E3}"/>
               </a:ext>
             </a:extLst>
           </p:cNvPr>
@@ -15376,7 +17226,7 @@
           <p:cNvPr id="18" name="">
             <a:extLst xmlns:a="http://schemas.openxmlformats.org/drawingml/2006/main">
               <a:ext uri="{FF2B5EF4-FFF2-40B4-BE49-F238E27FC236}">
-                <a16:creationId xmlns:a16="http://schemas.microsoft.com/office/drawing/2014/main" id="{A1F6088C-28C4-47B8-B7DC-1CDD7728F489}"/>
+                <a16:creationId xmlns:a16="http://schemas.microsoft.com/office/drawing/2014/main" id="{3502452E-E7F1-43D6-921B-AD88983C61A6}"/>
               </a:ext>
             </a:extLst>
           </p:cNvPr>
@@ -15438,7 +17288,7 @@
           <p:cNvPr id="19" name="">
             <a:extLst xmlns:a="http://schemas.openxmlformats.org/drawingml/2006/main">
               <a:ext uri="{FF2B5EF4-FFF2-40B4-BE49-F238E27FC236}">
-                <a16:creationId xmlns:a16="http://schemas.microsoft.com/office/drawing/2014/main" id="{154EF894-9694-4CD0-9EB2-4DFCA733DB62}"/>
+                <a16:creationId xmlns:a16="http://schemas.microsoft.com/office/drawing/2014/main" id="{1AA83249-915A-4A74-BB22-6422071C96D6}"/>
               </a:ext>
             </a:extLst>
           </p:cNvPr>
@@ -15554,7 +17404,7 @@
           <p:cNvPr id="20" name="">
             <a:extLst xmlns:a="http://schemas.openxmlformats.org/drawingml/2006/main">
               <a:ext uri="{FF2B5EF4-FFF2-40B4-BE49-F238E27FC236}">
-                <a16:creationId xmlns:a16="http://schemas.microsoft.com/office/drawing/2014/main" id="{63392EEF-9578-4084-843D-A6A1E51FD7B7}"/>
+                <a16:creationId xmlns:a16="http://schemas.microsoft.com/office/drawing/2014/main" id="{5F122640-0DD9-4715-A09C-D72EE5B9579C}"/>
               </a:ext>
             </a:extLst>
           </p:cNvPr>
@@ -15616,7 +17466,7 @@
           <p:cNvPr id="21" name="">
             <a:extLst xmlns:a="http://schemas.openxmlformats.org/drawingml/2006/main">
               <a:ext uri="{FF2B5EF4-FFF2-40B4-BE49-F238E27FC236}">
-                <a16:creationId xmlns:a16="http://schemas.microsoft.com/office/drawing/2014/main" id="{D54C8894-11C5-484D-B590-A924AFA2F222}"/>
+                <a16:creationId xmlns:a16="http://schemas.microsoft.com/office/drawing/2014/main" id="{930DEEFE-CBE3-42F8-A0D1-851D6C0DAF15}"/>
               </a:ext>
             </a:extLst>
           </p:cNvPr>
@@ -15676,7 +17526,7 @@
     </p:spTree>
     <p:extLst>
       <p:ext uri="{BB962C8B-B14F-4D97-AF65-F5344CB8AC3E}">
-        <p14:creationId xmlns:p14="http://schemas.microsoft.com/office/powerpoint/2010/main" val="1653820000"/>
+        <p14:creationId xmlns:p14="http://schemas.microsoft.com/office/powerpoint/2010/main" val="2082993785"/>
       </p:ext>
     </p:extLst>
   </p:cSld>
@@ -15707,7 +17557,7 @@
           <p:cNvPr id="14" name="">
             <a:extLst xmlns:a="http://schemas.openxmlformats.org/drawingml/2006/main">
               <a:ext uri="{FF2B5EF4-FFF2-40B4-BE49-F238E27FC236}">
-                <a16:creationId xmlns:a16="http://schemas.microsoft.com/office/drawing/2014/main" id="{41B9570C-F510-4A16-A580-EA0A15FF436B}"/>
+                <a16:creationId xmlns:a16="http://schemas.microsoft.com/office/drawing/2014/main" id="{B7713887-809D-450D-8282-DBBB9FB702FE}"/>
               </a:ext>
             </a:extLst>
           </p:cNvPr>
@@ -15769,7 +17619,7 @@
           <p:cNvPr id="2" name="">
             <a:extLst xmlns:a="http://schemas.openxmlformats.org/drawingml/2006/main">
               <a:ext uri="{FF2B5EF4-FFF2-40B4-BE49-F238E27FC236}">
-                <a16:creationId xmlns:a16="http://schemas.microsoft.com/office/drawing/2014/main" id="{2807F36E-3E97-44D5-AEE5-8616AD0F8A23}"/>
+                <a16:creationId xmlns:a16="http://schemas.microsoft.com/office/drawing/2014/main" id="{7C7B5240-E440-4434-A144-2FCEB26AB08C}"/>
               </a:ext>
             </a:extLst>
           </p:cNvPr>
@@ -15831,7 +17681,7 @@
           <p:cNvPr id="3" name="">
             <a:extLst xmlns:a="http://schemas.openxmlformats.org/drawingml/2006/main">
               <a:ext uri="{FF2B5EF4-FFF2-40B4-BE49-F238E27FC236}">
-                <a16:creationId xmlns:a16="http://schemas.microsoft.com/office/drawing/2014/main" id="{1E035EA9-9443-41F5-843C-C561B5E5050D}"/>
+                <a16:creationId xmlns:a16="http://schemas.microsoft.com/office/drawing/2014/main" id="{BCE6E3DB-EF59-4ABA-B92B-0D28E9AAFB4B}"/>
               </a:ext>
             </a:extLst>
           </p:cNvPr>
@@ -15893,7 +17743,7 @@
           <p:cNvPr id="4" name="">
             <a:extLst xmlns:a="http://schemas.openxmlformats.org/drawingml/2006/main">
               <a:ext uri="{FF2B5EF4-FFF2-40B4-BE49-F238E27FC236}">
-                <a16:creationId xmlns:a16="http://schemas.microsoft.com/office/drawing/2014/main" id="{7708D2B9-F7A3-4E66-9386-58600D2133BF}"/>
+                <a16:creationId xmlns:a16="http://schemas.microsoft.com/office/drawing/2014/main" id="{1D2CB5C0-734D-4B72-9EF5-72AB059A32E0}"/>
               </a:ext>
             </a:extLst>
           </p:cNvPr>
@@ -15924,7 +17774,7 @@
           <p:cNvPr id="5" name="">
             <a:extLst xmlns:a="http://schemas.openxmlformats.org/drawingml/2006/main">
               <a:ext uri="{FF2B5EF4-FFF2-40B4-BE49-F238E27FC236}">
-                <a16:creationId xmlns:a16="http://schemas.microsoft.com/office/drawing/2014/main" id="{22D9A76C-0DAF-4821-B408-21C9DFEC571D}"/>
+                <a16:creationId xmlns:a16="http://schemas.microsoft.com/office/drawing/2014/main" id="{77A150CC-035D-4F4F-AF4D-655B90F54443}"/>
               </a:ext>
             </a:extLst>
           </p:cNvPr>
@@ -15955,7 +17805,7 @@
           <p:cNvPr id="6" name="">
             <a:extLst xmlns:a="http://schemas.openxmlformats.org/drawingml/2006/main">
               <a:ext uri="{FF2B5EF4-FFF2-40B4-BE49-F238E27FC236}">
-                <a16:creationId xmlns:a16="http://schemas.microsoft.com/office/drawing/2014/main" id="{8603FEEA-6427-4617-9872-84D2046D34B4}"/>
+                <a16:creationId xmlns:a16="http://schemas.microsoft.com/office/drawing/2014/main" id="{EF84F9E4-3605-42F1-B14C-0D40FC9ABBFF}"/>
               </a:ext>
             </a:extLst>
           </p:cNvPr>
@@ -16017,7 +17867,7 @@
           <p:cNvPr id="7" name="">
             <a:extLst xmlns:a="http://schemas.openxmlformats.org/drawingml/2006/main">
               <a:ext uri="{FF2B5EF4-FFF2-40B4-BE49-F238E27FC236}">
-                <a16:creationId xmlns:a16="http://schemas.microsoft.com/office/drawing/2014/main" id="{63F08513-E944-45F9-8434-D92EDA89FD58}"/>
+                <a16:creationId xmlns:a16="http://schemas.microsoft.com/office/drawing/2014/main" id="{34F6D9F8-AF6C-4FF5-9095-B22BA755DE6A}"/>
               </a:ext>
             </a:extLst>
           </p:cNvPr>
@@ -16079,7 +17929,7 @@
           <p:cNvPr id="8" name="">
             <a:extLst xmlns:a="http://schemas.openxmlformats.org/drawingml/2006/main">
               <a:ext uri="{FF2B5EF4-FFF2-40B4-BE49-F238E27FC236}">
-                <a16:creationId xmlns:a16="http://schemas.microsoft.com/office/drawing/2014/main" id="{9CE59997-10E4-4FE8-B4B4-12BB51890C0C}"/>
+                <a16:creationId xmlns:a16="http://schemas.microsoft.com/office/drawing/2014/main" id="{FA49570B-53E7-4180-BDAD-63C6CCA0E879}"/>
               </a:ext>
             </a:extLst>
           </p:cNvPr>
@@ -16286,7 +18136,7 @@
           <p:cNvPr id="9" name="">
             <a:extLst xmlns:a="http://schemas.openxmlformats.org/drawingml/2006/main">
               <a:ext uri="{FF2B5EF4-FFF2-40B4-BE49-F238E27FC236}">
-                <a16:creationId xmlns:a16="http://schemas.microsoft.com/office/drawing/2014/main" id="{3143E8DC-B3C8-433D-886D-CB341083C99F}"/>
+                <a16:creationId xmlns:a16="http://schemas.microsoft.com/office/drawing/2014/main" id="{B1A96324-08C0-4085-9CBA-CABE0469EF99}"/>
               </a:ext>
             </a:extLst>
           </p:cNvPr>
@@ -16348,7 +18198,7 @@
           <p:cNvPr id="10" name="">
             <a:extLst xmlns:a="http://schemas.openxmlformats.org/drawingml/2006/main">
               <a:ext uri="{FF2B5EF4-FFF2-40B4-BE49-F238E27FC236}">
-                <a16:creationId xmlns:a16="http://schemas.microsoft.com/office/drawing/2014/main" id="{1AEFCFF1-4DAC-4726-8883-EA9D3B94DD44}"/>
+                <a16:creationId xmlns:a16="http://schemas.microsoft.com/office/drawing/2014/main" id="{A871F1A6-CA55-4576-8298-5E9F4FE9EE4E}"/>
               </a:ext>
             </a:extLst>
           </p:cNvPr>
@@ -16491,7 +18341,7 @@
           <p:cNvPr id="11" name="">
             <a:extLst xmlns:a="http://schemas.openxmlformats.org/drawingml/2006/main">
               <a:ext uri="{FF2B5EF4-FFF2-40B4-BE49-F238E27FC236}">
-                <a16:creationId xmlns:a16="http://schemas.microsoft.com/office/drawing/2014/main" id="{5D649CD9-A6BA-4B7A-942E-A00BEA6D745D}"/>
+                <a16:creationId xmlns:a16="http://schemas.microsoft.com/office/drawing/2014/main" id="{9325BC40-EB30-4CEF-9F33-F97811F2DAE2}"/>
               </a:ext>
             </a:extLst>
           </p:cNvPr>
@@ -16522,7 +18372,7 @@
           <p:cNvPr id="12" name="">
             <a:extLst xmlns:a="http://schemas.openxmlformats.org/drawingml/2006/main">
               <a:ext uri="{FF2B5EF4-FFF2-40B4-BE49-F238E27FC236}">
-                <a16:creationId xmlns:a16="http://schemas.microsoft.com/office/drawing/2014/main" id="{7E93CC69-349B-4DFA-9888-44AB94B25CCC}"/>
+                <a16:creationId xmlns:a16="http://schemas.microsoft.com/office/drawing/2014/main" id="{46570266-B213-4E2C-B9B5-142CA9021DAD}"/>
               </a:ext>
             </a:extLst>
           </p:cNvPr>
@@ -16584,7 +18434,7 @@
           <p:cNvPr id="13" name="">
             <a:extLst xmlns:a="http://schemas.openxmlformats.org/drawingml/2006/main">
               <a:ext uri="{FF2B5EF4-FFF2-40B4-BE49-F238E27FC236}">
-                <a16:creationId xmlns:a16="http://schemas.microsoft.com/office/drawing/2014/main" id="{58FF417C-9095-40CB-8E9E-64E67DF58E6A}"/>
+                <a16:creationId xmlns:a16="http://schemas.microsoft.com/office/drawing/2014/main" id="{A437BC23-9A52-4022-9FFF-40F79C85A4A3}"/>
               </a:ext>
             </a:extLst>
           </p:cNvPr>
@@ -16644,7 +18494,7 @@
     </p:spTree>
     <p:extLst>
       <p:ext uri="{BB962C8B-B14F-4D97-AF65-F5344CB8AC3E}">
-        <p14:creationId xmlns:p14="http://schemas.microsoft.com/office/powerpoint/2010/main" val="1815522375"/>
+        <p14:creationId xmlns:p14="http://schemas.microsoft.com/office/powerpoint/2010/main" val="141232645"/>
       </p:ext>
     </p:extLst>
   </p:cSld>
@@ -16675,7 +18525,7 @@
           <p:cNvPr id="21" name="">
             <a:extLst xmlns:a="http://schemas.openxmlformats.org/drawingml/2006/main">
               <a:ext uri="{FF2B5EF4-FFF2-40B4-BE49-F238E27FC236}">
-                <a16:creationId xmlns:a16="http://schemas.microsoft.com/office/drawing/2014/main" id="{BE1F261C-7A9C-4C48-BC57-4E04E1D31874}"/>
+                <a16:creationId xmlns:a16="http://schemas.microsoft.com/office/drawing/2014/main" id="{1CE1AEA8-9DD6-4777-BECF-D74824ABFAFA}"/>
               </a:ext>
             </a:extLst>
           </p:cNvPr>
@@ -16737,7 +18587,7 @@
           <p:cNvPr id="2" name="">
             <a:extLst xmlns:a="http://schemas.openxmlformats.org/drawingml/2006/main">
               <a:ext uri="{FF2B5EF4-FFF2-40B4-BE49-F238E27FC236}">
-                <a16:creationId xmlns:a16="http://schemas.microsoft.com/office/drawing/2014/main" id="{55D36D7C-E5B3-422A-AE2C-BB6890BA95FD}"/>
+                <a16:creationId xmlns:a16="http://schemas.microsoft.com/office/drawing/2014/main" id="{ACC2F952-3612-418A-AA37-96FAB00F890F}"/>
               </a:ext>
             </a:extLst>
           </p:cNvPr>
@@ -16799,7 +18649,7 @@
           <p:cNvPr id="3" name="">
             <a:extLst xmlns:a="http://schemas.openxmlformats.org/drawingml/2006/main">
               <a:ext uri="{FF2B5EF4-FFF2-40B4-BE49-F238E27FC236}">
-                <a16:creationId xmlns:a16="http://schemas.microsoft.com/office/drawing/2014/main" id="{BC280D76-99A0-4B3A-9DFE-2B2E4DCDC9BE}"/>
+                <a16:creationId xmlns:a16="http://schemas.microsoft.com/office/drawing/2014/main" id="{AC676F04-9D31-44A0-B8E2-566FE0CA6113}"/>
               </a:ext>
             </a:extLst>
           </p:cNvPr>
@@ -16861,7 +18711,7 @@
           <p:cNvPr id="4" name="">
             <a:extLst xmlns:a="http://schemas.openxmlformats.org/drawingml/2006/main">
               <a:ext uri="{FF2B5EF4-FFF2-40B4-BE49-F238E27FC236}">
-                <a16:creationId xmlns:a16="http://schemas.microsoft.com/office/drawing/2014/main" id="{DCE57ECB-B810-456D-80E2-DCA0B5A08E14}"/>
+                <a16:creationId xmlns:a16="http://schemas.microsoft.com/office/drawing/2014/main" id="{BB9E934E-89F9-4B50-8B9A-B1A7BFAC4FBD}"/>
               </a:ext>
             </a:extLst>
           </p:cNvPr>
@@ -16892,7 +18742,7 @@
           <p:cNvPr id="5" name="">
             <a:extLst xmlns:a="http://schemas.openxmlformats.org/drawingml/2006/main">
               <a:ext uri="{FF2B5EF4-FFF2-40B4-BE49-F238E27FC236}">
-                <a16:creationId xmlns:a16="http://schemas.microsoft.com/office/drawing/2014/main" id="{7B20D4A0-EFFB-4F49-9E50-D341F7286294}"/>
+                <a16:creationId xmlns:a16="http://schemas.microsoft.com/office/drawing/2014/main" id="{572437A4-9E71-47D1-8F8E-DC7AF8EAAEF8}"/>
               </a:ext>
             </a:extLst>
           </p:cNvPr>
@@ -16954,7 +18804,7 @@
           <p:cNvPr id="6" name="">
             <a:extLst xmlns:a="http://schemas.openxmlformats.org/drawingml/2006/main">
               <a:ext uri="{FF2B5EF4-FFF2-40B4-BE49-F238E27FC236}">
-                <a16:creationId xmlns:a16="http://schemas.microsoft.com/office/drawing/2014/main" id="{D0F43698-58C2-4640-9324-A01250384E41}"/>
+                <a16:creationId xmlns:a16="http://schemas.microsoft.com/office/drawing/2014/main" id="{E0DAE1C4-56D4-4BDF-8ED7-3062C059A727}"/>
               </a:ext>
             </a:extLst>
           </p:cNvPr>
@@ -17016,7 +18866,7 @@
           <p:cNvPr id="7" name="">
             <a:extLst xmlns:a="http://schemas.openxmlformats.org/drawingml/2006/main">
               <a:ext uri="{FF2B5EF4-FFF2-40B4-BE49-F238E27FC236}">
-                <a16:creationId xmlns:a16="http://schemas.microsoft.com/office/drawing/2014/main" id="{B0B0B36F-8887-46EB-8353-F13D1FB3961E}"/>
+                <a16:creationId xmlns:a16="http://schemas.microsoft.com/office/drawing/2014/main" id="{48C2472B-87AE-46D5-839F-20853D57A8D3}"/>
               </a:ext>
             </a:extLst>
           </p:cNvPr>
@@ -17078,7 +18928,7 @@
           <p:cNvPr id="8" name="">
             <a:extLst xmlns:a="http://schemas.openxmlformats.org/drawingml/2006/main">
               <a:ext uri="{FF2B5EF4-FFF2-40B4-BE49-F238E27FC236}">
-                <a16:creationId xmlns:a16="http://schemas.microsoft.com/office/drawing/2014/main" id="{B16D9B26-9B6A-401D-A4B0-F8898D75C4B2}"/>
+                <a16:creationId xmlns:a16="http://schemas.microsoft.com/office/drawing/2014/main" id="{8B31D86A-34E4-446D-912A-F8E419D75A63}"/>
               </a:ext>
             </a:extLst>
           </p:cNvPr>
@@ -17140,7 +18990,7 @@
           <p:cNvPr id="9" name="">
             <a:extLst xmlns:a="http://schemas.openxmlformats.org/drawingml/2006/main">
               <a:ext uri="{FF2B5EF4-FFF2-40B4-BE49-F238E27FC236}">
-                <a16:creationId xmlns:a16="http://schemas.microsoft.com/office/drawing/2014/main" id="{3C8B886F-96E8-4083-ADD3-11D821ADCA36}"/>
+                <a16:creationId xmlns:a16="http://schemas.microsoft.com/office/drawing/2014/main" id="{9569CF6C-DBEF-449E-8ED2-18AE983A29AC}"/>
               </a:ext>
             </a:extLst>
           </p:cNvPr>
@@ -17202,7 +19052,7 @@
           <p:cNvPr id="10" name="">
             <a:extLst xmlns:a="http://schemas.openxmlformats.org/drawingml/2006/main">
               <a:ext uri="{FF2B5EF4-FFF2-40B4-BE49-F238E27FC236}">
-                <a16:creationId xmlns:a16="http://schemas.microsoft.com/office/drawing/2014/main" id="{DC77051B-848B-4C71-A5C2-DDCF635BB180}"/>
+                <a16:creationId xmlns:a16="http://schemas.microsoft.com/office/drawing/2014/main" id="{6A8E7D25-D45C-4BC5-8942-69B502BA912B}"/>
               </a:ext>
             </a:extLst>
           </p:cNvPr>
@@ -17264,7 +19114,7 @@
           <p:cNvPr id="11" name="">
             <a:extLst xmlns:a="http://schemas.openxmlformats.org/drawingml/2006/main">
               <a:ext uri="{FF2B5EF4-FFF2-40B4-BE49-F238E27FC236}">
-                <a16:creationId xmlns:a16="http://schemas.microsoft.com/office/drawing/2014/main" id="{04C5CDF7-0D8F-4235-B0A0-73D2DF132EB3}"/>
+                <a16:creationId xmlns:a16="http://schemas.microsoft.com/office/drawing/2014/main" id="{03D07FD3-7263-448A-8916-B93B79302A69}"/>
               </a:ext>
             </a:extLst>
           </p:cNvPr>
@@ -17326,7 +19176,7 @@
           <p:cNvPr id="12" name="">
             <a:extLst xmlns:a="http://schemas.openxmlformats.org/drawingml/2006/main">
               <a:ext uri="{FF2B5EF4-FFF2-40B4-BE49-F238E27FC236}">
-                <a16:creationId xmlns:a16="http://schemas.microsoft.com/office/drawing/2014/main" id="{7710E2DD-84D9-47D2-A9C9-8866C59ED5C0}"/>
+                <a16:creationId xmlns:a16="http://schemas.microsoft.com/office/drawing/2014/main" id="{DA0D6FF4-A4B4-475B-8E64-7EF65AA5D397}"/>
               </a:ext>
             </a:extLst>
           </p:cNvPr>
@@ -17388,7 +19238,7 @@
           <p:cNvPr id="13" name="">
             <a:extLst xmlns:a="http://schemas.openxmlformats.org/drawingml/2006/main">
               <a:ext uri="{FF2B5EF4-FFF2-40B4-BE49-F238E27FC236}">
-                <a16:creationId xmlns:a16="http://schemas.microsoft.com/office/drawing/2014/main" id="{6CD4E882-F37D-4D00-94CD-29A2B199384E}"/>
+                <a16:creationId xmlns:a16="http://schemas.microsoft.com/office/drawing/2014/main" id="{2C273DFF-EFFC-4352-922B-35E4F36BFBE9}"/>
               </a:ext>
             </a:extLst>
           </p:cNvPr>
@@ -17450,7 +19300,7 @@
           <p:cNvPr id="14" name="">
             <a:extLst xmlns:a="http://schemas.openxmlformats.org/drawingml/2006/main">
               <a:ext uri="{FF2B5EF4-FFF2-40B4-BE49-F238E27FC236}">
-                <a16:creationId xmlns:a16="http://schemas.microsoft.com/office/drawing/2014/main" id="{CF52A96E-0B84-4F53-BC11-E2A594124E63}"/>
+                <a16:creationId xmlns:a16="http://schemas.microsoft.com/office/drawing/2014/main" id="{79D75FF3-AD1F-43A7-BACF-2413F97CDA5C}"/>
               </a:ext>
             </a:extLst>
           </p:cNvPr>
@@ -17512,7 +19362,7 @@
           <p:cNvPr id="15" name="">
             <a:extLst xmlns:a="http://schemas.openxmlformats.org/drawingml/2006/main">
               <a:ext uri="{FF2B5EF4-FFF2-40B4-BE49-F238E27FC236}">
-                <a16:creationId xmlns:a16="http://schemas.microsoft.com/office/drawing/2014/main" id="{495BCCAE-5914-4DCB-933C-F9740BD5C92F}"/>
+                <a16:creationId xmlns:a16="http://schemas.microsoft.com/office/drawing/2014/main" id="{17F14200-839C-4376-9838-594822FDC817}"/>
               </a:ext>
             </a:extLst>
           </p:cNvPr>
@@ -17574,7 +19424,7 @@
           <p:cNvPr id="16" name="">
             <a:extLst xmlns:a="http://schemas.openxmlformats.org/drawingml/2006/main">
               <a:ext uri="{FF2B5EF4-FFF2-40B4-BE49-F238E27FC236}">
-                <a16:creationId xmlns:a16="http://schemas.microsoft.com/office/drawing/2014/main" id="{D3B64EC1-7F82-4B99-AD46-E0F16AC9005D}"/>
+                <a16:creationId xmlns:a16="http://schemas.microsoft.com/office/drawing/2014/main" id="{C93046CE-3819-4652-AF5F-8518CD30CBE8}"/>
               </a:ext>
             </a:extLst>
           </p:cNvPr>
@@ -17636,7 +19486,7 @@
           <p:cNvPr id="17" name="">
             <a:extLst xmlns:a="http://schemas.openxmlformats.org/drawingml/2006/main">
               <a:ext uri="{FF2B5EF4-FFF2-40B4-BE49-F238E27FC236}">
-                <a16:creationId xmlns:a16="http://schemas.microsoft.com/office/drawing/2014/main" id="{431D7BE7-0D7F-4A5F-8211-BDDC5C558BC0}"/>
+                <a16:creationId xmlns:a16="http://schemas.microsoft.com/office/drawing/2014/main" id="{5A3AAA66-12CB-470C-9959-18B356F6C8F0}"/>
               </a:ext>
             </a:extLst>
           </p:cNvPr>
@@ -17667,7 +19517,7 @@
           <p:cNvPr id="18" name="">
             <a:extLst xmlns:a="http://schemas.openxmlformats.org/drawingml/2006/main">
               <a:ext uri="{FF2B5EF4-FFF2-40B4-BE49-F238E27FC236}">
-                <a16:creationId xmlns:a16="http://schemas.microsoft.com/office/drawing/2014/main" id="{48DAF95E-CF3D-493D-9CF6-C668FDC87C4A}"/>
+                <a16:creationId xmlns:a16="http://schemas.microsoft.com/office/drawing/2014/main" id="{3D14920E-C4C6-4393-A1F9-D54E3D4C19D7}"/>
               </a:ext>
             </a:extLst>
           </p:cNvPr>
@@ -17729,7 +19579,7 @@
           <p:cNvPr id="19" name="">
             <a:extLst xmlns:a="http://schemas.openxmlformats.org/drawingml/2006/main">
               <a:ext uri="{FF2B5EF4-FFF2-40B4-BE49-F238E27FC236}">
-                <a16:creationId xmlns:a16="http://schemas.microsoft.com/office/drawing/2014/main" id="{D21B0A94-A136-4483-A168-9FBEED671254}"/>
+                <a16:creationId xmlns:a16="http://schemas.microsoft.com/office/drawing/2014/main" id="{C17DE3AD-2CCF-43FE-85DB-69CFFB075A6B}"/>
               </a:ext>
             </a:extLst>
           </p:cNvPr>
@@ -17818,7 +19668,7 @@
           <p:cNvPr id="20" name="">
             <a:extLst xmlns:a="http://schemas.openxmlformats.org/drawingml/2006/main">
               <a:ext uri="{FF2B5EF4-FFF2-40B4-BE49-F238E27FC236}">
-                <a16:creationId xmlns:a16="http://schemas.microsoft.com/office/drawing/2014/main" id="{4992ED3F-C308-4711-97C1-BF9C11FAB6A3}"/>
+                <a16:creationId xmlns:a16="http://schemas.microsoft.com/office/drawing/2014/main" id="{B619AAA9-A9D8-442C-9B5A-81677F02D4B2}"/>
               </a:ext>
             </a:extLst>
           </p:cNvPr>
@@ -17878,7 +19728,7 @@
     </p:spTree>
     <p:extLst>
       <p:ext uri="{BB962C8B-B14F-4D97-AF65-F5344CB8AC3E}">
-        <p14:creationId xmlns:p14="http://schemas.microsoft.com/office/powerpoint/2010/main" val="1340784719"/>
+        <p14:creationId xmlns:p14="http://schemas.microsoft.com/office/powerpoint/2010/main" val="169880380"/>
       </p:ext>
     </p:extLst>
   </p:cSld>
@@ -17909,7 +19759,7 @@
           <p:cNvPr id="15" name="">
             <a:extLst xmlns:a="http://schemas.openxmlformats.org/drawingml/2006/main">
               <a:ext uri="{FF2B5EF4-FFF2-40B4-BE49-F238E27FC236}">
-                <a16:creationId xmlns:a16="http://schemas.microsoft.com/office/drawing/2014/main" id="{328E4971-B7BD-4769-ACF8-1CCDCECB07F1}"/>
+                <a16:creationId xmlns:a16="http://schemas.microsoft.com/office/drawing/2014/main" id="{A2C64689-03CD-4A4A-8708-96D68B95F04E}"/>
               </a:ext>
             </a:extLst>
           </p:cNvPr>
@@ -17971,7 +19821,7 @@
           <p:cNvPr id="2" name="">
             <a:extLst xmlns:a="http://schemas.openxmlformats.org/drawingml/2006/main">
               <a:ext uri="{FF2B5EF4-FFF2-40B4-BE49-F238E27FC236}">
-                <a16:creationId xmlns:a16="http://schemas.microsoft.com/office/drawing/2014/main" id="{1618CC40-5D78-4C87-A2A8-4A6BF4969052}"/>
+                <a16:creationId xmlns:a16="http://schemas.microsoft.com/office/drawing/2014/main" id="{C079AD4C-9DD7-4526-8A12-8EE90DDF574F}"/>
               </a:ext>
             </a:extLst>
           </p:cNvPr>
@@ -18033,7 +19883,7 @@
           <p:cNvPr id="3" name="">
             <a:extLst xmlns:a="http://schemas.openxmlformats.org/drawingml/2006/main">
               <a:ext uri="{FF2B5EF4-FFF2-40B4-BE49-F238E27FC236}">
-                <a16:creationId xmlns:a16="http://schemas.microsoft.com/office/drawing/2014/main" id="{967D3C6A-15C1-4185-A805-0C2E7481EA28}"/>
+                <a16:creationId xmlns:a16="http://schemas.microsoft.com/office/drawing/2014/main" id="{2E5FED43-7F9F-4A48-BC53-FB144C46D0B5}"/>
               </a:ext>
             </a:extLst>
           </p:cNvPr>
@@ -18095,7 +19945,7 @@
           <p:cNvPr id="4" name="">
             <a:extLst xmlns:a="http://schemas.openxmlformats.org/drawingml/2006/main">
               <a:ext uri="{FF2B5EF4-FFF2-40B4-BE49-F238E27FC236}">
-                <a16:creationId xmlns:a16="http://schemas.microsoft.com/office/drawing/2014/main" id="{99947EFD-58FC-4CDF-B338-1DE3ABF58189}"/>
+                <a16:creationId xmlns:a16="http://schemas.microsoft.com/office/drawing/2014/main" id="{377F6DE4-357D-4EBC-B35F-69F4453160B5}"/>
               </a:ext>
             </a:extLst>
           </p:cNvPr>
@@ -18126,7 +19976,7 @@
           <p:cNvPr id="5" name="">
             <a:extLst xmlns:a="http://schemas.openxmlformats.org/drawingml/2006/main">
               <a:ext uri="{FF2B5EF4-FFF2-40B4-BE49-F238E27FC236}">
-                <a16:creationId xmlns:a16="http://schemas.microsoft.com/office/drawing/2014/main" id="{6384E070-64A6-4D7C-A8B8-6CE3E62046CF}"/>
+                <a16:creationId xmlns:a16="http://schemas.microsoft.com/office/drawing/2014/main" id="{2F7E0191-FBA9-4CA5-81A6-30CCD76B6039}"/>
               </a:ext>
             </a:extLst>
           </p:cNvPr>
@@ -18188,7 +20038,7 @@
           <p:cNvPr id="6" name="">
             <a:extLst xmlns:a="http://schemas.openxmlformats.org/drawingml/2006/main">
               <a:ext uri="{FF2B5EF4-FFF2-40B4-BE49-F238E27FC236}">
-                <a16:creationId xmlns:a16="http://schemas.microsoft.com/office/drawing/2014/main" id="{CB81AC9E-F39B-4944-8D1C-05E398F1648C}"/>
+                <a16:creationId xmlns:a16="http://schemas.microsoft.com/office/drawing/2014/main" id="{4187E5B4-5BC4-4CBB-8A52-BB68ECA677C7}"/>
               </a:ext>
             </a:extLst>
           </p:cNvPr>
@@ -18219,7 +20069,7 @@
           <p:cNvPr id="7" name="">
             <a:extLst xmlns:a="http://schemas.openxmlformats.org/drawingml/2006/main">
               <a:ext uri="{FF2B5EF4-FFF2-40B4-BE49-F238E27FC236}">
-                <a16:creationId xmlns:a16="http://schemas.microsoft.com/office/drawing/2014/main" id="{42EEC018-9D4E-426D-B6AF-A270B0855F9C}"/>
+                <a16:creationId xmlns:a16="http://schemas.microsoft.com/office/drawing/2014/main" id="{9749D7F3-7D63-4116-86E7-62B7153B486A}"/>
               </a:ext>
             </a:extLst>
           </p:cNvPr>
@@ -18362,7 +20212,7 @@
           <p:cNvPr id="8" name="">
             <a:extLst xmlns:a="http://schemas.openxmlformats.org/drawingml/2006/main">
               <a:ext uri="{FF2B5EF4-FFF2-40B4-BE49-F238E27FC236}">
-                <a16:creationId xmlns:a16="http://schemas.microsoft.com/office/drawing/2014/main" id="{78BEF223-8B0F-4D5F-8465-A38F82E7543A}"/>
+                <a16:creationId xmlns:a16="http://schemas.microsoft.com/office/drawing/2014/main" id="{800A92E4-C19F-4DF2-A976-B0CC5CA539FE}"/>
               </a:ext>
             </a:extLst>
           </p:cNvPr>
@@ -18424,7 +20274,7 @@
           <p:cNvPr id="9" name="">
             <a:extLst xmlns:a="http://schemas.openxmlformats.org/drawingml/2006/main">
               <a:ext uri="{FF2B5EF4-FFF2-40B4-BE49-F238E27FC236}">
-                <a16:creationId xmlns:a16="http://schemas.microsoft.com/office/drawing/2014/main" id="{D722A92B-C0EA-4FCC-B647-40E6B02370DD}"/>
+                <a16:creationId xmlns:a16="http://schemas.microsoft.com/office/drawing/2014/main" id="{DFBAC7FA-09A8-4A7E-B0AC-6EE4017B473F}"/>
               </a:ext>
             </a:extLst>
           </p:cNvPr>
@@ -18486,7 +20336,7 @@
           <p:cNvPr id="10" name="">
             <a:extLst xmlns:a="http://schemas.openxmlformats.org/drawingml/2006/main">
               <a:ext uri="{FF2B5EF4-FFF2-40B4-BE49-F238E27FC236}">
-                <a16:creationId xmlns:a16="http://schemas.microsoft.com/office/drawing/2014/main" id="{C568DEFD-A24D-451D-948B-F04FC6AF8616}"/>
+                <a16:creationId xmlns:a16="http://schemas.microsoft.com/office/drawing/2014/main" id="{FA23B581-4699-43AD-98CB-6B47B761E991}"/>
               </a:ext>
             </a:extLst>
           </p:cNvPr>
@@ -18517,7 +20367,7 @@
           <p:cNvPr id="11" name="">
             <a:extLst xmlns:a="http://schemas.openxmlformats.org/drawingml/2006/main">
               <a:ext uri="{FF2B5EF4-FFF2-40B4-BE49-F238E27FC236}">
-                <a16:creationId xmlns:a16="http://schemas.microsoft.com/office/drawing/2014/main" id="{E91B45E2-5DB7-49CD-AD61-C7B878BAE567}"/>
+                <a16:creationId xmlns:a16="http://schemas.microsoft.com/office/drawing/2014/main" id="{F3A90DDB-CDD7-4AA5-BD84-5FAD8D1164D6}"/>
               </a:ext>
             </a:extLst>
           </p:cNvPr>
@@ -18660,7 +20510,7 @@
           <p:cNvPr id="12" name="">
             <a:extLst xmlns:a="http://schemas.openxmlformats.org/drawingml/2006/main">
               <a:ext uri="{FF2B5EF4-FFF2-40B4-BE49-F238E27FC236}">
-                <a16:creationId xmlns:a16="http://schemas.microsoft.com/office/drawing/2014/main" id="{B864656B-25C8-45F2-9E1E-9AC81EA58DB4}"/>
+                <a16:creationId xmlns:a16="http://schemas.microsoft.com/office/drawing/2014/main" id="{E4CCC0DD-B567-4592-BBDB-98D215DABA4B}"/>
               </a:ext>
             </a:extLst>
           </p:cNvPr>
@@ -18691,7 +20541,7 @@
           <p:cNvPr id="13" name="">
             <a:extLst xmlns:a="http://schemas.openxmlformats.org/drawingml/2006/main">
               <a:ext uri="{FF2B5EF4-FFF2-40B4-BE49-F238E27FC236}">
-                <a16:creationId xmlns:a16="http://schemas.microsoft.com/office/drawing/2014/main" id="{B7CC6A73-65FB-4609-941D-AB688FC6FEB7}"/>
+                <a16:creationId xmlns:a16="http://schemas.microsoft.com/office/drawing/2014/main" id="{1EF51353-B665-44E3-BE10-98FF6774E9E0}"/>
               </a:ext>
             </a:extLst>
           </p:cNvPr>
@@ -18753,7 +20603,7 @@
           <p:cNvPr id="14" name="">
             <a:extLst xmlns:a="http://schemas.openxmlformats.org/drawingml/2006/main">
               <a:ext uri="{FF2B5EF4-FFF2-40B4-BE49-F238E27FC236}">
-                <a16:creationId xmlns:a16="http://schemas.microsoft.com/office/drawing/2014/main" id="{7FE8BD3C-0999-40B7-A1D8-04A28D3131E4}"/>
+                <a16:creationId xmlns:a16="http://schemas.microsoft.com/office/drawing/2014/main" id="{47793132-DBE7-4F5E-8671-F82A2D3A5F53}"/>
               </a:ext>
             </a:extLst>
           </p:cNvPr>
@@ -18813,7 +20663,7 @@
     </p:spTree>
     <p:extLst>
       <p:ext uri="{BB962C8B-B14F-4D97-AF65-F5344CB8AC3E}">
-        <p14:creationId xmlns:p14="http://schemas.microsoft.com/office/powerpoint/2010/main" val="1119818135"/>
+        <p14:creationId xmlns:p14="http://schemas.microsoft.com/office/powerpoint/2010/main" val="1191311206"/>
       </p:ext>
     </p:extLst>
   </p:cSld>
@@ -18844,7 +20694,7 @@
           <p:cNvPr id="7" name="">
             <a:extLst xmlns:a="http://schemas.openxmlformats.org/drawingml/2006/main">
               <a:ext uri="{FF2B5EF4-FFF2-40B4-BE49-F238E27FC236}">
-                <a16:creationId xmlns:a16="http://schemas.microsoft.com/office/drawing/2014/main" id="{8C71FE71-49FC-414F-A5B1-DDE4E86D9CE6}"/>
+                <a16:creationId xmlns:a16="http://schemas.microsoft.com/office/drawing/2014/main" id="{B154988D-CA94-45ED-8E32-A91F42552EF1}"/>
               </a:ext>
             </a:extLst>
           </p:cNvPr>
@@ -18906,7 +20756,7 @@
           <p:cNvPr id="2" name="">
             <a:extLst xmlns:a="http://schemas.openxmlformats.org/drawingml/2006/main">
               <a:ext uri="{FF2B5EF4-FFF2-40B4-BE49-F238E27FC236}">
-                <a16:creationId xmlns:a16="http://schemas.microsoft.com/office/drawing/2014/main" id="{4ADEBED6-D281-4AFF-94C1-C0B8607BD57D}"/>
+                <a16:creationId xmlns:a16="http://schemas.microsoft.com/office/drawing/2014/main" id="{CB2B568B-D2A6-4147-AF8E-7ABAB4F1FF22}"/>
               </a:ext>
             </a:extLst>
           </p:cNvPr>
@@ -18968,7 +20818,7 @@
           <p:cNvPr id="3" name="">
             <a:extLst xmlns:a="http://schemas.openxmlformats.org/drawingml/2006/main">
               <a:ext uri="{FF2B5EF4-FFF2-40B4-BE49-F238E27FC236}">
-                <a16:creationId xmlns:a16="http://schemas.microsoft.com/office/drawing/2014/main" id="{164B2F83-F305-453D-984C-AE67BFC862F5}"/>
+                <a16:creationId xmlns:a16="http://schemas.microsoft.com/office/drawing/2014/main" id="{35E2D691-BDD9-4ED7-9009-A19CAE6DB551}"/>
               </a:ext>
             </a:extLst>
           </p:cNvPr>
@@ -19030,7 +20880,7 @@
           <p:cNvPr id="4" name="">
             <a:extLst xmlns:a="http://schemas.openxmlformats.org/drawingml/2006/main">
               <a:ext uri="{FF2B5EF4-FFF2-40B4-BE49-F238E27FC236}">
-                <a16:creationId xmlns:a16="http://schemas.microsoft.com/office/drawing/2014/main" id="{C07B9037-AB23-4426-B034-171703B3334A}"/>
+                <a16:creationId xmlns:a16="http://schemas.microsoft.com/office/drawing/2014/main" id="{6C8C8AEF-95A3-4BD0-8937-74B58EE5B84A}"/>
               </a:ext>
             </a:extLst>
           </p:cNvPr>
@@ -19065,7 +20915,7 @@
           <p:nvPr/>
         </p:nvPicPr>
         <p:blipFill>
-          <a:blip xmlns:r="http://schemas.openxmlformats.org/officeDocument/2006/relationships" xmlns:a="http://schemas.openxmlformats.org/drawingml/2006/main" r:embed="R88f2bf63e90d46eb"/>
+          <a:blip xmlns:r="http://schemas.openxmlformats.org/officeDocument/2006/relationships" xmlns:a="http://schemas.openxmlformats.org/drawingml/2006/main" r:embed="R69ddfb98b0294e4b"/>
           <a:stretch xmlns:a="http://schemas.openxmlformats.org/drawingml/2006/main"/>
         </p:blipFill>
         <p:spPr>
@@ -19083,7 +20933,7 @@
           <p:cNvPr id="6" name="">
             <a:extLst xmlns:a="http://schemas.openxmlformats.org/drawingml/2006/main">
               <a:ext uri="{FF2B5EF4-FFF2-40B4-BE49-F238E27FC236}">
-                <a16:creationId xmlns:a16="http://schemas.microsoft.com/office/drawing/2014/main" id="{C0BE3A0F-61F3-4688-B805-B71D5FF62292}"/>
+                <a16:creationId xmlns:a16="http://schemas.microsoft.com/office/drawing/2014/main" id="{15B742F2-67F3-49F1-A5D3-26DF808FC6CD}"/>
               </a:ext>
             </a:extLst>
           </p:cNvPr>
@@ -19143,7 +20993,7 @@
     </p:spTree>
     <p:extLst>
       <p:ext uri="{BB962C8B-B14F-4D97-AF65-F5344CB8AC3E}">
-        <p14:creationId xmlns:p14="http://schemas.microsoft.com/office/powerpoint/2010/main" val="1218593739"/>
+        <p14:creationId xmlns:p14="http://schemas.microsoft.com/office/powerpoint/2010/main" val="421597100"/>
       </p:ext>
     </p:extLst>
   </p:cSld>
@@ -19174,7 +21024,7 @@
           <p:cNvPr id="19" name="">
             <a:extLst xmlns:a="http://schemas.openxmlformats.org/drawingml/2006/main">
               <a:ext uri="{FF2B5EF4-FFF2-40B4-BE49-F238E27FC236}">
-                <a16:creationId xmlns:a16="http://schemas.microsoft.com/office/drawing/2014/main" id="{51149494-FB27-46F5-9D9C-418CB0F5303A}"/>
+                <a16:creationId xmlns:a16="http://schemas.microsoft.com/office/drawing/2014/main" id="{7B8CB6C2-9715-4E28-9556-88F44F7D3B32}"/>
               </a:ext>
             </a:extLst>
           </p:cNvPr>
@@ -19236,7 +21086,7 @@
           <p:cNvPr id="2" name="">
             <a:extLst xmlns:a="http://schemas.openxmlformats.org/drawingml/2006/main">
               <a:ext uri="{FF2B5EF4-FFF2-40B4-BE49-F238E27FC236}">
-                <a16:creationId xmlns:a16="http://schemas.microsoft.com/office/drawing/2014/main" id="{FBAC599C-FF07-4458-B672-ACA4637998A7}"/>
+                <a16:creationId xmlns:a16="http://schemas.microsoft.com/office/drawing/2014/main" id="{2EF059EB-9E91-43F9-BE85-7D6048A41552}"/>
               </a:ext>
             </a:extLst>
           </p:cNvPr>
@@ -19298,7 +21148,7 @@
           <p:cNvPr id="3" name="">
             <a:extLst xmlns:a="http://schemas.openxmlformats.org/drawingml/2006/main">
               <a:ext uri="{FF2B5EF4-FFF2-40B4-BE49-F238E27FC236}">
-                <a16:creationId xmlns:a16="http://schemas.microsoft.com/office/drawing/2014/main" id="{02C8433E-F276-4727-9E41-D7654F3D9939}"/>
+                <a16:creationId xmlns:a16="http://schemas.microsoft.com/office/drawing/2014/main" id="{AF76ADDC-A14D-4E0E-923B-D4302D88545C}"/>
               </a:ext>
             </a:extLst>
           </p:cNvPr>
@@ -19360,7 +21210,7 @@
           <p:cNvPr id="4" name="">
             <a:extLst xmlns:a="http://schemas.openxmlformats.org/drawingml/2006/main">
               <a:ext uri="{FF2B5EF4-FFF2-40B4-BE49-F238E27FC236}">
-                <a16:creationId xmlns:a16="http://schemas.microsoft.com/office/drawing/2014/main" id="{38D15C1C-C914-422B-92C1-B092844DBCE2}"/>
+                <a16:creationId xmlns:a16="http://schemas.microsoft.com/office/drawing/2014/main" id="{4DFA0304-DA70-47D0-9F51-64F4202A9AD4}"/>
               </a:ext>
             </a:extLst>
           </p:cNvPr>
@@ -19391,7 +21241,7 @@
           <p:cNvPr id="5" name="">
             <a:extLst xmlns:a="http://schemas.openxmlformats.org/drawingml/2006/main">
               <a:ext uri="{FF2B5EF4-FFF2-40B4-BE49-F238E27FC236}">
-                <a16:creationId xmlns:a16="http://schemas.microsoft.com/office/drawing/2014/main" id="{9ADB4296-DE19-486C-AE39-F1497613FF0A}"/>
+                <a16:creationId xmlns:a16="http://schemas.microsoft.com/office/drawing/2014/main" id="{DCBCF158-2AE3-4F37-A49F-3A2B72F6F1E8}"/>
               </a:ext>
             </a:extLst>
           </p:cNvPr>
@@ -19453,7 +21303,7 @@
           <p:cNvPr id="6" name="">
             <a:extLst xmlns:a="http://schemas.openxmlformats.org/drawingml/2006/main">
               <a:ext uri="{FF2B5EF4-FFF2-40B4-BE49-F238E27FC236}">
-                <a16:creationId xmlns:a16="http://schemas.microsoft.com/office/drawing/2014/main" id="{8C3BEB64-3A73-4155-9ACB-3EF72E9D1D88}"/>
+                <a16:creationId xmlns:a16="http://schemas.microsoft.com/office/drawing/2014/main" id="{692CB849-C19F-44BC-A2F6-9D78E1F2A381}"/>
               </a:ext>
             </a:extLst>
           </p:cNvPr>
@@ -19484,7 +21334,7 @@
           <p:cNvPr id="7" name="">
             <a:extLst xmlns:a="http://schemas.openxmlformats.org/drawingml/2006/main">
               <a:ext uri="{FF2B5EF4-FFF2-40B4-BE49-F238E27FC236}">
-                <a16:creationId xmlns:a16="http://schemas.microsoft.com/office/drawing/2014/main" id="{E189CA65-9814-45F8-B682-B078E8D98F53}"/>
+                <a16:creationId xmlns:a16="http://schemas.microsoft.com/office/drawing/2014/main" id="{DC28619C-E853-42B8-A502-E07ACE621F60}"/>
               </a:ext>
             </a:extLst>
           </p:cNvPr>
@@ -19573,7 +21423,7 @@
           <p:cNvPr id="8" name="">
             <a:extLst xmlns:a="http://schemas.openxmlformats.org/drawingml/2006/main">
               <a:ext uri="{FF2B5EF4-FFF2-40B4-BE49-F238E27FC236}">
-                <a16:creationId xmlns:a16="http://schemas.microsoft.com/office/drawing/2014/main" id="{9C6CACAA-C847-4090-BA99-B7CC744BAA2D}"/>
+                <a16:creationId xmlns:a16="http://schemas.microsoft.com/office/drawing/2014/main" id="{FCB37004-992E-49B9-A433-680EF4B825DF}"/>
               </a:ext>
             </a:extLst>
           </p:cNvPr>
@@ -19662,7 +21512,7 @@
           <p:cNvPr id="9" name="">
             <a:extLst xmlns:a="http://schemas.openxmlformats.org/drawingml/2006/main">
               <a:ext uri="{FF2B5EF4-FFF2-40B4-BE49-F238E27FC236}">
-                <a16:creationId xmlns:a16="http://schemas.microsoft.com/office/drawing/2014/main" id="{EAB6FF93-1B72-4DA2-AE90-369589CE10D3}"/>
+                <a16:creationId xmlns:a16="http://schemas.microsoft.com/office/drawing/2014/main" id="{77E68A97-89CA-4E1F-962F-BA1F5E9F2E91}"/>
               </a:ext>
             </a:extLst>
           </p:cNvPr>
@@ -19724,7 +21574,7 @@
           <p:cNvPr id="10" name="">
             <a:extLst xmlns:a="http://schemas.openxmlformats.org/drawingml/2006/main">
               <a:ext uri="{FF2B5EF4-FFF2-40B4-BE49-F238E27FC236}">
-                <a16:creationId xmlns:a16="http://schemas.microsoft.com/office/drawing/2014/main" id="{96B2A9D2-1018-4781-88A6-6E452E25D86B}"/>
+                <a16:creationId xmlns:a16="http://schemas.microsoft.com/office/drawing/2014/main" id="{CCF3D809-5B38-41F1-8383-D896E137C841}"/>
               </a:ext>
             </a:extLst>
           </p:cNvPr>
@@ -19786,7 +21636,7 @@
           <p:cNvPr id="11" name="">
             <a:extLst xmlns:a="http://schemas.openxmlformats.org/drawingml/2006/main">
               <a:ext uri="{FF2B5EF4-FFF2-40B4-BE49-F238E27FC236}">
-                <a16:creationId xmlns:a16="http://schemas.microsoft.com/office/drawing/2014/main" id="{BAC84F07-1EC7-412E-879D-F875C57A6676}"/>
+                <a16:creationId xmlns:a16="http://schemas.microsoft.com/office/drawing/2014/main" id="{CAE12FE2-8DC9-4B37-9F08-7A8F93EFFE4C}"/>
               </a:ext>
             </a:extLst>
           </p:cNvPr>
@@ -19817,7 +21667,7 @@
           <p:cNvPr id="12" name="">
             <a:extLst xmlns:a="http://schemas.openxmlformats.org/drawingml/2006/main">
               <a:ext uri="{FF2B5EF4-FFF2-40B4-BE49-F238E27FC236}">
-                <a16:creationId xmlns:a16="http://schemas.microsoft.com/office/drawing/2014/main" id="{DC446636-6DCD-4FCD-9A2A-CD90320B86B2}"/>
+                <a16:creationId xmlns:a16="http://schemas.microsoft.com/office/drawing/2014/main" id="{9ED537C1-FF53-4699-A77E-511DE9EFF276}"/>
               </a:ext>
             </a:extLst>
           </p:cNvPr>
@@ -19906,7 +21756,7 @@
           <p:cNvPr id="13" name="">
             <a:extLst xmlns:a="http://schemas.openxmlformats.org/drawingml/2006/main">
               <a:ext uri="{FF2B5EF4-FFF2-40B4-BE49-F238E27FC236}">
-                <a16:creationId xmlns:a16="http://schemas.microsoft.com/office/drawing/2014/main" id="{9C7E7716-FCBF-494F-B7D9-EDB6CB1F3B86}"/>
+                <a16:creationId xmlns:a16="http://schemas.microsoft.com/office/drawing/2014/main" id="{7FF32096-B63D-4DB5-9FBC-3F0CC15A3C77}"/>
               </a:ext>
             </a:extLst>
           </p:cNvPr>
@@ -19995,7 +21845,7 @@
           <p:cNvPr id="14" name="">
             <a:extLst xmlns:a="http://schemas.openxmlformats.org/drawingml/2006/main">
               <a:ext uri="{FF2B5EF4-FFF2-40B4-BE49-F238E27FC236}">
-                <a16:creationId xmlns:a16="http://schemas.microsoft.com/office/drawing/2014/main" id="{02CA87A6-9B85-44F3-82BF-27649EDE6BB0}"/>
+                <a16:creationId xmlns:a16="http://schemas.microsoft.com/office/drawing/2014/main" id="{0127EF11-152B-4D28-B3DC-646AEBD06900}"/>
               </a:ext>
             </a:extLst>
           </p:cNvPr>
@@ -20057,7 +21907,7 @@
           <p:cNvPr id="15" name="">
             <a:extLst xmlns:a="http://schemas.openxmlformats.org/drawingml/2006/main">
               <a:ext uri="{FF2B5EF4-FFF2-40B4-BE49-F238E27FC236}">
-                <a16:creationId xmlns:a16="http://schemas.microsoft.com/office/drawing/2014/main" id="{1F3957EF-7E84-4064-B436-777CCD661CEE}"/>
+                <a16:creationId xmlns:a16="http://schemas.microsoft.com/office/drawing/2014/main" id="{F3DDF133-931F-43F2-8807-832A5C25EECE}"/>
               </a:ext>
             </a:extLst>
           </p:cNvPr>
@@ -20119,7 +21969,7 @@
           <p:cNvPr id="16" name="">
             <a:extLst xmlns:a="http://schemas.openxmlformats.org/drawingml/2006/main">
               <a:ext uri="{FF2B5EF4-FFF2-40B4-BE49-F238E27FC236}">
-                <a16:creationId xmlns:a16="http://schemas.microsoft.com/office/drawing/2014/main" id="{398BEFBB-539A-4E67-8832-51B31E240EC5}"/>
+                <a16:creationId xmlns:a16="http://schemas.microsoft.com/office/drawing/2014/main" id="{3161CD2C-87BB-4E21-B694-E4D9231468BB}"/>
               </a:ext>
             </a:extLst>
           </p:cNvPr>
@@ -20150,7 +22000,7 @@
           <p:cNvPr id="17" name="">
             <a:extLst xmlns:a="http://schemas.openxmlformats.org/drawingml/2006/main">
               <a:ext uri="{FF2B5EF4-FFF2-40B4-BE49-F238E27FC236}">
-                <a16:creationId xmlns:a16="http://schemas.microsoft.com/office/drawing/2014/main" id="{50F803BE-8BCE-4F5E-9A6D-2D773E46B216}"/>
+                <a16:creationId xmlns:a16="http://schemas.microsoft.com/office/drawing/2014/main" id="{F1F00AC7-300C-430E-B264-5E23624943EE}"/>
               </a:ext>
             </a:extLst>
           </p:cNvPr>
@@ -20212,7 +22062,7 @@
           <p:cNvPr id="18" name="">
             <a:extLst xmlns:a="http://schemas.openxmlformats.org/drawingml/2006/main">
               <a:ext uri="{FF2B5EF4-FFF2-40B4-BE49-F238E27FC236}">
-                <a16:creationId xmlns:a16="http://schemas.microsoft.com/office/drawing/2014/main" id="{986B5FDB-BFC4-4305-8774-B65513A4A28A}"/>
+                <a16:creationId xmlns:a16="http://schemas.microsoft.com/office/drawing/2014/main" id="{696D12BA-6A59-4846-8B59-D248F0903E89}"/>
               </a:ext>
             </a:extLst>
           </p:cNvPr>
@@ -20272,7 +22122,7 @@
     </p:spTree>
     <p:extLst>
       <p:ext uri="{BB962C8B-B14F-4D97-AF65-F5344CB8AC3E}">
-        <p14:creationId xmlns:p14="http://schemas.microsoft.com/office/powerpoint/2010/main" val="1459041465"/>
+        <p14:creationId xmlns:p14="http://schemas.microsoft.com/office/powerpoint/2010/main" val="1681483123"/>
       </p:ext>
     </p:extLst>
   </p:cSld>
@@ -20303,7 +22153,7 @@
           <p:cNvPr id="7" name="">
             <a:extLst xmlns:a="http://schemas.openxmlformats.org/drawingml/2006/main">
               <a:ext uri="{FF2B5EF4-FFF2-40B4-BE49-F238E27FC236}">
-                <a16:creationId xmlns:a16="http://schemas.microsoft.com/office/drawing/2014/main" id="{41015998-D3B8-4158-AA16-EFDE398D2BC3}"/>
+                <a16:creationId xmlns:a16="http://schemas.microsoft.com/office/drawing/2014/main" id="{E9144D9F-F2DB-40D5-996F-11BF30C19557}"/>
               </a:ext>
             </a:extLst>
           </p:cNvPr>
@@ -20365,7 +22215,7 @@
           <p:cNvPr id="2" name="">
             <a:extLst xmlns:a="http://schemas.openxmlformats.org/drawingml/2006/main">
               <a:ext uri="{FF2B5EF4-FFF2-40B4-BE49-F238E27FC236}">
-                <a16:creationId xmlns:a16="http://schemas.microsoft.com/office/drawing/2014/main" id="{052F4469-5E2F-494C-8AFE-89FF34412A67}"/>
+                <a16:creationId xmlns:a16="http://schemas.microsoft.com/office/drawing/2014/main" id="{A698D00C-9644-4EDD-8D60-BBB52CFCD55A}"/>
               </a:ext>
             </a:extLst>
           </p:cNvPr>
@@ -20427,7 +22277,7 @@
           <p:cNvPr id="3" name="">
             <a:extLst xmlns:a="http://schemas.openxmlformats.org/drawingml/2006/main">
               <a:ext uri="{FF2B5EF4-FFF2-40B4-BE49-F238E27FC236}">
-                <a16:creationId xmlns:a16="http://schemas.microsoft.com/office/drawing/2014/main" id="{ED15A8DA-E198-4839-AC9B-F08D7E83B278}"/>
+                <a16:creationId xmlns:a16="http://schemas.microsoft.com/office/drawing/2014/main" id="{5748555C-3CC4-49F1-BBA9-1E28187056B5}"/>
               </a:ext>
             </a:extLst>
           </p:cNvPr>
@@ -20489,7 +22339,7 @@
           <p:cNvPr id="4" name="">
             <a:extLst xmlns:a="http://schemas.openxmlformats.org/drawingml/2006/main">
               <a:ext uri="{FF2B5EF4-FFF2-40B4-BE49-F238E27FC236}">
-                <a16:creationId xmlns:a16="http://schemas.microsoft.com/office/drawing/2014/main" id="{EDA7BD03-225B-4146-8B64-4771AB4DCF40}"/>
+                <a16:creationId xmlns:a16="http://schemas.microsoft.com/office/drawing/2014/main" id="{D9390A01-02EA-43D5-AF4C-250903D6CB1B}"/>
               </a:ext>
             </a:extLst>
           </p:cNvPr>
@@ -20524,7 +22374,7 @@
           <p:nvPr/>
         </p:nvPicPr>
         <p:blipFill>
-          <a:blip xmlns:r="http://schemas.openxmlformats.org/officeDocument/2006/relationships" xmlns:a="http://schemas.openxmlformats.org/drawingml/2006/main" r:embed="R4b81a1c3ba3c4e94"/>
+          <a:blip xmlns:r="http://schemas.openxmlformats.org/officeDocument/2006/relationships" xmlns:a="http://schemas.openxmlformats.org/drawingml/2006/main" r:embed="R2e792e6e54f74c82"/>
           <a:stretch xmlns:a="http://schemas.openxmlformats.org/drawingml/2006/main"/>
         </p:blipFill>
         <p:spPr>
@@ -20542,7 +22392,7 @@
           <p:cNvPr id="6" name="">
             <a:extLst xmlns:a="http://schemas.openxmlformats.org/drawingml/2006/main">
               <a:ext uri="{FF2B5EF4-FFF2-40B4-BE49-F238E27FC236}">
-                <a16:creationId xmlns:a16="http://schemas.microsoft.com/office/drawing/2014/main" id="{1F55902E-D7AE-4023-AEF6-7FD80BCBE7DA}"/>
+                <a16:creationId xmlns:a16="http://schemas.microsoft.com/office/drawing/2014/main" id="{56C3FE00-65D3-423B-B495-D5572FD665C6}"/>
               </a:ext>
             </a:extLst>
           </p:cNvPr>
@@ -20602,7 +22452,7 @@
     </p:spTree>
     <p:extLst>
       <p:ext uri="{BB962C8B-B14F-4D97-AF65-F5344CB8AC3E}">
-        <p14:creationId xmlns:p14="http://schemas.microsoft.com/office/powerpoint/2010/main" val="2088421059"/>
+        <p14:creationId xmlns:p14="http://schemas.microsoft.com/office/powerpoint/2010/main" val="1567362112"/>
       </p:ext>
     </p:extLst>
   </p:cSld>
@@ -20633,7 +22483,7 @@
           <p:cNvPr id="25" name="">
             <a:extLst xmlns:a="http://schemas.openxmlformats.org/drawingml/2006/main">
               <a:ext uri="{FF2B5EF4-FFF2-40B4-BE49-F238E27FC236}">
-                <a16:creationId xmlns:a16="http://schemas.microsoft.com/office/drawing/2014/main" id="{4A92C7C8-9918-4472-B94F-2AA7499E8EB9}"/>
+                <a16:creationId xmlns:a16="http://schemas.microsoft.com/office/drawing/2014/main" id="{738508A7-80A7-45AF-BC86-87CE79BEEE15}"/>
               </a:ext>
             </a:extLst>
           </p:cNvPr>
@@ -20695,7 +22545,7 @@
           <p:cNvPr id="2" name="">
             <a:extLst xmlns:a="http://schemas.openxmlformats.org/drawingml/2006/main">
               <a:ext uri="{FF2B5EF4-FFF2-40B4-BE49-F238E27FC236}">
-                <a16:creationId xmlns:a16="http://schemas.microsoft.com/office/drawing/2014/main" id="{4F606D12-C787-4282-9FB4-03C9248CBCF4}"/>
+                <a16:creationId xmlns:a16="http://schemas.microsoft.com/office/drawing/2014/main" id="{F7E0FF71-9DE8-4CA1-A0E9-6F1CDBBBC15D}"/>
               </a:ext>
             </a:extLst>
           </p:cNvPr>
@@ -20757,7 +22607,7 @@
           <p:cNvPr id="3" name="">
             <a:extLst xmlns:a="http://schemas.openxmlformats.org/drawingml/2006/main">
               <a:ext uri="{FF2B5EF4-FFF2-40B4-BE49-F238E27FC236}">
-                <a16:creationId xmlns:a16="http://schemas.microsoft.com/office/drawing/2014/main" id="{D7E86494-64E6-477E-9130-62DEF9D394FB}"/>
+                <a16:creationId xmlns:a16="http://schemas.microsoft.com/office/drawing/2014/main" id="{903B1FBD-CB4A-47B3-9EBD-596545FB5BAC}"/>
               </a:ext>
             </a:extLst>
           </p:cNvPr>
@@ -20819,7 +22669,7 @@
           <p:cNvPr id="4" name="">
             <a:extLst xmlns:a="http://schemas.openxmlformats.org/drawingml/2006/main">
               <a:ext uri="{FF2B5EF4-FFF2-40B4-BE49-F238E27FC236}">
-                <a16:creationId xmlns:a16="http://schemas.microsoft.com/office/drawing/2014/main" id="{1403D835-9403-43AE-BB08-0943AC717F5E}"/>
+                <a16:creationId xmlns:a16="http://schemas.microsoft.com/office/drawing/2014/main" id="{B9E1F11E-C474-4D46-AA71-440DCDB8F222}"/>
               </a:ext>
             </a:extLst>
           </p:cNvPr>
@@ -20850,7 +22700,7 @@
           <p:cNvPr id="5" name="">
             <a:extLst xmlns:a="http://schemas.openxmlformats.org/drawingml/2006/main">
               <a:ext uri="{FF2B5EF4-FFF2-40B4-BE49-F238E27FC236}">
-                <a16:creationId xmlns:a16="http://schemas.microsoft.com/office/drawing/2014/main" id="{DD5D7C81-4B80-4B17-9B60-4CD3FC5D8BE6}"/>
+                <a16:creationId xmlns:a16="http://schemas.microsoft.com/office/drawing/2014/main" id="{E64AECF2-8509-4334-B9E4-AF6F2FB1CDE5}"/>
               </a:ext>
             </a:extLst>
           </p:cNvPr>
@@ -20912,7 +22762,7 @@
           <p:cNvPr id="6" name="">
             <a:extLst xmlns:a="http://schemas.openxmlformats.org/drawingml/2006/main">
               <a:ext uri="{FF2B5EF4-FFF2-40B4-BE49-F238E27FC236}">
-                <a16:creationId xmlns:a16="http://schemas.microsoft.com/office/drawing/2014/main" id="{96A0BCF6-FE71-4557-B808-1AB3F2D5ED01}"/>
+                <a16:creationId xmlns:a16="http://schemas.microsoft.com/office/drawing/2014/main" id="{DC9D4351-C746-47EA-9B33-03DC357EC474}"/>
               </a:ext>
             </a:extLst>
           </p:cNvPr>
@@ -20974,7 +22824,7 @@
           <p:cNvPr id="7" name="">
             <a:extLst xmlns:a="http://schemas.openxmlformats.org/drawingml/2006/main">
               <a:ext uri="{FF2B5EF4-FFF2-40B4-BE49-F238E27FC236}">
-                <a16:creationId xmlns:a16="http://schemas.microsoft.com/office/drawing/2014/main" id="{CC80409D-04FC-4D7C-AA15-B96B071B7B1B}"/>
+                <a16:creationId xmlns:a16="http://schemas.microsoft.com/office/drawing/2014/main" id="{23C4F910-B85F-47BA-86C2-E37145A62047}"/>
               </a:ext>
             </a:extLst>
           </p:cNvPr>
@@ -21005,7 +22855,7 @@
           <p:cNvPr id="8" name="">
             <a:extLst xmlns:a="http://schemas.openxmlformats.org/drawingml/2006/main">
               <a:ext uri="{FF2B5EF4-FFF2-40B4-BE49-F238E27FC236}">
-                <a16:creationId xmlns:a16="http://schemas.microsoft.com/office/drawing/2014/main" id="{43613ED2-F333-4C8D-BE61-BE1067EA1387}"/>
+                <a16:creationId xmlns:a16="http://schemas.microsoft.com/office/drawing/2014/main" id="{C0CB40DA-FCB1-41BD-B720-CB5F54816753}"/>
               </a:ext>
             </a:extLst>
           </p:cNvPr>
@@ -21067,7 +22917,7 @@
           <p:cNvPr id="9" name="">
             <a:extLst xmlns:a="http://schemas.openxmlformats.org/drawingml/2006/main">
               <a:ext uri="{FF2B5EF4-FFF2-40B4-BE49-F238E27FC236}">
-                <a16:creationId xmlns:a16="http://schemas.microsoft.com/office/drawing/2014/main" id="{6B8D46DE-87A0-40D9-A699-A3ECF5F05941}"/>
+                <a16:creationId xmlns:a16="http://schemas.microsoft.com/office/drawing/2014/main" id="{4C44D6FE-DB4B-48B0-A624-6E710A74EF22}"/>
               </a:ext>
             </a:extLst>
           </p:cNvPr>
@@ -21129,7 +22979,7 @@
           <p:cNvPr id="10" name="">
             <a:extLst xmlns:a="http://schemas.openxmlformats.org/drawingml/2006/main">
               <a:ext uri="{FF2B5EF4-FFF2-40B4-BE49-F238E27FC236}">
-                <a16:creationId xmlns:a16="http://schemas.microsoft.com/office/drawing/2014/main" id="{7E2C0089-9AE7-4DC8-9FC9-57AFF3288D47}"/>
+                <a16:creationId xmlns:a16="http://schemas.microsoft.com/office/drawing/2014/main" id="{EA96C0B8-B9B2-40DF-9CA5-B877672762DF}"/>
               </a:ext>
             </a:extLst>
           </p:cNvPr>
@@ -21160,7 +23010,7 @@
           <p:cNvPr id="11" name="">
             <a:extLst xmlns:a="http://schemas.openxmlformats.org/drawingml/2006/main">
               <a:ext uri="{FF2B5EF4-FFF2-40B4-BE49-F238E27FC236}">
-                <a16:creationId xmlns:a16="http://schemas.microsoft.com/office/drawing/2014/main" id="{CC227589-1479-4987-BE25-8B629E0EA2AB}"/>
+                <a16:creationId xmlns:a16="http://schemas.microsoft.com/office/drawing/2014/main" id="{EA15F218-394E-4107-829F-7A3C288A0C6C}"/>
               </a:ext>
             </a:extLst>
           </p:cNvPr>
@@ -21222,7 +23072,7 @@
           <p:cNvPr id="12" name="">
             <a:extLst xmlns:a="http://schemas.openxmlformats.org/drawingml/2006/main">
               <a:ext uri="{FF2B5EF4-FFF2-40B4-BE49-F238E27FC236}">
-                <a16:creationId xmlns:a16="http://schemas.microsoft.com/office/drawing/2014/main" id="{6878044F-E9A1-4FF0-8518-52C84676B6A3}"/>
+                <a16:creationId xmlns:a16="http://schemas.microsoft.com/office/drawing/2014/main" id="{16E7D3CE-F2DC-40E8-8F0A-4844A5E17EE1}"/>
               </a:ext>
             </a:extLst>
           </p:cNvPr>
@@ -21284,7 +23134,7 @@
           <p:cNvPr id="13" name="">
             <a:extLst xmlns:a="http://schemas.openxmlformats.org/drawingml/2006/main">
               <a:ext uri="{FF2B5EF4-FFF2-40B4-BE49-F238E27FC236}">
-                <a16:creationId xmlns:a16="http://schemas.microsoft.com/office/drawing/2014/main" id="{2999C724-554B-4802-BFF6-5B606925C6F8}"/>
+                <a16:creationId xmlns:a16="http://schemas.microsoft.com/office/drawing/2014/main" id="{A6AF9CEC-43C4-4E31-A8DE-9C9888A697FE}"/>
               </a:ext>
             </a:extLst>
           </p:cNvPr>
@@ -21315,7 +23165,7 @@
           <p:cNvPr id="14" name="">
             <a:extLst xmlns:a="http://schemas.openxmlformats.org/drawingml/2006/main">
               <a:ext uri="{FF2B5EF4-FFF2-40B4-BE49-F238E27FC236}">
-                <a16:creationId xmlns:a16="http://schemas.microsoft.com/office/drawing/2014/main" id="{2E733DD8-F232-4F35-A410-002E01D14D6C}"/>
+                <a16:creationId xmlns:a16="http://schemas.microsoft.com/office/drawing/2014/main" id="{4C65CADD-F114-4816-A53B-4CF09501DA5E}"/>
               </a:ext>
             </a:extLst>
           </p:cNvPr>
@@ -21377,7 +23227,7 @@
           <p:cNvPr id="15" name="">
             <a:extLst xmlns:a="http://schemas.openxmlformats.org/drawingml/2006/main">
               <a:ext uri="{FF2B5EF4-FFF2-40B4-BE49-F238E27FC236}">
-                <a16:creationId xmlns:a16="http://schemas.microsoft.com/office/drawing/2014/main" id="{653F2C6E-6732-47F2-B004-2EE8CC598A12}"/>
+                <a16:creationId xmlns:a16="http://schemas.microsoft.com/office/drawing/2014/main" id="{ADF56145-6993-494F-ABCC-E340C1D5F07D}"/>
               </a:ext>
             </a:extLst>
           </p:cNvPr>
@@ -21408,7 +23258,7 @@
           <p:cNvPr id="16" name="">
             <a:extLst xmlns:a="http://schemas.openxmlformats.org/drawingml/2006/main">
               <a:ext uri="{FF2B5EF4-FFF2-40B4-BE49-F238E27FC236}">
-                <a16:creationId xmlns:a16="http://schemas.microsoft.com/office/drawing/2014/main" id="{2C2D279A-810C-4267-B4C9-74732FFE83D4}"/>
+                <a16:creationId xmlns:a16="http://schemas.microsoft.com/office/drawing/2014/main" id="{33FF4C77-78BA-4B84-BD9A-22D7A56DD824}"/>
               </a:ext>
             </a:extLst>
           </p:cNvPr>
@@ -21470,7 +23320,7 @@
           <p:cNvPr id="17" name="">
             <a:extLst xmlns:a="http://schemas.openxmlformats.org/drawingml/2006/main">
               <a:ext uri="{FF2B5EF4-FFF2-40B4-BE49-F238E27FC236}">
-                <a16:creationId xmlns:a16="http://schemas.microsoft.com/office/drawing/2014/main" id="{E81D08AC-2A5D-43DF-8C36-966CAEF698A8}"/>
+                <a16:creationId xmlns:a16="http://schemas.microsoft.com/office/drawing/2014/main" id="{5D25B2AA-5880-4CB2-8296-F05AFE313536}"/>
               </a:ext>
             </a:extLst>
           </p:cNvPr>
@@ -21532,7 +23382,7 @@
           <p:cNvPr id="18" name="">
             <a:extLst xmlns:a="http://schemas.openxmlformats.org/drawingml/2006/main">
               <a:ext uri="{FF2B5EF4-FFF2-40B4-BE49-F238E27FC236}">
-                <a16:creationId xmlns:a16="http://schemas.microsoft.com/office/drawing/2014/main" id="{145937C7-754F-47AE-804B-F7F33EEE782C}"/>
+                <a16:creationId xmlns:a16="http://schemas.microsoft.com/office/drawing/2014/main" id="{742290A7-2CBD-409D-88EA-C104FF4ACBDF}"/>
               </a:ext>
             </a:extLst>
           </p:cNvPr>
@@ -21594,7 +23444,7 @@
           <p:cNvPr id="19" name="">
             <a:extLst xmlns:a="http://schemas.openxmlformats.org/drawingml/2006/main">
               <a:ext uri="{FF2B5EF4-FFF2-40B4-BE49-F238E27FC236}">
-                <a16:creationId xmlns:a16="http://schemas.microsoft.com/office/drawing/2014/main" id="{13301F26-80A7-4559-9B14-DB44B4EAEC1F}"/>
+                <a16:creationId xmlns:a16="http://schemas.microsoft.com/office/drawing/2014/main" id="{8B686324-0EE1-4989-B325-C1CBFD25FEE7}"/>
               </a:ext>
             </a:extLst>
           </p:cNvPr>
@@ -21656,7 +23506,7 @@
           <p:cNvPr id="20" name="">
             <a:extLst xmlns:a="http://schemas.openxmlformats.org/drawingml/2006/main">
               <a:ext uri="{FF2B5EF4-FFF2-40B4-BE49-F238E27FC236}">
-                <a16:creationId xmlns:a16="http://schemas.microsoft.com/office/drawing/2014/main" id="{6991BF39-87B2-4C89-B161-862FC442E779}"/>
+                <a16:creationId xmlns:a16="http://schemas.microsoft.com/office/drawing/2014/main" id="{828E0FDB-84A2-4F6C-912C-7C76B429C00F}"/>
               </a:ext>
             </a:extLst>
           </p:cNvPr>
@@ -21718,7 +23568,7 @@
           <p:cNvPr id="21" name="">
             <a:extLst xmlns:a="http://schemas.openxmlformats.org/drawingml/2006/main">
               <a:ext uri="{FF2B5EF4-FFF2-40B4-BE49-F238E27FC236}">
-                <a16:creationId xmlns:a16="http://schemas.microsoft.com/office/drawing/2014/main" id="{A9C44F98-4EF7-4BF8-927A-5748D6C08621}"/>
+                <a16:creationId xmlns:a16="http://schemas.microsoft.com/office/drawing/2014/main" id="{79835168-0880-43B5-862F-7AAA9C64D283}"/>
               </a:ext>
             </a:extLst>
           </p:cNvPr>
@@ -21780,7 +23630,7 @@
           <p:cNvPr id="22" name="">
             <a:extLst xmlns:a="http://schemas.openxmlformats.org/drawingml/2006/main">
               <a:ext uri="{FF2B5EF4-FFF2-40B4-BE49-F238E27FC236}">
-                <a16:creationId xmlns:a16="http://schemas.microsoft.com/office/drawing/2014/main" id="{4D264B3C-E73E-4641-89DF-4C051A02857A}"/>
+                <a16:creationId xmlns:a16="http://schemas.microsoft.com/office/drawing/2014/main" id="{06683B84-7853-4A6F-83A3-B6899B2771AF}"/>
               </a:ext>
             </a:extLst>
           </p:cNvPr>
@@ -21811,7 +23661,7 @@
           <p:cNvPr id="23" name="">
             <a:extLst xmlns:a="http://schemas.openxmlformats.org/drawingml/2006/main">
               <a:ext uri="{FF2B5EF4-FFF2-40B4-BE49-F238E27FC236}">
-                <a16:creationId xmlns:a16="http://schemas.microsoft.com/office/drawing/2014/main" id="{FCA95F9F-DF8D-44CB-86CE-9CEFFDFAECEC}"/>
+                <a16:creationId xmlns:a16="http://schemas.microsoft.com/office/drawing/2014/main" id="{070A9CDC-639E-406D-A9D8-F6044C5E6222}"/>
               </a:ext>
             </a:extLst>
           </p:cNvPr>
@@ -21873,7 +23723,7 @@
           <p:cNvPr id="24" name="">
             <a:extLst xmlns:a="http://schemas.openxmlformats.org/drawingml/2006/main">
               <a:ext uri="{FF2B5EF4-FFF2-40B4-BE49-F238E27FC236}">
-                <a16:creationId xmlns:a16="http://schemas.microsoft.com/office/drawing/2014/main" id="{1F4D980E-77A4-440A-8273-6483298C8DDF}"/>
+                <a16:creationId xmlns:a16="http://schemas.microsoft.com/office/drawing/2014/main" id="{07D6DFA0-F02D-476D-A2A4-D4606C4C75D9}"/>
               </a:ext>
             </a:extLst>
           </p:cNvPr>
@@ -21933,7 +23783,7 @@
     </p:spTree>
     <p:extLst>
       <p:ext uri="{BB962C8B-B14F-4D97-AF65-F5344CB8AC3E}">
-        <p14:creationId xmlns:p14="http://schemas.microsoft.com/office/powerpoint/2010/main" val="1742490521"/>
+        <p14:creationId xmlns:p14="http://schemas.microsoft.com/office/powerpoint/2010/main" val="1279147242"/>
       </p:ext>
     </p:extLst>
   </p:cSld>
@@ -21964,7 +23814,7 @@
           <p:cNvPr id="72" name="">
             <a:extLst xmlns:a="http://schemas.openxmlformats.org/drawingml/2006/main">
               <a:ext uri="{FF2B5EF4-FFF2-40B4-BE49-F238E27FC236}">
-                <a16:creationId xmlns:a16="http://schemas.microsoft.com/office/drawing/2014/main" id="{F0BAC3A6-599B-439B-A1E9-262638C38D5C}"/>
+                <a16:creationId xmlns:a16="http://schemas.microsoft.com/office/drawing/2014/main" id="{3E5FFF3F-A01F-4E26-9EEE-302E4D7524E4}"/>
               </a:ext>
             </a:extLst>
           </p:cNvPr>
@@ -22026,7 +23876,7 @@
           <p:cNvPr id="2" name="">
             <a:extLst xmlns:a="http://schemas.openxmlformats.org/drawingml/2006/main">
               <a:ext uri="{FF2B5EF4-FFF2-40B4-BE49-F238E27FC236}">
-                <a16:creationId xmlns:a16="http://schemas.microsoft.com/office/drawing/2014/main" id="{431FE078-244A-4322-B51D-3DBA89A63E71}"/>
+                <a16:creationId xmlns:a16="http://schemas.microsoft.com/office/drawing/2014/main" id="{224DE04E-80B8-46F4-8072-A4B3230D1709}"/>
               </a:ext>
             </a:extLst>
           </p:cNvPr>
@@ -22088,7 +23938,7 @@
           <p:cNvPr id="3" name="">
             <a:extLst xmlns:a="http://schemas.openxmlformats.org/drawingml/2006/main">
               <a:ext uri="{FF2B5EF4-FFF2-40B4-BE49-F238E27FC236}">
-                <a16:creationId xmlns:a16="http://schemas.microsoft.com/office/drawing/2014/main" id="{945FF534-9B1D-489E-8ADC-3FC2676BA406}"/>
+                <a16:creationId xmlns:a16="http://schemas.microsoft.com/office/drawing/2014/main" id="{DE60EC7E-DECE-42C8-A1C4-0FCCCD5CF456}"/>
               </a:ext>
             </a:extLst>
           </p:cNvPr>
@@ -22150,7 +24000,7 @@
           <p:cNvPr id="4" name="">
             <a:extLst xmlns:a="http://schemas.openxmlformats.org/drawingml/2006/main">
               <a:ext uri="{FF2B5EF4-FFF2-40B4-BE49-F238E27FC236}">
-                <a16:creationId xmlns:a16="http://schemas.microsoft.com/office/drawing/2014/main" id="{F59C6A16-D894-4FA7-98EA-405C9327C90F}"/>
+                <a16:creationId xmlns:a16="http://schemas.microsoft.com/office/drawing/2014/main" id="{30963328-E2BF-4A69-B5CD-05AAD4481C3C}"/>
               </a:ext>
             </a:extLst>
           </p:cNvPr>
@@ -22181,7 +24031,7 @@
           <p:cNvPr id="5" name="">
             <a:extLst xmlns:a="http://schemas.openxmlformats.org/drawingml/2006/main">
               <a:ext uri="{FF2B5EF4-FFF2-40B4-BE49-F238E27FC236}">
-                <a16:creationId xmlns:a16="http://schemas.microsoft.com/office/drawing/2014/main" id="{6550E6B9-690A-4E69-8757-6A1004652419}"/>
+                <a16:creationId xmlns:a16="http://schemas.microsoft.com/office/drawing/2014/main" id="{DB96B137-B276-4E84-9229-8B5F58435183}"/>
               </a:ext>
             </a:extLst>
           </p:cNvPr>
@@ -22214,7 +24064,7 @@
           <p:cNvPr id="6" name="">
             <a:extLst xmlns:a="http://schemas.openxmlformats.org/drawingml/2006/main">
               <a:ext uri="{FF2B5EF4-FFF2-40B4-BE49-F238E27FC236}">
-                <a16:creationId xmlns:a16="http://schemas.microsoft.com/office/drawing/2014/main" id="{0E009763-0230-4A16-8BE2-6DE24E830CC7}"/>
+                <a16:creationId xmlns:a16="http://schemas.microsoft.com/office/drawing/2014/main" id="{40C93204-36F3-40EE-A55B-8A70FB13CB3A}"/>
               </a:ext>
             </a:extLst>
           </p:cNvPr>
@@ -22276,7 +24126,7 @@
           <p:cNvPr id="7" name="">
             <a:extLst xmlns:a="http://schemas.openxmlformats.org/drawingml/2006/main">
               <a:ext uri="{FF2B5EF4-FFF2-40B4-BE49-F238E27FC236}">
-                <a16:creationId xmlns:a16="http://schemas.microsoft.com/office/drawing/2014/main" id="{EBE512EA-F1C3-4D30-9775-DF75C511D78F}"/>
+                <a16:creationId xmlns:a16="http://schemas.microsoft.com/office/drawing/2014/main" id="{F5BB8F4D-E1EB-4413-B6CD-73610FB4D2F5}"/>
               </a:ext>
             </a:extLst>
           </p:cNvPr>
@@ -22309,7 +24159,7 @@
           <p:cNvPr id="8" name="">
             <a:extLst xmlns:a="http://schemas.openxmlformats.org/drawingml/2006/main">
               <a:ext uri="{FF2B5EF4-FFF2-40B4-BE49-F238E27FC236}">
-                <a16:creationId xmlns:a16="http://schemas.microsoft.com/office/drawing/2014/main" id="{E4FBE453-61E7-4F45-B34B-AAB211AFB130}"/>
+                <a16:creationId xmlns:a16="http://schemas.microsoft.com/office/drawing/2014/main" id="{80BFBF8C-6E65-47E8-86B5-D8C5E20A6B3F}"/>
               </a:ext>
             </a:extLst>
           </p:cNvPr>
@@ -22371,7 +24221,7 @@
           <p:cNvPr id="9" name="">
             <a:extLst xmlns:a="http://schemas.openxmlformats.org/drawingml/2006/main">
               <a:ext uri="{FF2B5EF4-FFF2-40B4-BE49-F238E27FC236}">
-                <a16:creationId xmlns:a16="http://schemas.microsoft.com/office/drawing/2014/main" id="{AED67E2B-135A-4F21-A6CF-CAC84386248C}"/>
+                <a16:creationId xmlns:a16="http://schemas.microsoft.com/office/drawing/2014/main" id="{EAE8C2F3-7EAA-4DFF-AD75-61854279EE0E}"/>
               </a:ext>
             </a:extLst>
           </p:cNvPr>
@@ -22404,7 +24254,7 @@
           <p:cNvPr id="10" name="">
             <a:extLst xmlns:a="http://schemas.openxmlformats.org/drawingml/2006/main">
               <a:ext uri="{FF2B5EF4-FFF2-40B4-BE49-F238E27FC236}">
-                <a16:creationId xmlns:a16="http://schemas.microsoft.com/office/drawing/2014/main" id="{2C09D60E-B4AC-4723-850F-04B1C6B85E05}"/>
+                <a16:creationId xmlns:a16="http://schemas.microsoft.com/office/drawing/2014/main" id="{7908F9FB-5F37-4ED5-B302-78B4C5F9467A}"/>
               </a:ext>
             </a:extLst>
           </p:cNvPr>
@@ -22466,7 +24316,7 @@
           <p:cNvPr id="11" name="">
             <a:extLst xmlns:a="http://schemas.openxmlformats.org/drawingml/2006/main">
               <a:ext uri="{FF2B5EF4-FFF2-40B4-BE49-F238E27FC236}">
-                <a16:creationId xmlns:a16="http://schemas.microsoft.com/office/drawing/2014/main" id="{C2FA0816-339D-4615-8FA0-AED213FACBF0}"/>
+                <a16:creationId xmlns:a16="http://schemas.microsoft.com/office/drawing/2014/main" id="{16F676E0-6766-4342-A3AD-7B5565243419}"/>
               </a:ext>
             </a:extLst>
           </p:cNvPr>
@@ -22499,7 +24349,7 @@
           <p:cNvPr id="12" name="">
             <a:extLst xmlns:a="http://schemas.openxmlformats.org/drawingml/2006/main">
               <a:ext uri="{FF2B5EF4-FFF2-40B4-BE49-F238E27FC236}">
-                <a16:creationId xmlns:a16="http://schemas.microsoft.com/office/drawing/2014/main" id="{5254BC9C-916F-49F1-B5F6-6F8740124BB4}"/>
+                <a16:creationId xmlns:a16="http://schemas.microsoft.com/office/drawing/2014/main" id="{7EE0BAEF-74BB-4209-9218-B9C5F7115C82}"/>
               </a:ext>
             </a:extLst>
           </p:cNvPr>
@@ -22561,7 +24411,7 @@
           <p:cNvPr id="13" name="">
             <a:extLst xmlns:a="http://schemas.openxmlformats.org/drawingml/2006/main">
               <a:ext uri="{FF2B5EF4-FFF2-40B4-BE49-F238E27FC236}">
-                <a16:creationId xmlns:a16="http://schemas.microsoft.com/office/drawing/2014/main" id="{8575E669-F1E9-4B8B-8891-B319F7FD908B}"/>
+                <a16:creationId xmlns:a16="http://schemas.microsoft.com/office/drawing/2014/main" id="{A41736F9-3D92-402C-9915-645548B48770}"/>
               </a:ext>
             </a:extLst>
           </p:cNvPr>
@@ -22594,7 +24444,7 @@
           <p:cNvPr id="14" name="">
             <a:extLst xmlns:a="http://schemas.openxmlformats.org/drawingml/2006/main">
               <a:ext uri="{FF2B5EF4-FFF2-40B4-BE49-F238E27FC236}">
-                <a16:creationId xmlns:a16="http://schemas.microsoft.com/office/drawing/2014/main" id="{DB6C4731-CF12-484D-B7D6-8CC107F2E62E}"/>
+                <a16:creationId xmlns:a16="http://schemas.microsoft.com/office/drawing/2014/main" id="{857E465E-A087-4E6D-AC57-F6BA0AC9CCD3}"/>
               </a:ext>
             </a:extLst>
           </p:cNvPr>
@@ -22656,7 +24506,7 @@
           <p:cNvPr id="15" name="">
             <a:extLst xmlns:a="http://schemas.openxmlformats.org/drawingml/2006/main">
               <a:ext uri="{FF2B5EF4-FFF2-40B4-BE49-F238E27FC236}">
-                <a16:creationId xmlns:a16="http://schemas.microsoft.com/office/drawing/2014/main" id="{90FBE7EF-EA56-4363-81AD-94CC9FA2A12D}"/>
+                <a16:creationId xmlns:a16="http://schemas.microsoft.com/office/drawing/2014/main" id="{05D6C199-B52E-40B6-A4A4-278FED598EB4}"/>
               </a:ext>
             </a:extLst>
           </p:cNvPr>
@@ -22689,7 +24539,7 @@
           <p:cNvPr id="16" name="">
             <a:extLst xmlns:a="http://schemas.openxmlformats.org/drawingml/2006/main">
               <a:ext uri="{FF2B5EF4-FFF2-40B4-BE49-F238E27FC236}">
-                <a16:creationId xmlns:a16="http://schemas.microsoft.com/office/drawing/2014/main" id="{14C3C1FE-3D80-4823-AD7D-166239980A67}"/>
+                <a16:creationId xmlns:a16="http://schemas.microsoft.com/office/drawing/2014/main" id="{3E01C225-F4F4-46A3-9F35-A8EC61BDC5DB}"/>
               </a:ext>
             </a:extLst>
           </p:cNvPr>
@@ -22751,7 +24601,7 @@
           <p:cNvPr id="17" name="">
             <a:extLst xmlns:a="http://schemas.openxmlformats.org/drawingml/2006/main">
               <a:ext uri="{FF2B5EF4-FFF2-40B4-BE49-F238E27FC236}">
-                <a16:creationId xmlns:a16="http://schemas.microsoft.com/office/drawing/2014/main" id="{EF187086-7AC2-456A-BB9A-5CB673D9030C}"/>
+                <a16:creationId xmlns:a16="http://schemas.microsoft.com/office/drawing/2014/main" id="{CAC5E5E0-A6F6-41CB-82E7-243034760F14}"/>
               </a:ext>
             </a:extLst>
           </p:cNvPr>
@@ -22784,7 +24634,7 @@
           <p:cNvPr id="18" name="">
             <a:extLst xmlns:a="http://schemas.openxmlformats.org/drawingml/2006/main">
               <a:ext uri="{FF2B5EF4-FFF2-40B4-BE49-F238E27FC236}">
-                <a16:creationId xmlns:a16="http://schemas.microsoft.com/office/drawing/2014/main" id="{305D6101-09DE-446E-993D-685FF9997145}"/>
+                <a16:creationId xmlns:a16="http://schemas.microsoft.com/office/drawing/2014/main" id="{B4B64277-3AB9-481A-A09B-079E240D3DBA}"/>
               </a:ext>
             </a:extLst>
           </p:cNvPr>
@@ -22846,7 +24696,7 @@
           <p:cNvPr id="19" name="">
             <a:extLst xmlns:a="http://schemas.openxmlformats.org/drawingml/2006/main">
               <a:ext uri="{FF2B5EF4-FFF2-40B4-BE49-F238E27FC236}">
-                <a16:creationId xmlns:a16="http://schemas.microsoft.com/office/drawing/2014/main" id="{D2631463-7863-40E3-A1D5-075DA36531EB}"/>
+                <a16:creationId xmlns:a16="http://schemas.microsoft.com/office/drawing/2014/main" id="{EEB157C2-FF14-4DDF-8165-994CDC1A1700}"/>
               </a:ext>
             </a:extLst>
           </p:cNvPr>
@@ -22879,7 +24729,7 @@
           <p:cNvPr id="20" name="">
             <a:extLst xmlns:a="http://schemas.openxmlformats.org/drawingml/2006/main">
               <a:ext uri="{FF2B5EF4-FFF2-40B4-BE49-F238E27FC236}">
-                <a16:creationId xmlns:a16="http://schemas.microsoft.com/office/drawing/2014/main" id="{5DB70779-FB76-478D-BA9D-4413BC9581BB}"/>
+                <a16:creationId xmlns:a16="http://schemas.microsoft.com/office/drawing/2014/main" id="{819617A5-6B52-4555-A24D-C622ECD20D2C}"/>
               </a:ext>
             </a:extLst>
           </p:cNvPr>
@@ -22941,7 +24791,7 @@
           <p:cNvPr id="21" name="">
             <a:extLst xmlns:a="http://schemas.openxmlformats.org/drawingml/2006/main">
               <a:ext uri="{FF2B5EF4-FFF2-40B4-BE49-F238E27FC236}">
-                <a16:creationId xmlns:a16="http://schemas.microsoft.com/office/drawing/2014/main" id="{1C0149DD-B883-4274-A4AC-EA80E96B4AF5}"/>
+                <a16:creationId xmlns:a16="http://schemas.microsoft.com/office/drawing/2014/main" id="{39AD691E-CA8C-4E3B-994C-E9DB1676279A}"/>
               </a:ext>
             </a:extLst>
           </p:cNvPr>
@@ -22974,7 +24824,7 @@
           <p:cNvPr id="22" name="">
             <a:extLst xmlns:a="http://schemas.openxmlformats.org/drawingml/2006/main">
               <a:ext uri="{FF2B5EF4-FFF2-40B4-BE49-F238E27FC236}">
-                <a16:creationId xmlns:a16="http://schemas.microsoft.com/office/drawing/2014/main" id="{375CBC35-B23B-4443-9128-E5AE21A7EDA3}"/>
+                <a16:creationId xmlns:a16="http://schemas.microsoft.com/office/drawing/2014/main" id="{4C632F68-B796-4391-84A0-0142C2E15C78}"/>
               </a:ext>
             </a:extLst>
           </p:cNvPr>
@@ -23036,7 +24886,7 @@
           <p:cNvPr id="23" name="">
             <a:extLst xmlns:a="http://schemas.openxmlformats.org/drawingml/2006/main">
               <a:ext uri="{FF2B5EF4-FFF2-40B4-BE49-F238E27FC236}">
-                <a16:creationId xmlns:a16="http://schemas.microsoft.com/office/drawing/2014/main" id="{1466D18B-0701-46B9-B045-5B52B9E5966D}"/>
+                <a16:creationId xmlns:a16="http://schemas.microsoft.com/office/drawing/2014/main" id="{AE6DAFCC-7CBC-41A9-BA60-892DBB4F320C}"/>
               </a:ext>
             </a:extLst>
           </p:cNvPr>
@@ -23069,7 +24919,7 @@
           <p:cNvPr id="24" name="">
             <a:extLst xmlns:a="http://schemas.openxmlformats.org/drawingml/2006/main">
               <a:ext uri="{FF2B5EF4-FFF2-40B4-BE49-F238E27FC236}">
-                <a16:creationId xmlns:a16="http://schemas.microsoft.com/office/drawing/2014/main" id="{55A412CF-AB4D-45BB-87C4-9F59C95AC710}"/>
+                <a16:creationId xmlns:a16="http://schemas.microsoft.com/office/drawing/2014/main" id="{2801F298-66BE-429A-BAF5-EE1F3485613F}"/>
               </a:ext>
             </a:extLst>
           </p:cNvPr>
@@ -23131,7 +24981,7 @@
           <p:cNvPr id="25" name="">
             <a:extLst xmlns:a="http://schemas.openxmlformats.org/drawingml/2006/main">
               <a:ext uri="{FF2B5EF4-FFF2-40B4-BE49-F238E27FC236}">
-                <a16:creationId xmlns:a16="http://schemas.microsoft.com/office/drawing/2014/main" id="{94A2441A-F34E-4F37-887C-4F9CAFCFF355}"/>
+                <a16:creationId xmlns:a16="http://schemas.microsoft.com/office/drawing/2014/main" id="{55609102-644F-4CB2-941D-8C26D390A45D}"/>
               </a:ext>
             </a:extLst>
           </p:cNvPr>
@@ -23164,7 +25014,7 @@
           <p:cNvPr id="26" name="">
             <a:extLst xmlns:a="http://schemas.openxmlformats.org/drawingml/2006/main">
               <a:ext uri="{FF2B5EF4-FFF2-40B4-BE49-F238E27FC236}">
-                <a16:creationId xmlns:a16="http://schemas.microsoft.com/office/drawing/2014/main" id="{DA22FB48-5699-4930-B69F-4EE9853749C3}"/>
+                <a16:creationId xmlns:a16="http://schemas.microsoft.com/office/drawing/2014/main" id="{99B63BFF-38FE-4B9C-85A8-2EDD88F5C197}"/>
               </a:ext>
             </a:extLst>
           </p:cNvPr>
@@ -23226,7 +25076,7 @@
           <p:cNvPr id="27" name="">
             <a:extLst xmlns:a="http://schemas.openxmlformats.org/drawingml/2006/main">
               <a:ext uri="{FF2B5EF4-FFF2-40B4-BE49-F238E27FC236}">
-                <a16:creationId xmlns:a16="http://schemas.microsoft.com/office/drawing/2014/main" id="{758AAA7B-41DC-48E9-9D3E-4A04857D4FE9}"/>
+                <a16:creationId xmlns:a16="http://schemas.microsoft.com/office/drawing/2014/main" id="{4B58DBAE-714B-41C4-85C2-2BE587B58C07}"/>
               </a:ext>
             </a:extLst>
           </p:cNvPr>
@@ -23259,7 +25109,7 @@
           <p:cNvPr id="28" name="">
             <a:extLst xmlns:a="http://schemas.openxmlformats.org/drawingml/2006/main">
               <a:ext uri="{FF2B5EF4-FFF2-40B4-BE49-F238E27FC236}">
-                <a16:creationId xmlns:a16="http://schemas.microsoft.com/office/drawing/2014/main" id="{77081A1A-FB3C-4E55-B6A8-4C5CC4496976}"/>
+                <a16:creationId xmlns:a16="http://schemas.microsoft.com/office/drawing/2014/main" id="{E77F8767-F473-46C4-A86A-174696AC936F}"/>
               </a:ext>
             </a:extLst>
           </p:cNvPr>
@@ -23321,7 +25171,7 @@
           <p:cNvPr id="29" name="">
             <a:extLst xmlns:a="http://schemas.openxmlformats.org/drawingml/2006/main">
               <a:ext uri="{FF2B5EF4-FFF2-40B4-BE49-F238E27FC236}">
-                <a16:creationId xmlns:a16="http://schemas.microsoft.com/office/drawing/2014/main" id="{645BFFD1-291F-4F77-B48A-414C5E129603}"/>
+                <a16:creationId xmlns:a16="http://schemas.microsoft.com/office/drawing/2014/main" id="{C22132B0-129E-4B4D-A023-F23EB8918127}"/>
               </a:ext>
             </a:extLst>
           </p:cNvPr>
@@ -23354,7 +25204,7 @@
           <p:cNvPr id="30" name="">
             <a:extLst xmlns:a="http://schemas.openxmlformats.org/drawingml/2006/main">
               <a:ext uri="{FF2B5EF4-FFF2-40B4-BE49-F238E27FC236}">
-                <a16:creationId xmlns:a16="http://schemas.microsoft.com/office/drawing/2014/main" id="{BC335125-F3EA-4544-AB0C-FA95CE59CECB}"/>
+                <a16:creationId xmlns:a16="http://schemas.microsoft.com/office/drawing/2014/main" id="{81BED878-3EAF-41D4-B281-2662AA2A4018}"/>
               </a:ext>
             </a:extLst>
           </p:cNvPr>
@@ -23416,7 +25266,7 @@
           <p:cNvPr id="31" name="">
             <a:extLst xmlns:a="http://schemas.openxmlformats.org/drawingml/2006/main">
               <a:ext uri="{FF2B5EF4-FFF2-40B4-BE49-F238E27FC236}">
-                <a16:creationId xmlns:a16="http://schemas.microsoft.com/office/drawing/2014/main" id="{6E4E6A3D-A4A7-4377-9FFD-F7D3DF8B30C3}"/>
+                <a16:creationId xmlns:a16="http://schemas.microsoft.com/office/drawing/2014/main" id="{8E53D89D-97DD-471C-B88F-2324EC58000F}"/>
               </a:ext>
             </a:extLst>
           </p:cNvPr>
@@ -23449,7 +25299,7 @@
           <p:cNvPr id="32" name="">
             <a:extLst xmlns:a="http://schemas.openxmlformats.org/drawingml/2006/main">
               <a:ext uri="{FF2B5EF4-FFF2-40B4-BE49-F238E27FC236}">
-                <a16:creationId xmlns:a16="http://schemas.microsoft.com/office/drawing/2014/main" id="{D0059A69-7329-436B-9840-3976F81EFE1A}"/>
+                <a16:creationId xmlns:a16="http://schemas.microsoft.com/office/drawing/2014/main" id="{64BB2D4E-C83F-4AC5-A6C5-0041A79392C5}"/>
               </a:ext>
             </a:extLst>
           </p:cNvPr>
@@ -23511,7 +25361,7 @@
           <p:cNvPr id="33" name="">
             <a:extLst xmlns:a="http://schemas.openxmlformats.org/drawingml/2006/main">
               <a:ext uri="{FF2B5EF4-FFF2-40B4-BE49-F238E27FC236}">
-                <a16:creationId xmlns:a16="http://schemas.microsoft.com/office/drawing/2014/main" id="{C3EFC0D4-EB1C-43E4-BDE1-E2E32733913A}"/>
+                <a16:creationId xmlns:a16="http://schemas.microsoft.com/office/drawing/2014/main" id="{810D12E8-51A0-427C-BE33-80A89400A53A}"/>
               </a:ext>
             </a:extLst>
           </p:cNvPr>
@@ -23544,7 +25394,7 @@
           <p:cNvPr id="34" name="">
             <a:extLst xmlns:a="http://schemas.openxmlformats.org/drawingml/2006/main">
               <a:ext uri="{FF2B5EF4-FFF2-40B4-BE49-F238E27FC236}">
-                <a16:creationId xmlns:a16="http://schemas.microsoft.com/office/drawing/2014/main" id="{247E67FF-A0AE-417C-BD18-0047E114A315}"/>
+                <a16:creationId xmlns:a16="http://schemas.microsoft.com/office/drawing/2014/main" id="{1028839E-129B-49F0-9F81-D5A3BE844CE1}"/>
               </a:ext>
             </a:extLst>
           </p:cNvPr>
@@ -23606,7 +25456,7 @@
           <p:cNvPr id="35" name="">
             <a:extLst xmlns:a="http://schemas.openxmlformats.org/drawingml/2006/main">
               <a:ext uri="{FF2B5EF4-FFF2-40B4-BE49-F238E27FC236}">
-                <a16:creationId xmlns:a16="http://schemas.microsoft.com/office/drawing/2014/main" id="{01AD809E-89E5-4DE2-95EA-AFC35D78592F}"/>
+                <a16:creationId xmlns:a16="http://schemas.microsoft.com/office/drawing/2014/main" id="{2FD84947-A3D5-4247-8D4C-7710DA01317A}"/>
               </a:ext>
             </a:extLst>
           </p:cNvPr>
@@ -23639,7 +25489,7 @@
           <p:cNvPr id="36" name="">
             <a:extLst xmlns:a="http://schemas.openxmlformats.org/drawingml/2006/main">
               <a:ext uri="{FF2B5EF4-FFF2-40B4-BE49-F238E27FC236}">
-                <a16:creationId xmlns:a16="http://schemas.microsoft.com/office/drawing/2014/main" id="{0E1FE451-A24F-4ACD-AE2A-E38ED5E7C5C1}"/>
+                <a16:creationId xmlns:a16="http://schemas.microsoft.com/office/drawing/2014/main" id="{D3BF1828-0BF2-4F06-98ED-AA674ACD389F}"/>
               </a:ext>
             </a:extLst>
           </p:cNvPr>
@@ -23701,7 +25551,7 @@
           <p:cNvPr id="37" name="">
             <a:extLst xmlns:a="http://schemas.openxmlformats.org/drawingml/2006/main">
               <a:ext uri="{FF2B5EF4-FFF2-40B4-BE49-F238E27FC236}">
-                <a16:creationId xmlns:a16="http://schemas.microsoft.com/office/drawing/2014/main" id="{B66E55AB-4EFE-4846-BBDF-50AD0A826A73}"/>
+                <a16:creationId xmlns:a16="http://schemas.microsoft.com/office/drawing/2014/main" id="{8B0EB539-FF34-4810-B4F4-78F60C1A1245}"/>
               </a:ext>
             </a:extLst>
           </p:cNvPr>
@@ -23734,7 +25584,7 @@
           <p:cNvPr id="38" name="">
             <a:extLst xmlns:a="http://schemas.openxmlformats.org/drawingml/2006/main">
               <a:ext uri="{FF2B5EF4-FFF2-40B4-BE49-F238E27FC236}">
-                <a16:creationId xmlns:a16="http://schemas.microsoft.com/office/drawing/2014/main" id="{53E7B76F-924E-4D96-B3E5-5ED5F8F7D254}"/>
+                <a16:creationId xmlns:a16="http://schemas.microsoft.com/office/drawing/2014/main" id="{0AB0B5AF-50B3-49EC-965E-264158036415}"/>
               </a:ext>
             </a:extLst>
           </p:cNvPr>
@@ -23796,7 +25646,7 @@
           <p:cNvPr id="39" name="">
             <a:extLst xmlns:a="http://schemas.openxmlformats.org/drawingml/2006/main">
               <a:ext uri="{FF2B5EF4-FFF2-40B4-BE49-F238E27FC236}">
-                <a16:creationId xmlns:a16="http://schemas.microsoft.com/office/drawing/2014/main" id="{3C2CA5BF-1536-415E-9CE9-CADDE2FD0F6D}"/>
+                <a16:creationId xmlns:a16="http://schemas.microsoft.com/office/drawing/2014/main" id="{9FE41B7E-4C83-4384-B002-39933D2B355A}"/>
               </a:ext>
             </a:extLst>
           </p:cNvPr>
@@ -23829,7 +25679,7 @@
           <p:cNvPr id="40" name="">
             <a:extLst xmlns:a="http://schemas.openxmlformats.org/drawingml/2006/main">
               <a:ext uri="{FF2B5EF4-FFF2-40B4-BE49-F238E27FC236}">
-                <a16:creationId xmlns:a16="http://schemas.microsoft.com/office/drawing/2014/main" id="{4A76FBCF-7152-4EAC-9D74-7A5D079E8C7A}"/>
+                <a16:creationId xmlns:a16="http://schemas.microsoft.com/office/drawing/2014/main" id="{05AB7423-97C5-4068-8999-D95EFAE88267}"/>
               </a:ext>
             </a:extLst>
           </p:cNvPr>
@@ -23891,7 +25741,7 @@
           <p:cNvPr id="41" name="">
             <a:extLst xmlns:a="http://schemas.openxmlformats.org/drawingml/2006/main">
               <a:ext uri="{FF2B5EF4-FFF2-40B4-BE49-F238E27FC236}">
-                <a16:creationId xmlns:a16="http://schemas.microsoft.com/office/drawing/2014/main" id="{EDD7FE1C-E49D-475A-953D-630D9AA710C6}"/>
+                <a16:creationId xmlns:a16="http://schemas.microsoft.com/office/drawing/2014/main" id="{E631E5C2-530B-42B2-88C5-70F126937CB6}"/>
               </a:ext>
             </a:extLst>
           </p:cNvPr>
@@ -23924,7 +25774,7 @@
           <p:cNvPr id="42" name="">
             <a:extLst xmlns:a="http://schemas.openxmlformats.org/drawingml/2006/main">
               <a:ext uri="{FF2B5EF4-FFF2-40B4-BE49-F238E27FC236}">
-                <a16:creationId xmlns:a16="http://schemas.microsoft.com/office/drawing/2014/main" id="{5594C083-D2C9-4613-93A7-1D96023D75D2}"/>
+                <a16:creationId xmlns:a16="http://schemas.microsoft.com/office/drawing/2014/main" id="{B342F6E5-361A-4582-A6FD-EDB2E98A6756}"/>
               </a:ext>
             </a:extLst>
           </p:cNvPr>
@@ -23986,7 +25836,7 @@
           <p:cNvPr id="43" name="">
             <a:extLst xmlns:a="http://schemas.openxmlformats.org/drawingml/2006/main">
               <a:ext uri="{FF2B5EF4-FFF2-40B4-BE49-F238E27FC236}">
-                <a16:creationId xmlns:a16="http://schemas.microsoft.com/office/drawing/2014/main" id="{DD338986-07AA-45C2-8B9C-44FD10F5278B}"/>
+                <a16:creationId xmlns:a16="http://schemas.microsoft.com/office/drawing/2014/main" id="{7D8FA73B-54E3-42CF-9EEB-F97B0D8EE9DB}"/>
               </a:ext>
             </a:extLst>
           </p:cNvPr>
@@ -24019,7 +25869,7 @@
           <p:cNvPr id="44" name="">
             <a:extLst xmlns:a="http://schemas.openxmlformats.org/drawingml/2006/main">
               <a:ext uri="{FF2B5EF4-FFF2-40B4-BE49-F238E27FC236}">
-                <a16:creationId xmlns:a16="http://schemas.microsoft.com/office/drawing/2014/main" id="{B4A2E727-D127-40A3-A9A9-84F2EDB8A6A3}"/>
+                <a16:creationId xmlns:a16="http://schemas.microsoft.com/office/drawing/2014/main" id="{077EFE40-FF7C-4365-9F8C-C9C9F8FB6A8F}"/>
               </a:ext>
             </a:extLst>
           </p:cNvPr>
@@ -24081,7 +25931,7 @@
           <p:cNvPr id="45" name="">
             <a:extLst xmlns:a="http://schemas.openxmlformats.org/drawingml/2006/main">
               <a:ext uri="{FF2B5EF4-FFF2-40B4-BE49-F238E27FC236}">
-                <a16:creationId xmlns:a16="http://schemas.microsoft.com/office/drawing/2014/main" id="{B025456A-7DDF-44A5-ABD1-8A56399582FD}"/>
+                <a16:creationId xmlns:a16="http://schemas.microsoft.com/office/drawing/2014/main" id="{31839658-EC01-4921-A0F2-BFEB7B21D675}"/>
               </a:ext>
             </a:extLst>
           </p:cNvPr>
@@ -24114,7 +25964,7 @@
           <p:cNvPr id="46" name="">
             <a:extLst xmlns:a="http://schemas.openxmlformats.org/drawingml/2006/main">
               <a:ext uri="{FF2B5EF4-FFF2-40B4-BE49-F238E27FC236}">
-                <a16:creationId xmlns:a16="http://schemas.microsoft.com/office/drawing/2014/main" id="{8C0D3ED8-8DC2-4B40-BEFA-8A89F032366A}"/>
+                <a16:creationId xmlns:a16="http://schemas.microsoft.com/office/drawing/2014/main" id="{70BA31A5-B6A3-41D1-A0D5-945F68F25E0F}"/>
               </a:ext>
             </a:extLst>
           </p:cNvPr>
@@ -24176,7 +26026,7 @@
           <p:cNvPr id="47" name="">
             <a:extLst xmlns:a="http://schemas.openxmlformats.org/drawingml/2006/main">
               <a:ext uri="{FF2B5EF4-FFF2-40B4-BE49-F238E27FC236}">
-                <a16:creationId xmlns:a16="http://schemas.microsoft.com/office/drawing/2014/main" id="{096D6689-C73B-4D86-8467-8CD8D2DCE8E8}"/>
+                <a16:creationId xmlns:a16="http://schemas.microsoft.com/office/drawing/2014/main" id="{AD62A90D-981F-4A66-9FA1-C46874F33B80}"/>
               </a:ext>
             </a:extLst>
           </p:cNvPr>
@@ -24209,7 +26059,7 @@
           <p:cNvPr id="48" name="">
             <a:extLst xmlns:a="http://schemas.openxmlformats.org/drawingml/2006/main">
               <a:ext uri="{FF2B5EF4-FFF2-40B4-BE49-F238E27FC236}">
-                <a16:creationId xmlns:a16="http://schemas.microsoft.com/office/drawing/2014/main" id="{D8079F03-B3FF-4C12-ACDD-329BA34B98B2}"/>
+                <a16:creationId xmlns:a16="http://schemas.microsoft.com/office/drawing/2014/main" id="{90B9E182-DA9D-41D7-86AD-EF836815447B}"/>
               </a:ext>
             </a:extLst>
           </p:cNvPr>
@@ -24271,7 +26121,7 @@
           <p:cNvPr id="49" name="">
             <a:extLst xmlns:a="http://schemas.openxmlformats.org/drawingml/2006/main">
               <a:ext uri="{FF2B5EF4-FFF2-40B4-BE49-F238E27FC236}">
-                <a16:creationId xmlns:a16="http://schemas.microsoft.com/office/drawing/2014/main" id="{39870948-7040-4DE9-9913-18677C6A46D9}"/>
+                <a16:creationId xmlns:a16="http://schemas.microsoft.com/office/drawing/2014/main" id="{4E066702-0BD6-4109-BAD9-8E9BE4C448B5}"/>
               </a:ext>
             </a:extLst>
           </p:cNvPr>
@@ -24304,7 +26154,7 @@
           <p:cNvPr id="50" name="">
             <a:extLst xmlns:a="http://schemas.openxmlformats.org/drawingml/2006/main">
               <a:ext uri="{FF2B5EF4-FFF2-40B4-BE49-F238E27FC236}">
-                <a16:creationId xmlns:a16="http://schemas.microsoft.com/office/drawing/2014/main" id="{14A38BEF-0853-47C7-BE46-F6A3A23C20BC}"/>
+                <a16:creationId xmlns:a16="http://schemas.microsoft.com/office/drawing/2014/main" id="{54EBDB79-77FC-4BA1-92BB-88A80B746219}"/>
               </a:ext>
             </a:extLst>
           </p:cNvPr>
@@ -24366,7 +26216,7 @@
           <p:cNvPr id="51" name="">
             <a:extLst xmlns:a="http://schemas.openxmlformats.org/drawingml/2006/main">
               <a:ext uri="{FF2B5EF4-FFF2-40B4-BE49-F238E27FC236}">
-                <a16:creationId xmlns:a16="http://schemas.microsoft.com/office/drawing/2014/main" id="{A517DF61-DA65-4F38-9C51-AED6C8346527}"/>
+                <a16:creationId xmlns:a16="http://schemas.microsoft.com/office/drawing/2014/main" id="{C447D76A-59C7-49BE-9CA5-9D0EF036F79B}"/>
               </a:ext>
             </a:extLst>
           </p:cNvPr>
@@ -24399,7 +26249,7 @@
           <p:cNvPr id="52" name="">
             <a:extLst xmlns:a="http://schemas.openxmlformats.org/drawingml/2006/main">
               <a:ext uri="{FF2B5EF4-FFF2-40B4-BE49-F238E27FC236}">
-                <a16:creationId xmlns:a16="http://schemas.microsoft.com/office/drawing/2014/main" id="{8E4C44D3-1F77-4AAD-A96C-461473863662}"/>
+                <a16:creationId xmlns:a16="http://schemas.microsoft.com/office/drawing/2014/main" id="{3A5E594D-FD92-44F3-A9F0-9E150936EDB3}"/>
               </a:ext>
             </a:extLst>
           </p:cNvPr>
@@ -24461,7 +26311,7 @@
           <p:cNvPr id="53" name="">
             <a:extLst xmlns:a="http://schemas.openxmlformats.org/drawingml/2006/main">
               <a:ext uri="{FF2B5EF4-FFF2-40B4-BE49-F238E27FC236}">
-                <a16:creationId xmlns:a16="http://schemas.microsoft.com/office/drawing/2014/main" id="{531A60E8-03C7-464A-89C9-F1D0E15ADE40}"/>
+                <a16:creationId xmlns:a16="http://schemas.microsoft.com/office/drawing/2014/main" id="{02F11C11-04F6-4245-99C0-618068191749}"/>
               </a:ext>
             </a:extLst>
           </p:cNvPr>
@@ -24494,7 +26344,7 @@
           <p:cNvPr id="54" name="">
             <a:extLst xmlns:a="http://schemas.openxmlformats.org/drawingml/2006/main">
               <a:ext uri="{FF2B5EF4-FFF2-40B4-BE49-F238E27FC236}">
-                <a16:creationId xmlns:a16="http://schemas.microsoft.com/office/drawing/2014/main" id="{4D50EC47-9A5D-4703-8B9E-3007F1EAF3C3}"/>
+                <a16:creationId xmlns:a16="http://schemas.microsoft.com/office/drawing/2014/main" id="{10AA8B89-F11A-417F-8AEB-5938A381C2ED}"/>
               </a:ext>
             </a:extLst>
           </p:cNvPr>
@@ -24556,7 +26406,7 @@
           <p:cNvPr id="55" name="">
             <a:extLst xmlns:a="http://schemas.openxmlformats.org/drawingml/2006/main">
               <a:ext uri="{FF2B5EF4-FFF2-40B4-BE49-F238E27FC236}">
-                <a16:creationId xmlns:a16="http://schemas.microsoft.com/office/drawing/2014/main" id="{19E99707-BD36-4B7B-BED7-A7AC70C1E47D}"/>
+                <a16:creationId xmlns:a16="http://schemas.microsoft.com/office/drawing/2014/main" id="{B6861A2F-3F59-4D67-B34E-E1E8911DB966}"/>
               </a:ext>
             </a:extLst>
           </p:cNvPr>
@@ -24589,7 +26439,7 @@
           <p:cNvPr id="56" name="">
             <a:extLst xmlns:a="http://schemas.openxmlformats.org/drawingml/2006/main">
               <a:ext uri="{FF2B5EF4-FFF2-40B4-BE49-F238E27FC236}">
-                <a16:creationId xmlns:a16="http://schemas.microsoft.com/office/drawing/2014/main" id="{F5DD46FB-803A-45F4-A3DD-958C6C3230E3}"/>
+                <a16:creationId xmlns:a16="http://schemas.microsoft.com/office/drawing/2014/main" id="{78AA4A63-FD54-4744-96EA-A7D26680ABB7}"/>
               </a:ext>
             </a:extLst>
           </p:cNvPr>
@@ -24651,7 +26501,7 @@
           <p:cNvPr id="57" name="">
             <a:extLst xmlns:a="http://schemas.openxmlformats.org/drawingml/2006/main">
               <a:ext uri="{FF2B5EF4-FFF2-40B4-BE49-F238E27FC236}">
-                <a16:creationId xmlns:a16="http://schemas.microsoft.com/office/drawing/2014/main" id="{475ED646-7618-4BEB-85C4-CA846A3DE65E}"/>
+                <a16:creationId xmlns:a16="http://schemas.microsoft.com/office/drawing/2014/main" id="{E0D0F56E-CB47-4FAA-A690-599CFD68D952}"/>
               </a:ext>
             </a:extLst>
           </p:cNvPr>
@@ -24684,7 +26534,7 @@
           <p:cNvPr id="58" name="">
             <a:extLst xmlns:a="http://schemas.openxmlformats.org/drawingml/2006/main">
               <a:ext uri="{FF2B5EF4-FFF2-40B4-BE49-F238E27FC236}">
-                <a16:creationId xmlns:a16="http://schemas.microsoft.com/office/drawing/2014/main" id="{07BB18F1-2727-4735-80FC-84B582C10860}"/>
+                <a16:creationId xmlns:a16="http://schemas.microsoft.com/office/drawing/2014/main" id="{A9B2EA26-5F5B-4E5A-8C62-9460FC85FFAE}"/>
               </a:ext>
             </a:extLst>
           </p:cNvPr>
@@ -24746,7 +26596,7 @@
           <p:cNvPr id="59" name="">
             <a:extLst xmlns:a="http://schemas.openxmlformats.org/drawingml/2006/main">
               <a:ext uri="{FF2B5EF4-FFF2-40B4-BE49-F238E27FC236}">
-                <a16:creationId xmlns:a16="http://schemas.microsoft.com/office/drawing/2014/main" id="{1A11D023-C617-495E-822A-C7FB37125B50}"/>
+                <a16:creationId xmlns:a16="http://schemas.microsoft.com/office/drawing/2014/main" id="{FE51467B-D228-48A5-B6A9-E31D2F5256EF}"/>
               </a:ext>
             </a:extLst>
           </p:cNvPr>
@@ -24779,7 +26629,7 @@
           <p:cNvPr id="60" name="">
             <a:extLst xmlns:a="http://schemas.openxmlformats.org/drawingml/2006/main">
               <a:ext uri="{FF2B5EF4-FFF2-40B4-BE49-F238E27FC236}">
-                <a16:creationId xmlns:a16="http://schemas.microsoft.com/office/drawing/2014/main" id="{CBFCD9B9-88E6-49C4-8F75-00469C11BBC4}"/>
+                <a16:creationId xmlns:a16="http://schemas.microsoft.com/office/drawing/2014/main" id="{69EA1156-18E3-454D-B338-E6B74E2EB704}"/>
               </a:ext>
             </a:extLst>
           </p:cNvPr>
@@ -24841,7 +26691,7 @@
           <p:cNvPr id="61" name="">
             <a:extLst xmlns:a="http://schemas.openxmlformats.org/drawingml/2006/main">
               <a:ext uri="{FF2B5EF4-FFF2-40B4-BE49-F238E27FC236}">
-                <a16:creationId xmlns:a16="http://schemas.microsoft.com/office/drawing/2014/main" id="{41746FD7-1596-4FF7-8A1B-4954DEEA7897}"/>
+                <a16:creationId xmlns:a16="http://schemas.microsoft.com/office/drawing/2014/main" id="{9153D2A8-4C63-4858-A835-EB3020F74110}"/>
               </a:ext>
             </a:extLst>
           </p:cNvPr>
@@ -24874,7 +26724,7 @@
           <p:cNvPr id="62" name="">
             <a:extLst xmlns:a="http://schemas.openxmlformats.org/drawingml/2006/main">
               <a:ext uri="{FF2B5EF4-FFF2-40B4-BE49-F238E27FC236}">
-                <a16:creationId xmlns:a16="http://schemas.microsoft.com/office/drawing/2014/main" id="{0079143F-6941-403C-A39B-FC12909AFB92}"/>
+                <a16:creationId xmlns:a16="http://schemas.microsoft.com/office/drawing/2014/main" id="{C729CFE8-E0AC-4FBA-BE36-37694D4B1457}"/>
               </a:ext>
             </a:extLst>
           </p:cNvPr>
@@ -24936,7 +26786,7 @@
           <p:cNvPr id="63" name="">
             <a:extLst xmlns:a="http://schemas.openxmlformats.org/drawingml/2006/main">
               <a:ext uri="{FF2B5EF4-FFF2-40B4-BE49-F238E27FC236}">
-                <a16:creationId xmlns:a16="http://schemas.microsoft.com/office/drawing/2014/main" id="{8C108454-EC2D-443F-BCF2-04313EBCFB67}"/>
+                <a16:creationId xmlns:a16="http://schemas.microsoft.com/office/drawing/2014/main" id="{7C32DE5A-C2C8-4571-8A49-8EB48E258008}"/>
               </a:ext>
             </a:extLst>
           </p:cNvPr>
@@ -24969,7 +26819,7 @@
           <p:cNvPr id="64" name="">
             <a:extLst xmlns:a="http://schemas.openxmlformats.org/drawingml/2006/main">
               <a:ext uri="{FF2B5EF4-FFF2-40B4-BE49-F238E27FC236}">
-                <a16:creationId xmlns:a16="http://schemas.microsoft.com/office/drawing/2014/main" id="{5DC8509F-B830-4223-880C-E7A336EAD569}"/>
+                <a16:creationId xmlns:a16="http://schemas.microsoft.com/office/drawing/2014/main" id="{8143D317-CA49-4179-BC71-2BA86A22C7CE}"/>
               </a:ext>
             </a:extLst>
           </p:cNvPr>
@@ -25031,7 +26881,7 @@
           <p:cNvPr id="65" name="">
             <a:extLst xmlns:a="http://schemas.openxmlformats.org/drawingml/2006/main">
               <a:ext uri="{FF2B5EF4-FFF2-40B4-BE49-F238E27FC236}">
-                <a16:creationId xmlns:a16="http://schemas.microsoft.com/office/drawing/2014/main" id="{C00831A6-1599-4194-BF78-003C99ED64B0}"/>
+                <a16:creationId xmlns:a16="http://schemas.microsoft.com/office/drawing/2014/main" id="{AB1DBBA9-1206-4A61-ABCB-8A88B1DC9B02}"/>
               </a:ext>
             </a:extLst>
           </p:cNvPr>
@@ -25064,7 +26914,7 @@
           <p:cNvPr id="66" name="">
             <a:extLst xmlns:a="http://schemas.openxmlformats.org/drawingml/2006/main">
               <a:ext uri="{FF2B5EF4-FFF2-40B4-BE49-F238E27FC236}">
-                <a16:creationId xmlns:a16="http://schemas.microsoft.com/office/drawing/2014/main" id="{C0DCF14D-E239-4DD4-9638-AD9E799DEB79}"/>
+                <a16:creationId xmlns:a16="http://schemas.microsoft.com/office/drawing/2014/main" id="{2EAD285D-FBA0-4D3E-B64F-1779E77FC57F}"/>
               </a:ext>
             </a:extLst>
           </p:cNvPr>
@@ -25126,7 +26976,7 @@
           <p:cNvPr id="67" name="">
             <a:extLst xmlns:a="http://schemas.openxmlformats.org/drawingml/2006/main">
               <a:ext uri="{FF2B5EF4-FFF2-40B4-BE49-F238E27FC236}">
-                <a16:creationId xmlns:a16="http://schemas.microsoft.com/office/drawing/2014/main" id="{020E8F05-DD90-4B6F-A6D8-44037B7D7C45}"/>
+                <a16:creationId xmlns:a16="http://schemas.microsoft.com/office/drawing/2014/main" id="{4BC535BD-42D1-4D13-AFEF-C7E13B4D3FE4}"/>
               </a:ext>
             </a:extLst>
           </p:cNvPr>
@@ -25159,7 +27009,7 @@
           <p:cNvPr id="68" name="">
             <a:extLst xmlns:a="http://schemas.openxmlformats.org/drawingml/2006/main">
               <a:ext uri="{FF2B5EF4-FFF2-40B4-BE49-F238E27FC236}">
-                <a16:creationId xmlns:a16="http://schemas.microsoft.com/office/drawing/2014/main" id="{864F6642-805D-4464-A746-091DCA2E9E12}"/>
+                <a16:creationId xmlns:a16="http://schemas.microsoft.com/office/drawing/2014/main" id="{03FDA229-7805-42E1-9F88-E09758F12021}"/>
               </a:ext>
             </a:extLst>
           </p:cNvPr>
@@ -25221,7 +27071,7 @@
           <p:cNvPr id="69" name="">
             <a:extLst xmlns:a="http://schemas.openxmlformats.org/drawingml/2006/main">
               <a:ext uri="{FF2B5EF4-FFF2-40B4-BE49-F238E27FC236}">
-                <a16:creationId xmlns:a16="http://schemas.microsoft.com/office/drawing/2014/main" id="{63CCC13B-9F5A-422B-8FCB-59791FD32C9C}"/>
+                <a16:creationId xmlns:a16="http://schemas.microsoft.com/office/drawing/2014/main" id="{90E07859-E570-42A8-AEEA-39043C2E0D09}"/>
               </a:ext>
             </a:extLst>
           </p:cNvPr>
@@ -25252,7 +27102,7 @@
           <p:cNvPr id="70" name="">
             <a:extLst xmlns:a="http://schemas.openxmlformats.org/drawingml/2006/main">
               <a:ext uri="{FF2B5EF4-FFF2-40B4-BE49-F238E27FC236}">
-                <a16:creationId xmlns:a16="http://schemas.microsoft.com/office/drawing/2014/main" id="{251D2268-1314-40F6-B569-211E680BC40C}"/>
+                <a16:creationId xmlns:a16="http://schemas.microsoft.com/office/drawing/2014/main" id="{53292F51-7AFB-4332-AA47-DDE44F5F29C4}"/>
               </a:ext>
             </a:extLst>
           </p:cNvPr>
@@ -25314,7 +27164,7 @@
           <p:cNvPr id="71" name="">
             <a:extLst xmlns:a="http://schemas.openxmlformats.org/drawingml/2006/main">
               <a:ext uri="{FF2B5EF4-FFF2-40B4-BE49-F238E27FC236}">
-                <a16:creationId xmlns:a16="http://schemas.microsoft.com/office/drawing/2014/main" id="{BD25B769-1E1B-45A9-97AB-EAA85C009072}"/>
+                <a16:creationId xmlns:a16="http://schemas.microsoft.com/office/drawing/2014/main" id="{5EFD9FC4-6879-4726-BFF4-9235F8A6F7B0}"/>
               </a:ext>
             </a:extLst>
           </p:cNvPr>
@@ -25374,7 +27224,7 @@
     </p:spTree>
     <p:extLst>
       <p:ext uri="{BB962C8B-B14F-4D97-AF65-F5344CB8AC3E}">
-        <p14:creationId xmlns:p14="http://schemas.microsoft.com/office/powerpoint/2010/main" val="2034941636"/>
+        <p14:creationId xmlns:p14="http://schemas.microsoft.com/office/powerpoint/2010/main" val="1696557799"/>
       </p:ext>
     </p:extLst>
   </p:cSld>
@@ -25405,7 +27255,7 @@
           <p:cNvPr id="16" name="">
             <a:extLst xmlns:a="http://schemas.openxmlformats.org/drawingml/2006/main">
               <a:ext uri="{FF2B5EF4-FFF2-40B4-BE49-F238E27FC236}">
-                <a16:creationId xmlns:a16="http://schemas.microsoft.com/office/drawing/2014/main" id="{738C20BA-DA39-4B82-A409-D24FE216F929}"/>
+                <a16:creationId xmlns:a16="http://schemas.microsoft.com/office/drawing/2014/main" id="{B08FE473-A89B-4E90-A76A-983C768C48F6}"/>
               </a:ext>
             </a:extLst>
           </p:cNvPr>
@@ -25467,7 +27317,7 @@
           <p:cNvPr id="2" name="">
             <a:extLst xmlns:a="http://schemas.openxmlformats.org/drawingml/2006/main">
               <a:ext uri="{FF2B5EF4-FFF2-40B4-BE49-F238E27FC236}">
-                <a16:creationId xmlns:a16="http://schemas.microsoft.com/office/drawing/2014/main" id="{7250A54A-F474-4960-81F5-F856C5EA85BE}"/>
+                <a16:creationId xmlns:a16="http://schemas.microsoft.com/office/drawing/2014/main" id="{C0BB233D-D3EF-4928-A56C-271967967484}"/>
               </a:ext>
             </a:extLst>
           </p:cNvPr>
@@ -25529,7 +27379,7 @@
           <p:cNvPr id="3" name="">
             <a:extLst xmlns:a="http://schemas.openxmlformats.org/drawingml/2006/main">
               <a:ext uri="{FF2B5EF4-FFF2-40B4-BE49-F238E27FC236}">
-                <a16:creationId xmlns:a16="http://schemas.microsoft.com/office/drawing/2014/main" id="{84055019-D1C4-47A4-9A33-F6E43A4C21BB}"/>
+                <a16:creationId xmlns:a16="http://schemas.microsoft.com/office/drawing/2014/main" id="{3C4C9931-D452-46E3-B76F-355821EF4C8D}"/>
               </a:ext>
             </a:extLst>
           </p:cNvPr>
@@ -25591,7 +27441,7 @@
           <p:cNvPr id="4" name="">
             <a:extLst xmlns:a="http://schemas.openxmlformats.org/drawingml/2006/main">
               <a:ext uri="{FF2B5EF4-FFF2-40B4-BE49-F238E27FC236}">
-                <a16:creationId xmlns:a16="http://schemas.microsoft.com/office/drawing/2014/main" id="{F5E30845-6C63-4BF3-8835-9D27F30A038E}"/>
+                <a16:creationId xmlns:a16="http://schemas.microsoft.com/office/drawing/2014/main" id="{6B7877DA-0C60-42B9-BF0E-6A07098B4C95}"/>
               </a:ext>
             </a:extLst>
           </p:cNvPr>
@@ -25622,7 +27472,7 @@
           <p:cNvPr id="5" name="">
             <a:extLst xmlns:a="http://schemas.openxmlformats.org/drawingml/2006/main">
               <a:ext uri="{FF2B5EF4-FFF2-40B4-BE49-F238E27FC236}">
-                <a16:creationId xmlns:a16="http://schemas.microsoft.com/office/drawing/2014/main" id="{59FC261B-BD86-494A-9C92-F77E85395AA7}"/>
+                <a16:creationId xmlns:a16="http://schemas.microsoft.com/office/drawing/2014/main" id="{F41461CB-92DA-4328-9E5F-8068D0F39D0A}"/>
               </a:ext>
             </a:extLst>
           </p:cNvPr>
@@ -25684,7 +27534,7 @@
           <p:cNvPr id="6" name="">
             <a:extLst xmlns:a="http://schemas.openxmlformats.org/drawingml/2006/main">
               <a:ext uri="{FF2B5EF4-FFF2-40B4-BE49-F238E27FC236}">
-                <a16:creationId xmlns:a16="http://schemas.microsoft.com/office/drawing/2014/main" id="{9E1623CB-5551-47CF-AC54-1579B86778C1}"/>
+                <a16:creationId xmlns:a16="http://schemas.microsoft.com/office/drawing/2014/main" id="{0644F3F9-1595-41F0-A2BD-16E17A98F1DB}"/>
               </a:ext>
             </a:extLst>
           </p:cNvPr>
@@ -25800,7 +27650,7 @@
           <p:cNvPr id="7" name="">
             <a:extLst xmlns:a="http://schemas.openxmlformats.org/drawingml/2006/main">
               <a:ext uri="{FF2B5EF4-FFF2-40B4-BE49-F238E27FC236}">
-                <a16:creationId xmlns:a16="http://schemas.microsoft.com/office/drawing/2014/main" id="{B3A6E767-9A44-44BC-9885-B4690CCD1D5B}"/>
+                <a16:creationId xmlns:a16="http://schemas.microsoft.com/office/drawing/2014/main" id="{2F4379C7-7E70-48DD-9E17-EAF14B20388C}"/>
               </a:ext>
             </a:extLst>
           </p:cNvPr>
@@ -25862,7 +27712,7 @@
           <p:cNvPr id="8" name="">
             <a:extLst xmlns:a="http://schemas.openxmlformats.org/drawingml/2006/main">
               <a:ext uri="{FF2B5EF4-FFF2-40B4-BE49-F238E27FC236}">
-                <a16:creationId xmlns:a16="http://schemas.microsoft.com/office/drawing/2014/main" id="{18099468-DE00-4577-82EE-1460408E6D01}"/>
+                <a16:creationId xmlns:a16="http://schemas.microsoft.com/office/drawing/2014/main" id="{884C018F-8F82-463C-B473-9742AD8E55C0}"/>
               </a:ext>
             </a:extLst>
           </p:cNvPr>
@@ -25978,7 +27828,7 @@
           <p:cNvPr id="9" name="">
             <a:extLst xmlns:a="http://schemas.openxmlformats.org/drawingml/2006/main">
               <a:ext uri="{FF2B5EF4-FFF2-40B4-BE49-F238E27FC236}">
-                <a16:creationId xmlns:a16="http://schemas.microsoft.com/office/drawing/2014/main" id="{6CE1A69A-4D87-4B82-8C16-3F22DFAEC4AF}"/>
+                <a16:creationId xmlns:a16="http://schemas.microsoft.com/office/drawing/2014/main" id="{162DB8D5-C147-438F-BF86-CA7DEBFE664B}"/>
               </a:ext>
             </a:extLst>
           </p:cNvPr>
@@ -26040,7 +27890,7 @@
           <p:cNvPr id="10" name="">
             <a:extLst xmlns:a="http://schemas.openxmlformats.org/drawingml/2006/main">
               <a:ext uri="{FF2B5EF4-FFF2-40B4-BE49-F238E27FC236}">
-                <a16:creationId xmlns:a16="http://schemas.microsoft.com/office/drawing/2014/main" id="{AC5BFDE5-1125-47D2-8040-B03ADCA4C00F}"/>
+                <a16:creationId xmlns:a16="http://schemas.microsoft.com/office/drawing/2014/main" id="{405FB685-A6B7-47F9-835F-4D4EBDCE3DFE}"/>
               </a:ext>
             </a:extLst>
           </p:cNvPr>
@@ -26156,7 +28006,7 @@
           <p:cNvPr id="11" name="">
             <a:extLst xmlns:a="http://schemas.openxmlformats.org/drawingml/2006/main">
               <a:ext uri="{FF2B5EF4-FFF2-40B4-BE49-F238E27FC236}">
-                <a16:creationId xmlns:a16="http://schemas.microsoft.com/office/drawing/2014/main" id="{65B02D67-8B24-4D14-B636-97446CC5FC1E}"/>
+                <a16:creationId xmlns:a16="http://schemas.microsoft.com/office/drawing/2014/main" id="{92FC2166-EF42-4494-933F-B17E82C1D987}"/>
               </a:ext>
             </a:extLst>
           </p:cNvPr>
@@ -26187,7 +28037,7 @@
           <p:cNvPr id="12" name="">
             <a:extLst xmlns:a="http://schemas.openxmlformats.org/drawingml/2006/main">
               <a:ext uri="{FF2B5EF4-FFF2-40B4-BE49-F238E27FC236}">
-                <a16:creationId xmlns:a16="http://schemas.microsoft.com/office/drawing/2014/main" id="{5754AC1B-641F-4F97-9959-599C67A158EA}"/>
+                <a16:creationId xmlns:a16="http://schemas.microsoft.com/office/drawing/2014/main" id="{FF525946-9392-4639-8016-0C6E034EEC2C}"/>
               </a:ext>
             </a:extLst>
           </p:cNvPr>
@@ -26249,7 +28099,7 @@
           <p:cNvPr id="13" name="">
             <a:extLst xmlns:a="http://schemas.openxmlformats.org/drawingml/2006/main">
               <a:ext uri="{FF2B5EF4-FFF2-40B4-BE49-F238E27FC236}">
-                <a16:creationId xmlns:a16="http://schemas.microsoft.com/office/drawing/2014/main" id="{EA6C18EC-6511-4DC9-9C81-BFD391F6AD6B}"/>
+                <a16:creationId xmlns:a16="http://schemas.microsoft.com/office/drawing/2014/main" id="{74B80F04-C6C3-418D-BC27-53C53094E0BE}"/>
               </a:ext>
             </a:extLst>
           </p:cNvPr>
@@ -26311,7 +28161,7 @@
           <p:cNvPr id="14" name="">
             <a:extLst xmlns:a="http://schemas.openxmlformats.org/drawingml/2006/main">
               <a:ext uri="{FF2B5EF4-FFF2-40B4-BE49-F238E27FC236}">
-                <a16:creationId xmlns:a16="http://schemas.microsoft.com/office/drawing/2014/main" id="{EBF2548B-5607-4C20-B6E7-DDAF5E60AA00}"/>
+                <a16:creationId xmlns:a16="http://schemas.microsoft.com/office/drawing/2014/main" id="{4853850D-8771-4B77-97F7-01BAC3BE7CD7}"/>
               </a:ext>
             </a:extLst>
           </p:cNvPr>
@@ -26373,7 +28223,7 @@
           <p:cNvPr id="15" name="">
             <a:extLst xmlns:a="http://schemas.openxmlformats.org/drawingml/2006/main">
               <a:ext uri="{FF2B5EF4-FFF2-40B4-BE49-F238E27FC236}">
-                <a16:creationId xmlns:a16="http://schemas.microsoft.com/office/drawing/2014/main" id="{B1AA47C3-821F-4B17-B77E-515104314890}"/>
+                <a16:creationId xmlns:a16="http://schemas.microsoft.com/office/drawing/2014/main" id="{073EAC8F-471F-468A-953D-595329DDED90}"/>
               </a:ext>
             </a:extLst>
           </p:cNvPr>
@@ -26433,7 +28283,7 @@
     </p:spTree>
     <p:extLst>
       <p:ext uri="{BB962C8B-B14F-4D97-AF65-F5344CB8AC3E}">
-        <p14:creationId xmlns:p14="http://schemas.microsoft.com/office/powerpoint/2010/main" val="1255914920"/>
+        <p14:creationId xmlns:p14="http://schemas.microsoft.com/office/powerpoint/2010/main" val="2055567014"/>
       </p:ext>
     </p:extLst>
   </p:cSld>
@@ -26464,7 +28314,7 @@
           <p:cNvPr id="14" name="">
             <a:extLst xmlns:a="http://schemas.openxmlformats.org/drawingml/2006/main">
               <a:ext uri="{FF2B5EF4-FFF2-40B4-BE49-F238E27FC236}">
-                <a16:creationId xmlns:a16="http://schemas.microsoft.com/office/drawing/2014/main" id="{53320A01-A985-47F7-8FEC-964C8E2660F2}"/>
+                <a16:creationId xmlns:a16="http://schemas.microsoft.com/office/drawing/2014/main" id="{5F860983-3AF0-47FF-AC22-0BCCB9B9B2E9}"/>
               </a:ext>
             </a:extLst>
           </p:cNvPr>
@@ -26526,7 +28376,7 @@
           <p:cNvPr id="2" name="">
             <a:extLst xmlns:a="http://schemas.openxmlformats.org/drawingml/2006/main">
               <a:ext uri="{FF2B5EF4-FFF2-40B4-BE49-F238E27FC236}">
-                <a16:creationId xmlns:a16="http://schemas.microsoft.com/office/drawing/2014/main" id="{FE6DF21D-3861-40CC-A1E8-BBB75532F122}"/>
+                <a16:creationId xmlns:a16="http://schemas.microsoft.com/office/drawing/2014/main" id="{B7310B79-9D5B-4AD3-A234-473EC97536FD}"/>
               </a:ext>
             </a:extLst>
           </p:cNvPr>
@@ -26588,7 +28438,7 @@
           <p:cNvPr id="3" name="">
             <a:extLst xmlns:a="http://schemas.openxmlformats.org/drawingml/2006/main">
               <a:ext uri="{FF2B5EF4-FFF2-40B4-BE49-F238E27FC236}">
-                <a16:creationId xmlns:a16="http://schemas.microsoft.com/office/drawing/2014/main" id="{5DF69E02-335D-41B8-A22B-5ECCA3E0C07F}"/>
+                <a16:creationId xmlns:a16="http://schemas.microsoft.com/office/drawing/2014/main" id="{198EBB55-46A4-4E58-A6E3-E689595F3E1C}"/>
               </a:ext>
             </a:extLst>
           </p:cNvPr>
@@ -26650,7 +28500,7 @@
           <p:cNvPr id="4" name="">
             <a:extLst xmlns:a="http://schemas.openxmlformats.org/drawingml/2006/main">
               <a:ext uri="{FF2B5EF4-FFF2-40B4-BE49-F238E27FC236}">
-                <a16:creationId xmlns:a16="http://schemas.microsoft.com/office/drawing/2014/main" id="{03990AEE-8EAA-4FEA-8BA8-63016CA37C5E}"/>
+                <a16:creationId xmlns:a16="http://schemas.microsoft.com/office/drawing/2014/main" id="{8EB9F524-97A0-4222-A2EC-549BE22ABA65}"/>
               </a:ext>
             </a:extLst>
           </p:cNvPr>
@@ -26681,7 +28531,7 @@
           <p:cNvPr id="5" name="">
             <a:extLst xmlns:a="http://schemas.openxmlformats.org/drawingml/2006/main">
               <a:ext uri="{FF2B5EF4-FFF2-40B4-BE49-F238E27FC236}">
-                <a16:creationId xmlns:a16="http://schemas.microsoft.com/office/drawing/2014/main" id="{2C78C46E-7F92-4BFA-BDD2-22E3079D103B}"/>
+                <a16:creationId xmlns:a16="http://schemas.microsoft.com/office/drawing/2014/main" id="{22F1F03F-325A-4F7C-9A68-B25B893998C8}"/>
               </a:ext>
             </a:extLst>
           </p:cNvPr>
@@ -26743,7 +28593,7 @@
           <p:cNvPr id="6" name="">
             <a:extLst xmlns:a="http://schemas.openxmlformats.org/drawingml/2006/main">
               <a:ext uri="{FF2B5EF4-FFF2-40B4-BE49-F238E27FC236}">
-                <a16:creationId xmlns:a16="http://schemas.microsoft.com/office/drawing/2014/main" id="{7B7E27F3-DFCE-45DB-AF72-4E7C9C4AFC33}"/>
+                <a16:creationId xmlns:a16="http://schemas.microsoft.com/office/drawing/2014/main" id="{B4236095-1C7B-4551-936C-E6500CEECB9C}"/>
               </a:ext>
             </a:extLst>
           </p:cNvPr>
@@ -26774,7 +28624,7 @@
           <p:cNvPr id="7" name="">
             <a:extLst xmlns:a="http://schemas.openxmlformats.org/drawingml/2006/main">
               <a:ext uri="{FF2B5EF4-FFF2-40B4-BE49-F238E27FC236}">
-                <a16:creationId xmlns:a16="http://schemas.microsoft.com/office/drawing/2014/main" id="{B69740F3-D61D-43AE-BD77-11E091D33B1C}"/>
+                <a16:creationId xmlns:a16="http://schemas.microsoft.com/office/drawing/2014/main" id="{B76FCC3B-0532-4E0F-8F29-B60B686FC75B}"/>
               </a:ext>
             </a:extLst>
           </p:cNvPr>
@@ -26944,7 +28794,7 @@
           <p:cNvPr id="8" name="">
             <a:extLst xmlns:a="http://schemas.openxmlformats.org/drawingml/2006/main">
               <a:ext uri="{FF2B5EF4-FFF2-40B4-BE49-F238E27FC236}">
-                <a16:creationId xmlns:a16="http://schemas.microsoft.com/office/drawing/2014/main" id="{A5B54CB7-5DB4-41AE-A5A0-374AD4823FC8}"/>
+                <a16:creationId xmlns:a16="http://schemas.microsoft.com/office/drawing/2014/main" id="{B740B03F-0333-407C-B320-55D57C09325C}"/>
               </a:ext>
             </a:extLst>
           </p:cNvPr>
@@ -27006,7 +28856,7 @@
           <p:cNvPr id="9" name="">
             <a:extLst xmlns:a="http://schemas.openxmlformats.org/drawingml/2006/main">
               <a:ext uri="{FF2B5EF4-FFF2-40B4-BE49-F238E27FC236}">
-                <a16:creationId xmlns:a16="http://schemas.microsoft.com/office/drawing/2014/main" id="{7FA29A73-D837-46D5-BCD7-35256B5CAD48}"/>
+                <a16:creationId xmlns:a16="http://schemas.microsoft.com/office/drawing/2014/main" id="{B3827E2B-ED31-4A3A-99EC-7FFBE298F9BF}"/>
               </a:ext>
             </a:extLst>
           </p:cNvPr>
@@ -27037,7 +28887,7 @@
           <p:cNvPr id="10" name="">
             <a:extLst xmlns:a="http://schemas.openxmlformats.org/drawingml/2006/main">
               <a:ext uri="{FF2B5EF4-FFF2-40B4-BE49-F238E27FC236}">
-                <a16:creationId xmlns:a16="http://schemas.microsoft.com/office/drawing/2014/main" id="{4413C23F-F4FB-4740-A03E-FD59095EF372}"/>
+                <a16:creationId xmlns:a16="http://schemas.microsoft.com/office/drawing/2014/main" id="{0FB006FE-4FF2-4F86-AD22-F2A201CDD4D0}"/>
               </a:ext>
             </a:extLst>
           </p:cNvPr>
@@ -27207,7 +29057,7 @@
           <p:cNvPr id="11" name="">
             <a:extLst xmlns:a="http://schemas.openxmlformats.org/drawingml/2006/main">
               <a:ext uri="{FF2B5EF4-FFF2-40B4-BE49-F238E27FC236}">
-                <a16:creationId xmlns:a16="http://schemas.microsoft.com/office/drawing/2014/main" id="{5943CA1F-900E-483D-AB5E-6520F8DFE223}"/>
+                <a16:creationId xmlns:a16="http://schemas.microsoft.com/office/drawing/2014/main" id="{40674ED5-343A-4528-88A4-749F05053F49}"/>
               </a:ext>
             </a:extLst>
           </p:cNvPr>
@@ -27238,7 +29088,7 @@
           <p:cNvPr id="12" name="">
             <a:extLst xmlns:a="http://schemas.openxmlformats.org/drawingml/2006/main">
               <a:ext uri="{FF2B5EF4-FFF2-40B4-BE49-F238E27FC236}">
-                <a16:creationId xmlns:a16="http://schemas.microsoft.com/office/drawing/2014/main" id="{F08EC97E-B1D8-4800-A164-614AD71EAFD5}"/>
+                <a16:creationId xmlns:a16="http://schemas.microsoft.com/office/drawing/2014/main" id="{DB46B58D-F029-49CE-9134-E26DE9723E8B}"/>
               </a:ext>
             </a:extLst>
           </p:cNvPr>
@@ -27300,7 +29150,7 @@
           <p:cNvPr id="13" name="">
             <a:extLst xmlns:a="http://schemas.openxmlformats.org/drawingml/2006/main">
               <a:ext uri="{FF2B5EF4-FFF2-40B4-BE49-F238E27FC236}">
-                <a16:creationId xmlns:a16="http://schemas.microsoft.com/office/drawing/2014/main" id="{BA9999D4-62A6-41B7-9468-BC729B8D43D0}"/>
+                <a16:creationId xmlns:a16="http://schemas.microsoft.com/office/drawing/2014/main" id="{BC2D363C-27C1-427E-9EDA-9668F1E61F43}"/>
               </a:ext>
             </a:extLst>
           </p:cNvPr>
@@ -27360,7 +29210,7 @@
     </p:spTree>
     <p:extLst>
       <p:ext uri="{BB962C8B-B14F-4D97-AF65-F5344CB8AC3E}">
-        <p14:creationId xmlns:p14="http://schemas.microsoft.com/office/powerpoint/2010/main" val="606239023"/>
+        <p14:creationId xmlns:p14="http://schemas.microsoft.com/office/powerpoint/2010/main" val="1588763777"/>
       </p:ext>
     </p:extLst>
   </p:cSld>
@@ -27391,7 +29241,7 @@
           <p:cNvPr id="17" name="">
             <a:extLst xmlns:a="http://schemas.openxmlformats.org/drawingml/2006/main">
               <a:ext uri="{FF2B5EF4-FFF2-40B4-BE49-F238E27FC236}">
-                <a16:creationId xmlns:a16="http://schemas.microsoft.com/office/drawing/2014/main" id="{A29BDB7B-9656-46AB-BA80-573A9D14FF8C}"/>
+                <a16:creationId xmlns:a16="http://schemas.microsoft.com/office/drawing/2014/main" id="{31280BA3-E356-496D-A8EA-3F7F81CF398D}"/>
               </a:ext>
             </a:extLst>
           </p:cNvPr>
@@ -27453,7 +29303,7 @@
           <p:cNvPr id="2" name="">
             <a:extLst xmlns:a="http://schemas.openxmlformats.org/drawingml/2006/main">
               <a:ext uri="{FF2B5EF4-FFF2-40B4-BE49-F238E27FC236}">
-                <a16:creationId xmlns:a16="http://schemas.microsoft.com/office/drawing/2014/main" id="{C3D0AB3E-CB21-4CA3-A795-35EAF6EC458D}"/>
+                <a16:creationId xmlns:a16="http://schemas.microsoft.com/office/drawing/2014/main" id="{9227280E-8D0F-4085-93E3-FE159D0B223F}"/>
               </a:ext>
             </a:extLst>
           </p:cNvPr>
@@ -27515,7 +29365,7 @@
           <p:cNvPr id="3" name="">
             <a:extLst xmlns:a="http://schemas.openxmlformats.org/drawingml/2006/main">
               <a:ext uri="{FF2B5EF4-FFF2-40B4-BE49-F238E27FC236}">
-                <a16:creationId xmlns:a16="http://schemas.microsoft.com/office/drawing/2014/main" id="{949075D9-EF76-435C-B565-47D85621FB7A}"/>
+                <a16:creationId xmlns:a16="http://schemas.microsoft.com/office/drawing/2014/main" id="{2CE95D02-1B54-420C-A91B-96730C296E96}"/>
               </a:ext>
             </a:extLst>
           </p:cNvPr>
@@ -27577,7 +29427,7 @@
           <p:cNvPr id="4" name="">
             <a:extLst xmlns:a="http://schemas.openxmlformats.org/drawingml/2006/main">
               <a:ext uri="{FF2B5EF4-FFF2-40B4-BE49-F238E27FC236}">
-                <a16:creationId xmlns:a16="http://schemas.microsoft.com/office/drawing/2014/main" id="{B67C6A89-8F4E-4B26-AA8A-9B5928F38EBB}"/>
+                <a16:creationId xmlns:a16="http://schemas.microsoft.com/office/drawing/2014/main" id="{5AEC80E2-4B27-4AF2-B417-AABE6886F922}"/>
               </a:ext>
             </a:extLst>
           </p:cNvPr>
@@ -27608,7 +29458,7 @@
           <p:cNvPr id="5" name="">
             <a:extLst xmlns:a="http://schemas.openxmlformats.org/drawingml/2006/main">
               <a:ext uri="{FF2B5EF4-FFF2-40B4-BE49-F238E27FC236}">
-                <a16:creationId xmlns:a16="http://schemas.microsoft.com/office/drawing/2014/main" id="{80BBF1B7-F03E-4D3E-8E67-C4B51509DD36}"/>
+                <a16:creationId xmlns:a16="http://schemas.microsoft.com/office/drawing/2014/main" id="{A0C0AE7E-87AE-4D5B-AEEB-8628CB22DF3B}"/>
               </a:ext>
             </a:extLst>
           </p:cNvPr>
@@ -27670,7 +29520,7 @@
           <p:cNvPr id="6" name="">
             <a:extLst xmlns:a="http://schemas.openxmlformats.org/drawingml/2006/main">
               <a:ext uri="{FF2B5EF4-FFF2-40B4-BE49-F238E27FC236}">
-                <a16:creationId xmlns:a16="http://schemas.microsoft.com/office/drawing/2014/main" id="{541BB159-98FA-4CB7-90C1-4F83EC636034}"/>
+                <a16:creationId xmlns:a16="http://schemas.microsoft.com/office/drawing/2014/main" id="{0BB8369F-6808-4BD3-B327-43F134FCB172}"/>
               </a:ext>
             </a:extLst>
           </p:cNvPr>
@@ -27701,7 +29551,7 @@
           <p:cNvPr id="7" name="">
             <a:extLst xmlns:a="http://schemas.openxmlformats.org/drawingml/2006/main">
               <a:ext uri="{FF2B5EF4-FFF2-40B4-BE49-F238E27FC236}">
-                <a16:creationId xmlns:a16="http://schemas.microsoft.com/office/drawing/2014/main" id="{8A912CC5-4923-44F7-9F17-6FE869A158D1}"/>
+                <a16:creationId xmlns:a16="http://schemas.microsoft.com/office/drawing/2014/main" id="{08E95695-85C3-45EF-9F1A-A3E73705B832}"/>
               </a:ext>
             </a:extLst>
           </p:cNvPr>
@@ -27844,7 +29694,7 @@
           <p:cNvPr id="8" name="">
             <a:extLst xmlns:a="http://schemas.openxmlformats.org/drawingml/2006/main">
               <a:ext uri="{FF2B5EF4-FFF2-40B4-BE49-F238E27FC236}">
-                <a16:creationId xmlns:a16="http://schemas.microsoft.com/office/drawing/2014/main" id="{F58D76B6-0C51-49CE-9D1E-4F513150DFAC}"/>
+                <a16:creationId xmlns:a16="http://schemas.microsoft.com/office/drawing/2014/main" id="{991C8F16-4CA0-435F-A98D-185EB918343C}"/>
               </a:ext>
             </a:extLst>
           </p:cNvPr>
@@ -27906,7 +29756,7 @@
           <p:cNvPr id="9" name="">
             <a:extLst xmlns:a="http://schemas.openxmlformats.org/drawingml/2006/main">
               <a:ext uri="{FF2B5EF4-FFF2-40B4-BE49-F238E27FC236}">
-                <a16:creationId xmlns:a16="http://schemas.microsoft.com/office/drawing/2014/main" id="{4C78EC39-2EC9-4733-B825-0BEC7C15C8C2}"/>
+                <a16:creationId xmlns:a16="http://schemas.microsoft.com/office/drawing/2014/main" id="{BC64D560-E445-4F89-90EE-5B6CDF7F6944}"/>
               </a:ext>
             </a:extLst>
           </p:cNvPr>
@@ -27937,7 +29787,7 @@
           <p:cNvPr id="10" name="">
             <a:extLst xmlns:a="http://schemas.openxmlformats.org/drawingml/2006/main">
               <a:ext uri="{FF2B5EF4-FFF2-40B4-BE49-F238E27FC236}">
-                <a16:creationId xmlns:a16="http://schemas.microsoft.com/office/drawing/2014/main" id="{865D9756-76E5-4C97-8C5E-A82723637C34}"/>
+                <a16:creationId xmlns:a16="http://schemas.microsoft.com/office/drawing/2014/main" id="{BB9A4072-68C9-4E34-AAE5-9F6C23477A2F}"/>
               </a:ext>
             </a:extLst>
           </p:cNvPr>
@@ -28080,7 +29930,7 @@
           <p:cNvPr id="11" name="">
             <a:extLst xmlns:a="http://schemas.openxmlformats.org/drawingml/2006/main">
               <a:ext uri="{FF2B5EF4-FFF2-40B4-BE49-F238E27FC236}">
-                <a16:creationId xmlns:a16="http://schemas.microsoft.com/office/drawing/2014/main" id="{8658FD17-3604-4C08-9D62-259A8CD41389}"/>
+                <a16:creationId xmlns:a16="http://schemas.microsoft.com/office/drawing/2014/main" id="{96BD5481-5D46-41B7-9656-EDF278A4E203}"/>
               </a:ext>
             </a:extLst>
           </p:cNvPr>
@@ -28142,7 +29992,7 @@
           <p:cNvPr id="12" name="">
             <a:extLst xmlns:a="http://schemas.openxmlformats.org/drawingml/2006/main">
               <a:ext uri="{FF2B5EF4-FFF2-40B4-BE49-F238E27FC236}">
-                <a16:creationId xmlns:a16="http://schemas.microsoft.com/office/drawing/2014/main" id="{4C00D390-494A-44C0-9320-DABFCBF23643}"/>
+                <a16:creationId xmlns:a16="http://schemas.microsoft.com/office/drawing/2014/main" id="{46166CE9-74EA-4291-9323-0356347CAD3A}"/>
               </a:ext>
             </a:extLst>
           </p:cNvPr>
@@ -28173,7 +30023,7 @@
           <p:cNvPr id="13" name="">
             <a:extLst xmlns:a="http://schemas.openxmlformats.org/drawingml/2006/main">
               <a:ext uri="{FF2B5EF4-FFF2-40B4-BE49-F238E27FC236}">
-                <a16:creationId xmlns:a16="http://schemas.microsoft.com/office/drawing/2014/main" id="{875A80F3-41A6-448E-A5AF-1FE70A2518A2}"/>
+                <a16:creationId xmlns:a16="http://schemas.microsoft.com/office/drawing/2014/main" id="{647DA928-BFC7-41D2-AD3E-0D18565C71AA}"/>
               </a:ext>
             </a:extLst>
           </p:cNvPr>
@@ -28316,7 +30166,7 @@
           <p:cNvPr id="14" name="">
             <a:extLst xmlns:a="http://schemas.openxmlformats.org/drawingml/2006/main">
               <a:ext uri="{FF2B5EF4-FFF2-40B4-BE49-F238E27FC236}">
-                <a16:creationId xmlns:a16="http://schemas.microsoft.com/office/drawing/2014/main" id="{7D5E5127-3A1E-41A1-A426-C997D67F8FE7}"/>
+                <a16:creationId xmlns:a16="http://schemas.microsoft.com/office/drawing/2014/main" id="{8ED597A1-86F3-4027-9E5E-1B4CE0E0E2C1}"/>
               </a:ext>
             </a:extLst>
           </p:cNvPr>
@@ -28347,7 +30197,7 @@
           <p:cNvPr id="15" name="">
             <a:extLst xmlns:a="http://schemas.openxmlformats.org/drawingml/2006/main">
               <a:ext uri="{FF2B5EF4-FFF2-40B4-BE49-F238E27FC236}">
-                <a16:creationId xmlns:a16="http://schemas.microsoft.com/office/drawing/2014/main" id="{33E041F7-EA07-487F-BE80-377B985995F0}"/>
+                <a16:creationId xmlns:a16="http://schemas.microsoft.com/office/drawing/2014/main" id="{CB8CAA99-F52D-41AA-B889-BB626042AB09}"/>
               </a:ext>
             </a:extLst>
           </p:cNvPr>
@@ -28436,7 +30286,7 @@
           <p:cNvPr id="16" name="">
             <a:extLst xmlns:a="http://schemas.openxmlformats.org/drawingml/2006/main">
               <a:ext uri="{FF2B5EF4-FFF2-40B4-BE49-F238E27FC236}">
-                <a16:creationId xmlns:a16="http://schemas.microsoft.com/office/drawing/2014/main" id="{0CEC8148-EB5E-4F69-A75F-9ADF66683CC1}"/>
+                <a16:creationId xmlns:a16="http://schemas.microsoft.com/office/drawing/2014/main" id="{012A904A-9126-46FA-9605-4668B1CC21AE}"/>
               </a:ext>
             </a:extLst>
           </p:cNvPr>
@@ -28496,7 +30346,7 @@
     </p:spTree>
     <p:extLst>
       <p:ext uri="{BB962C8B-B14F-4D97-AF65-F5344CB8AC3E}">
-        <p14:creationId xmlns:p14="http://schemas.microsoft.com/office/powerpoint/2010/main" val="1506026605"/>
+        <p14:creationId xmlns:p14="http://schemas.microsoft.com/office/powerpoint/2010/main" val="1223326425"/>
       </p:ext>
     </p:extLst>
   </p:cSld>
@@ -28527,7 +30377,7 @@
           <p:cNvPr id="26" name="">
             <a:extLst xmlns:a="http://schemas.openxmlformats.org/drawingml/2006/main">
               <a:ext uri="{FF2B5EF4-FFF2-40B4-BE49-F238E27FC236}">
-                <a16:creationId xmlns:a16="http://schemas.microsoft.com/office/drawing/2014/main" id="{15FD4670-F115-4943-8CCB-D9CD87342FD7}"/>
+                <a16:creationId xmlns:a16="http://schemas.microsoft.com/office/drawing/2014/main" id="{AE46CFB3-AC79-4307-B467-342F40D2F73F}"/>
               </a:ext>
             </a:extLst>
           </p:cNvPr>
@@ -28589,7 +30439,7 @@
           <p:cNvPr id="2" name="">
             <a:extLst xmlns:a="http://schemas.openxmlformats.org/drawingml/2006/main">
               <a:ext uri="{FF2B5EF4-FFF2-40B4-BE49-F238E27FC236}">
-                <a16:creationId xmlns:a16="http://schemas.microsoft.com/office/drawing/2014/main" id="{A48DAC25-504E-400C-990A-043F8F3C7ED8}"/>
+                <a16:creationId xmlns:a16="http://schemas.microsoft.com/office/drawing/2014/main" id="{BEAE9193-B5C8-4516-8962-4FAFD7D8B0D0}"/>
               </a:ext>
             </a:extLst>
           </p:cNvPr>
@@ -28651,7 +30501,7 @@
           <p:cNvPr id="3" name="">
             <a:extLst xmlns:a="http://schemas.openxmlformats.org/drawingml/2006/main">
               <a:ext uri="{FF2B5EF4-FFF2-40B4-BE49-F238E27FC236}">
-                <a16:creationId xmlns:a16="http://schemas.microsoft.com/office/drawing/2014/main" id="{441C823E-7406-4BCB-98ED-09D82F519505}"/>
+                <a16:creationId xmlns:a16="http://schemas.microsoft.com/office/drawing/2014/main" id="{6E98AD74-6F9B-4450-B342-3E8A8AE087D6}"/>
               </a:ext>
             </a:extLst>
           </p:cNvPr>
@@ -28713,7 +30563,7 @@
           <p:cNvPr id="4" name="">
             <a:extLst xmlns:a="http://schemas.openxmlformats.org/drawingml/2006/main">
               <a:ext uri="{FF2B5EF4-FFF2-40B4-BE49-F238E27FC236}">
-                <a16:creationId xmlns:a16="http://schemas.microsoft.com/office/drawing/2014/main" id="{F01D85E2-5465-42FB-BBB4-643BEEFA3493}"/>
+                <a16:creationId xmlns:a16="http://schemas.microsoft.com/office/drawing/2014/main" id="{D193915A-EE5B-4526-A235-EEBF9D89FE14}"/>
               </a:ext>
             </a:extLst>
           </p:cNvPr>
@@ -28744,7 +30594,7 @@
           <p:cNvPr id="5" name="">
             <a:extLst xmlns:a="http://schemas.openxmlformats.org/drawingml/2006/main">
               <a:ext uri="{FF2B5EF4-FFF2-40B4-BE49-F238E27FC236}">
-                <a16:creationId xmlns:a16="http://schemas.microsoft.com/office/drawing/2014/main" id="{8B334864-FEA0-47B5-9FBB-435C8A5E3FAF}"/>
+                <a16:creationId xmlns:a16="http://schemas.microsoft.com/office/drawing/2014/main" id="{2E9E7AF5-E145-48E9-917F-0EBDEB30CA5C}"/>
               </a:ext>
             </a:extLst>
           </p:cNvPr>
@@ -28806,7 +30656,7 @@
           <p:cNvPr id="6" name="">
             <a:extLst xmlns:a="http://schemas.openxmlformats.org/drawingml/2006/main">
               <a:ext uri="{FF2B5EF4-FFF2-40B4-BE49-F238E27FC236}">
-                <a16:creationId xmlns:a16="http://schemas.microsoft.com/office/drawing/2014/main" id="{F70BDD02-8301-4541-9BB8-117065C81BB5}"/>
+                <a16:creationId xmlns:a16="http://schemas.microsoft.com/office/drawing/2014/main" id="{AE135981-0283-47EB-AA77-C5744D8F3461}"/>
               </a:ext>
             </a:extLst>
           </p:cNvPr>
@@ -28868,7 +30718,7 @@
           <p:cNvPr id="7" name="">
             <a:extLst xmlns:a="http://schemas.openxmlformats.org/drawingml/2006/main">
               <a:ext uri="{FF2B5EF4-FFF2-40B4-BE49-F238E27FC236}">
-                <a16:creationId xmlns:a16="http://schemas.microsoft.com/office/drawing/2014/main" id="{536AEB8F-4F14-4D7F-8BFE-5F40140EEFD0}"/>
+                <a16:creationId xmlns:a16="http://schemas.microsoft.com/office/drawing/2014/main" id="{2A90663D-1593-4F50-9555-71710C643DC9}"/>
               </a:ext>
             </a:extLst>
           </p:cNvPr>
@@ -28930,7 +30780,7 @@
           <p:cNvPr id="8" name="">
             <a:extLst xmlns:a="http://schemas.openxmlformats.org/drawingml/2006/main">
               <a:ext uri="{FF2B5EF4-FFF2-40B4-BE49-F238E27FC236}">
-                <a16:creationId xmlns:a16="http://schemas.microsoft.com/office/drawing/2014/main" id="{4F1DCE68-CD77-47AC-A6A8-3C87E80C986E}"/>
+                <a16:creationId xmlns:a16="http://schemas.microsoft.com/office/drawing/2014/main" id="{62F77233-4D18-4E0D-848F-2425AC1FAF7E}"/>
               </a:ext>
             </a:extLst>
           </p:cNvPr>
@@ -28961,7 +30811,7 @@
           <p:cNvPr id="9" name="">
             <a:extLst xmlns:a="http://schemas.openxmlformats.org/drawingml/2006/main">
               <a:ext uri="{FF2B5EF4-FFF2-40B4-BE49-F238E27FC236}">
-                <a16:creationId xmlns:a16="http://schemas.microsoft.com/office/drawing/2014/main" id="{F325C014-1053-4D24-9453-57B62ABD6250}"/>
+                <a16:creationId xmlns:a16="http://schemas.microsoft.com/office/drawing/2014/main" id="{09208078-3075-48DA-A4EB-1B7E16525DC3}"/>
               </a:ext>
             </a:extLst>
           </p:cNvPr>
@@ -29023,7 +30873,7 @@
           <p:cNvPr id="10" name="">
             <a:extLst xmlns:a="http://schemas.openxmlformats.org/drawingml/2006/main">
               <a:ext uri="{FF2B5EF4-FFF2-40B4-BE49-F238E27FC236}">
-                <a16:creationId xmlns:a16="http://schemas.microsoft.com/office/drawing/2014/main" id="{194BA39D-9130-45BB-A901-4F1B4809F62A}"/>
+                <a16:creationId xmlns:a16="http://schemas.microsoft.com/office/drawing/2014/main" id="{FCA0870A-FB5B-47B9-BE79-1018E4004983}"/>
               </a:ext>
             </a:extLst>
           </p:cNvPr>
@@ -29085,7 +30935,7 @@
           <p:cNvPr id="11" name="">
             <a:extLst xmlns:a="http://schemas.openxmlformats.org/drawingml/2006/main">
               <a:ext uri="{FF2B5EF4-FFF2-40B4-BE49-F238E27FC236}">
-                <a16:creationId xmlns:a16="http://schemas.microsoft.com/office/drawing/2014/main" id="{FFC33DDD-1B61-4718-93DE-764FF5656F3B}"/>
+                <a16:creationId xmlns:a16="http://schemas.microsoft.com/office/drawing/2014/main" id="{423DB55B-BB5B-459C-9CE8-6C58B9DD5573}"/>
               </a:ext>
             </a:extLst>
           </p:cNvPr>
@@ -29147,7 +30997,7 @@
           <p:cNvPr id="12" name="">
             <a:extLst xmlns:a="http://schemas.openxmlformats.org/drawingml/2006/main">
               <a:ext uri="{FF2B5EF4-FFF2-40B4-BE49-F238E27FC236}">
-                <a16:creationId xmlns:a16="http://schemas.microsoft.com/office/drawing/2014/main" id="{747D2C15-59AF-439D-9643-8842BEF5A0BF}"/>
+                <a16:creationId xmlns:a16="http://schemas.microsoft.com/office/drawing/2014/main" id="{A802C6A1-45CB-4B7F-BB0C-36068EF0146E}"/>
               </a:ext>
             </a:extLst>
           </p:cNvPr>
@@ -29178,7 +31028,7 @@
           <p:cNvPr id="13" name="">
             <a:extLst xmlns:a="http://schemas.openxmlformats.org/drawingml/2006/main">
               <a:ext uri="{FF2B5EF4-FFF2-40B4-BE49-F238E27FC236}">
-                <a16:creationId xmlns:a16="http://schemas.microsoft.com/office/drawing/2014/main" id="{B1602130-693F-44B0-9EF9-1120A2674994}"/>
+                <a16:creationId xmlns:a16="http://schemas.microsoft.com/office/drawing/2014/main" id="{690C3511-9C46-4D93-9508-C95E1725D658}"/>
               </a:ext>
             </a:extLst>
           </p:cNvPr>
@@ -29240,7 +31090,7 @@
           <p:cNvPr id="14" name="">
             <a:extLst xmlns:a="http://schemas.openxmlformats.org/drawingml/2006/main">
               <a:ext uri="{FF2B5EF4-FFF2-40B4-BE49-F238E27FC236}">
-                <a16:creationId xmlns:a16="http://schemas.microsoft.com/office/drawing/2014/main" id="{D81B7BD4-9B29-47DF-8495-AAB49611DAD6}"/>
+                <a16:creationId xmlns:a16="http://schemas.microsoft.com/office/drawing/2014/main" id="{3306ED1C-12B9-4D30-B0B0-D44C0ACFB053}"/>
               </a:ext>
             </a:extLst>
           </p:cNvPr>
@@ -29302,7 +31152,7 @@
           <p:cNvPr id="15" name="">
             <a:extLst xmlns:a="http://schemas.openxmlformats.org/drawingml/2006/main">
               <a:ext uri="{FF2B5EF4-FFF2-40B4-BE49-F238E27FC236}">
-                <a16:creationId xmlns:a16="http://schemas.microsoft.com/office/drawing/2014/main" id="{F7E2328F-3380-4DFD-9022-638D766A2AA2}"/>
+                <a16:creationId xmlns:a16="http://schemas.microsoft.com/office/drawing/2014/main" id="{E19CF511-D576-4B4F-9E5D-D2E643F72713}"/>
               </a:ext>
             </a:extLst>
           </p:cNvPr>
@@ -29364,7 +31214,7 @@
           <p:cNvPr id="16" name="">
             <a:extLst xmlns:a="http://schemas.openxmlformats.org/drawingml/2006/main">
               <a:ext uri="{FF2B5EF4-FFF2-40B4-BE49-F238E27FC236}">
-                <a16:creationId xmlns:a16="http://schemas.microsoft.com/office/drawing/2014/main" id="{B9F1C9EC-7BEA-4F97-BFB5-307D83211D54}"/>
+                <a16:creationId xmlns:a16="http://schemas.microsoft.com/office/drawing/2014/main" id="{89462000-CCB7-4C77-AB5B-63FB6BBE273F}"/>
               </a:ext>
             </a:extLst>
           </p:cNvPr>
@@ -29395,7 +31245,7 @@
           <p:cNvPr id="17" name="">
             <a:extLst xmlns:a="http://schemas.openxmlformats.org/drawingml/2006/main">
               <a:ext uri="{FF2B5EF4-FFF2-40B4-BE49-F238E27FC236}">
-                <a16:creationId xmlns:a16="http://schemas.microsoft.com/office/drawing/2014/main" id="{4412FADC-6E8F-4EE9-97AF-057DCFE29B1B}"/>
+                <a16:creationId xmlns:a16="http://schemas.microsoft.com/office/drawing/2014/main" id="{00CE84E4-6CDC-4CED-AF4A-3E9D6A7251C6}"/>
               </a:ext>
             </a:extLst>
           </p:cNvPr>
@@ -29457,7 +31307,7 @@
           <p:cNvPr id="18" name="">
             <a:extLst xmlns:a="http://schemas.openxmlformats.org/drawingml/2006/main">
               <a:ext uri="{FF2B5EF4-FFF2-40B4-BE49-F238E27FC236}">
-                <a16:creationId xmlns:a16="http://schemas.microsoft.com/office/drawing/2014/main" id="{DC0B300A-1C83-401A-9587-621A23DBD42E}"/>
+                <a16:creationId xmlns:a16="http://schemas.microsoft.com/office/drawing/2014/main" id="{97C64274-9684-459B-901E-5B0121F4C4DE}"/>
               </a:ext>
             </a:extLst>
           </p:cNvPr>
@@ -29519,7 +31369,7 @@
           <p:cNvPr id="19" name="">
             <a:extLst xmlns:a="http://schemas.openxmlformats.org/drawingml/2006/main">
               <a:ext uri="{FF2B5EF4-FFF2-40B4-BE49-F238E27FC236}">
-                <a16:creationId xmlns:a16="http://schemas.microsoft.com/office/drawing/2014/main" id="{1942F77C-24E3-40DE-B5AD-69FA8D65A4D9}"/>
+                <a16:creationId xmlns:a16="http://schemas.microsoft.com/office/drawing/2014/main" id="{1133F442-818B-4833-A1C1-6477C65BE17A}"/>
               </a:ext>
             </a:extLst>
           </p:cNvPr>
@@ -29581,7 +31431,7 @@
           <p:cNvPr id="20" name="">
             <a:extLst xmlns:a="http://schemas.openxmlformats.org/drawingml/2006/main">
               <a:ext uri="{FF2B5EF4-FFF2-40B4-BE49-F238E27FC236}">
-                <a16:creationId xmlns:a16="http://schemas.microsoft.com/office/drawing/2014/main" id="{2AA038A5-B85E-4CE0-A529-B423B909EC1E}"/>
+                <a16:creationId xmlns:a16="http://schemas.microsoft.com/office/drawing/2014/main" id="{18EFBF3B-600A-48D1-A78A-0B82E35E0F11}"/>
               </a:ext>
             </a:extLst>
           </p:cNvPr>
@@ -29612,7 +31462,7 @@
           <p:cNvPr id="21" name="">
             <a:extLst xmlns:a="http://schemas.openxmlformats.org/drawingml/2006/main">
               <a:ext uri="{FF2B5EF4-FFF2-40B4-BE49-F238E27FC236}">
-                <a16:creationId xmlns:a16="http://schemas.microsoft.com/office/drawing/2014/main" id="{408C1AF7-2183-4918-AF54-7EDA7D5E7525}"/>
+                <a16:creationId xmlns:a16="http://schemas.microsoft.com/office/drawing/2014/main" id="{C218FDE4-885B-4B20-B356-0AA416070F8D}"/>
               </a:ext>
             </a:extLst>
           </p:cNvPr>
@@ -29674,7 +31524,7 @@
           <p:cNvPr id="22" name="">
             <a:extLst xmlns:a="http://schemas.openxmlformats.org/drawingml/2006/main">
               <a:ext uri="{FF2B5EF4-FFF2-40B4-BE49-F238E27FC236}">
-                <a16:creationId xmlns:a16="http://schemas.microsoft.com/office/drawing/2014/main" id="{BEC89D97-975C-4152-BF18-3D623BB3FF7F}"/>
+                <a16:creationId xmlns:a16="http://schemas.microsoft.com/office/drawing/2014/main" id="{93C47C96-79E2-41C1-AF43-0CCAEB21DE0B}"/>
               </a:ext>
             </a:extLst>
           </p:cNvPr>
@@ -29736,7 +31586,7 @@
           <p:cNvPr id="23" name="">
             <a:extLst xmlns:a="http://schemas.openxmlformats.org/drawingml/2006/main">
               <a:ext uri="{FF2B5EF4-FFF2-40B4-BE49-F238E27FC236}">
-                <a16:creationId xmlns:a16="http://schemas.microsoft.com/office/drawing/2014/main" id="{369A71F8-971C-49E9-890B-3253547EF8AE}"/>
+                <a16:creationId xmlns:a16="http://schemas.microsoft.com/office/drawing/2014/main" id="{01E76A66-F910-4C47-A25F-A9198D6DDF4C}"/>
               </a:ext>
             </a:extLst>
           </p:cNvPr>
@@ -29798,7 +31648,7 @@
           <p:cNvPr id="24" name="">
             <a:extLst xmlns:a="http://schemas.openxmlformats.org/drawingml/2006/main">
               <a:ext uri="{FF2B5EF4-FFF2-40B4-BE49-F238E27FC236}">
-                <a16:creationId xmlns:a16="http://schemas.microsoft.com/office/drawing/2014/main" id="{E5F26420-90EE-4202-9AD4-944AB9DCEFD7}"/>
+                <a16:creationId xmlns:a16="http://schemas.microsoft.com/office/drawing/2014/main" id="{7BC295DE-BC6C-40D7-B69F-7899481DB48A}"/>
               </a:ext>
             </a:extLst>
           </p:cNvPr>
@@ -29829,7 +31679,7 @@
           <p:cNvPr id="25" name="">
             <a:extLst xmlns:a="http://schemas.openxmlformats.org/drawingml/2006/main">
               <a:ext uri="{FF2B5EF4-FFF2-40B4-BE49-F238E27FC236}">
-                <a16:creationId xmlns:a16="http://schemas.microsoft.com/office/drawing/2014/main" id="{F9432C87-26D5-472F-A8C3-E8925CC4602D}"/>
+                <a16:creationId xmlns:a16="http://schemas.microsoft.com/office/drawing/2014/main" id="{E5872D05-EAD9-42D3-BCD1-458002A3D055}"/>
               </a:ext>
             </a:extLst>
           </p:cNvPr>
@@ -29889,7 +31739,7 @@
     </p:spTree>
     <p:extLst>
       <p:ext uri="{BB962C8B-B14F-4D97-AF65-F5344CB8AC3E}">
-        <p14:creationId xmlns:p14="http://schemas.microsoft.com/office/powerpoint/2010/main" val="1622014521"/>
+        <p14:creationId xmlns:p14="http://schemas.microsoft.com/office/powerpoint/2010/main" val="1253734073"/>
       </p:ext>
     </p:extLst>
   </p:cSld>
@@ -29920,7 +31770,7 @@
           <p:cNvPr id="20" name="">
             <a:extLst xmlns:a="http://schemas.openxmlformats.org/drawingml/2006/main">
               <a:ext uri="{FF2B5EF4-FFF2-40B4-BE49-F238E27FC236}">
-                <a16:creationId xmlns:a16="http://schemas.microsoft.com/office/drawing/2014/main" id="{7DAE4CD2-4C6A-4660-AC7A-BCADBF54A655}"/>
+                <a16:creationId xmlns:a16="http://schemas.microsoft.com/office/drawing/2014/main" id="{19A3AF02-6DB1-47C5-AE6E-321CE77DBC81}"/>
               </a:ext>
             </a:extLst>
           </p:cNvPr>
@@ -29982,7 +31832,7 @@
           <p:cNvPr id="2" name="">
             <a:extLst xmlns:a="http://schemas.openxmlformats.org/drawingml/2006/main">
               <a:ext uri="{FF2B5EF4-FFF2-40B4-BE49-F238E27FC236}">
-                <a16:creationId xmlns:a16="http://schemas.microsoft.com/office/drawing/2014/main" id="{4BE37DBE-2626-4A79-A349-F22286E38C7C}"/>
+                <a16:creationId xmlns:a16="http://schemas.microsoft.com/office/drawing/2014/main" id="{309D92C8-C5DE-4731-85B4-73CCCDEAE9FE}"/>
               </a:ext>
             </a:extLst>
           </p:cNvPr>
@@ -30044,7 +31894,7 @@
           <p:cNvPr id="3" name="">
             <a:extLst xmlns:a="http://schemas.openxmlformats.org/drawingml/2006/main">
               <a:ext uri="{FF2B5EF4-FFF2-40B4-BE49-F238E27FC236}">
-                <a16:creationId xmlns:a16="http://schemas.microsoft.com/office/drawing/2014/main" id="{41795305-E2D0-4D02-A1FF-E1B2984542A0}"/>
+                <a16:creationId xmlns:a16="http://schemas.microsoft.com/office/drawing/2014/main" id="{ED09AE67-C99F-457E-BFD0-5C9111AAAD77}"/>
               </a:ext>
             </a:extLst>
           </p:cNvPr>
@@ -30106,7 +31956,7 @@
           <p:cNvPr id="4" name="">
             <a:extLst xmlns:a="http://schemas.openxmlformats.org/drawingml/2006/main">
               <a:ext uri="{FF2B5EF4-FFF2-40B4-BE49-F238E27FC236}">
-                <a16:creationId xmlns:a16="http://schemas.microsoft.com/office/drawing/2014/main" id="{38CDE073-6B22-4866-9B22-3729AEF666CA}"/>
+                <a16:creationId xmlns:a16="http://schemas.microsoft.com/office/drawing/2014/main" id="{728A18F9-7654-4FD6-B676-AF3EC8C95C3C}"/>
               </a:ext>
             </a:extLst>
           </p:cNvPr>
@@ -30137,7 +31987,7 @@
           <p:cNvPr id="5" name="">
             <a:extLst xmlns:a="http://schemas.openxmlformats.org/drawingml/2006/main">
               <a:ext uri="{FF2B5EF4-FFF2-40B4-BE49-F238E27FC236}">
-                <a16:creationId xmlns:a16="http://schemas.microsoft.com/office/drawing/2014/main" id="{F55C1274-4C62-4F20-907E-C3E3145A6F41}"/>
+                <a16:creationId xmlns:a16="http://schemas.microsoft.com/office/drawing/2014/main" id="{4F9AF01A-9CC8-482A-A471-29CDED853117}"/>
               </a:ext>
             </a:extLst>
           </p:cNvPr>
@@ -30199,7 +32049,7 @@
           <p:cNvPr id="6" name="">
             <a:extLst xmlns:a="http://schemas.openxmlformats.org/drawingml/2006/main">
               <a:ext uri="{FF2B5EF4-FFF2-40B4-BE49-F238E27FC236}">
-                <a16:creationId xmlns:a16="http://schemas.microsoft.com/office/drawing/2014/main" id="{5E11FC55-F930-4FE1-9476-D556585C7471}"/>
+                <a16:creationId xmlns:a16="http://schemas.microsoft.com/office/drawing/2014/main" id="{0D99A543-AE6B-4121-AEAA-AEDE43F21909}"/>
               </a:ext>
             </a:extLst>
           </p:cNvPr>
@@ -30230,7 +32080,7 @@
           <p:cNvPr id="7" name="">
             <a:extLst xmlns:a="http://schemas.openxmlformats.org/drawingml/2006/main">
               <a:ext uri="{FF2B5EF4-FFF2-40B4-BE49-F238E27FC236}">
-                <a16:creationId xmlns:a16="http://schemas.microsoft.com/office/drawing/2014/main" id="{B9437FCD-1733-4609-B3E3-12D5CDA2DAC4}"/>
+                <a16:creationId xmlns:a16="http://schemas.microsoft.com/office/drawing/2014/main" id="{2F366A1D-350E-4476-8FBD-DAECBCCF76BA}"/>
               </a:ext>
             </a:extLst>
           </p:cNvPr>
@@ -30292,7 +32142,7 @@
           <p:cNvPr id="8" name="">
             <a:extLst xmlns:a="http://schemas.openxmlformats.org/drawingml/2006/main">
               <a:ext uri="{FF2B5EF4-FFF2-40B4-BE49-F238E27FC236}">
-                <a16:creationId xmlns:a16="http://schemas.microsoft.com/office/drawing/2014/main" id="{EECF7E09-F8D5-49CA-A53D-1E5E8F7C6F55}"/>
+                <a16:creationId xmlns:a16="http://schemas.microsoft.com/office/drawing/2014/main" id="{FEC13989-2727-4E97-8CC2-0FBDFCEE6117}"/>
               </a:ext>
             </a:extLst>
           </p:cNvPr>
@@ -30435,7 +32285,7 @@
           <p:cNvPr id="9" name="">
             <a:extLst xmlns:a="http://schemas.openxmlformats.org/drawingml/2006/main">
               <a:ext uri="{FF2B5EF4-FFF2-40B4-BE49-F238E27FC236}">
-                <a16:creationId xmlns:a16="http://schemas.microsoft.com/office/drawing/2014/main" id="{55795EC2-6326-443C-AA72-AC9A13F0B7E6}"/>
+                <a16:creationId xmlns:a16="http://schemas.microsoft.com/office/drawing/2014/main" id="{C132BE81-7A1A-499D-BCB5-ACB9B2B915BB}"/>
               </a:ext>
             </a:extLst>
           </p:cNvPr>
@@ -30497,7 +32347,7 @@
           <p:cNvPr id="10" name="">
             <a:extLst xmlns:a="http://schemas.openxmlformats.org/drawingml/2006/main">
               <a:ext uri="{FF2B5EF4-FFF2-40B4-BE49-F238E27FC236}">
-                <a16:creationId xmlns:a16="http://schemas.microsoft.com/office/drawing/2014/main" id="{789728B8-98A2-4C88-A46F-D495113C76AB}"/>
+                <a16:creationId xmlns:a16="http://schemas.microsoft.com/office/drawing/2014/main" id="{67B0581F-1616-458C-ACD1-8A7867383050}"/>
               </a:ext>
             </a:extLst>
           </p:cNvPr>
@@ -30528,7 +32378,7 @@
           <p:cNvPr id="11" name="">
             <a:extLst xmlns:a="http://schemas.openxmlformats.org/drawingml/2006/main">
               <a:ext uri="{FF2B5EF4-FFF2-40B4-BE49-F238E27FC236}">
-                <a16:creationId xmlns:a16="http://schemas.microsoft.com/office/drawing/2014/main" id="{8B4F2BE4-6249-4E3A-B8AD-8C217B08F1F2}"/>
+                <a16:creationId xmlns:a16="http://schemas.microsoft.com/office/drawing/2014/main" id="{812304C0-071B-4673-8CAF-042F0A297D06}"/>
               </a:ext>
             </a:extLst>
           </p:cNvPr>
@@ -30590,7 +32440,7 @@
           <p:cNvPr id="12" name="">
             <a:extLst xmlns:a="http://schemas.openxmlformats.org/drawingml/2006/main">
               <a:ext uri="{FF2B5EF4-FFF2-40B4-BE49-F238E27FC236}">
-                <a16:creationId xmlns:a16="http://schemas.microsoft.com/office/drawing/2014/main" id="{896E263B-2E69-425B-8E01-B2A7296731AA}"/>
+                <a16:creationId xmlns:a16="http://schemas.microsoft.com/office/drawing/2014/main" id="{B1DCD595-02DB-4A5B-8FA3-EDF07D0EA69A}"/>
               </a:ext>
             </a:extLst>
           </p:cNvPr>
@@ -30733,7 +32583,7 @@
           <p:cNvPr id="13" name="">
             <a:extLst xmlns:a="http://schemas.openxmlformats.org/drawingml/2006/main">
               <a:ext uri="{FF2B5EF4-FFF2-40B4-BE49-F238E27FC236}">
-                <a16:creationId xmlns:a16="http://schemas.microsoft.com/office/drawing/2014/main" id="{73D2E7DB-B2E7-4919-9168-EE8A40389E57}"/>
+                <a16:creationId xmlns:a16="http://schemas.microsoft.com/office/drawing/2014/main" id="{A70D6EAC-9A67-40EE-9102-A5B0DC336B3E}"/>
               </a:ext>
             </a:extLst>
           </p:cNvPr>
@@ -30795,7 +32645,7 @@
           <p:cNvPr id="14" name="">
             <a:extLst xmlns:a="http://schemas.openxmlformats.org/drawingml/2006/main">
               <a:ext uri="{FF2B5EF4-FFF2-40B4-BE49-F238E27FC236}">
-                <a16:creationId xmlns:a16="http://schemas.microsoft.com/office/drawing/2014/main" id="{98454496-8E74-48D7-9FB9-8F37D46C8822}"/>
+                <a16:creationId xmlns:a16="http://schemas.microsoft.com/office/drawing/2014/main" id="{E03B8778-B374-4E02-9C21-BB8F9667C07C}"/>
               </a:ext>
             </a:extLst>
           </p:cNvPr>
@@ -30826,7 +32676,7 @@
           <p:cNvPr id="15" name="">
             <a:extLst xmlns:a="http://schemas.openxmlformats.org/drawingml/2006/main">
               <a:ext uri="{FF2B5EF4-FFF2-40B4-BE49-F238E27FC236}">
-                <a16:creationId xmlns:a16="http://schemas.microsoft.com/office/drawing/2014/main" id="{DC392606-5609-420A-B43C-C8CD6FBA291D}"/>
+                <a16:creationId xmlns:a16="http://schemas.microsoft.com/office/drawing/2014/main" id="{0710D5A5-768C-4CF6-B7FD-AFDF0B411B5B}"/>
               </a:ext>
             </a:extLst>
           </p:cNvPr>
@@ -30888,7 +32738,7 @@
           <p:cNvPr id="16" name="">
             <a:extLst xmlns:a="http://schemas.openxmlformats.org/drawingml/2006/main">
               <a:ext uri="{FF2B5EF4-FFF2-40B4-BE49-F238E27FC236}">
-                <a16:creationId xmlns:a16="http://schemas.microsoft.com/office/drawing/2014/main" id="{91768E2C-C1E6-4FE4-88FB-692AC98A21A8}"/>
+                <a16:creationId xmlns:a16="http://schemas.microsoft.com/office/drawing/2014/main" id="{26700254-B79E-4B02-8CFA-F4D3B0634674}"/>
               </a:ext>
             </a:extLst>
           </p:cNvPr>
@@ -31031,7 +32881,7 @@
           <p:cNvPr id="17" name="">
             <a:extLst xmlns:a="http://schemas.openxmlformats.org/drawingml/2006/main">
               <a:ext uri="{FF2B5EF4-FFF2-40B4-BE49-F238E27FC236}">
-                <a16:creationId xmlns:a16="http://schemas.microsoft.com/office/drawing/2014/main" id="{B2B04CEB-9B02-41A4-9D13-0221310545A8}"/>
+                <a16:creationId xmlns:a16="http://schemas.microsoft.com/office/drawing/2014/main" id="{244111E8-0D03-4B6E-853A-680412A11BA6}"/>
               </a:ext>
             </a:extLst>
           </p:cNvPr>
@@ -31062,7 +32912,7 @@
           <p:cNvPr id="18" name="">
             <a:extLst xmlns:a="http://schemas.openxmlformats.org/drawingml/2006/main">
               <a:ext uri="{FF2B5EF4-FFF2-40B4-BE49-F238E27FC236}">
-                <a16:creationId xmlns:a16="http://schemas.microsoft.com/office/drawing/2014/main" id="{414C9B6B-8CD0-4088-8888-9135839B850A}"/>
+                <a16:creationId xmlns:a16="http://schemas.microsoft.com/office/drawing/2014/main" id="{1E168C7E-20DC-4E38-BA6F-96E870BCA641}"/>
               </a:ext>
             </a:extLst>
           </p:cNvPr>
@@ -31124,7 +32974,7 @@
           <p:cNvPr id="19" name="">
             <a:extLst xmlns:a="http://schemas.openxmlformats.org/drawingml/2006/main">
               <a:ext uri="{FF2B5EF4-FFF2-40B4-BE49-F238E27FC236}">
-                <a16:creationId xmlns:a16="http://schemas.microsoft.com/office/drawing/2014/main" id="{1FDBA831-F0F6-45F2-811E-A44D77387DBC}"/>
+                <a16:creationId xmlns:a16="http://schemas.microsoft.com/office/drawing/2014/main" id="{58061545-0D41-4FDB-A9C3-85B31B24A136}"/>
               </a:ext>
             </a:extLst>
           </p:cNvPr>
@@ -31184,7 +33034,7 @@
     </p:spTree>
     <p:extLst>
       <p:ext uri="{BB962C8B-B14F-4D97-AF65-F5344CB8AC3E}">
-        <p14:creationId xmlns:p14="http://schemas.microsoft.com/office/powerpoint/2010/main" val="1005512223"/>
+        <p14:creationId xmlns:p14="http://schemas.microsoft.com/office/powerpoint/2010/main" val="420644788"/>
       </p:ext>
     </p:extLst>
   </p:cSld>
@@ -31215,7 +33065,7 @@
           <p:cNvPr id="24" name="">
             <a:extLst xmlns:a="http://schemas.openxmlformats.org/drawingml/2006/main">
               <a:ext uri="{FF2B5EF4-FFF2-40B4-BE49-F238E27FC236}">
-                <a16:creationId xmlns:a16="http://schemas.microsoft.com/office/drawing/2014/main" id="{8E2E0B27-7CC2-4A84-9C83-7B53B764DC2F}"/>
+                <a16:creationId xmlns:a16="http://schemas.microsoft.com/office/drawing/2014/main" id="{DEB09543-D094-4E12-8E26-DAC653B8AD59}"/>
               </a:ext>
             </a:extLst>
           </p:cNvPr>
@@ -31277,7 +33127,7 @@
           <p:cNvPr id="2" name="">
             <a:extLst xmlns:a="http://schemas.openxmlformats.org/drawingml/2006/main">
               <a:ext uri="{FF2B5EF4-FFF2-40B4-BE49-F238E27FC236}">
-                <a16:creationId xmlns:a16="http://schemas.microsoft.com/office/drawing/2014/main" id="{A116716A-9ABA-4C87-A5AD-AD8B43CCE41D}"/>
+                <a16:creationId xmlns:a16="http://schemas.microsoft.com/office/drawing/2014/main" id="{26BB896A-AC8B-41AB-8F92-D188ACE0CE87}"/>
               </a:ext>
             </a:extLst>
           </p:cNvPr>
@@ -31339,7 +33189,7 @@
           <p:cNvPr id="3" name="">
             <a:extLst xmlns:a="http://schemas.openxmlformats.org/drawingml/2006/main">
               <a:ext uri="{FF2B5EF4-FFF2-40B4-BE49-F238E27FC236}">
-                <a16:creationId xmlns:a16="http://schemas.microsoft.com/office/drawing/2014/main" id="{7402655C-7536-4759-AC68-C955E637E078}"/>
+                <a16:creationId xmlns:a16="http://schemas.microsoft.com/office/drawing/2014/main" id="{60742011-259A-4453-AB9D-0A7028FCD21F}"/>
               </a:ext>
             </a:extLst>
           </p:cNvPr>
@@ -31401,7 +33251,7 @@
           <p:cNvPr id="4" name="">
             <a:extLst xmlns:a="http://schemas.openxmlformats.org/drawingml/2006/main">
               <a:ext uri="{FF2B5EF4-FFF2-40B4-BE49-F238E27FC236}">
-                <a16:creationId xmlns:a16="http://schemas.microsoft.com/office/drawing/2014/main" id="{54E3DAE4-4A28-4BB9-9736-87BEBDEFA013}"/>
+                <a16:creationId xmlns:a16="http://schemas.microsoft.com/office/drawing/2014/main" id="{23074922-6B68-4E82-9ABE-96FC710FCD30}"/>
               </a:ext>
             </a:extLst>
           </p:cNvPr>
@@ -31432,7 +33282,7 @@
           <p:cNvPr id="5" name="">
             <a:extLst xmlns:a="http://schemas.openxmlformats.org/drawingml/2006/main">
               <a:ext uri="{FF2B5EF4-FFF2-40B4-BE49-F238E27FC236}">
-                <a16:creationId xmlns:a16="http://schemas.microsoft.com/office/drawing/2014/main" id="{9600AA72-E77D-4722-A504-A819FC03A61A}"/>
+                <a16:creationId xmlns:a16="http://schemas.microsoft.com/office/drawing/2014/main" id="{E3E73ED1-7D83-4D56-AFC9-2E1D6399D8AC}"/>
               </a:ext>
             </a:extLst>
           </p:cNvPr>
@@ -31494,7 +33344,7 @@
           <p:cNvPr id="6" name="">
             <a:extLst xmlns:a="http://schemas.openxmlformats.org/drawingml/2006/main">
               <a:ext uri="{FF2B5EF4-FFF2-40B4-BE49-F238E27FC236}">
-                <a16:creationId xmlns:a16="http://schemas.microsoft.com/office/drawing/2014/main" id="{45464281-8A6A-464A-9AB3-2F35EDCFDB9A}"/>
+                <a16:creationId xmlns:a16="http://schemas.microsoft.com/office/drawing/2014/main" id="{3E349B2E-19E0-40AB-8D5D-4D72B8B25440}"/>
               </a:ext>
             </a:extLst>
           </p:cNvPr>
@@ -31556,7 +33406,7 @@
           <p:cNvPr id="7" name="">
             <a:extLst xmlns:a="http://schemas.openxmlformats.org/drawingml/2006/main">
               <a:ext uri="{FF2B5EF4-FFF2-40B4-BE49-F238E27FC236}">
-                <a16:creationId xmlns:a16="http://schemas.microsoft.com/office/drawing/2014/main" id="{3E875563-3FCA-4E08-A69F-D51D754AFC8E}"/>
+                <a16:creationId xmlns:a16="http://schemas.microsoft.com/office/drawing/2014/main" id="{1E71FCA3-B220-4C70-AC43-BEAB36ADBF55}"/>
               </a:ext>
             </a:extLst>
           </p:cNvPr>
@@ -31618,7 +33468,7 @@
           <p:cNvPr id="8" name="">
             <a:extLst xmlns:a="http://schemas.openxmlformats.org/drawingml/2006/main">
               <a:ext uri="{FF2B5EF4-FFF2-40B4-BE49-F238E27FC236}">
-                <a16:creationId xmlns:a16="http://schemas.microsoft.com/office/drawing/2014/main" id="{8B09052F-315E-46AD-9540-DE83C61F2492}"/>
+                <a16:creationId xmlns:a16="http://schemas.microsoft.com/office/drawing/2014/main" id="{D292A3C8-54F4-4D5C-8EAB-48B012D5ED2D}"/>
               </a:ext>
             </a:extLst>
           </p:cNvPr>
@@ -31649,7 +33499,7 @@
           <p:cNvPr id="9" name="">
             <a:extLst xmlns:a="http://schemas.openxmlformats.org/drawingml/2006/main">
               <a:ext uri="{FF2B5EF4-FFF2-40B4-BE49-F238E27FC236}">
-                <a16:creationId xmlns:a16="http://schemas.microsoft.com/office/drawing/2014/main" id="{E00122AB-6571-4B52-BA92-8452780921A4}"/>
+                <a16:creationId xmlns:a16="http://schemas.microsoft.com/office/drawing/2014/main" id="{DDAC0E05-A4D3-4F83-8500-DF1A7403CF59}"/>
               </a:ext>
             </a:extLst>
           </p:cNvPr>
@@ -31711,7 +33561,7 @@
           <p:cNvPr id="10" name="">
             <a:extLst xmlns:a="http://schemas.openxmlformats.org/drawingml/2006/main">
               <a:ext uri="{FF2B5EF4-FFF2-40B4-BE49-F238E27FC236}">
-                <a16:creationId xmlns:a16="http://schemas.microsoft.com/office/drawing/2014/main" id="{E90D1861-1EC1-406E-A4D5-F47E4711E882}"/>
+                <a16:creationId xmlns:a16="http://schemas.microsoft.com/office/drawing/2014/main" id="{B92E5F1F-A05E-4066-9456-C950DA71F8A5}"/>
               </a:ext>
             </a:extLst>
           </p:cNvPr>
@@ -31773,7 +33623,7 @@
           <p:cNvPr id="11" name="">
             <a:extLst xmlns:a="http://schemas.openxmlformats.org/drawingml/2006/main">
               <a:ext uri="{FF2B5EF4-FFF2-40B4-BE49-F238E27FC236}">
-                <a16:creationId xmlns:a16="http://schemas.microsoft.com/office/drawing/2014/main" id="{AD3DE315-AC0D-4E71-9864-C5956B403D59}"/>
+                <a16:creationId xmlns:a16="http://schemas.microsoft.com/office/drawing/2014/main" id="{B51EB827-BDD3-4E1A-BFA3-B0B6F9B09C7D}"/>
               </a:ext>
             </a:extLst>
           </p:cNvPr>
@@ -31835,7 +33685,7 @@
           <p:cNvPr id="12" name="">
             <a:extLst xmlns:a="http://schemas.openxmlformats.org/drawingml/2006/main">
               <a:ext uri="{FF2B5EF4-FFF2-40B4-BE49-F238E27FC236}">
-                <a16:creationId xmlns:a16="http://schemas.microsoft.com/office/drawing/2014/main" id="{F5A13D3E-5890-4A76-960C-AF40E45466CC}"/>
+                <a16:creationId xmlns:a16="http://schemas.microsoft.com/office/drawing/2014/main" id="{74DDC64C-72CC-4B02-B4C8-FCABEA5AAAF0}"/>
               </a:ext>
             </a:extLst>
           </p:cNvPr>
@@ -31866,7 +33716,7 @@
           <p:cNvPr id="13" name="">
             <a:extLst xmlns:a="http://schemas.openxmlformats.org/drawingml/2006/main">
               <a:ext uri="{FF2B5EF4-FFF2-40B4-BE49-F238E27FC236}">
-                <a16:creationId xmlns:a16="http://schemas.microsoft.com/office/drawing/2014/main" id="{2D369D4C-ACAF-4C87-BF8E-92B7ACD3831D}"/>
+                <a16:creationId xmlns:a16="http://schemas.microsoft.com/office/drawing/2014/main" id="{2A5FC9BE-D40B-4734-8F5F-36BBD2C26EE6}"/>
               </a:ext>
             </a:extLst>
           </p:cNvPr>
@@ -31928,7 +33778,7 @@
           <p:cNvPr id="14" name="">
             <a:extLst xmlns:a="http://schemas.openxmlformats.org/drawingml/2006/main">
               <a:ext uri="{FF2B5EF4-FFF2-40B4-BE49-F238E27FC236}">
-                <a16:creationId xmlns:a16="http://schemas.microsoft.com/office/drawing/2014/main" id="{C5553307-89A6-4620-BC68-19B0986CB620}"/>
+                <a16:creationId xmlns:a16="http://schemas.microsoft.com/office/drawing/2014/main" id="{62876EE6-6457-4541-AF6D-04F06D396662}"/>
               </a:ext>
             </a:extLst>
           </p:cNvPr>
@@ -31990,7 +33840,7 @@
           <p:cNvPr id="15" name="">
             <a:extLst xmlns:a="http://schemas.openxmlformats.org/drawingml/2006/main">
               <a:ext uri="{FF2B5EF4-FFF2-40B4-BE49-F238E27FC236}">
-                <a16:creationId xmlns:a16="http://schemas.microsoft.com/office/drawing/2014/main" id="{630CD8CA-4CAA-4612-AB8B-FDA3AA6B6DC7}"/>
+                <a16:creationId xmlns:a16="http://schemas.microsoft.com/office/drawing/2014/main" id="{5C70828D-0CCE-44C2-A267-6ED7A709DAFF}"/>
               </a:ext>
             </a:extLst>
           </p:cNvPr>
@@ -32052,7 +33902,7 @@
           <p:cNvPr id="16" name="">
             <a:extLst xmlns:a="http://schemas.openxmlformats.org/drawingml/2006/main">
               <a:ext uri="{FF2B5EF4-FFF2-40B4-BE49-F238E27FC236}">
-                <a16:creationId xmlns:a16="http://schemas.microsoft.com/office/drawing/2014/main" id="{80500563-A4B9-408C-82C7-0614821A0886}"/>
+                <a16:creationId xmlns:a16="http://schemas.microsoft.com/office/drawing/2014/main" id="{F428FE66-2467-4431-AE72-04993DCFC3D5}"/>
               </a:ext>
             </a:extLst>
           </p:cNvPr>
@@ -32083,7 +33933,7 @@
           <p:cNvPr id="17" name="">
             <a:extLst xmlns:a="http://schemas.openxmlformats.org/drawingml/2006/main">
               <a:ext uri="{FF2B5EF4-FFF2-40B4-BE49-F238E27FC236}">
-                <a16:creationId xmlns:a16="http://schemas.microsoft.com/office/drawing/2014/main" id="{9042ED95-FA35-456C-A7E6-BE77976D41A4}"/>
+                <a16:creationId xmlns:a16="http://schemas.microsoft.com/office/drawing/2014/main" id="{52F6E7B8-1DFB-4434-9834-9416292E90C6}"/>
               </a:ext>
             </a:extLst>
           </p:cNvPr>
@@ -32145,7 +33995,7 @@
           <p:cNvPr id="18" name="">
             <a:extLst xmlns:a="http://schemas.openxmlformats.org/drawingml/2006/main">
               <a:ext uri="{FF2B5EF4-FFF2-40B4-BE49-F238E27FC236}">
-                <a16:creationId xmlns:a16="http://schemas.microsoft.com/office/drawing/2014/main" id="{95399F17-7F9B-4961-939A-B30D2CE2D824}"/>
+                <a16:creationId xmlns:a16="http://schemas.microsoft.com/office/drawing/2014/main" id="{E6CC041C-22DB-4269-945F-641D5967939C}"/>
               </a:ext>
             </a:extLst>
           </p:cNvPr>
@@ -32207,7 +34057,7 @@
           <p:cNvPr id="19" name="">
             <a:extLst xmlns:a="http://schemas.openxmlformats.org/drawingml/2006/main">
               <a:ext uri="{FF2B5EF4-FFF2-40B4-BE49-F238E27FC236}">
-                <a16:creationId xmlns:a16="http://schemas.microsoft.com/office/drawing/2014/main" id="{347CEFFC-9D2B-4D56-8549-C8919CF4FECA}"/>
+                <a16:creationId xmlns:a16="http://schemas.microsoft.com/office/drawing/2014/main" id="{CBC816DF-1D35-460D-B983-41141A98E699}"/>
               </a:ext>
             </a:extLst>
           </p:cNvPr>
@@ -32269,7 +34119,7 @@
           <p:cNvPr id="20" name="">
             <a:extLst xmlns:a="http://schemas.openxmlformats.org/drawingml/2006/main">
               <a:ext uri="{FF2B5EF4-FFF2-40B4-BE49-F238E27FC236}">
-                <a16:creationId xmlns:a16="http://schemas.microsoft.com/office/drawing/2014/main" id="{DB86C844-45B1-4629-A0FE-ABC9819DB622}"/>
+                <a16:creationId xmlns:a16="http://schemas.microsoft.com/office/drawing/2014/main" id="{910030D3-4407-41F7-86CB-8BA18F8BD89D}"/>
               </a:ext>
             </a:extLst>
           </p:cNvPr>
@@ -32300,7 +34150,7 @@
           <p:cNvPr id="21" name="">
             <a:extLst xmlns:a="http://schemas.openxmlformats.org/drawingml/2006/main">
               <a:ext uri="{FF2B5EF4-FFF2-40B4-BE49-F238E27FC236}">
-                <a16:creationId xmlns:a16="http://schemas.microsoft.com/office/drawing/2014/main" id="{DDE8F6AD-D963-48A3-B0CD-B670B08A63A9}"/>
+                <a16:creationId xmlns:a16="http://schemas.microsoft.com/office/drawing/2014/main" id="{3F512519-FF64-4C1B-B715-CB909E219D0C}"/>
               </a:ext>
             </a:extLst>
           </p:cNvPr>
@@ -32331,7 +34181,7 @@
           <p:cNvPr id="22" name="">
             <a:extLst xmlns:a="http://schemas.openxmlformats.org/drawingml/2006/main">
               <a:ext uri="{FF2B5EF4-FFF2-40B4-BE49-F238E27FC236}">
-                <a16:creationId xmlns:a16="http://schemas.microsoft.com/office/drawing/2014/main" id="{679E313E-A286-4567-B7C3-82084ACD04C4}"/>
+                <a16:creationId xmlns:a16="http://schemas.microsoft.com/office/drawing/2014/main" id="{6356F0E3-1A6B-49E3-B193-2D1FDF42DC9A}"/>
               </a:ext>
             </a:extLst>
           </p:cNvPr>
@@ -32393,7 +34243,7 @@
           <p:cNvPr id="23" name="">
             <a:extLst xmlns:a="http://schemas.openxmlformats.org/drawingml/2006/main">
               <a:ext uri="{FF2B5EF4-FFF2-40B4-BE49-F238E27FC236}">
-                <a16:creationId xmlns:a16="http://schemas.microsoft.com/office/drawing/2014/main" id="{8919DA1E-FC7B-42BE-9E75-FEDA0E95E7BF}"/>
+                <a16:creationId xmlns:a16="http://schemas.microsoft.com/office/drawing/2014/main" id="{6EC74BB3-9E8F-42F2-93E9-BB9E587F56E6}"/>
               </a:ext>
             </a:extLst>
           </p:cNvPr>
@@ -32453,7 +34303,7 @@
     </p:spTree>
     <p:extLst>
       <p:ext uri="{BB962C8B-B14F-4D97-AF65-F5344CB8AC3E}">
-        <p14:creationId xmlns:p14="http://schemas.microsoft.com/office/powerpoint/2010/main" val="1667116467"/>
+        <p14:creationId xmlns:p14="http://schemas.microsoft.com/office/powerpoint/2010/main" val="137358356"/>
       </p:ext>
     </p:extLst>
   </p:cSld>
@@ -32484,7 +34334,7 @@
           <p:cNvPr id="7" name="">
             <a:extLst xmlns:a="http://schemas.openxmlformats.org/drawingml/2006/main">
               <a:ext uri="{FF2B5EF4-FFF2-40B4-BE49-F238E27FC236}">
-                <a16:creationId xmlns:a16="http://schemas.microsoft.com/office/drawing/2014/main" id="{40ED223B-7E5E-46DC-A127-8B90CA26E844}"/>
+                <a16:creationId xmlns:a16="http://schemas.microsoft.com/office/drawing/2014/main" id="{3624C6C1-E8C0-49B5-80AC-BD4181AFF5A8}"/>
               </a:ext>
             </a:extLst>
           </p:cNvPr>
@@ -32546,7 +34396,7 @@
           <p:cNvPr id="2" name="">
             <a:extLst xmlns:a="http://schemas.openxmlformats.org/drawingml/2006/main">
               <a:ext uri="{FF2B5EF4-FFF2-40B4-BE49-F238E27FC236}">
-                <a16:creationId xmlns:a16="http://schemas.microsoft.com/office/drawing/2014/main" id="{463E82A2-DDED-4757-986A-B47F70B56E16}"/>
+                <a16:creationId xmlns:a16="http://schemas.microsoft.com/office/drawing/2014/main" id="{B5746BFC-D63C-4EC7-972B-589253CAFF83}"/>
               </a:ext>
             </a:extLst>
           </p:cNvPr>
@@ -32608,7 +34458,7 @@
           <p:cNvPr id="3" name="">
             <a:extLst xmlns:a="http://schemas.openxmlformats.org/drawingml/2006/main">
               <a:ext uri="{FF2B5EF4-FFF2-40B4-BE49-F238E27FC236}">
-                <a16:creationId xmlns:a16="http://schemas.microsoft.com/office/drawing/2014/main" id="{3EF81617-959B-46B2-A910-FD7D58E0151F}"/>
+                <a16:creationId xmlns:a16="http://schemas.microsoft.com/office/drawing/2014/main" id="{5391F721-81BD-49A5-BCC2-133E989B3480}"/>
               </a:ext>
             </a:extLst>
           </p:cNvPr>
@@ -32670,7 +34520,7 @@
           <p:cNvPr id="4" name="">
             <a:extLst xmlns:a="http://schemas.openxmlformats.org/drawingml/2006/main">
               <a:ext uri="{FF2B5EF4-FFF2-40B4-BE49-F238E27FC236}">
-                <a16:creationId xmlns:a16="http://schemas.microsoft.com/office/drawing/2014/main" id="{D44B3588-EFEA-4CEE-B334-A7F4B76FDAB4}"/>
+                <a16:creationId xmlns:a16="http://schemas.microsoft.com/office/drawing/2014/main" id="{452C2A12-34D1-4E8D-A00D-76EAEAE73FE2}"/>
               </a:ext>
             </a:extLst>
           </p:cNvPr>
@@ -32705,7 +34555,7 @@
           <p:nvPr/>
         </p:nvPicPr>
         <p:blipFill>
-          <a:blip xmlns:r="http://schemas.openxmlformats.org/officeDocument/2006/relationships" xmlns:a="http://schemas.openxmlformats.org/drawingml/2006/main" r:embed="R3079d63922bf4170"/>
+          <a:blip xmlns:r="http://schemas.openxmlformats.org/officeDocument/2006/relationships" xmlns:a="http://schemas.openxmlformats.org/drawingml/2006/main" r:embed="Rd36a3b36d9734a47"/>
           <a:stretch xmlns:a="http://schemas.openxmlformats.org/drawingml/2006/main"/>
         </p:blipFill>
         <p:spPr>
@@ -32723,7 +34573,7 @@
           <p:cNvPr id="6" name="">
             <a:extLst xmlns:a="http://schemas.openxmlformats.org/drawingml/2006/main">
               <a:ext uri="{FF2B5EF4-FFF2-40B4-BE49-F238E27FC236}">
-                <a16:creationId xmlns:a16="http://schemas.microsoft.com/office/drawing/2014/main" id="{F3DB039B-D9B9-427C-85F4-C35728018439}"/>
+                <a16:creationId xmlns:a16="http://schemas.microsoft.com/office/drawing/2014/main" id="{384EA209-4DF2-4840-A98E-8BC5A9974D16}"/>
               </a:ext>
             </a:extLst>
           </p:cNvPr>
@@ -32783,7 +34633,7 @@
     </p:spTree>
     <p:extLst>
       <p:ext uri="{BB962C8B-B14F-4D97-AF65-F5344CB8AC3E}">
-        <p14:creationId xmlns:p14="http://schemas.microsoft.com/office/powerpoint/2010/main" val="1094188905"/>
+        <p14:creationId xmlns:p14="http://schemas.microsoft.com/office/powerpoint/2010/main" val="1448675722"/>
       </p:ext>
     </p:extLst>
   </p:cSld>
@@ -32814,7 +34664,7 @@
           <p:cNvPr id="7" name="">
             <a:extLst xmlns:a="http://schemas.openxmlformats.org/drawingml/2006/main">
               <a:ext uri="{FF2B5EF4-FFF2-40B4-BE49-F238E27FC236}">
-                <a16:creationId xmlns:a16="http://schemas.microsoft.com/office/drawing/2014/main" id="{3542D76A-5D08-4CF6-9CD9-9726A19CB315}"/>
+                <a16:creationId xmlns:a16="http://schemas.microsoft.com/office/drawing/2014/main" id="{5AA345B7-0232-4790-9341-81AB6CCD552F}"/>
               </a:ext>
             </a:extLst>
           </p:cNvPr>
@@ -32876,7 +34726,7 @@
           <p:cNvPr id="2" name="">
             <a:extLst xmlns:a="http://schemas.openxmlformats.org/drawingml/2006/main">
               <a:ext uri="{FF2B5EF4-FFF2-40B4-BE49-F238E27FC236}">
-                <a16:creationId xmlns:a16="http://schemas.microsoft.com/office/drawing/2014/main" id="{DA6108A9-881D-4AA0-8E2D-02EC5916241A}"/>
+                <a16:creationId xmlns:a16="http://schemas.microsoft.com/office/drawing/2014/main" id="{22C50215-B16F-4182-8605-29AA5A9BC6E7}"/>
               </a:ext>
             </a:extLst>
           </p:cNvPr>
@@ -32938,7 +34788,7 @@
           <p:cNvPr id="3" name="">
             <a:extLst xmlns:a="http://schemas.openxmlformats.org/drawingml/2006/main">
               <a:ext uri="{FF2B5EF4-FFF2-40B4-BE49-F238E27FC236}">
-                <a16:creationId xmlns:a16="http://schemas.microsoft.com/office/drawing/2014/main" id="{3F2670E5-D31F-4714-A21A-268F1D64B998}"/>
+                <a16:creationId xmlns:a16="http://schemas.microsoft.com/office/drawing/2014/main" id="{C15A856A-8866-4D96-8BC8-BCFA58A2F3D3}"/>
               </a:ext>
             </a:extLst>
           </p:cNvPr>
@@ -33000,7 +34850,7 @@
           <p:cNvPr id="4" name="">
             <a:extLst xmlns:a="http://schemas.openxmlformats.org/drawingml/2006/main">
               <a:ext uri="{FF2B5EF4-FFF2-40B4-BE49-F238E27FC236}">
-                <a16:creationId xmlns:a16="http://schemas.microsoft.com/office/drawing/2014/main" id="{7BD7BD38-2DF1-44E8-9F3A-FB38143B05A3}"/>
+                <a16:creationId xmlns:a16="http://schemas.microsoft.com/office/drawing/2014/main" id="{3EBA7D3A-2228-4B50-9513-185A49FA10C6}"/>
               </a:ext>
             </a:extLst>
           </p:cNvPr>
@@ -33035,7 +34885,7 @@
           <p:nvPr/>
         </p:nvPicPr>
         <p:blipFill>
-          <a:blip xmlns:r="http://schemas.openxmlformats.org/officeDocument/2006/relationships" xmlns:a="http://schemas.openxmlformats.org/drawingml/2006/main" r:embed="Ra376f7768ef04d05"/>
+          <a:blip xmlns:r="http://schemas.openxmlformats.org/officeDocument/2006/relationships" xmlns:a="http://schemas.openxmlformats.org/drawingml/2006/main" r:embed="R4924d62bd5704009"/>
           <a:stretch xmlns:a="http://schemas.openxmlformats.org/drawingml/2006/main"/>
         </p:blipFill>
         <p:spPr>
@@ -33053,7 +34903,7 @@
           <p:cNvPr id="6" name="">
             <a:extLst xmlns:a="http://schemas.openxmlformats.org/drawingml/2006/main">
               <a:ext uri="{FF2B5EF4-FFF2-40B4-BE49-F238E27FC236}">
-                <a16:creationId xmlns:a16="http://schemas.microsoft.com/office/drawing/2014/main" id="{C891F9D6-5938-4EAF-BACF-E6B19599D389}"/>
+                <a16:creationId xmlns:a16="http://schemas.microsoft.com/office/drawing/2014/main" id="{27AE0783-D362-4865-8A01-880C2E62C5B9}"/>
               </a:ext>
             </a:extLst>
           </p:cNvPr>
@@ -33113,7 +34963,7 @@
     </p:spTree>
     <p:extLst>
       <p:ext uri="{BB962C8B-B14F-4D97-AF65-F5344CB8AC3E}">
-        <p14:creationId xmlns:p14="http://schemas.microsoft.com/office/powerpoint/2010/main" val="435289030"/>
+        <p14:creationId xmlns:p14="http://schemas.microsoft.com/office/powerpoint/2010/main" val="318365115"/>
       </p:ext>
     </p:extLst>
   </p:cSld>
@@ -33144,7 +34994,7 @@
           <p:cNvPr id="7" name="">
             <a:extLst xmlns:a="http://schemas.openxmlformats.org/drawingml/2006/main">
               <a:ext uri="{FF2B5EF4-FFF2-40B4-BE49-F238E27FC236}">
-                <a16:creationId xmlns:a16="http://schemas.microsoft.com/office/drawing/2014/main" id="{4920C631-8ED4-476E-8EE4-C35A879BEB0C}"/>
+                <a16:creationId xmlns:a16="http://schemas.microsoft.com/office/drawing/2014/main" id="{0FF87AE5-EF43-4000-8317-C0D5C478EDFB}"/>
               </a:ext>
             </a:extLst>
           </p:cNvPr>
@@ -33206,7 +35056,7 @@
           <p:cNvPr id="2" name="">
             <a:extLst xmlns:a="http://schemas.openxmlformats.org/drawingml/2006/main">
               <a:ext uri="{FF2B5EF4-FFF2-40B4-BE49-F238E27FC236}">
-                <a16:creationId xmlns:a16="http://schemas.microsoft.com/office/drawing/2014/main" id="{CE4ACECE-B1BD-45DA-A5D1-C036A826B550}"/>
+                <a16:creationId xmlns:a16="http://schemas.microsoft.com/office/drawing/2014/main" id="{035DACE6-A1D2-4B18-A633-13DE35E65D44}"/>
               </a:ext>
             </a:extLst>
           </p:cNvPr>
@@ -33268,7 +35118,7 @@
           <p:cNvPr id="3" name="">
             <a:extLst xmlns:a="http://schemas.openxmlformats.org/drawingml/2006/main">
               <a:ext uri="{FF2B5EF4-FFF2-40B4-BE49-F238E27FC236}">
-                <a16:creationId xmlns:a16="http://schemas.microsoft.com/office/drawing/2014/main" id="{8DAC7010-9426-480C-A74B-99F38BE4584C}"/>
+                <a16:creationId xmlns:a16="http://schemas.microsoft.com/office/drawing/2014/main" id="{1A51A26D-5EF0-4495-9862-664E32BD1448}"/>
               </a:ext>
             </a:extLst>
           </p:cNvPr>
@@ -33330,7 +35180,7 @@
           <p:cNvPr id="4" name="">
             <a:extLst xmlns:a="http://schemas.openxmlformats.org/drawingml/2006/main">
               <a:ext uri="{FF2B5EF4-FFF2-40B4-BE49-F238E27FC236}">
-                <a16:creationId xmlns:a16="http://schemas.microsoft.com/office/drawing/2014/main" id="{7E1CFAC5-F6BF-46D1-8D1A-23D2E25A3DDF}"/>
+                <a16:creationId xmlns:a16="http://schemas.microsoft.com/office/drawing/2014/main" id="{8C3159F5-647A-47E6-8D3B-A3C2DAF2CEE2}"/>
               </a:ext>
             </a:extLst>
           </p:cNvPr>
@@ -33365,7 +35215,7 @@
           <p:nvPr/>
         </p:nvPicPr>
         <p:blipFill>
-          <a:blip xmlns:r="http://schemas.openxmlformats.org/officeDocument/2006/relationships" xmlns:a="http://schemas.openxmlformats.org/drawingml/2006/main" r:embed="Re2e181ec7ee044a0"/>
+          <a:blip xmlns:r="http://schemas.openxmlformats.org/officeDocument/2006/relationships" xmlns:a="http://schemas.openxmlformats.org/drawingml/2006/main" r:embed="Ra7cf7f4be849400c"/>
           <a:stretch xmlns:a="http://schemas.openxmlformats.org/drawingml/2006/main"/>
         </p:blipFill>
         <p:spPr>
@@ -33383,7 +35233,7 @@
           <p:cNvPr id="6" name="">
             <a:extLst xmlns:a="http://schemas.openxmlformats.org/drawingml/2006/main">
               <a:ext uri="{FF2B5EF4-FFF2-40B4-BE49-F238E27FC236}">
-                <a16:creationId xmlns:a16="http://schemas.microsoft.com/office/drawing/2014/main" id="{5EF5EB4D-85F4-4618-AB37-2A4DCD899E3D}"/>
+                <a16:creationId xmlns:a16="http://schemas.microsoft.com/office/drawing/2014/main" id="{116F594A-4817-42A3-9D8D-0BA2F7112FA8}"/>
               </a:ext>
             </a:extLst>
           </p:cNvPr>
@@ -33443,7 +35293,7 @@
     </p:spTree>
     <p:extLst>
       <p:ext uri="{BB962C8B-B14F-4D97-AF65-F5344CB8AC3E}">
-        <p14:creationId xmlns:p14="http://schemas.microsoft.com/office/powerpoint/2010/main" val="1488066816"/>
+        <p14:creationId xmlns:p14="http://schemas.microsoft.com/office/powerpoint/2010/main" val="1467190310"/>
       </p:ext>
     </p:extLst>
   </p:cSld>
@@ -33474,7 +35324,7 @@
           <p:cNvPr id="14" name="">
             <a:extLst xmlns:a="http://schemas.openxmlformats.org/drawingml/2006/main">
               <a:ext uri="{FF2B5EF4-FFF2-40B4-BE49-F238E27FC236}">
-                <a16:creationId xmlns:a16="http://schemas.microsoft.com/office/drawing/2014/main" id="{B4D3FA62-2339-4EB9-92C9-DA1AE83B074A}"/>
+                <a16:creationId xmlns:a16="http://schemas.microsoft.com/office/drawing/2014/main" id="{C42D80E4-8804-47E7-BE25-1C923FDB8B5F}"/>
               </a:ext>
             </a:extLst>
           </p:cNvPr>
@@ -33536,7 +35386,7 @@
           <p:cNvPr id="2" name="">
             <a:extLst xmlns:a="http://schemas.openxmlformats.org/drawingml/2006/main">
               <a:ext uri="{FF2B5EF4-FFF2-40B4-BE49-F238E27FC236}">
-                <a16:creationId xmlns:a16="http://schemas.microsoft.com/office/drawing/2014/main" id="{D5AD219F-AB84-420B-B2C7-76446FED1A5A}"/>
+                <a16:creationId xmlns:a16="http://schemas.microsoft.com/office/drawing/2014/main" id="{C9A52BBF-6335-4634-97A8-BB2F8F59FD89}"/>
               </a:ext>
             </a:extLst>
           </p:cNvPr>
@@ -33598,7 +35448,7 @@
           <p:cNvPr id="3" name="">
             <a:extLst xmlns:a="http://schemas.openxmlformats.org/drawingml/2006/main">
               <a:ext uri="{FF2B5EF4-FFF2-40B4-BE49-F238E27FC236}">
-                <a16:creationId xmlns:a16="http://schemas.microsoft.com/office/drawing/2014/main" id="{53B41AB4-026D-4016-91FD-3D3F24EFFF02}"/>
+                <a16:creationId xmlns:a16="http://schemas.microsoft.com/office/drawing/2014/main" id="{2937376B-6719-45EA-B697-0E11389EA9C8}"/>
               </a:ext>
             </a:extLst>
           </p:cNvPr>
@@ -33660,7 +35510,7 @@
           <p:cNvPr id="4" name="">
             <a:extLst xmlns:a="http://schemas.openxmlformats.org/drawingml/2006/main">
               <a:ext uri="{FF2B5EF4-FFF2-40B4-BE49-F238E27FC236}">
-                <a16:creationId xmlns:a16="http://schemas.microsoft.com/office/drawing/2014/main" id="{896DEE5E-0CD9-462F-8CBC-310B122C243E}"/>
+                <a16:creationId xmlns:a16="http://schemas.microsoft.com/office/drawing/2014/main" id="{D39E59D3-7609-4B01-B19E-77594550A60D}"/>
               </a:ext>
             </a:extLst>
           </p:cNvPr>
@@ -33691,7 +35541,7 @@
           <p:cNvPr id="5" name="">
             <a:extLst xmlns:a="http://schemas.openxmlformats.org/drawingml/2006/main">
               <a:ext uri="{FF2B5EF4-FFF2-40B4-BE49-F238E27FC236}">
-                <a16:creationId xmlns:a16="http://schemas.microsoft.com/office/drawing/2014/main" id="{09EE6146-AC14-48AA-B0F6-9187F1E891AE}"/>
+                <a16:creationId xmlns:a16="http://schemas.microsoft.com/office/drawing/2014/main" id="{8D3C7013-241A-46EB-B091-D82B9FF16138}"/>
               </a:ext>
             </a:extLst>
           </p:cNvPr>
@@ -33753,7 +35603,7 @@
           <p:cNvPr id="6" name="">
             <a:extLst xmlns:a="http://schemas.openxmlformats.org/drawingml/2006/main">
               <a:ext uri="{FF2B5EF4-FFF2-40B4-BE49-F238E27FC236}">
-                <a16:creationId xmlns:a16="http://schemas.microsoft.com/office/drawing/2014/main" id="{F820A799-F9F6-41D5-B752-3C0913FB341E}"/>
+                <a16:creationId xmlns:a16="http://schemas.microsoft.com/office/drawing/2014/main" id="{38179516-2DA8-4C41-A1C7-1B8719574F74}"/>
               </a:ext>
             </a:extLst>
           </p:cNvPr>
@@ -33784,7 +35634,7 @@
           <p:cNvPr id="7" name="">
             <a:extLst xmlns:a="http://schemas.openxmlformats.org/drawingml/2006/main">
               <a:ext uri="{FF2B5EF4-FFF2-40B4-BE49-F238E27FC236}">
-                <a16:creationId xmlns:a16="http://schemas.microsoft.com/office/drawing/2014/main" id="{66D7217C-0CD5-4D8B-9E63-A719052D0402}"/>
+                <a16:creationId xmlns:a16="http://schemas.microsoft.com/office/drawing/2014/main" id="{8B92FD73-ED41-4773-BAD0-024BDE85299F}"/>
               </a:ext>
             </a:extLst>
           </p:cNvPr>
@@ -33954,7 +35804,7 @@
           <p:cNvPr id="8" name="">
             <a:extLst xmlns:a="http://schemas.openxmlformats.org/drawingml/2006/main">
               <a:ext uri="{FF2B5EF4-FFF2-40B4-BE49-F238E27FC236}">
-                <a16:creationId xmlns:a16="http://schemas.microsoft.com/office/drawing/2014/main" id="{7B6A9AC2-F6F1-4388-B3A6-D936E7B70B16}"/>
+                <a16:creationId xmlns:a16="http://schemas.microsoft.com/office/drawing/2014/main" id="{6B178D27-EC22-4A0E-8F79-C18C199D887B}"/>
               </a:ext>
             </a:extLst>
           </p:cNvPr>
@@ -34016,7 +35866,7 @@
           <p:cNvPr id="9" name="">
             <a:extLst xmlns:a="http://schemas.openxmlformats.org/drawingml/2006/main">
               <a:ext uri="{FF2B5EF4-FFF2-40B4-BE49-F238E27FC236}">
-                <a16:creationId xmlns:a16="http://schemas.microsoft.com/office/drawing/2014/main" id="{96721ADF-9502-4017-B3E0-6CF7DBE64507}"/>
+                <a16:creationId xmlns:a16="http://schemas.microsoft.com/office/drawing/2014/main" id="{AE936566-1E81-4FEE-87BA-1E48ADD77020}"/>
               </a:ext>
             </a:extLst>
           </p:cNvPr>
@@ -34047,7 +35897,7 @@
           <p:cNvPr id="10" name="">
             <a:extLst xmlns:a="http://schemas.openxmlformats.org/drawingml/2006/main">
               <a:ext uri="{FF2B5EF4-FFF2-40B4-BE49-F238E27FC236}">
-                <a16:creationId xmlns:a16="http://schemas.microsoft.com/office/drawing/2014/main" id="{54E0EAEA-1A6B-40FB-8C3C-D13C450B4311}"/>
+                <a16:creationId xmlns:a16="http://schemas.microsoft.com/office/drawing/2014/main" id="{EF780034-735A-44EA-8C97-1D6DA22231E8}"/>
               </a:ext>
             </a:extLst>
           </p:cNvPr>
@@ -34217,7 +36067,7 @@
           <p:cNvPr id="11" name="">
             <a:extLst xmlns:a="http://schemas.openxmlformats.org/drawingml/2006/main">
               <a:ext uri="{FF2B5EF4-FFF2-40B4-BE49-F238E27FC236}">
-                <a16:creationId xmlns:a16="http://schemas.microsoft.com/office/drawing/2014/main" id="{91D0DB92-0A5A-4B23-95BD-13BC6B52F23B}"/>
+                <a16:creationId xmlns:a16="http://schemas.microsoft.com/office/drawing/2014/main" id="{1753AAD8-6FF1-4F92-B0E7-9C29BF583997}"/>
               </a:ext>
             </a:extLst>
           </p:cNvPr>
@@ -34248,7 +36098,7 @@
           <p:cNvPr id="12" name="">
             <a:extLst xmlns:a="http://schemas.openxmlformats.org/drawingml/2006/main">
               <a:ext uri="{FF2B5EF4-FFF2-40B4-BE49-F238E27FC236}">
-                <a16:creationId xmlns:a16="http://schemas.microsoft.com/office/drawing/2014/main" id="{F0EBEB24-12C2-45F1-AB18-B343D2098DC9}"/>
+                <a16:creationId xmlns:a16="http://schemas.microsoft.com/office/drawing/2014/main" id="{7D21A5F2-A68A-4743-82B5-1504FA77CD4A}"/>
               </a:ext>
             </a:extLst>
           </p:cNvPr>
@@ -34310,7 +36160,7 @@
           <p:cNvPr id="13" name="">
             <a:extLst xmlns:a="http://schemas.openxmlformats.org/drawingml/2006/main">
               <a:ext uri="{FF2B5EF4-FFF2-40B4-BE49-F238E27FC236}">
-                <a16:creationId xmlns:a16="http://schemas.microsoft.com/office/drawing/2014/main" id="{7B858C81-97B9-4B74-9C35-149B75EAAB23}"/>
+                <a16:creationId xmlns:a16="http://schemas.microsoft.com/office/drawing/2014/main" id="{998435B5-781E-4AC5-90C6-DF5796224E1E}"/>
               </a:ext>
             </a:extLst>
           </p:cNvPr>
@@ -34370,7 +36220,7 @@
     </p:spTree>
     <p:extLst>
       <p:ext uri="{BB962C8B-B14F-4D97-AF65-F5344CB8AC3E}">
-        <p14:creationId xmlns:p14="http://schemas.microsoft.com/office/powerpoint/2010/main" val="1141297930"/>
+        <p14:creationId xmlns:p14="http://schemas.microsoft.com/office/powerpoint/2010/main" val="515956662"/>
       </p:ext>
     </p:extLst>
   </p:cSld>
@@ -34401,7 +36251,7 @@
           <p:cNvPr id="24" name="">
             <a:extLst xmlns:a="http://schemas.openxmlformats.org/drawingml/2006/main">
               <a:ext uri="{FF2B5EF4-FFF2-40B4-BE49-F238E27FC236}">
-                <a16:creationId xmlns:a16="http://schemas.microsoft.com/office/drawing/2014/main" id="{515BCAC7-8850-495D-A792-B152DF465BC6}"/>
+                <a16:creationId xmlns:a16="http://schemas.microsoft.com/office/drawing/2014/main" id="{B720EFD2-A8E8-41CA-9C40-88D6E4D999C9}"/>
               </a:ext>
             </a:extLst>
           </p:cNvPr>
@@ -34463,7 +36313,7 @@
           <p:cNvPr id="2" name="">
             <a:extLst xmlns:a="http://schemas.openxmlformats.org/drawingml/2006/main">
               <a:ext uri="{FF2B5EF4-FFF2-40B4-BE49-F238E27FC236}">
-                <a16:creationId xmlns:a16="http://schemas.microsoft.com/office/drawing/2014/main" id="{EAF118C4-061B-43D8-8B85-E450BEF37255}"/>
+                <a16:creationId xmlns:a16="http://schemas.microsoft.com/office/drawing/2014/main" id="{BE9A8FA4-C05F-4439-AF9D-936CFB39916C}"/>
               </a:ext>
             </a:extLst>
           </p:cNvPr>
@@ -34525,7 +36375,7 @@
           <p:cNvPr id="3" name="">
             <a:extLst xmlns:a="http://schemas.openxmlformats.org/drawingml/2006/main">
               <a:ext uri="{FF2B5EF4-FFF2-40B4-BE49-F238E27FC236}">
-                <a16:creationId xmlns:a16="http://schemas.microsoft.com/office/drawing/2014/main" id="{EAAB7364-16BB-48DD-8CBC-64BC67D2FB23}"/>
+                <a16:creationId xmlns:a16="http://schemas.microsoft.com/office/drawing/2014/main" id="{17C609F3-2235-4549-A4C6-E2338FA9EEFD}"/>
               </a:ext>
             </a:extLst>
           </p:cNvPr>
@@ -34587,7 +36437,7 @@
           <p:cNvPr id="4" name="">
             <a:extLst xmlns:a="http://schemas.openxmlformats.org/drawingml/2006/main">
               <a:ext uri="{FF2B5EF4-FFF2-40B4-BE49-F238E27FC236}">
-                <a16:creationId xmlns:a16="http://schemas.microsoft.com/office/drawing/2014/main" id="{C4C93E76-281A-4C91-8C2E-3BD15B69A9E4}"/>
+                <a16:creationId xmlns:a16="http://schemas.microsoft.com/office/drawing/2014/main" id="{7228D922-7E88-4CF0-A8B0-EFBF267ADB21}"/>
               </a:ext>
             </a:extLst>
           </p:cNvPr>
@@ -34618,7 +36468,7 @@
           <p:cNvPr id="5" name="">
             <a:extLst xmlns:a="http://schemas.openxmlformats.org/drawingml/2006/main">
               <a:ext uri="{FF2B5EF4-FFF2-40B4-BE49-F238E27FC236}">
-                <a16:creationId xmlns:a16="http://schemas.microsoft.com/office/drawing/2014/main" id="{A809FDE1-1409-45CF-8C26-38C2631D0B61}"/>
+                <a16:creationId xmlns:a16="http://schemas.microsoft.com/office/drawing/2014/main" id="{8EF51BD7-2B8C-42A8-99EC-087F29FE2C85}"/>
               </a:ext>
             </a:extLst>
           </p:cNvPr>
@@ -34680,7 +36530,7 @@
           <p:cNvPr id="6" name="">
             <a:extLst xmlns:a="http://schemas.openxmlformats.org/drawingml/2006/main">
               <a:ext uri="{FF2B5EF4-FFF2-40B4-BE49-F238E27FC236}">
-                <a16:creationId xmlns:a16="http://schemas.microsoft.com/office/drawing/2014/main" id="{EBF23743-4CA0-42BD-8CDF-0F7DC4955462}"/>
+                <a16:creationId xmlns:a16="http://schemas.microsoft.com/office/drawing/2014/main" id="{4FAD036D-CEB2-48E8-955A-3AA85CBDC703}"/>
               </a:ext>
             </a:extLst>
           </p:cNvPr>
@@ -34713,7 +36563,7 @@
           <p:cNvPr id="7" name="">
             <a:extLst xmlns:a="http://schemas.openxmlformats.org/drawingml/2006/main">
               <a:ext uri="{FF2B5EF4-FFF2-40B4-BE49-F238E27FC236}">
-                <a16:creationId xmlns:a16="http://schemas.microsoft.com/office/drawing/2014/main" id="{D04BB8A4-F49D-4B3F-A4E5-F88E7805C85F}"/>
+                <a16:creationId xmlns:a16="http://schemas.microsoft.com/office/drawing/2014/main" id="{A950B323-5C74-4872-8C5C-BF660B37D4C9}"/>
               </a:ext>
             </a:extLst>
           </p:cNvPr>
@@ -34802,7 +36652,7 @@
           <p:cNvPr id="8" name="">
             <a:extLst xmlns:a="http://schemas.openxmlformats.org/drawingml/2006/main">
               <a:ext uri="{FF2B5EF4-FFF2-40B4-BE49-F238E27FC236}">
-                <a16:creationId xmlns:a16="http://schemas.microsoft.com/office/drawing/2014/main" id="{1C57D29D-4B6B-4FB2-9A5B-CD562338C709}"/>
+                <a16:creationId xmlns:a16="http://schemas.microsoft.com/office/drawing/2014/main" id="{A6C0AEE3-4A69-41E9-9131-C347113D6026}"/>
               </a:ext>
             </a:extLst>
           </p:cNvPr>
@@ -34864,7 +36714,7 @@
           <p:cNvPr id="9" name="">
             <a:extLst xmlns:a="http://schemas.openxmlformats.org/drawingml/2006/main">
               <a:ext uri="{FF2B5EF4-FFF2-40B4-BE49-F238E27FC236}">
-                <a16:creationId xmlns:a16="http://schemas.microsoft.com/office/drawing/2014/main" id="{ADEDD6AB-E33E-4ECD-8F52-AF96F1E83464}"/>
+                <a16:creationId xmlns:a16="http://schemas.microsoft.com/office/drawing/2014/main" id="{B23763E7-F033-4E12-B883-90B149676C8F}"/>
               </a:ext>
             </a:extLst>
           </p:cNvPr>
@@ -34897,7 +36747,7 @@
           <p:cNvPr id="10" name="">
             <a:extLst xmlns:a="http://schemas.openxmlformats.org/drawingml/2006/main">
               <a:ext uri="{FF2B5EF4-FFF2-40B4-BE49-F238E27FC236}">
-                <a16:creationId xmlns:a16="http://schemas.microsoft.com/office/drawing/2014/main" id="{4D495897-D552-40F1-B8DA-5AC2F5E387DE}"/>
+                <a16:creationId xmlns:a16="http://schemas.microsoft.com/office/drawing/2014/main" id="{9E15E6FF-205C-4924-9FF5-5D74F7D446EA}"/>
               </a:ext>
             </a:extLst>
           </p:cNvPr>
@@ -34986,7 +36836,7 @@
           <p:cNvPr id="11" name="">
             <a:extLst xmlns:a="http://schemas.openxmlformats.org/drawingml/2006/main">
               <a:ext uri="{FF2B5EF4-FFF2-40B4-BE49-F238E27FC236}">
-                <a16:creationId xmlns:a16="http://schemas.microsoft.com/office/drawing/2014/main" id="{F1D8E67E-322D-4F9A-B606-AE48A4378F8F}"/>
+                <a16:creationId xmlns:a16="http://schemas.microsoft.com/office/drawing/2014/main" id="{BD6DE645-10F7-4F21-B166-CE337FDA6693}"/>
               </a:ext>
             </a:extLst>
           </p:cNvPr>
@@ -35048,7 +36898,7 @@
           <p:cNvPr id="12" name="">
             <a:extLst xmlns:a="http://schemas.openxmlformats.org/drawingml/2006/main">
               <a:ext uri="{FF2B5EF4-FFF2-40B4-BE49-F238E27FC236}">
-                <a16:creationId xmlns:a16="http://schemas.microsoft.com/office/drawing/2014/main" id="{E8562182-88A2-4118-87D4-AC6CADBF19DE}"/>
+                <a16:creationId xmlns:a16="http://schemas.microsoft.com/office/drawing/2014/main" id="{4FEC8B0B-66C8-49D5-A339-396A66C4C9B7}"/>
               </a:ext>
             </a:extLst>
           </p:cNvPr>
@@ -35081,7 +36931,7 @@
           <p:cNvPr id="13" name="">
             <a:extLst xmlns:a="http://schemas.openxmlformats.org/drawingml/2006/main">
               <a:ext uri="{FF2B5EF4-FFF2-40B4-BE49-F238E27FC236}">
-                <a16:creationId xmlns:a16="http://schemas.microsoft.com/office/drawing/2014/main" id="{B6B111B7-9FE6-4A42-902C-F6E9EDD11ED2}"/>
+                <a16:creationId xmlns:a16="http://schemas.microsoft.com/office/drawing/2014/main" id="{D7D4135E-4C09-4751-B68D-B58B57B56E5D}"/>
               </a:ext>
             </a:extLst>
           </p:cNvPr>
@@ -35170,7 +37020,7 @@
           <p:cNvPr id="14" name="">
             <a:extLst xmlns:a="http://schemas.openxmlformats.org/drawingml/2006/main">
               <a:ext uri="{FF2B5EF4-FFF2-40B4-BE49-F238E27FC236}">
-                <a16:creationId xmlns:a16="http://schemas.microsoft.com/office/drawing/2014/main" id="{339C4654-7363-4AB9-9921-4D612F2AF705}"/>
+                <a16:creationId xmlns:a16="http://schemas.microsoft.com/office/drawing/2014/main" id="{FF6D8C7E-6B2B-4B7B-A1DC-A4ED92B2BCEA}"/>
               </a:ext>
             </a:extLst>
           </p:cNvPr>
@@ -35232,7 +37082,7 @@
           <p:cNvPr id="15" name="">
             <a:extLst xmlns:a="http://schemas.openxmlformats.org/drawingml/2006/main">
               <a:ext uri="{FF2B5EF4-FFF2-40B4-BE49-F238E27FC236}">
-                <a16:creationId xmlns:a16="http://schemas.microsoft.com/office/drawing/2014/main" id="{42EA4696-DB29-4D8C-8D52-EDFB47D41601}"/>
+                <a16:creationId xmlns:a16="http://schemas.microsoft.com/office/drawing/2014/main" id="{2A6BB363-F0CE-4DAA-946C-486CD90B0851}"/>
               </a:ext>
             </a:extLst>
           </p:cNvPr>
@@ -35265,7 +37115,7 @@
           <p:cNvPr id="16" name="">
             <a:extLst xmlns:a="http://schemas.openxmlformats.org/drawingml/2006/main">
               <a:ext uri="{FF2B5EF4-FFF2-40B4-BE49-F238E27FC236}">
-                <a16:creationId xmlns:a16="http://schemas.microsoft.com/office/drawing/2014/main" id="{AE2EDCCC-DAF7-4F51-9450-40CB671D5AF4}"/>
+                <a16:creationId xmlns:a16="http://schemas.microsoft.com/office/drawing/2014/main" id="{D5BAACF7-6B9C-4490-A3F0-1FC83941B26A}"/>
               </a:ext>
             </a:extLst>
           </p:cNvPr>
@@ -35354,7 +37204,7 @@
           <p:cNvPr id="17" name="">
             <a:extLst xmlns:a="http://schemas.openxmlformats.org/drawingml/2006/main">
               <a:ext uri="{FF2B5EF4-FFF2-40B4-BE49-F238E27FC236}">
-                <a16:creationId xmlns:a16="http://schemas.microsoft.com/office/drawing/2014/main" id="{517CF3DD-2809-4E8C-902E-FB7AA32170BF}"/>
+                <a16:creationId xmlns:a16="http://schemas.microsoft.com/office/drawing/2014/main" id="{60F921D7-69A2-4753-911F-44C7F418B9AC}"/>
               </a:ext>
             </a:extLst>
           </p:cNvPr>
@@ -35387,7 +37237,7 @@
           <p:cNvPr id="18" name="">
             <a:extLst xmlns:a="http://schemas.openxmlformats.org/drawingml/2006/main">
               <a:ext uri="{FF2B5EF4-FFF2-40B4-BE49-F238E27FC236}">
-                <a16:creationId xmlns:a16="http://schemas.microsoft.com/office/drawing/2014/main" id="{55AB33BC-E238-4390-8209-878E9390D113}"/>
+                <a16:creationId xmlns:a16="http://schemas.microsoft.com/office/drawing/2014/main" id="{3C026B7B-BBB7-4C4E-99ED-45DF8E4DE8C5}"/>
               </a:ext>
             </a:extLst>
           </p:cNvPr>
@@ -35476,7 +37326,7 @@
           <p:cNvPr id="19" name="">
             <a:extLst xmlns:a="http://schemas.openxmlformats.org/drawingml/2006/main">
               <a:ext uri="{FF2B5EF4-FFF2-40B4-BE49-F238E27FC236}">
-                <a16:creationId xmlns:a16="http://schemas.microsoft.com/office/drawing/2014/main" id="{59358F53-76CC-4648-8CB2-7B5B71365A0A}"/>
+                <a16:creationId xmlns:a16="http://schemas.microsoft.com/office/drawing/2014/main" id="{976A6125-D0D1-42FA-B4CC-F06977970439}"/>
               </a:ext>
             </a:extLst>
           </p:cNvPr>
@@ -35507,7 +37357,7 @@
           <p:cNvPr id="20" name="">
             <a:extLst xmlns:a="http://schemas.openxmlformats.org/drawingml/2006/main">
               <a:ext uri="{FF2B5EF4-FFF2-40B4-BE49-F238E27FC236}">
-                <a16:creationId xmlns:a16="http://schemas.microsoft.com/office/drawing/2014/main" id="{6D42908F-9A95-42DF-90E2-74A2C7B2CF0A}"/>
+                <a16:creationId xmlns:a16="http://schemas.microsoft.com/office/drawing/2014/main" id="{0DE5C6E7-1A42-4BA2-BA64-BDCF7ED1A0C8}"/>
               </a:ext>
             </a:extLst>
           </p:cNvPr>
@@ -35569,7 +37419,7 @@
           <p:cNvPr id="21" name="">
             <a:extLst xmlns:a="http://schemas.openxmlformats.org/drawingml/2006/main">
               <a:ext uri="{FF2B5EF4-FFF2-40B4-BE49-F238E27FC236}">
-                <a16:creationId xmlns:a16="http://schemas.microsoft.com/office/drawing/2014/main" id="{2B31C775-C50C-4CF3-B914-525F431C50A7}"/>
+                <a16:creationId xmlns:a16="http://schemas.microsoft.com/office/drawing/2014/main" id="{FAF5F357-0B0C-4A9B-A5A4-A1A59E60CDBC}"/>
               </a:ext>
             </a:extLst>
           </p:cNvPr>
@@ -35631,7 +37481,7 @@
           <p:cNvPr id="22" name="">
             <a:extLst xmlns:a="http://schemas.openxmlformats.org/drawingml/2006/main">
               <a:ext uri="{FF2B5EF4-FFF2-40B4-BE49-F238E27FC236}">
-                <a16:creationId xmlns:a16="http://schemas.microsoft.com/office/drawing/2014/main" id="{9D4C06A3-6099-4847-99E7-0355A9AF9933}"/>
+                <a16:creationId xmlns:a16="http://schemas.microsoft.com/office/drawing/2014/main" id="{5D52B3ED-EC20-4D63-BC0A-224ABC30AF65}"/>
               </a:ext>
             </a:extLst>
           </p:cNvPr>
@@ -35693,7 +37543,7 @@
           <p:cNvPr id="23" name="">
             <a:extLst xmlns:a="http://schemas.openxmlformats.org/drawingml/2006/main">
               <a:ext uri="{FF2B5EF4-FFF2-40B4-BE49-F238E27FC236}">
-                <a16:creationId xmlns:a16="http://schemas.microsoft.com/office/drawing/2014/main" id="{280AA46B-7EDC-4151-A9D7-6BFFFBDCDC48}"/>
+                <a16:creationId xmlns:a16="http://schemas.microsoft.com/office/drawing/2014/main" id="{BAE3C761-ADD9-4241-B456-9B0BF2947D81}"/>
               </a:ext>
             </a:extLst>
           </p:cNvPr>
@@ -35753,7 +37603,7 @@
     </p:spTree>
     <p:extLst>
       <p:ext uri="{BB962C8B-B14F-4D97-AF65-F5344CB8AC3E}">
-        <p14:creationId xmlns:p14="http://schemas.microsoft.com/office/powerpoint/2010/main" val="1971457745"/>
+        <p14:creationId xmlns:p14="http://schemas.microsoft.com/office/powerpoint/2010/main" val="779127247"/>
       </p:ext>
     </p:extLst>
   </p:cSld>
@@ -35784,7 +37634,7 @@
           <p:cNvPr id="18" name="">
             <a:extLst xmlns:a="http://schemas.openxmlformats.org/drawingml/2006/main">
               <a:ext uri="{FF2B5EF4-FFF2-40B4-BE49-F238E27FC236}">
-                <a16:creationId xmlns:a16="http://schemas.microsoft.com/office/drawing/2014/main" id="{C35F2AE0-067D-490E-BECF-D73AEC5BC786}"/>
+                <a16:creationId xmlns:a16="http://schemas.microsoft.com/office/drawing/2014/main" id="{87BDD68A-0C4E-48A0-9DA7-206877F5583A}"/>
               </a:ext>
             </a:extLst>
           </p:cNvPr>
@@ -35846,7 +37696,7 @@
           <p:cNvPr id="2" name="">
             <a:extLst xmlns:a="http://schemas.openxmlformats.org/drawingml/2006/main">
               <a:ext uri="{FF2B5EF4-FFF2-40B4-BE49-F238E27FC236}">
-                <a16:creationId xmlns:a16="http://schemas.microsoft.com/office/drawing/2014/main" id="{99844714-E5B5-4DC6-A6AD-D4AD10373559}"/>
+                <a16:creationId xmlns:a16="http://schemas.microsoft.com/office/drawing/2014/main" id="{32A9BBB9-227E-424D-98F6-71F8798F4AD6}"/>
               </a:ext>
             </a:extLst>
           </p:cNvPr>
@@ -35908,7 +37758,7 @@
           <p:cNvPr id="3" name="">
             <a:extLst xmlns:a="http://schemas.openxmlformats.org/drawingml/2006/main">
               <a:ext uri="{FF2B5EF4-FFF2-40B4-BE49-F238E27FC236}">
-                <a16:creationId xmlns:a16="http://schemas.microsoft.com/office/drawing/2014/main" id="{16DC361B-D4DE-42EA-8A1E-4B518F246354}"/>
+                <a16:creationId xmlns:a16="http://schemas.microsoft.com/office/drawing/2014/main" id="{7C3DCFCA-2FEB-4413-AAB9-87106759D1C3}"/>
               </a:ext>
             </a:extLst>
           </p:cNvPr>
@@ -35970,7 +37820,7 @@
           <p:cNvPr id="4" name="">
             <a:extLst xmlns:a="http://schemas.openxmlformats.org/drawingml/2006/main">
               <a:ext uri="{FF2B5EF4-FFF2-40B4-BE49-F238E27FC236}">
-                <a16:creationId xmlns:a16="http://schemas.microsoft.com/office/drawing/2014/main" id="{51455309-8BD2-4AFF-A51E-AD28F2388F0B}"/>
+                <a16:creationId xmlns:a16="http://schemas.microsoft.com/office/drawing/2014/main" id="{1C50329D-0F05-4655-BD19-E2489557B157}"/>
               </a:ext>
             </a:extLst>
           </p:cNvPr>
@@ -36001,7 +37851,7 @@
           <p:cNvPr id="5" name="">
             <a:extLst xmlns:a="http://schemas.openxmlformats.org/drawingml/2006/main">
               <a:ext uri="{FF2B5EF4-FFF2-40B4-BE49-F238E27FC236}">
-                <a16:creationId xmlns:a16="http://schemas.microsoft.com/office/drawing/2014/main" id="{381DA133-9029-452D-B1E5-4A00DCD19CEE}"/>
+                <a16:creationId xmlns:a16="http://schemas.microsoft.com/office/drawing/2014/main" id="{072132AE-4FC9-406E-A0A9-D17A7FFDA8DB}"/>
               </a:ext>
             </a:extLst>
           </p:cNvPr>
@@ -36063,7 +37913,7 @@
           <p:cNvPr id="6" name="">
             <a:extLst xmlns:a="http://schemas.openxmlformats.org/drawingml/2006/main">
               <a:ext uri="{FF2B5EF4-FFF2-40B4-BE49-F238E27FC236}">
-                <a16:creationId xmlns:a16="http://schemas.microsoft.com/office/drawing/2014/main" id="{E1B5868D-E9AC-4B96-82DC-C1EF339D2CFC}"/>
+                <a16:creationId xmlns:a16="http://schemas.microsoft.com/office/drawing/2014/main" id="{37B0C42C-DFC9-4C06-B15F-126AAC750101}"/>
               </a:ext>
             </a:extLst>
           </p:cNvPr>
@@ -36094,7 +37944,7 @@
           <p:cNvPr id="7" name="">
             <a:extLst xmlns:a="http://schemas.openxmlformats.org/drawingml/2006/main">
               <a:ext uri="{FF2B5EF4-FFF2-40B4-BE49-F238E27FC236}">
-                <a16:creationId xmlns:a16="http://schemas.microsoft.com/office/drawing/2014/main" id="{A839EC5F-B612-49B0-BB30-47E6484FE890}"/>
+                <a16:creationId xmlns:a16="http://schemas.microsoft.com/office/drawing/2014/main" id="{D16B2D29-DED6-4F51-AD19-9878B55C2B5F}"/>
               </a:ext>
             </a:extLst>
           </p:cNvPr>
@@ -36237,7 +38087,7 @@
           <p:cNvPr id="8" name="">
             <a:extLst xmlns:a="http://schemas.openxmlformats.org/drawingml/2006/main">
               <a:ext uri="{FF2B5EF4-FFF2-40B4-BE49-F238E27FC236}">
-                <a16:creationId xmlns:a16="http://schemas.microsoft.com/office/drawing/2014/main" id="{D90A95CB-EAE3-4F3D-B93B-D810762B6684}"/>
+                <a16:creationId xmlns:a16="http://schemas.microsoft.com/office/drawing/2014/main" id="{E7EB1815-FAA7-4A62-8355-7B9E64D22B13}"/>
               </a:ext>
             </a:extLst>
           </p:cNvPr>
@@ -36299,7 +38149,7 @@
           <p:cNvPr id="9" name="">
             <a:extLst xmlns:a="http://schemas.openxmlformats.org/drawingml/2006/main">
               <a:ext uri="{FF2B5EF4-FFF2-40B4-BE49-F238E27FC236}">
-                <a16:creationId xmlns:a16="http://schemas.microsoft.com/office/drawing/2014/main" id="{4D507578-046A-4638-A7EB-F784A7A08B2C}"/>
+                <a16:creationId xmlns:a16="http://schemas.microsoft.com/office/drawing/2014/main" id="{50EF34A8-A6E8-4CB6-9C0C-7CAFAB50EF88}"/>
               </a:ext>
             </a:extLst>
           </p:cNvPr>
@@ -36330,7 +38180,7 @@
           <p:cNvPr id="10" name="">
             <a:extLst xmlns:a="http://schemas.openxmlformats.org/drawingml/2006/main">
               <a:ext uri="{FF2B5EF4-FFF2-40B4-BE49-F238E27FC236}">
-                <a16:creationId xmlns:a16="http://schemas.microsoft.com/office/drawing/2014/main" id="{4728E91A-3AEF-4192-A1DA-7B929F2478B5}"/>
+                <a16:creationId xmlns:a16="http://schemas.microsoft.com/office/drawing/2014/main" id="{B964A15E-8F9F-4EC4-B657-CA093A31AA36}"/>
               </a:ext>
             </a:extLst>
           </p:cNvPr>
@@ -36473,7 +38323,7 @@
           <p:cNvPr id="11" name="">
             <a:extLst xmlns:a="http://schemas.openxmlformats.org/drawingml/2006/main">
               <a:ext uri="{FF2B5EF4-FFF2-40B4-BE49-F238E27FC236}">
-                <a16:creationId xmlns:a16="http://schemas.microsoft.com/office/drawing/2014/main" id="{17446E0E-9BDE-48F4-B7D1-A4ECDDA869F5}"/>
+                <a16:creationId xmlns:a16="http://schemas.microsoft.com/office/drawing/2014/main" id="{F48A2D19-CC44-4692-99C5-5A5FD6B50DA9}"/>
               </a:ext>
             </a:extLst>
           </p:cNvPr>
@@ -36535,7 +38385,7 @@
           <p:cNvPr id="12" name="">
             <a:extLst xmlns:a="http://schemas.openxmlformats.org/drawingml/2006/main">
               <a:ext uri="{FF2B5EF4-FFF2-40B4-BE49-F238E27FC236}">
-                <a16:creationId xmlns:a16="http://schemas.microsoft.com/office/drawing/2014/main" id="{C7C0D540-3639-4226-932C-39EADB710EF7}"/>
+                <a16:creationId xmlns:a16="http://schemas.microsoft.com/office/drawing/2014/main" id="{C2AE23D9-F1FE-460D-958D-A5713D6C1786}"/>
               </a:ext>
             </a:extLst>
           </p:cNvPr>
@@ -36566,7 +38416,7 @@
           <p:cNvPr id="13" name="">
             <a:extLst xmlns:a="http://schemas.openxmlformats.org/drawingml/2006/main">
               <a:ext uri="{FF2B5EF4-FFF2-40B4-BE49-F238E27FC236}">
-                <a16:creationId xmlns:a16="http://schemas.microsoft.com/office/drawing/2014/main" id="{4AF17E91-9725-4666-B092-F1CB33AD20F4}"/>
+                <a16:creationId xmlns:a16="http://schemas.microsoft.com/office/drawing/2014/main" id="{1606E0C0-EFDD-4CCB-B961-F45232024722}"/>
               </a:ext>
             </a:extLst>
           </p:cNvPr>
@@ -36709,7 +38559,7 @@
           <p:cNvPr id="14" name="">
             <a:extLst xmlns:a="http://schemas.openxmlformats.org/drawingml/2006/main">
               <a:ext uri="{FF2B5EF4-FFF2-40B4-BE49-F238E27FC236}">
-                <a16:creationId xmlns:a16="http://schemas.microsoft.com/office/drawing/2014/main" id="{0703361C-0B58-47BF-BB2C-8C943DED5CBE}"/>
+                <a16:creationId xmlns:a16="http://schemas.microsoft.com/office/drawing/2014/main" id="{BD1317E6-73BB-48AC-9DAB-C72FB040377B}"/>
               </a:ext>
             </a:extLst>
           </p:cNvPr>
@@ -36740,7 +38590,7 @@
           <p:cNvPr id="15" name="">
             <a:extLst xmlns:a="http://schemas.openxmlformats.org/drawingml/2006/main">
               <a:ext uri="{FF2B5EF4-FFF2-40B4-BE49-F238E27FC236}">
-                <a16:creationId xmlns:a16="http://schemas.microsoft.com/office/drawing/2014/main" id="{82045C75-4E0E-4EB2-9A3F-AC284E19A37C}"/>
+                <a16:creationId xmlns:a16="http://schemas.microsoft.com/office/drawing/2014/main" id="{A573F943-AFF0-41A5-85F6-1B0CA55DA12A}"/>
               </a:ext>
             </a:extLst>
           </p:cNvPr>
@@ -36802,7 +38652,7 @@
           <p:cNvPr id="16" name="">
             <a:extLst xmlns:a="http://schemas.openxmlformats.org/drawingml/2006/main">
               <a:ext uri="{FF2B5EF4-FFF2-40B4-BE49-F238E27FC236}">
-                <a16:creationId xmlns:a16="http://schemas.microsoft.com/office/drawing/2014/main" id="{D9E21296-43E9-433E-BC3A-BBBC0B5B9370}"/>
+                <a16:creationId xmlns:a16="http://schemas.microsoft.com/office/drawing/2014/main" id="{9C571260-A02B-41D8-BFFC-2C71D50F4A32}"/>
               </a:ext>
             </a:extLst>
           </p:cNvPr>
@@ -36864,7 +38714,7 @@
           <p:cNvPr id="17" name="">
             <a:extLst xmlns:a="http://schemas.openxmlformats.org/drawingml/2006/main">
               <a:ext uri="{FF2B5EF4-FFF2-40B4-BE49-F238E27FC236}">
-                <a16:creationId xmlns:a16="http://schemas.microsoft.com/office/drawing/2014/main" id="{773B48A4-73CA-47CC-B745-B749602BBEC8}"/>
+                <a16:creationId xmlns:a16="http://schemas.microsoft.com/office/drawing/2014/main" id="{4224A542-67B1-45CE-86D4-32EB06F9228A}"/>
               </a:ext>
             </a:extLst>
           </p:cNvPr>
@@ -36924,7 +38774,7 @@
     </p:spTree>
     <p:extLst>
       <p:ext uri="{BB962C8B-B14F-4D97-AF65-F5344CB8AC3E}">
-        <p14:creationId xmlns:p14="http://schemas.microsoft.com/office/powerpoint/2010/main" val="1471102667"/>
+        <p14:creationId xmlns:p14="http://schemas.microsoft.com/office/powerpoint/2010/main" val="1361602498"/>
       </p:ext>
     </p:extLst>
   </p:cSld>
